--- a/615_781_Kuta_Nguyen_McLain.pptx
+++ b/615_781_Kuta_Nguyen_McLain.pptx
@@ -199,6 +199,83 @@
     </pc:docChg>
   </pc:docChgLst>
   <pc:docChgLst>
+    <pc:chgData name="Uyen P. Nguyen" userId="S::unguyen7@jh.edu::92021b55-417f-458a-90a7-cf14ced67da3" providerId="AD" clId="Web-{1C5DA43F-1144-560B-A996-9F9957834AF2}"/>
+    <pc:docChg chg="modSld">
+      <pc:chgData name="Uyen P. Nguyen" userId="S::unguyen7@jh.edu::92021b55-417f-458a-90a7-cf14ced67da3" providerId="AD" clId="Web-{1C5DA43F-1144-560B-A996-9F9957834AF2}" dt="2026-05-03T01:28:46.789" v="180" actId="20577"/>
+      <pc:docMkLst>
+        <pc:docMk/>
+      </pc:docMkLst>
+      <pc:sldChg chg="modSp">
+        <pc:chgData name="Uyen P. Nguyen" userId="S::unguyen7@jh.edu::92021b55-417f-458a-90a7-cf14ced67da3" providerId="AD" clId="Web-{1C5DA43F-1144-560B-A996-9F9957834AF2}" dt="2026-05-03T01:28:46.789" v="180" actId="20577"/>
+        <pc:sldMkLst>
+          <pc:docMk/>
+          <pc:sldMk cId="2133178391" sldId="257"/>
+        </pc:sldMkLst>
+        <pc:spChg chg="mod">
+          <ac:chgData name="Uyen P. Nguyen" userId="S::unguyen7@jh.edu::92021b55-417f-458a-90a7-cf14ced67da3" providerId="AD" clId="Web-{1C5DA43F-1144-560B-A996-9F9957834AF2}" dt="2026-05-03T00:49:04.439" v="76" actId="20577"/>
+          <ac:spMkLst>
+            <pc:docMk/>
+            <pc:sldMk cId="2133178391" sldId="257"/>
+            <ac:spMk id="7" creationId="{D159B653-A360-6E33-D2F6-A0D58B9935A5}"/>
+          </ac:spMkLst>
+        </pc:spChg>
+        <pc:spChg chg="mod">
+          <ac:chgData name="Uyen P. Nguyen" userId="S::unguyen7@jh.edu::92021b55-417f-458a-90a7-cf14ced67da3" providerId="AD" clId="Web-{1C5DA43F-1144-560B-A996-9F9957834AF2}" dt="2026-05-03T01:28:46.789" v="180" actId="20577"/>
+          <ac:spMkLst>
+            <pc:docMk/>
+            <pc:sldMk cId="2133178391" sldId="257"/>
+            <ac:spMk id="9" creationId="{EABC739E-24F8-66FD-A37D-4CF4952DF00F}"/>
+          </ac:spMkLst>
+        </pc:spChg>
+      </pc:sldChg>
+      <pc:sldChg chg="modSp">
+        <pc:chgData name="Uyen P. Nguyen" userId="S::unguyen7@jh.edu::92021b55-417f-458a-90a7-cf14ced67da3" providerId="AD" clId="Web-{1C5DA43F-1144-560B-A996-9F9957834AF2}" dt="2026-05-03T00:49:00.532" v="72" actId="20577"/>
+        <pc:sldMkLst>
+          <pc:docMk/>
+          <pc:sldMk cId="1284274485" sldId="259"/>
+        </pc:sldMkLst>
+        <pc:spChg chg="mod">
+          <ac:chgData name="Uyen P. Nguyen" userId="S::unguyen7@jh.edu::92021b55-417f-458a-90a7-cf14ced67da3" providerId="AD" clId="Web-{1C5DA43F-1144-560B-A996-9F9957834AF2}" dt="2026-05-03T00:49:00.532" v="72" actId="20577"/>
+          <ac:spMkLst>
+            <pc:docMk/>
+            <pc:sldMk cId="1284274485" sldId="259"/>
+            <ac:spMk id="7" creationId="{32741F24-76C7-9C01-1DBD-5EE3762FAACA}"/>
+          </ac:spMkLst>
+        </pc:spChg>
+      </pc:sldChg>
+      <pc:sldChg chg="modSp">
+        <pc:chgData name="Uyen P. Nguyen" userId="S::unguyen7@jh.edu::92021b55-417f-458a-90a7-cf14ced67da3" providerId="AD" clId="Web-{1C5DA43F-1144-560B-A996-9F9957834AF2}" dt="2026-05-03T00:48:55.797" v="67" actId="20577"/>
+        <pc:sldMkLst>
+          <pc:docMk/>
+          <pc:sldMk cId="1027488440" sldId="260"/>
+        </pc:sldMkLst>
+        <pc:spChg chg="mod">
+          <ac:chgData name="Uyen P. Nguyen" userId="S::unguyen7@jh.edu::92021b55-417f-458a-90a7-cf14ced67da3" providerId="AD" clId="Web-{1C5DA43F-1144-560B-A996-9F9957834AF2}" dt="2026-05-03T00:48:55.797" v="67" actId="20577"/>
+          <ac:spMkLst>
+            <pc:docMk/>
+            <pc:sldMk cId="1027488440" sldId="260"/>
+            <ac:spMk id="7" creationId="{2C42AF74-C537-A886-53B7-E8DF3240B7B7}"/>
+          </ac:spMkLst>
+        </pc:spChg>
+      </pc:sldChg>
+      <pc:sldChg chg="modSp">
+        <pc:chgData name="Uyen P. Nguyen" userId="S::unguyen7@jh.edu::92021b55-417f-458a-90a7-cf14ced67da3" providerId="AD" clId="Web-{1C5DA43F-1144-560B-A996-9F9957834AF2}" dt="2026-05-03T00:46:37.606" v="25"/>
+        <pc:sldMkLst>
+          <pc:docMk/>
+          <pc:sldMk cId="2092433718" sldId="265"/>
+        </pc:sldMkLst>
+        <pc:graphicFrameChg chg="mod modGraphic">
+          <ac:chgData name="Uyen P. Nguyen" userId="S::unguyen7@jh.edu::92021b55-417f-458a-90a7-cf14ced67da3" providerId="AD" clId="Web-{1C5DA43F-1144-560B-A996-9F9957834AF2}" dt="2026-05-03T00:46:37.606" v="25"/>
+          <ac:graphicFrameMkLst>
+            <pc:docMk/>
+            <pc:sldMk cId="2092433718" sldId="265"/>
+            <ac:graphicFrameMk id="3" creationId="{15498308-56C6-0976-7133-85BE4FA98101}"/>
+          </ac:graphicFrameMkLst>
+        </pc:graphicFrameChg>
+      </pc:sldChg>
+    </pc:docChg>
+  </pc:docChgLst>
+  <pc:docChgLst>
     <pc:chgData name="Uyen P. Nguyen" userId="S::unguyen7@jh.edu::92021b55-417f-458a-90a7-cf14ced67da3" providerId="AD" clId="Web-{C8FECEF0-CD1E-8A61-D6A9-E78BD7F5FC65}"/>
     <pc:docChg chg="addSld modSld sldOrd">
       <pc:chgData name="Uyen P. Nguyen" userId="S::unguyen7@jh.edu::92021b55-417f-458a-90a7-cf14ced67da3" providerId="AD" clId="Web-{C8FECEF0-CD1E-8A61-D6A9-E78BD7F5FC65}" dt="2026-05-03T02:56:56.270" v="1241" actId="20577"/>
@@ -382,83 +459,6 @@
             <ac:picMk id="8" creationId="{B38A110A-4554-DD53-7B39-D305EC31083C}"/>
           </ac:picMkLst>
         </pc:picChg>
-      </pc:sldChg>
-    </pc:docChg>
-  </pc:docChgLst>
-  <pc:docChgLst>
-    <pc:chgData name="Uyen P. Nguyen" userId="S::unguyen7@jh.edu::92021b55-417f-458a-90a7-cf14ced67da3" providerId="AD" clId="Web-{1C5DA43F-1144-560B-A996-9F9957834AF2}"/>
-    <pc:docChg chg="modSld">
-      <pc:chgData name="Uyen P. Nguyen" userId="S::unguyen7@jh.edu::92021b55-417f-458a-90a7-cf14ced67da3" providerId="AD" clId="Web-{1C5DA43F-1144-560B-A996-9F9957834AF2}" dt="2026-05-03T01:28:46.789" v="180" actId="20577"/>
-      <pc:docMkLst>
-        <pc:docMk/>
-      </pc:docMkLst>
-      <pc:sldChg chg="modSp">
-        <pc:chgData name="Uyen P. Nguyen" userId="S::unguyen7@jh.edu::92021b55-417f-458a-90a7-cf14ced67da3" providerId="AD" clId="Web-{1C5DA43F-1144-560B-A996-9F9957834AF2}" dt="2026-05-03T01:28:46.789" v="180" actId="20577"/>
-        <pc:sldMkLst>
-          <pc:docMk/>
-          <pc:sldMk cId="2133178391" sldId="257"/>
-        </pc:sldMkLst>
-        <pc:spChg chg="mod">
-          <ac:chgData name="Uyen P. Nguyen" userId="S::unguyen7@jh.edu::92021b55-417f-458a-90a7-cf14ced67da3" providerId="AD" clId="Web-{1C5DA43F-1144-560B-A996-9F9957834AF2}" dt="2026-05-03T00:49:04.439" v="76" actId="20577"/>
-          <ac:spMkLst>
-            <pc:docMk/>
-            <pc:sldMk cId="2133178391" sldId="257"/>
-            <ac:spMk id="7" creationId="{D159B653-A360-6E33-D2F6-A0D58B9935A5}"/>
-          </ac:spMkLst>
-        </pc:spChg>
-        <pc:spChg chg="mod">
-          <ac:chgData name="Uyen P. Nguyen" userId="S::unguyen7@jh.edu::92021b55-417f-458a-90a7-cf14ced67da3" providerId="AD" clId="Web-{1C5DA43F-1144-560B-A996-9F9957834AF2}" dt="2026-05-03T01:28:46.789" v="180" actId="20577"/>
-          <ac:spMkLst>
-            <pc:docMk/>
-            <pc:sldMk cId="2133178391" sldId="257"/>
-            <ac:spMk id="9" creationId="{EABC739E-24F8-66FD-A37D-4CF4952DF00F}"/>
-          </ac:spMkLst>
-        </pc:spChg>
-      </pc:sldChg>
-      <pc:sldChg chg="modSp">
-        <pc:chgData name="Uyen P. Nguyen" userId="S::unguyen7@jh.edu::92021b55-417f-458a-90a7-cf14ced67da3" providerId="AD" clId="Web-{1C5DA43F-1144-560B-A996-9F9957834AF2}" dt="2026-05-03T00:49:00.532" v="72" actId="20577"/>
-        <pc:sldMkLst>
-          <pc:docMk/>
-          <pc:sldMk cId="1284274485" sldId="259"/>
-        </pc:sldMkLst>
-        <pc:spChg chg="mod">
-          <ac:chgData name="Uyen P. Nguyen" userId="S::unguyen7@jh.edu::92021b55-417f-458a-90a7-cf14ced67da3" providerId="AD" clId="Web-{1C5DA43F-1144-560B-A996-9F9957834AF2}" dt="2026-05-03T00:49:00.532" v="72" actId="20577"/>
-          <ac:spMkLst>
-            <pc:docMk/>
-            <pc:sldMk cId="1284274485" sldId="259"/>
-            <ac:spMk id="7" creationId="{32741F24-76C7-9C01-1DBD-5EE3762FAACA}"/>
-          </ac:spMkLst>
-        </pc:spChg>
-      </pc:sldChg>
-      <pc:sldChg chg="modSp">
-        <pc:chgData name="Uyen P. Nguyen" userId="S::unguyen7@jh.edu::92021b55-417f-458a-90a7-cf14ced67da3" providerId="AD" clId="Web-{1C5DA43F-1144-560B-A996-9F9957834AF2}" dt="2026-05-03T00:48:55.797" v="67" actId="20577"/>
-        <pc:sldMkLst>
-          <pc:docMk/>
-          <pc:sldMk cId="1027488440" sldId="260"/>
-        </pc:sldMkLst>
-        <pc:spChg chg="mod">
-          <ac:chgData name="Uyen P. Nguyen" userId="S::unguyen7@jh.edu::92021b55-417f-458a-90a7-cf14ced67da3" providerId="AD" clId="Web-{1C5DA43F-1144-560B-A996-9F9957834AF2}" dt="2026-05-03T00:48:55.797" v="67" actId="20577"/>
-          <ac:spMkLst>
-            <pc:docMk/>
-            <pc:sldMk cId="1027488440" sldId="260"/>
-            <ac:spMk id="7" creationId="{2C42AF74-C537-A886-53B7-E8DF3240B7B7}"/>
-          </ac:spMkLst>
-        </pc:spChg>
-      </pc:sldChg>
-      <pc:sldChg chg="modSp">
-        <pc:chgData name="Uyen P. Nguyen" userId="S::unguyen7@jh.edu::92021b55-417f-458a-90a7-cf14ced67da3" providerId="AD" clId="Web-{1C5DA43F-1144-560B-A996-9F9957834AF2}" dt="2026-05-03T00:46:37.606" v="25"/>
-        <pc:sldMkLst>
-          <pc:docMk/>
-          <pc:sldMk cId="2092433718" sldId="265"/>
-        </pc:sldMkLst>
-        <pc:graphicFrameChg chg="mod modGraphic">
-          <ac:chgData name="Uyen P. Nguyen" userId="S::unguyen7@jh.edu::92021b55-417f-458a-90a7-cf14ced67da3" providerId="AD" clId="Web-{1C5DA43F-1144-560B-A996-9F9957834AF2}" dt="2026-05-03T00:46:37.606" v="25"/>
-          <ac:graphicFrameMkLst>
-            <pc:docMk/>
-            <pc:sldMk cId="2092433718" sldId="265"/>
-            <ac:graphicFrameMk id="3" creationId="{15498308-56C6-0976-7133-85BE4FA98101}"/>
-          </ac:graphicFrameMkLst>
-        </pc:graphicFrameChg>
       </pc:sldChg>
     </pc:docChg>
   </pc:docChgLst>
@@ -1058,7 +1058,7 @@
           <a:p>
             <a:fld id="{35653055-CE3A-8142-A33E-C797CCF22D71}" type="datetimeFigureOut">
               <a:rPr lang="en-US" smtClean="0"/>
-              <a:t>5/2/2026</a:t>
+              <a:t>5/3/2026</a:t>
             </a:fld>
             <a:endParaRPr lang="en-US"/>
           </a:p>
@@ -1256,7 +1256,7 @@
           <a:p>
             <a:fld id="{35653055-CE3A-8142-A33E-C797CCF22D71}" type="datetimeFigureOut">
               <a:rPr lang="en-US" smtClean="0"/>
-              <a:t>5/2/2026</a:t>
+              <a:t>5/3/2026</a:t>
             </a:fld>
             <a:endParaRPr lang="en-US"/>
           </a:p>
@@ -1464,7 +1464,7 @@
           <a:p>
             <a:fld id="{35653055-CE3A-8142-A33E-C797CCF22D71}" type="datetimeFigureOut">
               <a:rPr lang="en-US" smtClean="0"/>
-              <a:t>5/2/2026</a:t>
+              <a:t>5/3/2026</a:t>
             </a:fld>
             <a:endParaRPr lang="en-US"/>
           </a:p>
@@ -1662,7 +1662,7 @@
           <a:p>
             <a:fld id="{35653055-CE3A-8142-A33E-C797CCF22D71}" type="datetimeFigureOut">
               <a:rPr lang="en-US" smtClean="0"/>
-              <a:t>5/2/2026</a:t>
+              <a:t>5/3/2026</a:t>
             </a:fld>
             <a:endParaRPr lang="en-US"/>
           </a:p>
@@ -1937,7 +1937,7 @@
           <a:p>
             <a:fld id="{35653055-CE3A-8142-A33E-C797CCF22D71}" type="datetimeFigureOut">
               <a:rPr lang="en-US" smtClean="0"/>
-              <a:t>5/2/2026</a:t>
+              <a:t>5/3/2026</a:t>
             </a:fld>
             <a:endParaRPr lang="en-US"/>
           </a:p>
@@ -2202,7 +2202,7 @@
           <a:p>
             <a:fld id="{35653055-CE3A-8142-A33E-C797CCF22D71}" type="datetimeFigureOut">
               <a:rPr lang="en-US" smtClean="0"/>
-              <a:t>5/2/2026</a:t>
+              <a:t>5/3/2026</a:t>
             </a:fld>
             <a:endParaRPr lang="en-US"/>
           </a:p>
@@ -2614,7 +2614,7 @@
           <a:p>
             <a:fld id="{35653055-CE3A-8142-A33E-C797CCF22D71}" type="datetimeFigureOut">
               <a:rPr lang="en-US" smtClean="0"/>
-              <a:t>5/2/2026</a:t>
+              <a:t>5/3/2026</a:t>
             </a:fld>
             <a:endParaRPr lang="en-US"/>
           </a:p>
@@ -2755,7 +2755,7 @@
           <a:p>
             <a:fld id="{35653055-CE3A-8142-A33E-C797CCF22D71}" type="datetimeFigureOut">
               <a:rPr lang="en-US" smtClean="0"/>
-              <a:t>5/2/2026</a:t>
+              <a:t>5/3/2026</a:t>
             </a:fld>
             <a:endParaRPr lang="en-US"/>
           </a:p>
@@ -2868,7 +2868,7 @@
           <a:p>
             <a:fld id="{35653055-CE3A-8142-A33E-C797CCF22D71}" type="datetimeFigureOut">
               <a:rPr lang="en-US" smtClean="0"/>
-              <a:t>5/2/2026</a:t>
+              <a:t>5/3/2026</a:t>
             </a:fld>
             <a:endParaRPr lang="en-US"/>
           </a:p>
@@ -3179,7 +3179,7 @@
           <a:p>
             <a:fld id="{35653055-CE3A-8142-A33E-C797CCF22D71}" type="datetimeFigureOut">
               <a:rPr lang="en-US" smtClean="0"/>
-              <a:t>5/2/2026</a:t>
+              <a:t>5/3/2026</a:t>
             </a:fld>
             <a:endParaRPr lang="en-US"/>
           </a:p>
@@ -3467,7 +3467,7 @@
           <a:p>
             <a:fld id="{35653055-CE3A-8142-A33E-C797CCF22D71}" type="datetimeFigureOut">
               <a:rPr lang="en-US" smtClean="0"/>
-              <a:t>5/2/2026</a:t>
+              <a:t>5/3/2026</a:t>
             </a:fld>
             <a:endParaRPr lang="en-US"/>
           </a:p>
@@ -3708,7 +3708,7 @@
           <a:p>
             <a:fld id="{35653055-CE3A-8142-A33E-C797CCF22D71}" type="datetimeFigureOut">
               <a:rPr lang="en-US" smtClean="0"/>
-              <a:t>5/2/2026</a:t>
+              <a:t>5/3/2026</a:t>
             </a:fld>
             <a:endParaRPr lang="en-US"/>
           </a:p>
@@ -4471,230 +4471,399 @@
           </a:p>
         </p:txBody>
       </p:sp>
-      <p:sp>
-        <p:nvSpPr>
-          <p:cNvPr id="9" name="TextBox 8">
-            <a:extLst>
-              <a:ext uri="{FF2B5EF4-FFF2-40B4-BE49-F238E27FC236}">
-                <a16:creationId xmlns:a16="http://schemas.microsoft.com/office/drawing/2014/main" id="{B508FDDF-3951-0564-B047-DD35ABA722F0}"/>
-              </a:ext>
-            </a:extLst>
-          </p:cNvPr>
-          <p:cNvSpPr txBox="1"/>
-          <p:nvPr/>
-        </p:nvSpPr>
-        <p:spPr>
-          <a:xfrm>
-            <a:off x="457200" y="1181100"/>
-            <a:ext cx="10590028" cy="3154710"/>
-          </a:xfrm>
-          <a:prstGeom prst="rect">
-            <a:avLst/>
-          </a:prstGeom>
-          <a:noFill/>
-        </p:spPr>
-        <p:txBody>
-          <a:bodyPr wrap="square" lIns="91440" tIns="45720" rIns="91440" bIns="45720" anchor="t">
-            <a:spAutoFit/>
-          </a:bodyPr>
-          <a:lstStyle/>
-          <a:p>
-            <a:pPr marL="285750" indent="-285750">
-              <a:buFont typeface="Arial" panose="020B0604020202020204" pitchFamily="34" charset="0"/>
-              <a:buChar char="•"/>
-            </a:pPr>
-            <a:r>
-              <a:rPr lang="en-US" sz="2000">
-                <a:solidFill>
-                  <a:srgbClr val="202123"/>
-                </a:solidFill>
-                <a:latin typeface="Calibri"/>
-                <a:ea typeface="Calibri"/>
-                <a:cs typeface="Calibri"/>
-              </a:rPr>
-              <a:t>After achieving a sifted key, how do we know it is correct?</a:t>
-            </a:r>
-            <a:endParaRPr lang="en-US" sz="2000">
-              <a:solidFill>
-                <a:srgbClr val="202123"/>
-              </a:solidFill>
-              <a:latin typeface="Calibri" panose="020F0502020204030204" pitchFamily="34" charset="0"/>
-              <a:cs typeface="Calibri" panose="020F0502020204030204" pitchFamily="34" charset="0"/>
-            </a:endParaRPr>
-          </a:p>
-          <a:p>
-            <a:pPr marL="742950" lvl="1" indent="-285750">
-              <a:buFont typeface="Courier New" panose="020B0604020202020204" pitchFamily="34" charset="0"/>
-              <a:buChar char="o"/>
-            </a:pPr>
-            <a:r>
-              <a:rPr lang="en-US" sz="2000">
-                <a:solidFill>
-                  <a:srgbClr val="202123"/>
-                </a:solidFill>
-                <a:latin typeface="Calibri"/>
-                <a:ea typeface="Calibri"/>
-                <a:cs typeface="Calibri"/>
-              </a:rPr>
-              <a:t>Cascade Procedure</a:t>
-            </a:r>
-          </a:p>
-          <a:p>
-            <a:pPr marL="1200150" lvl="2" indent="-285750">
-              <a:buFont typeface="Wingdings" panose="020B0604020202020204" pitchFamily="34" charset="0"/>
-              <a:buChar char="§"/>
-            </a:pPr>
-            <a:r>
-              <a:rPr lang="en-US" sz="2000">
-                <a:solidFill>
-                  <a:srgbClr val="202123"/>
-                </a:solidFill>
-                <a:latin typeface="Calibri"/>
-                <a:ea typeface="Calibri"/>
-                <a:cs typeface="Calibri"/>
-              </a:rPr>
-              <a:t>Divide the key into blocks and perform a parity check on each block</a:t>
-            </a:r>
-          </a:p>
-          <a:p>
-            <a:pPr marL="1657350" lvl="3" indent="-285750">
-              <a:buFont typeface="Arial" panose="020B0604020202020204" pitchFamily="34" charset="0"/>
-              <a:buChar char="•"/>
-            </a:pPr>
-            <a:r>
-              <a:rPr lang="en-US" sz="2000">
-                <a:solidFill>
-                  <a:srgbClr val="202123"/>
-                </a:solidFill>
-                <a:latin typeface="Calibri"/>
-                <a:ea typeface="Calibri"/>
-                <a:cs typeface="Calibri"/>
-              </a:rPr>
-              <a:t>Iterate over any mismatches in parity (binary search) to find error(s)</a:t>
-            </a:r>
-          </a:p>
-          <a:p>
-            <a:pPr marL="1200150" lvl="2" indent="-285750">
-              <a:buFont typeface="Wingdings" panose="020B0604020202020204" pitchFamily="34" charset="0"/>
-              <a:buChar char="§"/>
-            </a:pPr>
-            <a:r>
-              <a:rPr lang="en-US" sz="2000">
-                <a:solidFill>
-                  <a:srgbClr val="202123"/>
-                </a:solidFill>
-                <a:latin typeface="Calibri"/>
-                <a:ea typeface="Calibri"/>
-                <a:cs typeface="Calibri"/>
-              </a:rPr>
-              <a:t>Permute the bits and repeat</a:t>
-            </a:r>
-          </a:p>
-          <a:p>
-            <a:pPr marL="742950" lvl="1" indent="-285750">
-              <a:buFont typeface="Courier New" panose="020B0604020202020204" pitchFamily="34" charset="0"/>
-              <a:buChar char="o"/>
-            </a:pPr>
-            <a:r>
-              <a:rPr lang="en-US" sz="2000">
-                <a:solidFill>
-                  <a:srgbClr val="202123"/>
-                </a:solidFill>
-                <a:latin typeface="Calibri"/>
-                <a:ea typeface="Calibri"/>
-                <a:cs typeface="Calibri"/>
-              </a:rPr>
-              <a:t>Only requires communication over a public channel</a:t>
-            </a:r>
-          </a:p>
-          <a:p>
-            <a:pPr marL="285750" indent="-285750">
-              <a:spcBef>
-                <a:spcPts val="600"/>
-              </a:spcBef>
-              <a:buFont typeface="Arial" panose="020B0604020202020204" pitchFamily="34" charset="0"/>
-              <a:buChar char="•"/>
-            </a:pPr>
-            <a:r>
-              <a:rPr lang="en-US" sz="2000">
-                <a:solidFill>
-                  <a:srgbClr val="202123"/>
-                </a:solidFill>
-                <a:latin typeface="Calibri" panose="020F0502020204030204" pitchFamily="34" charset="0"/>
-                <a:cs typeface="Calibri" panose="020F0502020204030204" pitchFamily="34" charset="0"/>
-              </a:rPr>
-              <a:t>Results:</a:t>
-            </a:r>
-          </a:p>
-          <a:p>
-            <a:pPr marL="742950" lvl="1" indent="-285750">
-              <a:buFont typeface="Courier New" panose="02070309020205020404" pitchFamily="49" charset="0"/>
-              <a:buChar char="o"/>
-            </a:pPr>
-            <a:r>
-              <a:rPr lang="en-US">
-                <a:solidFill>
-                  <a:srgbClr val="202123"/>
-                </a:solidFill>
-                <a:latin typeface="Calibri"/>
-                <a:ea typeface="Calibri"/>
-                <a:cs typeface="Calibri"/>
-              </a:rPr>
-              <a:t>Pre-correction QBER: 92% match (59 of 64 bits)</a:t>
-            </a:r>
-            <a:endParaRPr lang="en-US">
-              <a:solidFill>
-                <a:srgbClr val="202123"/>
-              </a:solidFill>
-              <a:latin typeface="Calibri" panose="020F0502020204030204" pitchFamily="34" charset="0"/>
-              <a:ea typeface="Calibri"/>
-              <a:cs typeface="Calibri" panose="020F0502020204030204" pitchFamily="34" charset="0"/>
-            </a:endParaRPr>
-          </a:p>
-          <a:p>
-            <a:pPr marL="742950" lvl="1" indent="-285750">
-              <a:buFont typeface="Courier New" panose="02070309020205020404" pitchFamily="49" charset="0"/>
-              <a:buChar char="o"/>
-            </a:pPr>
-            <a:r>
-              <a:rPr lang="en-US">
-                <a:solidFill>
-                  <a:srgbClr val="202123"/>
-                </a:solidFill>
-                <a:latin typeface="Calibri"/>
-                <a:ea typeface="Calibri"/>
-                <a:cs typeface="Calibri"/>
-              </a:rPr>
-              <a:t>Post-correction QBER: 100% match (64 of 64 bits)</a:t>
-            </a:r>
-          </a:p>
-          <a:p>
-            <a:pPr marL="1200150" lvl="2" indent="-285750">
-              <a:buFont typeface="Wingdings" panose="02070309020205020404" pitchFamily="49" charset="0"/>
-              <a:buChar char="§"/>
-            </a:pPr>
-            <a:r>
-              <a:rPr lang="en-US">
-                <a:solidFill>
-                  <a:srgbClr val="202123"/>
-                </a:solidFill>
-                <a:latin typeface="Calibri"/>
-                <a:ea typeface="Calibri"/>
-                <a:cs typeface="Calibri"/>
-              </a:rPr>
-              <a:t>Up to 5 bits leaked to Eve</a:t>
-            </a:r>
-            <a:endParaRPr lang="en-US" dirty="0">
-              <a:solidFill>
-                <a:srgbClr val="202123"/>
-              </a:solidFill>
-              <a:latin typeface="Calibri" panose="020F0502020204030204" pitchFamily="34" charset="0"/>
-              <a:ea typeface="Calibri"/>
-              <a:cs typeface="Calibri" panose="020F0502020204030204" pitchFamily="34" charset="0"/>
-            </a:endParaRPr>
-          </a:p>
-        </p:txBody>
-      </p:sp>
+      <mc:AlternateContent xmlns:mc="http://schemas.openxmlformats.org/markup-compatibility/2006">
+        <mc:Choice xmlns:a14="http://schemas.microsoft.com/office/drawing/2010/main" Requires="a14">
+          <p:sp>
+            <p:nvSpPr>
+              <p:cNvPr id="9" name="TextBox 8">
+                <a:extLst>
+                  <a:ext uri="{FF2B5EF4-FFF2-40B4-BE49-F238E27FC236}">
+                    <a16:creationId xmlns:a16="http://schemas.microsoft.com/office/drawing/2014/main" id="{B508FDDF-3951-0564-B047-DD35ABA722F0}"/>
+                  </a:ext>
+                </a:extLst>
+              </p:cNvPr>
+              <p:cNvSpPr txBox="1"/>
+              <p:nvPr/>
+            </p:nvSpPr>
+            <p:spPr>
+              <a:xfrm>
+                <a:off x="457200" y="1181100"/>
+                <a:ext cx="10590028" cy="4546116"/>
+              </a:xfrm>
+              <a:prstGeom prst="rect">
+                <a:avLst/>
+              </a:prstGeom>
+              <a:noFill/>
+            </p:spPr>
+            <p:txBody>
+              <a:bodyPr wrap="square" lIns="91440" tIns="45720" rIns="91440" bIns="45720" anchor="t">
+                <a:spAutoFit/>
+              </a:bodyPr>
+              <a:lstStyle/>
+              <a:p>
+                <a:pPr marL="285750" indent="-285750">
+                  <a:buFont typeface="Arial" panose="020B0604020202020204" pitchFamily="34" charset="0"/>
+                  <a:buChar char="•"/>
+                </a:pPr>
+                <a:r>
+                  <a:rPr lang="en-US" sz="2000" dirty="0">
+                    <a:solidFill>
+                      <a:srgbClr val="202123"/>
+                    </a:solidFill>
+                    <a:latin typeface="Calibri"/>
+                    <a:ea typeface="Calibri"/>
+                    <a:cs typeface="Calibri"/>
+                  </a:rPr>
+                  <a:t>After achieving a sifted key, how do we know it is correct?</a:t>
+                </a:r>
+                <a:endParaRPr lang="en-US" sz="2000" dirty="0">
+                  <a:solidFill>
+                    <a:srgbClr val="202123"/>
+                  </a:solidFill>
+                  <a:latin typeface="Calibri" panose="020F0502020204030204" pitchFamily="34" charset="0"/>
+                  <a:cs typeface="Calibri" panose="020F0502020204030204" pitchFamily="34" charset="0"/>
+                </a:endParaRPr>
+              </a:p>
+              <a:p>
+                <a:pPr marL="742950" lvl="1" indent="-285750">
+                  <a:buFont typeface="Courier New" panose="020B0604020202020204" pitchFamily="34" charset="0"/>
+                  <a:buChar char="o"/>
+                </a:pPr>
+                <a:r>
+                  <a:rPr lang="en-US" sz="2000" dirty="0">
+                    <a:solidFill>
+                      <a:srgbClr val="202123"/>
+                    </a:solidFill>
+                    <a:latin typeface="Calibri"/>
+                    <a:ea typeface="Calibri"/>
+                    <a:cs typeface="Calibri"/>
+                  </a:rPr>
+                  <a:t>Cascade Procedure</a:t>
+                </a:r>
+              </a:p>
+              <a:p>
+                <a:pPr marL="1200150" lvl="2" indent="-285750">
+                  <a:buFont typeface="Wingdings" panose="020B0604020202020204" pitchFamily="34" charset="0"/>
+                  <a:buChar char="§"/>
+                </a:pPr>
+                <a:r>
+                  <a:rPr lang="en-US" sz="2000" dirty="0">
+                    <a:solidFill>
+                      <a:srgbClr val="202123"/>
+                    </a:solidFill>
+                    <a:latin typeface="Calibri"/>
+                    <a:ea typeface="Calibri"/>
+                    <a:cs typeface="Calibri"/>
+                  </a:rPr>
+                  <a:t>Divide the key into blocks and perform a parity check on each block</a:t>
+                </a:r>
+              </a:p>
+              <a:p>
+                <a:pPr marL="1657350" lvl="3" indent="-285750">
+                  <a:buFont typeface="Wingdings" panose="020B0604020202020204" pitchFamily="34" charset="0"/>
+                  <a:buChar char="§"/>
+                </a:pPr>
+                <a:r>
+                  <a:rPr lang="en-US" sz="2000" dirty="0">
+                    <a:solidFill>
+                      <a:srgbClr val="202123"/>
+                    </a:solidFill>
+                    <a:latin typeface="Calibri"/>
+                    <a:ea typeface="Calibri"/>
+                    <a:cs typeface="Calibri"/>
+                  </a:rPr>
+                  <a:t>Heuristic for block size:  </a:t>
+                </a:r>
+                <a14:m>
+                  <m:oMath xmlns:m="http://schemas.openxmlformats.org/officeDocument/2006/math">
+                    <m:r>
+                      <a:rPr lang="en-US" sz="2000" b="0" i="1" smtClean="0">
+                        <a:solidFill>
+                          <a:srgbClr val="202123"/>
+                        </a:solidFill>
+                        <a:latin typeface="Cambria Math" panose="02040503050406030204" pitchFamily="18" charset="0"/>
+                        <a:ea typeface="Calibri"/>
+                        <a:cs typeface="Calibri"/>
+                      </a:rPr>
+                      <m:t>≈</m:t>
+                    </m:r>
+                    <m:f>
+                      <m:fPr>
+                        <m:ctrlPr>
+                          <a:rPr lang="en-US" sz="2000" b="0" i="1" smtClean="0">
+                            <a:solidFill>
+                              <a:srgbClr val="202123"/>
+                            </a:solidFill>
+                            <a:latin typeface="Cambria Math" panose="02040503050406030204" pitchFamily="18" charset="0"/>
+                            <a:ea typeface="Calibri"/>
+                            <a:cs typeface="Calibri"/>
+                          </a:rPr>
+                        </m:ctrlPr>
+                      </m:fPr>
+                      <m:num>
+                        <m:r>
+                          <a:rPr lang="en-US" sz="2000" b="0" i="1" smtClean="0">
+                            <a:solidFill>
+                              <a:srgbClr val="202123"/>
+                            </a:solidFill>
+                            <a:latin typeface="Cambria Math" panose="02040503050406030204" pitchFamily="18" charset="0"/>
+                            <a:ea typeface="Calibri"/>
+                            <a:cs typeface="Calibri"/>
+                          </a:rPr>
+                          <m:t>1</m:t>
+                        </m:r>
+                      </m:num>
+                      <m:den>
+                        <m:r>
+                          <a:rPr lang="en-US" sz="2000" b="0" i="1" smtClean="0">
+                            <a:solidFill>
+                              <a:srgbClr val="202123"/>
+                            </a:solidFill>
+                            <a:latin typeface="Cambria Math" panose="02040503050406030204" pitchFamily="18" charset="0"/>
+                            <a:ea typeface="Calibri"/>
+                            <a:cs typeface="Calibri"/>
+                          </a:rPr>
+                          <m:t>𝑄𝐵𝐸𝑅</m:t>
+                        </m:r>
+                      </m:den>
+                    </m:f>
+                  </m:oMath>
+                </a14:m>
+                <a:endParaRPr lang="en-US" sz="2000" dirty="0">
+                  <a:solidFill>
+                    <a:srgbClr val="202123"/>
+                  </a:solidFill>
+                  <a:latin typeface="Calibri"/>
+                  <a:ea typeface="Calibri"/>
+                  <a:cs typeface="Calibri"/>
+                </a:endParaRPr>
+              </a:p>
+              <a:p>
+                <a:pPr marL="1657350" lvl="3" indent="-285750">
+                  <a:buFont typeface="Wingdings" panose="020B0604020202020204" pitchFamily="34" charset="0"/>
+                  <a:buChar char="§"/>
+                </a:pPr>
+                <a:r>
+                  <a:rPr lang="en-US" sz="2000" dirty="0">
+                    <a:solidFill>
+                      <a:srgbClr val="202123"/>
+                    </a:solidFill>
+                    <a:latin typeface="Calibri"/>
+                    <a:ea typeface="Calibri"/>
+                    <a:cs typeface="Calibri"/>
+                  </a:rPr>
+                  <a:t>Iterate over any mismatches in parity (binary search) to find error(s)</a:t>
+                </a:r>
+              </a:p>
+              <a:p>
+                <a:pPr marL="1657350" lvl="3" indent="-285750">
+                  <a:buFont typeface="Wingdings" panose="020B0604020202020204" pitchFamily="34" charset="0"/>
+                  <a:buChar char="§"/>
+                </a:pPr>
+                <a:r>
+                  <a:rPr lang="en-US" sz="2000" dirty="0">
+                    <a:solidFill>
+                      <a:srgbClr val="202123"/>
+                    </a:solidFill>
+                    <a:ea typeface="Calibri"/>
+                    <a:cs typeface="Calibri"/>
+                  </a:rPr>
+                  <a:t>Each parity comparison leaks a bit of information to eavesdropper</a:t>
+                </a:r>
+                <a:endParaRPr lang="en-US" sz="2000" dirty="0">
+                  <a:solidFill>
+                    <a:srgbClr val="202123"/>
+                  </a:solidFill>
+                  <a:latin typeface="Calibri"/>
+                  <a:ea typeface="Calibri"/>
+                  <a:cs typeface="Calibri"/>
+                </a:endParaRPr>
+              </a:p>
+              <a:p>
+                <a:pPr marL="1200150" lvl="2" indent="-285750">
+                  <a:buFont typeface="Wingdings" panose="020B0604020202020204" pitchFamily="34" charset="0"/>
+                  <a:buChar char="§"/>
+                </a:pPr>
+                <a:r>
+                  <a:rPr lang="en-US" sz="2000" dirty="0">
+                    <a:solidFill>
+                      <a:srgbClr val="202123"/>
+                    </a:solidFill>
+                    <a:latin typeface="Calibri"/>
+                    <a:ea typeface="Calibri"/>
+                    <a:cs typeface="Calibri"/>
+                  </a:rPr>
+                  <a:t>Permute the bits and repeat</a:t>
+                </a:r>
+              </a:p>
+              <a:p>
+                <a:pPr marL="1657350" lvl="3" indent="-285750">
+                  <a:buFont typeface="Wingdings" panose="020B0604020202020204" pitchFamily="34" charset="0"/>
+                  <a:buChar char="§"/>
+                </a:pPr>
+                <a:r>
+                  <a:rPr lang="en-US" sz="2000" dirty="0">
+                    <a:solidFill>
+                      <a:srgbClr val="202123"/>
+                    </a:solidFill>
+                    <a:latin typeface="Calibri"/>
+                    <a:ea typeface="Calibri"/>
+                    <a:cs typeface="Calibri"/>
+                  </a:rPr>
+                  <a:t>Increasing the number of permutations resolves more errors but increases information leakage</a:t>
+                </a:r>
+              </a:p>
+              <a:p>
+                <a:pPr marL="742950" lvl="1" indent="-285750">
+                  <a:buFont typeface="Courier New" panose="020B0604020202020204" pitchFamily="34" charset="0"/>
+                  <a:buChar char="o"/>
+                </a:pPr>
+                <a:r>
+                  <a:rPr lang="en-US" sz="2000" dirty="0">
+                    <a:solidFill>
+                      <a:srgbClr val="202123"/>
+                    </a:solidFill>
+                    <a:latin typeface="Calibri"/>
+                    <a:ea typeface="Calibri"/>
+                    <a:cs typeface="Calibri"/>
+                  </a:rPr>
+                  <a:t>Only requires communication over a public channel</a:t>
+                </a:r>
+              </a:p>
+              <a:p>
+                <a:pPr marL="285750" indent="-285750">
+                  <a:spcBef>
+                    <a:spcPts val="600"/>
+                  </a:spcBef>
+                  <a:buFont typeface="Arial" panose="020B0604020202020204" pitchFamily="34" charset="0"/>
+                  <a:buChar char="•"/>
+                </a:pPr>
+                <a:r>
+                  <a:rPr lang="en-US" sz="2000" dirty="0">
+                    <a:solidFill>
+                      <a:srgbClr val="202123"/>
+                    </a:solidFill>
+                    <a:latin typeface="Calibri" panose="020F0502020204030204" pitchFamily="34" charset="0"/>
+                    <a:cs typeface="Calibri" panose="020F0502020204030204" pitchFamily="34" charset="0"/>
+                  </a:rPr>
+                  <a:t>Results:</a:t>
+                </a:r>
+              </a:p>
+              <a:p>
+                <a:pPr marL="742950" lvl="1" indent="-285750">
+                  <a:buFont typeface="Courier New" panose="02070309020205020404" pitchFamily="49" charset="0"/>
+                  <a:buChar char="o"/>
+                </a:pPr>
+                <a:r>
+                  <a:rPr lang="en-US" dirty="0">
+                    <a:solidFill>
+                      <a:srgbClr val="202123"/>
+                    </a:solidFill>
+                    <a:latin typeface="Calibri"/>
+                    <a:ea typeface="Calibri"/>
+                    <a:cs typeface="Calibri"/>
+                  </a:rPr>
+                  <a:t>Pre-correction QBER: 92% match (59 of 64 bits)</a:t>
+                </a:r>
+                <a:endParaRPr lang="en-US" dirty="0">
+                  <a:solidFill>
+                    <a:srgbClr val="202123"/>
+                  </a:solidFill>
+                  <a:latin typeface="Calibri" panose="020F0502020204030204" pitchFamily="34" charset="0"/>
+                  <a:ea typeface="Calibri"/>
+                  <a:cs typeface="Calibri" panose="020F0502020204030204" pitchFamily="34" charset="0"/>
+                </a:endParaRPr>
+              </a:p>
+              <a:p>
+                <a:pPr marL="742950" lvl="1" indent="-285750">
+                  <a:buFont typeface="Courier New" panose="02070309020205020404" pitchFamily="49" charset="0"/>
+                  <a:buChar char="o"/>
+                </a:pPr>
+                <a:r>
+                  <a:rPr lang="en-US" dirty="0">
+                    <a:solidFill>
+                      <a:srgbClr val="202123"/>
+                    </a:solidFill>
+                    <a:latin typeface="Calibri"/>
+                    <a:ea typeface="Calibri"/>
+                    <a:cs typeface="Calibri"/>
+                  </a:rPr>
+                  <a:t>Post-correction QBER: 100% match (64 of 64 bits)</a:t>
+                </a:r>
+              </a:p>
+              <a:p>
+                <a:pPr marL="1200150" lvl="2" indent="-285750">
+                  <a:buFont typeface="Wingdings" panose="02070309020205020404" pitchFamily="49" charset="0"/>
+                  <a:buChar char="§"/>
+                </a:pPr>
+                <a:r>
+                  <a:rPr lang="en-US" dirty="0">
+                    <a:solidFill>
+                      <a:srgbClr val="202123"/>
+                    </a:solidFill>
+                    <a:latin typeface="Calibri"/>
+                    <a:ea typeface="Calibri"/>
+                    <a:cs typeface="Calibri"/>
+                  </a:rPr>
+                  <a:t>Up to 5 bits leaked to Eve</a:t>
+                </a:r>
+                <a:endParaRPr lang="en-US" dirty="0">
+                  <a:solidFill>
+                    <a:srgbClr val="202123"/>
+                  </a:solidFill>
+                  <a:latin typeface="Calibri" panose="020F0502020204030204" pitchFamily="34" charset="0"/>
+                  <a:ea typeface="Calibri"/>
+                  <a:cs typeface="Calibri" panose="020F0502020204030204" pitchFamily="34" charset="0"/>
+                </a:endParaRPr>
+              </a:p>
+            </p:txBody>
+          </p:sp>
+        </mc:Choice>
+        <mc:Fallback>
+          <p:sp>
+            <p:nvSpPr>
+              <p:cNvPr id="9" name="TextBox 8">
+                <a:extLst>
+                  <a:ext uri="{FF2B5EF4-FFF2-40B4-BE49-F238E27FC236}">
+                    <a16:creationId xmlns:a16="http://schemas.microsoft.com/office/drawing/2014/main" id="{B508FDDF-3951-0564-B047-DD35ABA722F0}"/>
+                  </a:ext>
+                </a:extLst>
+              </p:cNvPr>
+              <p:cNvSpPr txBox="1">
+                <a:spLocks noRot="1" noChangeAspect="1" noMove="1" noResize="1" noEditPoints="1" noAdjustHandles="1" noChangeArrowheads="1" noChangeShapeType="1" noTextEdit="1"/>
+              </p:cNvSpPr>
+              <p:nvPr/>
+            </p:nvSpPr>
+            <p:spPr>
+              <a:xfrm>
+                <a:off x="457200" y="1181100"/>
+                <a:ext cx="10590028" cy="4546116"/>
+              </a:xfrm>
+              <a:prstGeom prst="rect">
+                <a:avLst/>
+              </a:prstGeom>
+              <a:blipFill>
+                <a:blip r:embed="rId2"/>
+                <a:stretch>
+                  <a:fillRect l="-518" t="-804" b="-1206"/>
+                </a:stretch>
+              </a:blipFill>
+            </p:spPr>
+            <p:txBody>
+              <a:bodyPr/>
+              <a:lstStyle/>
+              <a:p>
+                <a:r>
+                  <a:rPr lang="en-US">
+                    <a:noFill/>
+                  </a:rPr>
+                  <a:t> </a:t>
+                </a:r>
+              </a:p>
+            </p:txBody>
+          </p:sp>
+        </mc:Fallback>
+      </mc:AlternateContent>
     </p:spTree>
     <p:extLst>
       <p:ext uri="{BB962C8B-B14F-4D97-AF65-F5344CB8AC3E}">
@@ -4815,246 +4984,470 @@
           </a:p>
         </p:txBody>
       </p:sp>
-      <p:sp>
-        <p:nvSpPr>
-          <p:cNvPr id="9" name="TextBox 8">
-            <a:extLst>
-              <a:ext uri="{FF2B5EF4-FFF2-40B4-BE49-F238E27FC236}">
-                <a16:creationId xmlns:a16="http://schemas.microsoft.com/office/drawing/2014/main" id="{F5F91DD6-6252-5987-ED81-0F61A3E07FAE}"/>
-              </a:ext>
-            </a:extLst>
-          </p:cNvPr>
-          <p:cNvSpPr txBox="1"/>
-          <p:nvPr/>
-        </p:nvSpPr>
-        <p:spPr>
-          <a:xfrm>
-            <a:off x="457200" y="1181100"/>
-            <a:ext cx="10590028" cy="3539430"/>
-          </a:xfrm>
-          <a:prstGeom prst="rect">
-            <a:avLst/>
-          </a:prstGeom>
-          <a:noFill/>
-        </p:spPr>
-        <p:txBody>
-          <a:bodyPr wrap="square" lIns="91440" tIns="45720" rIns="91440" bIns="45720" anchor="t">
-            <a:spAutoFit/>
-          </a:bodyPr>
-          <a:lstStyle/>
-          <a:p>
-            <a:pPr marL="285750" indent="-285750">
-              <a:buFont typeface="Arial" panose="020B0604020202020204" pitchFamily="34" charset="0"/>
-              <a:buChar char="•"/>
-            </a:pPr>
-            <a:r>
-              <a:rPr lang="en-US" sz="2000">
-                <a:solidFill>
-                  <a:srgbClr val="202123"/>
-                </a:solidFill>
-                <a:latin typeface="Calibri"/>
-                <a:ea typeface="Calibri"/>
-                <a:cs typeface="Calibri"/>
-              </a:rPr>
-              <a:t>What will be amplified? Eve's mutual information with Alice and Bob</a:t>
-            </a:r>
-            <a:endParaRPr lang="en-US"/>
-          </a:p>
-          <a:p>
-            <a:pPr marL="285750" indent="-285750">
-              <a:buFont typeface="Arial" panose="020B0604020202020204" pitchFamily="34" charset="0"/>
-              <a:buChar char="•"/>
-            </a:pPr>
-            <a:r>
-              <a:rPr lang="en-US" sz="2000">
-                <a:solidFill>
-                  <a:srgbClr val="202123"/>
-                </a:solidFill>
-                <a:latin typeface="Calibri"/>
-                <a:ea typeface="Calibri"/>
-                <a:cs typeface="Calibri"/>
-              </a:rPr>
-              <a:t>By what method? Hashing</a:t>
-            </a:r>
-            <a:endParaRPr lang="en-US"/>
-          </a:p>
-          <a:p>
-            <a:pPr marL="742950" lvl="1" indent="-285750">
-              <a:buFont typeface="Courier New" panose="020B0604020202020204" pitchFamily="34" charset="0"/>
-              <a:buChar char="o"/>
-            </a:pPr>
-            <a:r>
-              <a:rPr lang="en-US" sz="2000">
-                <a:solidFill>
-                  <a:srgbClr val="202123"/>
-                </a:solidFill>
-                <a:latin typeface="Calibri"/>
-                <a:ea typeface="Calibri"/>
-                <a:cs typeface="Calibri"/>
-              </a:rPr>
-              <a:t>Toeplitz matrix</a:t>
-            </a:r>
-            <a:endParaRPr lang="en-US" sz="2000" dirty="0">
-              <a:solidFill>
-                <a:srgbClr val="202123"/>
-              </a:solidFill>
-              <a:latin typeface="Calibri"/>
-              <a:ea typeface="Calibri"/>
-              <a:cs typeface="Calibri"/>
-            </a:endParaRPr>
-          </a:p>
-          <a:p>
-            <a:pPr marL="285750" indent="-285750">
-              <a:buFont typeface="Arial" panose="020B0604020202020204" pitchFamily="34" charset="0"/>
-              <a:buChar char="•"/>
-            </a:pPr>
-            <a:r>
-              <a:rPr lang="en-US" sz="2000">
-                <a:solidFill>
-                  <a:srgbClr val="202123"/>
-                </a:solidFill>
-                <a:latin typeface="Calibri" panose="020F0502020204030204" pitchFamily="34" charset="0"/>
-                <a:cs typeface="Calibri" panose="020F0502020204030204" pitchFamily="34" charset="0"/>
-              </a:rPr>
-              <a:t>Results:</a:t>
-            </a:r>
-          </a:p>
-          <a:p>
-            <a:pPr marL="742950" lvl="1" indent="-285750">
-              <a:buFont typeface="Courier New" panose="02070309020205020404" pitchFamily="49" charset="0"/>
-              <a:buChar char="o"/>
-            </a:pPr>
-            <a:r>
-              <a:rPr lang="en-US" dirty="0">
-                <a:solidFill>
-                  <a:srgbClr val="202123"/>
-                </a:solidFill>
-                <a:latin typeface="Calibri"/>
-                <a:ea typeface="Calibri"/>
-                <a:cs typeface="Calibri"/>
-              </a:rPr>
-              <a:t>Instead of a 64-bit key where Eve has 5 sets of parity checks, we have 39 bits of private information</a:t>
-            </a:r>
-          </a:p>
-          <a:p>
-            <a:pPr marL="742950" lvl="1" indent="-285750">
-              <a:buFont typeface="Courier New" panose="02070309020205020404" pitchFamily="49" charset="0"/>
-              <a:buChar char="o"/>
-            </a:pPr>
-            <a:r>
-              <a:rPr lang="en-US">
-                <a:solidFill>
-                  <a:srgbClr val="202123"/>
-                </a:solidFill>
-                <a:latin typeface="Calibri"/>
-                <a:ea typeface="Calibri"/>
-                <a:cs typeface="Calibri"/>
-              </a:rPr>
-              <a:t>A shorter but more secure key</a:t>
-            </a:r>
-          </a:p>
-          <a:p>
-            <a:pPr marL="742950" lvl="1" indent="-285750">
-              <a:buFont typeface="Courier New" panose="02070309020205020404" pitchFamily="49" charset="0"/>
-              <a:buChar char="o"/>
-            </a:pPr>
-            <a:endParaRPr lang="en-US" dirty="0">
-              <a:solidFill>
-                <a:srgbClr val="202123"/>
-              </a:solidFill>
-              <a:latin typeface="Calibri" panose="020F0502020204030204" pitchFamily="34" charset="0"/>
-              <a:ea typeface="Calibri"/>
-              <a:cs typeface="Calibri" panose="020F0502020204030204" pitchFamily="34" charset="0"/>
-            </a:endParaRPr>
-          </a:p>
-          <a:p>
-            <a:pPr marL="742950" lvl="1" indent="-285750">
-              <a:buFont typeface="Courier New" panose="02070309020205020404" pitchFamily="49" charset="0"/>
-              <a:buChar char="o"/>
-            </a:pPr>
-            <a:r>
-              <a:rPr lang="en-US">
-                <a:solidFill>
-                  <a:srgbClr val="202123"/>
-                </a:solidFill>
-                <a:latin typeface="Calibri"/>
-                <a:ea typeface="Calibri"/>
-                <a:cs typeface="Calibri"/>
-              </a:rPr>
-              <a:t>Example:</a:t>
-            </a:r>
-            <a:endParaRPr lang="en-US" dirty="0">
-              <a:solidFill>
-                <a:srgbClr val="202123"/>
-              </a:solidFill>
-              <a:latin typeface="Calibri" panose="020F0502020204030204" pitchFamily="34" charset="0"/>
-              <a:ea typeface="Calibri"/>
-              <a:cs typeface="Calibri" panose="020F0502020204030204" pitchFamily="34" charset="0"/>
-            </a:endParaRPr>
-          </a:p>
-          <a:p>
-            <a:pPr marL="1200150" lvl="2" indent="-285750">
-              <a:buFont typeface="Wingdings" panose="02070309020205020404" pitchFamily="49" charset="0"/>
-              <a:buChar char="§"/>
-            </a:pPr>
-            <a:r>
-              <a:rPr lang="en-US">
-                <a:solidFill>
-                  <a:srgbClr val="202123"/>
-                </a:solidFill>
-                <a:ea typeface="+mn-lt"/>
-                <a:cs typeface="+mn-lt"/>
-              </a:rPr>
-              <a:t>To encode "BB84"</a:t>
-            </a:r>
-            <a:endParaRPr lang="en-US" dirty="0">
-              <a:solidFill>
-                <a:srgbClr val="202123"/>
-              </a:solidFill>
-              <a:ea typeface="+mn-lt"/>
-              <a:cs typeface="+mn-lt"/>
-            </a:endParaRPr>
-          </a:p>
-          <a:p>
-            <a:pPr lvl="2"/>
-            <a:r>
-              <a:rPr lang="en-US">
-                <a:solidFill>
-                  <a:srgbClr val="202123"/>
-                </a:solidFill>
-                <a:ea typeface="+mn-lt"/>
-                <a:cs typeface="+mn-lt"/>
-              </a:rPr>
-              <a:t>Key:  11110111001101011111011010111100</a:t>
-            </a:r>
-          </a:p>
-          <a:p>
-            <a:pPr lvl="2"/>
-            <a:r>
-              <a:rPr lang="en-US"/>
-              <a:t>Cipher Text: 11001111101011000101001111011001</a:t>
-            </a:r>
-          </a:p>
-          <a:p>
-            <a:pPr lvl="2"/>
-            <a:r>
-              <a:rPr lang="en-US">
-                <a:ea typeface="Calibri" panose="020F0502020204030204"/>
-                <a:cs typeface="Calibri" panose="020F0502020204030204"/>
-              </a:rPr>
-              <a:t>Decoded: </a:t>
-            </a:r>
-            <a:r>
-              <a:rPr lang="en-US">
-                <a:ea typeface="+mn-lt"/>
-                <a:cs typeface="+mn-lt"/>
-              </a:rPr>
-              <a:t>00000000010000100000100000000010</a:t>
-            </a:r>
-            <a:endParaRPr lang="en-US"/>
-          </a:p>
-        </p:txBody>
-      </p:sp>
+      <mc:AlternateContent xmlns:mc="http://schemas.openxmlformats.org/markup-compatibility/2006">
+        <mc:Choice xmlns:a14="http://schemas.microsoft.com/office/drawing/2010/main" Requires="a14">
+          <p:sp>
+            <p:nvSpPr>
+              <p:cNvPr id="9" name="TextBox 8">
+                <a:extLst>
+                  <a:ext uri="{FF2B5EF4-FFF2-40B4-BE49-F238E27FC236}">
+                    <a16:creationId xmlns:a16="http://schemas.microsoft.com/office/drawing/2014/main" id="{F5F91DD6-6252-5987-ED81-0F61A3E07FAE}"/>
+                  </a:ext>
+                </a:extLst>
+              </p:cNvPr>
+              <p:cNvSpPr txBox="1"/>
+              <p:nvPr/>
+            </p:nvSpPr>
+            <p:spPr>
+              <a:xfrm>
+                <a:off x="457200" y="1181100"/>
+                <a:ext cx="10590028" cy="4731552"/>
+              </a:xfrm>
+              <a:prstGeom prst="rect">
+                <a:avLst/>
+              </a:prstGeom>
+              <a:noFill/>
+            </p:spPr>
+            <p:txBody>
+              <a:bodyPr wrap="square" lIns="91440" tIns="45720" rIns="91440" bIns="45720" anchor="t">
+                <a:spAutoFit/>
+              </a:bodyPr>
+              <a:lstStyle/>
+              <a:p>
+                <a:pPr marL="285750" indent="-285750">
+                  <a:buFont typeface="Arial" panose="020B0604020202020204" pitchFamily="34" charset="0"/>
+                  <a:buChar char="•"/>
+                </a:pPr>
+                <a:r>
+                  <a:rPr lang="en-US" sz="2000" dirty="0">
+                    <a:solidFill>
+                      <a:srgbClr val="202123"/>
+                    </a:solidFill>
+                    <a:latin typeface="Calibri"/>
+                    <a:ea typeface="Calibri"/>
+                    <a:cs typeface="Calibri"/>
+                  </a:rPr>
+                  <a:t>What will be amplified? Eve's mutual information with Alice and Bob</a:t>
+                </a:r>
+              </a:p>
+              <a:p>
+                <a:pPr marL="285750" indent="-285750">
+                  <a:buFont typeface="Arial" panose="020B0604020202020204" pitchFamily="34" charset="0"/>
+                  <a:buChar char="•"/>
+                </a:pPr>
+                <a:r>
+                  <a:rPr lang="en-US" dirty="0"/>
+                  <a:t>Compress length </a:t>
+                </a:r>
+                <a:r>
+                  <a:rPr lang="en-US" i="1" dirty="0"/>
+                  <a:t>n</a:t>
+                </a:r>
+                <a:r>
+                  <a:rPr lang="en-US" dirty="0"/>
+                  <a:t> bit string to length </a:t>
+                </a:r>
+                <a:r>
+                  <a:rPr lang="en-US" i="1" dirty="0"/>
+                  <a:t>m </a:t>
+                </a:r>
+                <a:r>
+                  <a:rPr lang="en-US" dirty="0"/>
+                  <a:t>bit string to maximize entropy</a:t>
+                </a:r>
+              </a:p>
+              <a:p>
+                <a:pPr marL="742950" lvl="1" indent="-285750">
+                  <a:buFont typeface="Arial" panose="020B0604020202020204" pitchFamily="34" charset="0"/>
+                  <a:buChar char="•"/>
+                </a:pPr>
+                <a14:m>
+                  <m:oMath xmlns:m="http://schemas.openxmlformats.org/officeDocument/2006/math">
+                    <m:r>
+                      <a:rPr lang="en-US" b="0" i="1" smtClean="0">
+                        <a:latin typeface="Cambria Math" panose="02040503050406030204" pitchFamily="18" charset="0"/>
+                      </a:rPr>
+                      <m:t>𝑚</m:t>
+                    </m:r>
+                    <m:r>
+                      <a:rPr lang="en-US" b="0" i="1" smtClean="0">
+                        <a:latin typeface="Cambria Math" panose="02040503050406030204" pitchFamily="18" charset="0"/>
+                      </a:rPr>
+                      <m:t>≈</m:t>
+                    </m:r>
+                    <m:r>
+                      <a:rPr lang="en-US" b="0" i="1" smtClean="0">
+                        <a:latin typeface="Cambria Math" panose="02040503050406030204" pitchFamily="18" charset="0"/>
+                      </a:rPr>
+                      <m:t>𝑛</m:t>
+                    </m:r>
+                    <m:r>
+                      <a:rPr lang="en-US" b="0" i="1" smtClean="0">
+                        <a:latin typeface="Cambria Math" panose="02040503050406030204" pitchFamily="18" charset="0"/>
+                      </a:rPr>
+                      <m:t> −</m:t>
+                    </m:r>
+                    <m:r>
+                      <a:rPr lang="en-US" b="0" i="1" smtClean="0">
+                        <a:latin typeface="Cambria Math" panose="02040503050406030204" pitchFamily="18" charset="0"/>
+                      </a:rPr>
+                      <m:t>𝐸𝑣</m:t>
+                    </m:r>
+                    <m:sSub>
+                      <m:sSubPr>
+                        <m:ctrlPr>
+                          <a:rPr lang="en-US" b="0" i="1" smtClean="0">
+                            <a:latin typeface="Cambria Math" panose="02040503050406030204" pitchFamily="18" charset="0"/>
+                          </a:rPr>
+                        </m:ctrlPr>
+                      </m:sSubPr>
+                      <m:e>
+                        <m:r>
+                          <a:rPr lang="en-US" b="0" i="1" smtClean="0">
+                            <a:latin typeface="Cambria Math" panose="02040503050406030204" pitchFamily="18" charset="0"/>
+                          </a:rPr>
+                          <m:t>𝑒</m:t>
+                        </m:r>
+                      </m:e>
+                      <m:sub>
+                        <m:r>
+                          <a:rPr lang="en-US" b="0" i="1" smtClean="0">
+                            <a:latin typeface="Cambria Math" panose="02040503050406030204" pitchFamily="18" charset="0"/>
+                          </a:rPr>
+                          <m:t>𝑖𝑛𝑓𝑜</m:t>
+                        </m:r>
+                      </m:sub>
+                    </m:sSub>
+                    <m:r>
+                      <a:rPr lang="en-US" b="0" i="1" smtClean="0">
+                        <a:latin typeface="Cambria Math" panose="02040503050406030204" pitchFamily="18" charset="0"/>
+                      </a:rPr>
+                      <m:t>−</m:t>
+                    </m:r>
+                    <m:r>
+                      <a:rPr lang="en-US" b="0" i="1" smtClean="0">
+                        <a:latin typeface="Cambria Math" panose="02040503050406030204" pitchFamily="18" charset="0"/>
+                      </a:rPr>
+                      <m:t>𝑠𝑒𝑐𝑢𝑟𝑖𝑡</m:t>
+                    </m:r>
+                    <m:sSub>
+                      <m:sSubPr>
+                        <m:ctrlPr>
+                          <a:rPr lang="en-US" b="0" i="1" smtClean="0">
+                            <a:latin typeface="Cambria Math" panose="02040503050406030204" pitchFamily="18" charset="0"/>
+                          </a:rPr>
+                        </m:ctrlPr>
+                      </m:sSubPr>
+                      <m:e>
+                        <m:r>
+                          <a:rPr lang="en-US" b="0" i="1" smtClean="0">
+                            <a:latin typeface="Cambria Math" panose="02040503050406030204" pitchFamily="18" charset="0"/>
+                          </a:rPr>
+                          <m:t>𝑦</m:t>
+                        </m:r>
+                      </m:e>
+                      <m:sub>
+                        <m:r>
+                          <a:rPr lang="en-US" b="0" i="1" smtClean="0">
+                            <a:latin typeface="Cambria Math" panose="02040503050406030204" pitchFamily="18" charset="0"/>
+                          </a:rPr>
+                          <m:t>𝑚𝑎𝑟𝑔𝑖𝑛</m:t>
+                        </m:r>
+                      </m:sub>
+                    </m:sSub>
+                  </m:oMath>
+                </a14:m>
+                <a:endParaRPr lang="en-US" dirty="0"/>
+              </a:p>
+              <a:p>
+                <a:pPr marL="742950" lvl="1" indent="-285750">
+                  <a:buFont typeface="Arial" panose="020B0604020202020204" pitchFamily="34" charset="0"/>
+                  <a:buChar char="•"/>
+                </a:pPr>
+                <a:r>
+                  <a:rPr lang="en-US" dirty="0"/>
+                  <a:t>For QBER greater than </a:t>
+                </a:r>
+                <a14:m>
+                  <m:oMath xmlns:m="http://schemas.openxmlformats.org/officeDocument/2006/math">
+                    <m:r>
+                      <a:rPr lang="en-US" b="0" i="1" smtClean="0">
+                        <a:latin typeface="Cambria Math" panose="02040503050406030204" pitchFamily="18" charset="0"/>
+                      </a:rPr>
+                      <m:t>≈11%</m:t>
+                    </m:r>
+                  </m:oMath>
+                </a14:m>
+                <a:r>
+                  <a:rPr lang="en-US" dirty="0"/>
+                  <a:t>, the information Eve has </a:t>
+                </a:r>
+                <a:r>
+                  <a:rPr lang="en-US"/>
+                  <a:t>prohibits compression </a:t>
+                </a:r>
+                <a:r>
+                  <a:rPr lang="en-US" dirty="0"/>
+                  <a:t>(i.e. </a:t>
+                </a:r>
+                <a14:m>
+                  <m:oMath xmlns:m="http://schemas.openxmlformats.org/officeDocument/2006/math">
+                    <m:r>
+                      <a:rPr lang="en-US" b="0" i="1" smtClean="0">
+                        <a:latin typeface="Cambria Math" panose="02040503050406030204" pitchFamily="18" charset="0"/>
+                      </a:rPr>
+                      <m:t>𝑚</m:t>
+                    </m:r>
+                    <m:r>
+                      <a:rPr lang="en-US" b="0" i="1" smtClean="0">
+                        <a:latin typeface="Cambria Math" panose="02040503050406030204" pitchFamily="18" charset="0"/>
+                      </a:rPr>
+                      <m:t>&lt;0</m:t>
+                    </m:r>
+                  </m:oMath>
+                </a14:m>
+                <a:r>
+                  <a:rPr lang="en-US" dirty="0"/>
+                  <a:t>)</a:t>
+                </a:r>
+              </a:p>
+              <a:p>
+                <a:pPr marL="285750" indent="-285750">
+                  <a:buFont typeface="Arial" panose="020B0604020202020204" pitchFamily="34" charset="0"/>
+                  <a:buChar char="•"/>
+                </a:pPr>
+                <a:r>
+                  <a:rPr lang="en-US" sz="2000" dirty="0">
+                    <a:solidFill>
+                      <a:srgbClr val="202123"/>
+                    </a:solidFill>
+                    <a:latin typeface="Calibri"/>
+                    <a:ea typeface="Calibri"/>
+                    <a:cs typeface="Calibri"/>
+                  </a:rPr>
+                  <a:t>By what method? Hashing</a:t>
+                </a:r>
+                <a:endParaRPr lang="en-US" dirty="0"/>
+              </a:p>
+              <a:p>
+                <a:pPr marL="742950" lvl="1" indent="-285750">
+                  <a:buFont typeface="Courier New" panose="020B0604020202020204" pitchFamily="34" charset="0"/>
+                  <a:buChar char="o"/>
+                </a:pPr>
+                <a:r>
+                  <a:rPr lang="en-US" sz="2000" dirty="0">
+                    <a:solidFill>
+                      <a:srgbClr val="202123"/>
+                    </a:solidFill>
+                    <a:latin typeface="Calibri"/>
+                    <a:ea typeface="Calibri"/>
+                    <a:cs typeface="Calibri"/>
+                  </a:rPr>
+                  <a:t>Hashing function is declared over public channel without providing any further information to Eve</a:t>
+                </a:r>
+              </a:p>
+              <a:p>
+                <a:pPr marL="742950" lvl="1" indent="-285750">
+                  <a:buFont typeface="Courier New" panose="020B0604020202020204" pitchFamily="34" charset="0"/>
+                  <a:buChar char="o"/>
+                </a:pPr>
+                <a:r>
+                  <a:rPr lang="en-US" sz="2000" dirty="0">
+                    <a:solidFill>
+                      <a:srgbClr val="202123"/>
+                    </a:solidFill>
+                    <a:latin typeface="Calibri"/>
+                    <a:ea typeface="Calibri"/>
+                    <a:cs typeface="Calibri"/>
+                  </a:rPr>
+                  <a:t>Toeplitz matrix</a:t>
+                </a:r>
+              </a:p>
+              <a:p>
+                <a:pPr marL="285750" indent="-285750">
+                  <a:buFont typeface="Arial" panose="020B0604020202020204" pitchFamily="34" charset="0"/>
+                  <a:buChar char="•"/>
+                </a:pPr>
+                <a:r>
+                  <a:rPr lang="en-US" sz="2000" dirty="0">
+                    <a:solidFill>
+                      <a:srgbClr val="202123"/>
+                    </a:solidFill>
+                    <a:latin typeface="Calibri" panose="020F0502020204030204" pitchFamily="34" charset="0"/>
+                    <a:cs typeface="Calibri" panose="020F0502020204030204" pitchFamily="34" charset="0"/>
+                  </a:rPr>
+                  <a:t>Results:</a:t>
+                </a:r>
+              </a:p>
+              <a:p>
+                <a:pPr marL="742950" lvl="1" indent="-285750">
+                  <a:buFont typeface="Courier New" panose="02070309020205020404" pitchFamily="49" charset="0"/>
+                  <a:buChar char="o"/>
+                </a:pPr>
+                <a:r>
+                  <a:rPr lang="en-US" dirty="0">
+                    <a:solidFill>
+                      <a:srgbClr val="202123"/>
+                    </a:solidFill>
+                    <a:latin typeface="Calibri"/>
+                    <a:ea typeface="Calibri"/>
+                    <a:cs typeface="Calibri"/>
+                  </a:rPr>
+                  <a:t>Instead of a 64-bit key where Eve has 5 sets of parity checks, we have 39 bits of private information</a:t>
+                </a:r>
+              </a:p>
+              <a:p>
+                <a:pPr marL="742950" lvl="1" indent="-285750">
+                  <a:buFont typeface="Courier New" panose="02070309020205020404" pitchFamily="49" charset="0"/>
+                  <a:buChar char="o"/>
+                </a:pPr>
+                <a:r>
+                  <a:rPr lang="en-US" dirty="0">
+                    <a:solidFill>
+                      <a:srgbClr val="202123"/>
+                    </a:solidFill>
+                    <a:latin typeface="Calibri"/>
+                    <a:ea typeface="Calibri"/>
+                    <a:cs typeface="Calibri"/>
+                  </a:rPr>
+                  <a:t>A shorter but more secure key</a:t>
+                </a:r>
+                <a:endParaRPr lang="en-US" dirty="0">
+                  <a:solidFill>
+                    <a:srgbClr val="202123"/>
+                  </a:solidFill>
+                  <a:latin typeface="Calibri" panose="020F0502020204030204" pitchFamily="34" charset="0"/>
+                  <a:ea typeface="Calibri"/>
+                  <a:cs typeface="Calibri" panose="020F0502020204030204" pitchFamily="34" charset="0"/>
+                </a:endParaRPr>
+              </a:p>
+              <a:p>
+                <a:pPr marL="742950" lvl="1" indent="-285750">
+                  <a:buFont typeface="Courier New" panose="02070309020205020404" pitchFamily="49" charset="0"/>
+                  <a:buChar char="o"/>
+                </a:pPr>
+                <a:r>
+                  <a:rPr lang="en-US" dirty="0">
+                    <a:solidFill>
+                      <a:srgbClr val="202123"/>
+                    </a:solidFill>
+                    <a:latin typeface="Calibri"/>
+                    <a:ea typeface="Calibri"/>
+                    <a:cs typeface="Calibri"/>
+                  </a:rPr>
+                  <a:t>Example:</a:t>
+                </a:r>
+                <a:endParaRPr lang="en-US" dirty="0">
+                  <a:solidFill>
+                    <a:srgbClr val="202123"/>
+                  </a:solidFill>
+                  <a:latin typeface="Calibri" panose="020F0502020204030204" pitchFamily="34" charset="0"/>
+                  <a:ea typeface="Calibri"/>
+                  <a:cs typeface="Calibri" panose="020F0502020204030204" pitchFamily="34" charset="0"/>
+                </a:endParaRPr>
+              </a:p>
+              <a:p>
+                <a:pPr marL="1200150" lvl="2" indent="-285750">
+                  <a:buFont typeface="Wingdings" panose="02070309020205020404" pitchFamily="49" charset="0"/>
+                  <a:buChar char="§"/>
+                </a:pPr>
+                <a:r>
+                  <a:rPr lang="en-US" dirty="0">
+                    <a:solidFill>
+                      <a:srgbClr val="202123"/>
+                    </a:solidFill>
+                    <a:ea typeface="+mn-lt"/>
+                    <a:cs typeface="+mn-lt"/>
+                  </a:rPr>
+                  <a:t>To encode "BB84"</a:t>
+                </a:r>
+              </a:p>
+              <a:p>
+                <a:pPr lvl="2"/>
+                <a:r>
+                  <a:rPr lang="en-US" dirty="0">
+                    <a:solidFill>
+                      <a:srgbClr val="202123"/>
+                    </a:solidFill>
+                    <a:ea typeface="+mn-lt"/>
+                    <a:cs typeface="+mn-lt"/>
+                  </a:rPr>
+                  <a:t>Key:  11110111001101011111011010111100</a:t>
+                </a:r>
+              </a:p>
+              <a:p>
+                <a:pPr lvl="2"/>
+                <a:r>
+                  <a:rPr lang="en-US" dirty="0"/>
+                  <a:t>Cipher Text: 11001111101011000101001111011001</a:t>
+                </a:r>
+              </a:p>
+              <a:p>
+                <a:pPr lvl="2"/>
+                <a:r>
+                  <a:rPr lang="en-US" dirty="0">
+                    <a:ea typeface="Calibri" panose="020F0502020204030204"/>
+                    <a:cs typeface="Calibri" panose="020F0502020204030204"/>
+                  </a:rPr>
+                  <a:t>Decoded: </a:t>
+                </a:r>
+                <a:r>
+                  <a:rPr lang="en-US" dirty="0">
+                    <a:ea typeface="+mn-lt"/>
+                    <a:cs typeface="+mn-lt"/>
+                  </a:rPr>
+                  <a:t>00000000010000100000100000000010</a:t>
+                </a:r>
+                <a:endParaRPr lang="en-US" dirty="0"/>
+              </a:p>
+            </p:txBody>
+          </p:sp>
+        </mc:Choice>
+        <mc:Fallback>
+          <p:sp>
+            <p:nvSpPr>
+              <p:cNvPr id="9" name="TextBox 8">
+                <a:extLst>
+                  <a:ext uri="{FF2B5EF4-FFF2-40B4-BE49-F238E27FC236}">
+                    <a16:creationId xmlns:a16="http://schemas.microsoft.com/office/drawing/2014/main" id="{F5F91DD6-6252-5987-ED81-0F61A3E07FAE}"/>
+                  </a:ext>
+                </a:extLst>
+              </p:cNvPr>
+              <p:cNvSpPr txBox="1">
+                <a:spLocks noRot="1" noChangeAspect="1" noMove="1" noResize="1" noEditPoints="1" noAdjustHandles="1" noChangeArrowheads="1" noChangeShapeType="1" noTextEdit="1"/>
+              </p:cNvSpPr>
+              <p:nvPr/>
+            </p:nvSpPr>
+            <p:spPr>
+              <a:xfrm>
+                <a:off x="457200" y="1181100"/>
+                <a:ext cx="10590028" cy="4731552"/>
+              </a:xfrm>
+              <a:prstGeom prst="rect">
+                <a:avLst/>
+              </a:prstGeom>
+              <a:blipFill>
+                <a:blip r:embed="rId2"/>
+                <a:stretch>
+                  <a:fillRect l="-518" t="-773" r="-979" b="-1160"/>
+                </a:stretch>
+              </a:blipFill>
+            </p:spPr>
+            <p:txBody>
+              <a:bodyPr/>
+              <a:lstStyle/>
+              <a:p>
+                <a:r>
+                  <a:rPr lang="en-US">
+                    <a:noFill/>
+                  </a:rPr>
+                  <a:t> </a:t>
+                </a:r>
+              </a:p>
+            </p:txBody>
+          </p:sp>
+        </mc:Fallback>
+      </mc:AlternateContent>
     </p:spTree>
     <p:extLst>
       <p:ext uri="{BB962C8B-B14F-4D97-AF65-F5344CB8AC3E}">
@@ -5208,7 +5601,7 @@
               <a:buChar char="•"/>
             </a:pPr>
             <a:r>
-              <a:rPr lang="en-US" sz="2000">
+              <a:rPr lang="en-US" sz="2000" dirty="0">
                 <a:solidFill>
                   <a:srgbClr val="202123"/>
                 </a:solidFill>
@@ -5227,7 +5620,7 @@
               <a:buChar char="•"/>
             </a:pPr>
             <a:r>
-              <a:rPr lang="en-US" sz="2000">
+              <a:rPr lang="en-US" sz="2000" dirty="0">
                 <a:solidFill>
                   <a:srgbClr val="202123"/>
                 </a:solidFill>
@@ -5245,7 +5638,7 @@
               <a:buFont typeface="Arial" panose="020B0604020202020204" pitchFamily="34" charset="0"/>
               <a:buChar char="•"/>
             </a:pPr>
-            <a:endParaRPr lang="en-US" sz="2000">
+            <a:endParaRPr lang="en-US" sz="2000" dirty="0">
               <a:solidFill>
                 <a:srgbClr val="202123"/>
               </a:solidFill>

--- a/615_781_Kuta_Nguyen_McLain.pptx
+++ b/615_781_Kuta_Nguyen_McLain.pptx
@@ -117,6 +117,11 @@
       </a:defRPr>
     </a:lvl9pPr>
   </p:defaultTextStyle>
+  <p:extLst>
+    <p:ext uri="{EFAFB233-063F-42B5-8137-9DF3F51BA10A}">
+      <p15:sldGuideLst xmlns:p15="http://schemas.microsoft.com/office/powerpoint/2012/main"/>
+    </p:ext>
+  </p:extLst>
 </p:presentation>
 </file>
 
@@ -195,83 +200,6 @@
             <ac:spMk id="7" creationId="{E4378A81-279B-CA9A-8E50-130D2D276DA6}"/>
           </ac:spMkLst>
         </pc:spChg>
-      </pc:sldChg>
-    </pc:docChg>
-  </pc:docChgLst>
-  <pc:docChgLst>
-    <pc:chgData name="Uyen P. Nguyen" userId="S::unguyen7@jh.edu::92021b55-417f-458a-90a7-cf14ced67da3" providerId="AD" clId="Web-{1C5DA43F-1144-560B-A996-9F9957834AF2}"/>
-    <pc:docChg chg="modSld">
-      <pc:chgData name="Uyen P. Nguyen" userId="S::unguyen7@jh.edu::92021b55-417f-458a-90a7-cf14ced67da3" providerId="AD" clId="Web-{1C5DA43F-1144-560B-A996-9F9957834AF2}" dt="2026-05-03T01:28:46.789" v="180" actId="20577"/>
-      <pc:docMkLst>
-        <pc:docMk/>
-      </pc:docMkLst>
-      <pc:sldChg chg="modSp">
-        <pc:chgData name="Uyen P. Nguyen" userId="S::unguyen7@jh.edu::92021b55-417f-458a-90a7-cf14ced67da3" providerId="AD" clId="Web-{1C5DA43F-1144-560B-A996-9F9957834AF2}" dt="2026-05-03T01:28:46.789" v="180" actId="20577"/>
-        <pc:sldMkLst>
-          <pc:docMk/>
-          <pc:sldMk cId="2133178391" sldId="257"/>
-        </pc:sldMkLst>
-        <pc:spChg chg="mod">
-          <ac:chgData name="Uyen P. Nguyen" userId="S::unguyen7@jh.edu::92021b55-417f-458a-90a7-cf14ced67da3" providerId="AD" clId="Web-{1C5DA43F-1144-560B-A996-9F9957834AF2}" dt="2026-05-03T00:49:04.439" v="76" actId="20577"/>
-          <ac:spMkLst>
-            <pc:docMk/>
-            <pc:sldMk cId="2133178391" sldId="257"/>
-            <ac:spMk id="7" creationId="{D159B653-A360-6E33-D2F6-A0D58B9935A5}"/>
-          </ac:spMkLst>
-        </pc:spChg>
-        <pc:spChg chg="mod">
-          <ac:chgData name="Uyen P. Nguyen" userId="S::unguyen7@jh.edu::92021b55-417f-458a-90a7-cf14ced67da3" providerId="AD" clId="Web-{1C5DA43F-1144-560B-A996-9F9957834AF2}" dt="2026-05-03T01:28:46.789" v="180" actId="20577"/>
-          <ac:spMkLst>
-            <pc:docMk/>
-            <pc:sldMk cId="2133178391" sldId="257"/>
-            <ac:spMk id="9" creationId="{EABC739E-24F8-66FD-A37D-4CF4952DF00F}"/>
-          </ac:spMkLst>
-        </pc:spChg>
-      </pc:sldChg>
-      <pc:sldChg chg="modSp">
-        <pc:chgData name="Uyen P. Nguyen" userId="S::unguyen7@jh.edu::92021b55-417f-458a-90a7-cf14ced67da3" providerId="AD" clId="Web-{1C5DA43F-1144-560B-A996-9F9957834AF2}" dt="2026-05-03T00:49:00.532" v="72" actId="20577"/>
-        <pc:sldMkLst>
-          <pc:docMk/>
-          <pc:sldMk cId="1284274485" sldId="259"/>
-        </pc:sldMkLst>
-        <pc:spChg chg="mod">
-          <ac:chgData name="Uyen P. Nguyen" userId="S::unguyen7@jh.edu::92021b55-417f-458a-90a7-cf14ced67da3" providerId="AD" clId="Web-{1C5DA43F-1144-560B-A996-9F9957834AF2}" dt="2026-05-03T00:49:00.532" v="72" actId="20577"/>
-          <ac:spMkLst>
-            <pc:docMk/>
-            <pc:sldMk cId="1284274485" sldId="259"/>
-            <ac:spMk id="7" creationId="{32741F24-76C7-9C01-1DBD-5EE3762FAACA}"/>
-          </ac:spMkLst>
-        </pc:spChg>
-      </pc:sldChg>
-      <pc:sldChg chg="modSp">
-        <pc:chgData name="Uyen P. Nguyen" userId="S::unguyen7@jh.edu::92021b55-417f-458a-90a7-cf14ced67da3" providerId="AD" clId="Web-{1C5DA43F-1144-560B-A996-9F9957834AF2}" dt="2026-05-03T00:48:55.797" v="67" actId="20577"/>
-        <pc:sldMkLst>
-          <pc:docMk/>
-          <pc:sldMk cId="1027488440" sldId="260"/>
-        </pc:sldMkLst>
-        <pc:spChg chg="mod">
-          <ac:chgData name="Uyen P. Nguyen" userId="S::unguyen7@jh.edu::92021b55-417f-458a-90a7-cf14ced67da3" providerId="AD" clId="Web-{1C5DA43F-1144-560B-A996-9F9957834AF2}" dt="2026-05-03T00:48:55.797" v="67" actId="20577"/>
-          <ac:spMkLst>
-            <pc:docMk/>
-            <pc:sldMk cId="1027488440" sldId="260"/>
-            <ac:spMk id="7" creationId="{2C42AF74-C537-A886-53B7-E8DF3240B7B7}"/>
-          </ac:spMkLst>
-        </pc:spChg>
-      </pc:sldChg>
-      <pc:sldChg chg="modSp">
-        <pc:chgData name="Uyen P. Nguyen" userId="S::unguyen7@jh.edu::92021b55-417f-458a-90a7-cf14ced67da3" providerId="AD" clId="Web-{1C5DA43F-1144-560B-A996-9F9957834AF2}" dt="2026-05-03T00:46:37.606" v="25"/>
-        <pc:sldMkLst>
-          <pc:docMk/>
-          <pc:sldMk cId="2092433718" sldId="265"/>
-        </pc:sldMkLst>
-        <pc:graphicFrameChg chg="mod modGraphic">
-          <ac:chgData name="Uyen P. Nguyen" userId="S::unguyen7@jh.edu::92021b55-417f-458a-90a7-cf14ced67da3" providerId="AD" clId="Web-{1C5DA43F-1144-560B-A996-9F9957834AF2}" dt="2026-05-03T00:46:37.606" v="25"/>
-          <ac:graphicFrameMkLst>
-            <pc:docMk/>
-            <pc:sldMk cId="2092433718" sldId="265"/>
-            <ac:graphicFrameMk id="3" creationId="{15498308-56C6-0976-7133-85BE4FA98101}"/>
-          </ac:graphicFrameMkLst>
-        </pc:graphicFrameChg>
       </pc:sldChg>
     </pc:docChg>
   </pc:docChgLst>
@@ -459,6 +387,83 @@
             <ac:picMk id="8" creationId="{B38A110A-4554-DD53-7B39-D305EC31083C}"/>
           </ac:picMkLst>
         </pc:picChg>
+      </pc:sldChg>
+    </pc:docChg>
+  </pc:docChgLst>
+  <pc:docChgLst>
+    <pc:chgData name="Uyen P. Nguyen" userId="S::unguyen7@jh.edu::92021b55-417f-458a-90a7-cf14ced67da3" providerId="AD" clId="Web-{1C5DA43F-1144-560B-A996-9F9957834AF2}"/>
+    <pc:docChg chg="modSld">
+      <pc:chgData name="Uyen P. Nguyen" userId="S::unguyen7@jh.edu::92021b55-417f-458a-90a7-cf14ced67da3" providerId="AD" clId="Web-{1C5DA43F-1144-560B-A996-9F9957834AF2}" dt="2026-05-03T01:28:46.789" v="180" actId="20577"/>
+      <pc:docMkLst>
+        <pc:docMk/>
+      </pc:docMkLst>
+      <pc:sldChg chg="modSp">
+        <pc:chgData name="Uyen P. Nguyen" userId="S::unguyen7@jh.edu::92021b55-417f-458a-90a7-cf14ced67da3" providerId="AD" clId="Web-{1C5DA43F-1144-560B-A996-9F9957834AF2}" dt="2026-05-03T01:28:46.789" v="180" actId="20577"/>
+        <pc:sldMkLst>
+          <pc:docMk/>
+          <pc:sldMk cId="2133178391" sldId="257"/>
+        </pc:sldMkLst>
+        <pc:spChg chg="mod">
+          <ac:chgData name="Uyen P. Nguyen" userId="S::unguyen7@jh.edu::92021b55-417f-458a-90a7-cf14ced67da3" providerId="AD" clId="Web-{1C5DA43F-1144-560B-A996-9F9957834AF2}" dt="2026-05-03T00:49:04.439" v="76" actId="20577"/>
+          <ac:spMkLst>
+            <pc:docMk/>
+            <pc:sldMk cId="2133178391" sldId="257"/>
+            <ac:spMk id="7" creationId="{D159B653-A360-6E33-D2F6-A0D58B9935A5}"/>
+          </ac:spMkLst>
+        </pc:spChg>
+        <pc:spChg chg="mod">
+          <ac:chgData name="Uyen P. Nguyen" userId="S::unguyen7@jh.edu::92021b55-417f-458a-90a7-cf14ced67da3" providerId="AD" clId="Web-{1C5DA43F-1144-560B-A996-9F9957834AF2}" dt="2026-05-03T01:28:46.789" v="180" actId="20577"/>
+          <ac:spMkLst>
+            <pc:docMk/>
+            <pc:sldMk cId="2133178391" sldId="257"/>
+            <ac:spMk id="9" creationId="{EABC739E-24F8-66FD-A37D-4CF4952DF00F}"/>
+          </ac:spMkLst>
+        </pc:spChg>
+      </pc:sldChg>
+      <pc:sldChg chg="modSp">
+        <pc:chgData name="Uyen P. Nguyen" userId="S::unguyen7@jh.edu::92021b55-417f-458a-90a7-cf14ced67da3" providerId="AD" clId="Web-{1C5DA43F-1144-560B-A996-9F9957834AF2}" dt="2026-05-03T00:49:00.532" v="72" actId="20577"/>
+        <pc:sldMkLst>
+          <pc:docMk/>
+          <pc:sldMk cId="1284274485" sldId="259"/>
+        </pc:sldMkLst>
+        <pc:spChg chg="mod">
+          <ac:chgData name="Uyen P. Nguyen" userId="S::unguyen7@jh.edu::92021b55-417f-458a-90a7-cf14ced67da3" providerId="AD" clId="Web-{1C5DA43F-1144-560B-A996-9F9957834AF2}" dt="2026-05-03T00:49:00.532" v="72" actId="20577"/>
+          <ac:spMkLst>
+            <pc:docMk/>
+            <pc:sldMk cId="1284274485" sldId="259"/>
+            <ac:spMk id="7" creationId="{32741F24-76C7-9C01-1DBD-5EE3762FAACA}"/>
+          </ac:spMkLst>
+        </pc:spChg>
+      </pc:sldChg>
+      <pc:sldChg chg="modSp">
+        <pc:chgData name="Uyen P. Nguyen" userId="S::unguyen7@jh.edu::92021b55-417f-458a-90a7-cf14ced67da3" providerId="AD" clId="Web-{1C5DA43F-1144-560B-A996-9F9957834AF2}" dt="2026-05-03T00:48:55.797" v="67" actId="20577"/>
+        <pc:sldMkLst>
+          <pc:docMk/>
+          <pc:sldMk cId="1027488440" sldId="260"/>
+        </pc:sldMkLst>
+        <pc:spChg chg="mod">
+          <ac:chgData name="Uyen P. Nguyen" userId="S::unguyen7@jh.edu::92021b55-417f-458a-90a7-cf14ced67da3" providerId="AD" clId="Web-{1C5DA43F-1144-560B-A996-9F9957834AF2}" dt="2026-05-03T00:48:55.797" v="67" actId="20577"/>
+          <ac:spMkLst>
+            <pc:docMk/>
+            <pc:sldMk cId="1027488440" sldId="260"/>
+            <ac:spMk id="7" creationId="{2C42AF74-C537-A886-53B7-E8DF3240B7B7}"/>
+          </ac:spMkLst>
+        </pc:spChg>
+      </pc:sldChg>
+      <pc:sldChg chg="modSp">
+        <pc:chgData name="Uyen P. Nguyen" userId="S::unguyen7@jh.edu::92021b55-417f-458a-90a7-cf14ced67da3" providerId="AD" clId="Web-{1C5DA43F-1144-560B-A996-9F9957834AF2}" dt="2026-05-03T00:46:37.606" v="25"/>
+        <pc:sldMkLst>
+          <pc:docMk/>
+          <pc:sldMk cId="2092433718" sldId="265"/>
+        </pc:sldMkLst>
+        <pc:graphicFrameChg chg="mod modGraphic">
+          <ac:chgData name="Uyen P. Nguyen" userId="S::unguyen7@jh.edu::92021b55-417f-458a-90a7-cf14ced67da3" providerId="AD" clId="Web-{1C5DA43F-1144-560B-A996-9F9957834AF2}" dt="2026-05-03T00:46:37.606" v="25"/>
+          <ac:graphicFrameMkLst>
+            <pc:docMk/>
+            <pc:sldMk cId="2092433718" sldId="265"/>
+            <ac:graphicFrameMk id="3" creationId="{15498308-56C6-0976-7133-85BE4FA98101}"/>
+          </ac:graphicFrameMkLst>
+        </pc:graphicFrameChg>
       </pc:sldChg>
     </pc:docChg>
   </pc:docChgLst>
@@ -4471,8 +4476,8 @@
           </a:p>
         </p:txBody>
       </p:sp>
-      <mc:AlternateContent xmlns:mc="http://schemas.openxmlformats.org/markup-compatibility/2006">
-        <mc:Choice xmlns:a14="http://schemas.microsoft.com/office/drawing/2010/main" Requires="a14">
+      <mc:AlternateContent xmlns:mc="http://schemas.openxmlformats.org/markup-compatibility/2006" xmlns:a14="http://schemas.microsoft.com/office/drawing/2010/main">
+        <mc:Choice Requires="a14">
           <p:sp>
             <p:nvSpPr>
               <p:cNvPr id="9" name="TextBox 8">
@@ -4819,7 +4824,7 @@
             </p:txBody>
           </p:sp>
         </mc:Choice>
-        <mc:Fallback>
+        <mc:Fallback xmlns="">
           <p:sp>
             <p:nvSpPr>
               <p:cNvPr id="9" name="TextBox 8">
@@ -4984,8 +4989,8 @@
           </a:p>
         </p:txBody>
       </p:sp>
-      <mc:AlternateContent xmlns:mc="http://schemas.openxmlformats.org/markup-compatibility/2006">
-        <mc:Choice xmlns:a14="http://schemas.microsoft.com/office/drawing/2010/main" Requires="a14">
+      <mc:AlternateContent xmlns:mc="http://schemas.openxmlformats.org/markup-compatibility/2006" xmlns:a14="http://schemas.microsoft.com/office/drawing/2010/main">
+        <mc:Choice Requires="a14">
           <p:sp>
             <p:nvSpPr>
               <p:cNvPr id="9" name="TextBox 8">
@@ -5180,15 +5185,7 @@
                 </a14:m>
                 <a:r>
                   <a:rPr lang="en-US" dirty="0"/>
-                  <a:t>, the information Eve has </a:t>
-                </a:r>
-                <a:r>
-                  <a:rPr lang="en-US"/>
-                  <a:t>prohibits compression </a:t>
-                </a:r>
-                <a:r>
-                  <a:rPr lang="en-US" dirty="0"/>
-                  <a:t>(i.e. </a:t>
+                  <a:t>, the information Eve has prohibits compression (i.e. </a:t>
                 </a:r>
                 <a14:m>
                   <m:oMath xmlns:m="http://schemas.openxmlformats.org/officeDocument/2006/math">
@@ -5403,7 +5400,7 @@
             </p:txBody>
           </p:sp>
         </mc:Choice>
-        <mc:Fallback>
+        <mc:Fallback xmlns="">
           <p:sp>
             <p:nvSpPr>
               <p:cNvPr id="9" name="TextBox 8">
@@ -5568,87 +5565,310 @@
           </a:p>
         </p:txBody>
       </p:sp>
-      <p:sp>
-        <p:nvSpPr>
-          <p:cNvPr id="9" name="TextBox 8">
-            <a:extLst>
-              <a:ext uri="{FF2B5EF4-FFF2-40B4-BE49-F238E27FC236}">
-                <a16:creationId xmlns:a16="http://schemas.microsoft.com/office/drawing/2014/main" id="{79ED7CEE-C5E9-CD5A-272A-71445B3DFEC7}"/>
-              </a:ext>
-            </a:extLst>
-          </p:cNvPr>
-          <p:cNvSpPr txBox="1"/>
-          <p:nvPr/>
-        </p:nvSpPr>
-        <p:spPr>
-          <a:xfrm>
-            <a:off x="457200" y="1181100"/>
-            <a:ext cx="10590028" cy="1169551"/>
-          </a:xfrm>
-          <a:prstGeom prst="rect">
-            <a:avLst/>
-          </a:prstGeom>
-          <a:noFill/>
-        </p:spPr>
-        <p:txBody>
-          <a:bodyPr wrap="square" lIns="91440" tIns="45720" rIns="91440" bIns="45720" anchor="t">
-            <a:spAutoFit/>
-          </a:bodyPr>
-          <a:lstStyle/>
-          <a:p>
-            <a:pPr marL="285750" indent="-285750">
-              <a:buFont typeface="Arial" panose="020B0604020202020204" pitchFamily="34" charset="0"/>
-              <a:buChar char="•"/>
-            </a:pPr>
-            <a:r>
-              <a:rPr lang="en-US" sz="2000" dirty="0">
-                <a:solidFill>
-                  <a:srgbClr val="202123"/>
-                </a:solidFill>
-                <a:latin typeface="Calibri" panose="020F0502020204030204" pitchFamily="34" charset="0"/>
-                <a:cs typeface="Calibri" panose="020F0502020204030204" pitchFamily="34" charset="0"/>
-              </a:rPr>
-              <a:t>[…]</a:t>
-            </a:r>
-          </a:p>
-          <a:p>
-            <a:pPr marL="285750" indent="-285750">
-              <a:spcBef>
-                <a:spcPts val="600"/>
-              </a:spcBef>
-              <a:buFont typeface="Arial" panose="020B0604020202020204" pitchFamily="34" charset="0"/>
-              <a:buChar char="•"/>
-            </a:pPr>
-            <a:r>
-              <a:rPr lang="en-US" sz="2000" dirty="0">
-                <a:solidFill>
-                  <a:srgbClr val="202123"/>
-                </a:solidFill>
-                <a:latin typeface="Calibri" panose="020F0502020204030204" pitchFamily="34" charset="0"/>
-                <a:cs typeface="Calibri" panose="020F0502020204030204" pitchFamily="34" charset="0"/>
-              </a:rPr>
-              <a:t>Limitation</a:t>
-            </a:r>
-          </a:p>
-          <a:p>
-            <a:pPr marL="285750" indent="-285750">
-              <a:spcBef>
-                <a:spcPts val="600"/>
-              </a:spcBef>
-              <a:buFont typeface="Arial" panose="020B0604020202020204" pitchFamily="34" charset="0"/>
-              <a:buChar char="•"/>
-            </a:pPr>
-            <a:endParaRPr lang="en-US" sz="2000" dirty="0">
-              <a:solidFill>
-                <a:srgbClr val="202123"/>
-              </a:solidFill>
-              <a:latin typeface="Calibri" panose="020F0502020204030204" pitchFamily="34" charset="0"/>
-              <a:ea typeface="Calibri"/>
-              <a:cs typeface="Calibri" panose="020F0502020204030204" pitchFamily="34" charset="0"/>
-            </a:endParaRPr>
-          </a:p>
-        </p:txBody>
-      </p:sp>
+      <mc:AlternateContent xmlns:mc="http://schemas.openxmlformats.org/markup-compatibility/2006">
+        <mc:Choice xmlns:a14="http://schemas.microsoft.com/office/drawing/2010/main" Requires="a14">
+          <p:sp>
+            <p:nvSpPr>
+              <p:cNvPr id="9" name="TextBox 8">
+                <a:extLst>
+                  <a:ext uri="{FF2B5EF4-FFF2-40B4-BE49-F238E27FC236}">
+                    <a16:creationId xmlns:a16="http://schemas.microsoft.com/office/drawing/2014/main" id="{79ED7CEE-C5E9-CD5A-272A-71445B3DFEC7}"/>
+                  </a:ext>
+                </a:extLst>
+              </p:cNvPr>
+              <p:cNvSpPr txBox="1"/>
+              <p:nvPr/>
+            </p:nvSpPr>
+            <p:spPr>
+              <a:xfrm>
+                <a:off x="457200" y="1181100"/>
+                <a:ext cx="10590028" cy="3785652"/>
+              </a:xfrm>
+              <a:prstGeom prst="rect">
+                <a:avLst/>
+              </a:prstGeom>
+              <a:noFill/>
+            </p:spPr>
+            <p:txBody>
+              <a:bodyPr wrap="square" lIns="91440" tIns="45720" rIns="91440" bIns="45720" anchor="t">
+                <a:spAutoFit/>
+              </a:bodyPr>
+              <a:lstStyle/>
+              <a:p>
+                <a:pPr marL="285750" indent="-285750">
+                  <a:buFont typeface="Arial" panose="020B0604020202020204" pitchFamily="34" charset="0"/>
+                  <a:buChar char="•"/>
+                </a:pPr>
+                <a:r>
+                  <a:rPr lang="en-US" sz="2000" dirty="0">
+                    <a:solidFill>
+                      <a:srgbClr val="202123"/>
+                    </a:solidFill>
+                    <a:latin typeface="Calibri" panose="020F0502020204030204" pitchFamily="34" charset="0"/>
+                    <a:cs typeface="Calibri" panose="020F0502020204030204" pitchFamily="34" charset="0"/>
+                  </a:rPr>
+                  <a:t>BB84 is provably secure QKD protocol against eavesdropping</a:t>
+                </a:r>
+              </a:p>
+              <a:p>
+                <a:pPr marL="285750" indent="-285750">
+                  <a:spcBef>
+                    <a:spcPts val="600"/>
+                  </a:spcBef>
+                  <a:buFont typeface="Arial" panose="020B0604020202020204" pitchFamily="34" charset="0"/>
+                  <a:buChar char="•"/>
+                </a:pPr>
+                <a:r>
+                  <a:rPr lang="en-US" sz="2000" dirty="0">
+                    <a:solidFill>
+                      <a:srgbClr val="202123"/>
+                    </a:solidFill>
+                    <a:latin typeface="Calibri" panose="020F0502020204030204" pitchFamily="34" charset="0"/>
+                    <a:cs typeface="Calibri" panose="020F0502020204030204" pitchFamily="34" charset="0"/>
+                  </a:rPr>
+                  <a:t>Noticeable limitations:</a:t>
+                </a:r>
+              </a:p>
+              <a:p>
+                <a:pPr marL="742950" lvl="1" indent="-285750">
+                  <a:spcBef>
+                    <a:spcPts val="600"/>
+                  </a:spcBef>
+                  <a:buFont typeface="Arial" panose="020B0604020202020204" pitchFamily="34" charset="0"/>
+                  <a:buChar char="•"/>
+                </a:pPr>
+                <a:r>
+                  <a:rPr lang="en-US" sz="2000" dirty="0">
+                    <a:solidFill>
+                      <a:srgbClr val="202123"/>
+                    </a:solidFill>
+                    <a:latin typeface="Calibri" panose="020F0502020204030204" pitchFamily="34" charset="0"/>
+                    <a:cs typeface="Calibri" panose="020F0502020204030204" pitchFamily="34" charset="0"/>
+                  </a:rPr>
+                  <a:t>Requires sufficiently low QBER to generate a secure key (</a:t>
+                </a:r>
+                <a14:m>
+                  <m:oMath xmlns:m="http://schemas.openxmlformats.org/officeDocument/2006/math">
+                    <m:r>
+                      <a:rPr lang="en-US" sz="2000" b="0" i="1" smtClean="0">
+                        <a:solidFill>
+                          <a:srgbClr val="202123"/>
+                        </a:solidFill>
+                        <a:latin typeface="Cambria Math" panose="02040503050406030204" pitchFamily="18" charset="0"/>
+                        <a:cs typeface="Calibri" panose="020F0502020204030204" pitchFamily="34" charset="0"/>
+                      </a:rPr>
+                      <m:t>𝑄𝐵𝐸𝑅</m:t>
+                    </m:r>
+                    <m:r>
+                      <a:rPr lang="en-US" sz="2000" b="0" i="1" smtClean="0">
+                        <a:solidFill>
+                          <a:srgbClr val="202123"/>
+                        </a:solidFill>
+                        <a:latin typeface="Cambria Math" panose="02040503050406030204" pitchFamily="18" charset="0"/>
+                        <a:cs typeface="Calibri" panose="020F0502020204030204" pitchFamily="34" charset="0"/>
+                      </a:rPr>
+                      <m:t>&lt;11%</m:t>
+                    </m:r>
+                  </m:oMath>
+                </a14:m>
+                <a:r>
+                  <a:rPr lang="en-US" sz="2000" dirty="0">
+                    <a:solidFill>
+                      <a:srgbClr val="202123"/>
+                    </a:solidFill>
+                    <a:latin typeface="Calibri" panose="020F0502020204030204" pitchFamily="34" charset="0"/>
+                    <a:cs typeface="Calibri" panose="020F0502020204030204" pitchFamily="34" charset="0"/>
+                  </a:rPr>
+                  <a:t>)</a:t>
+                </a:r>
+              </a:p>
+              <a:p>
+                <a:pPr marL="1200150" lvl="2" indent="-285750">
+                  <a:spcBef>
+                    <a:spcPts val="600"/>
+                  </a:spcBef>
+                  <a:buFont typeface="Arial" panose="020B0604020202020204" pitchFamily="34" charset="0"/>
+                  <a:buChar char="•"/>
+                </a:pPr>
+                <a:r>
+                  <a:rPr lang="en-US" sz="2000" dirty="0">
+                    <a:solidFill>
+                      <a:srgbClr val="202123"/>
+                    </a:solidFill>
+                    <a:latin typeface="Calibri" panose="020F0502020204030204" pitchFamily="34" charset="0"/>
+                    <a:cs typeface="Calibri" panose="020F0502020204030204" pitchFamily="34" charset="0"/>
+                  </a:rPr>
+                  <a:t>Difficult to implement in moderate-to-high noise-plus-interference environments </a:t>
+                </a:r>
+              </a:p>
+              <a:p>
+                <a:pPr marL="742950" lvl="1" indent="-285750">
+                  <a:spcBef>
+                    <a:spcPts val="600"/>
+                  </a:spcBef>
+                  <a:buFont typeface="Arial" panose="020B0604020202020204" pitchFamily="34" charset="0"/>
+                  <a:buChar char="•"/>
+                </a:pPr>
+                <a:r>
+                  <a:rPr lang="en-US" sz="2000" dirty="0">
+                    <a:solidFill>
+                      <a:srgbClr val="202123"/>
+                    </a:solidFill>
+                    <a:latin typeface="Calibri" panose="020F0502020204030204" pitchFamily="34" charset="0"/>
+                    <a:cs typeface="Calibri" panose="020F0502020204030204" pitchFamily="34" charset="0"/>
+                  </a:rPr>
+                  <a:t>Requires high information latency</a:t>
+                </a:r>
+              </a:p>
+              <a:p>
+                <a:pPr marL="1200150" lvl="2" indent="-285750">
+                  <a:spcBef>
+                    <a:spcPts val="600"/>
+                  </a:spcBef>
+                  <a:buFont typeface="Arial" panose="020B0604020202020204" pitchFamily="34" charset="0"/>
+                  <a:buChar char="•"/>
+                </a:pPr>
+                <a:r>
+                  <a:rPr lang="en-US" sz="2000" dirty="0">
+                    <a:solidFill>
+                      <a:srgbClr val="202123"/>
+                    </a:solidFill>
+                    <a:latin typeface="Calibri" panose="020F0502020204030204" pitchFamily="34" charset="0"/>
+                    <a:cs typeface="Calibri" panose="020F0502020204030204" pitchFamily="34" charset="0"/>
+                  </a:rPr>
+                  <a:t>Comparing basis selection and parities across the public channel is resource intensive</a:t>
+                </a:r>
+              </a:p>
+              <a:p>
+                <a:pPr marL="285750" indent="-285750">
+                  <a:spcBef>
+                    <a:spcPts val="600"/>
+                  </a:spcBef>
+                  <a:buFont typeface="Arial" panose="020B0604020202020204" pitchFamily="34" charset="0"/>
+                  <a:buChar char="•"/>
+                </a:pPr>
+                <a:r>
+                  <a:rPr lang="en-US" sz="2000" dirty="0">
+                    <a:solidFill>
+                      <a:srgbClr val="202123"/>
+                    </a:solidFill>
+                    <a:latin typeface="Calibri" panose="020F0502020204030204" pitchFamily="34" charset="0"/>
+                    <a:ea typeface="Calibri"/>
+                    <a:cs typeface="Calibri" panose="020F0502020204030204" pitchFamily="34" charset="0"/>
+                  </a:rPr>
+                  <a:t>Improvements:</a:t>
+                </a:r>
+              </a:p>
+              <a:p>
+                <a:pPr marL="742950" lvl="1" indent="-285750">
+                  <a:spcBef>
+                    <a:spcPts val="600"/>
+                  </a:spcBef>
+                  <a:buFont typeface="Arial" panose="020B0604020202020204" pitchFamily="34" charset="0"/>
+                  <a:buChar char="•"/>
+                </a:pPr>
+                <a:r>
+                  <a:rPr lang="en-US" sz="2000" dirty="0">
+                    <a:solidFill>
+                      <a:srgbClr val="202123"/>
+                    </a:solidFill>
+                    <a:latin typeface="Calibri" panose="020F0502020204030204" pitchFamily="34" charset="0"/>
+                    <a:ea typeface="Calibri"/>
+                    <a:cs typeface="Calibri" panose="020F0502020204030204" pitchFamily="34" charset="0"/>
+                  </a:rPr>
+                  <a:t>Cascade protocol can be replaced with a low-density parity check (LDPC) protocol to improve reconciliation efficiency</a:t>
+                </a:r>
+              </a:p>
+              <a:p>
+                <a:pPr marL="742950" lvl="1" indent="-285750">
+                  <a:spcBef>
+                    <a:spcPts val="600"/>
+                  </a:spcBef>
+                  <a:buFont typeface="Arial" panose="020B0604020202020204" pitchFamily="34" charset="0"/>
+                  <a:buChar char="•"/>
+                </a:pPr>
+                <a:r>
+                  <a:rPr lang="en-US" sz="2000" dirty="0">
+                    <a:solidFill>
+                      <a:srgbClr val="202123"/>
+                    </a:solidFill>
+                    <a:latin typeface="Calibri" panose="020F0502020204030204" pitchFamily="34" charset="0"/>
+                    <a:ea typeface="Calibri"/>
+                    <a:cs typeface="Calibri" panose="020F0502020204030204" pitchFamily="34" charset="0"/>
+                  </a:rPr>
+                  <a:t>Later QKD protocols such as </a:t>
+                </a:r>
+                <a:r>
+                  <a:rPr lang="en-US" sz="2000">
+                    <a:solidFill>
+                      <a:srgbClr val="202123"/>
+                    </a:solidFill>
+                    <a:latin typeface="Calibri" panose="020F0502020204030204" pitchFamily="34" charset="0"/>
+                    <a:ea typeface="Calibri"/>
+                    <a:cs typeface="Calibri" panose="020F0502020204030204" pitchFamily="34" charset="0"/>
+                  </a:rPr>
+                  <a:t>E91 uses </a:t>
+                </a:r>
+                <a:r>
+                  <a:rPr lang="en-US" sz="2000" dirty="0">
+                    <a:solidFill>
+                      <a:srgbClr val="202123"/>
+                    </a:solidFill>
+                    <a:latin typeface="Calibri" panose="020F0502020204030204" pitchFamily="34" charset="0"/>
+                    <a:ea typeface="Calibri"/>
+                    <a:cs typeface="Calibri" panose="020F0502020204030204" pitchFamily="34" charset="0"/>
+                  </a:rPr>
+                  <a:t>entanglement to provide device-independent security</a:t>
+                </a:r>
+              </a:p>
+            </p:txBody>
+          </p:sp>
+        </mc:Choice>
+        <mc:Fallback>
+          <p:sp>
+            <p:nvSpPr>
+              <p:cNvPr id="9" name="TextBox 8">
+                <a:extLst>
+                  <a:ext uri="{FF2B5EF4-FFF2-40B4-BE49-F238E27FC236}">
+                    <a16:creationId xmlns:a16="http://schemas.microsoft.com/office/drawing/2014/main" id="{79ED7CEE-C5E9-CD5A-272A-71445B3DFEC7}"/>
+                  </a:ext>
+                </a:extLst>
+              </p:cNvPr>
+              <p:cNvSpPr txBox="1">
+                <a:spLocks noRot="1" noChangeAspect="1" noMove="1" noResize="1" noEditPoints="1" noAdjustHandles="1" noChangeArrowheads="1" noChangeShapeType="1" noTextEdit="1"/>
+              </p:cNvSpPr>
+              <p:nvPr/>
+            </p:nvSpPr>
+            <p:spPr>
+              <a:xfrm>
+                <a:off x="457200" y="1181100"/>
+                <a:ext cx="10590028" cy="3785652"/>
+              </a:xfrm>
+              <a:prstGeom prst="rect">
+                <a:avLst/>
+              </a:prstGeom>
+              <a:blipFill>
+                <a:blip r:embed="rId2"/>
+                <a:stretch>
+                  <a:fillRect l="-518" t="-966" r="-230" b="-1932"/>
+                </a:stretch>
+              </a:blipFill>
+            </p:spPr>
+            <p:txBody>
+              <a:bodyPr/>
+              <a:lstStyle/>
+              <a:p>
+                <a:r>
+                  <a:rPr lang="en-US">
+                    <a:noFill/>
+                  </a:rPr>
+                  <a:t> </a:t>
+                </a:r>
+              </a:p>
+            </p:txBody>
+          </p:sp>
+        </mc:Fallback>
+      </mc:AlternateContent>
     </p:spTree>
     <p:extLst>
       <p:ext uri="{BB962C8B-B14F-4D97-AF65-F5344CB8AC3E}">

--- a/615_781_Kuta_Nguyen_McLain.pptx
+++ b/615_781_Kuta_Nguyen_McLain.pptx
@@ -17,8 +17,9 @@
     <p:sldId id="262" r:id="rId11"/>
     <p:sldId id="263" r:id="rId12"/>
     <p:sldId id="264" r:id="rId13"/>
-    <p:sldId id="265" r:id="rId14"/>
-    <p:sldId id="266" r:id="rId15"/>
+    <p:sldId id="272" r:id="rId14"/>
+    <p:sldId id="265" r:id="rId15"/>
+    <p:sldId id="266" r:id="rId16"/>
   </p:sldIdLst>
   <p:sldSz cx="12192000" cy="6858000"/>
   <p:notesSz cx="6858000" cy="9144000"/>
@@ -200,6 +201,83 @@
             <ac:spMk id="7" creationId="{E4378A81-279B-CA9A-8E50-130D2D276DA6}"/>
           </ac:spMkLst>
         </pc:spChg>
+      </pc:sldChg>
+    </pc:docChg>
+  </pc:docChgLst>
+  <pc:docChgLst>
+    <pc:chgData name="Uyen P. Nguyen" userId="S::unguyen7@jh.edu::92021b55-417f-458a-90a7-cf14ced67da3" providerId="AD" clId="Web-{1C5DA43F-1144-560B-A996-9F9957834AF2}"/>
+    <pc:docChg chg="modSld">
+      <pc:chgData name="Uyen P. Nguyen" userId="S::unguyen7@jh.edu::92021b55-417f-458a-90a7-cf14ced67da3" providerId="AD" clId="Web-{1C5DA43F-1144-560B-A996-9F9957834AF2}" dt="2026-05-03T01:28:46.789" v="180" actId="20577"/>
+      <pc:docMkLst>
+        <pc:docMk/>
+      </pc:docMkLst>
+      <pc:sldChg chg="modSp">
+        <pc:chgData name="Uyen P. Nguyen" userId="S::unguyen7@jh.edu::92021b55-417f-458a-90a7-cf14ced67da3" providerId="AD" clId="Web-{1C5DA43F-1144-560B-A996-9F9957834AF2}" dt="2026-05-03T01:28:46.789" v="180" actId="20577"/>
+        <pc:sldMkLst>
+          <pc:docMk/>
+          <pc:sldMk cId="2133178391" sldId="257"/>
+        </pc:sldMkLst>
+        <pc:spChg chg="mod">
+          <ac:chgData name="Uyen P. Nguyen" userId="S::unguyen7@jh.edu::92021b55-417f-458a-90a7-cf14ced67da3" providerId="AD" clId="Web-{1C5DA43F-1144-560B-A996-9F9957834AF2}" dt="2026-05-03T00:49:04.439" v="76" actId="20577"/>
+          <ac:spMkLst>
+            <pc:docMk/>
+            <pc:sldMk cId="2133178391" sldId="257"/>
+            <ac:spMk id="7" creationId="{D159B653-A360-6E33-D2F6-A0D58B9935A5}"/>
+          </ac:spMkLst>
+        </pc:spChg>
+        <pc:spChg chg="mod">
+          <ac:chgData name="Uyen P. Nguyen" userId="S::unguyen7@jh.edu::92021b55-417f-458a-90a7-cf14ced67da3" providerId="AD" clId="Web-{1C5DA43F-1144-560B-A996-9F9957834AF2}" dt="2026-05-03T01:28:46.789" v="180" actId="20577"/>
+          <ac:spMkLst>
+            <pc:docMk/>
+            <pc:sldMk cId="2133178391" sldId="257"/>
+            <ac:spMk id="9" creationId="{EABC739E-24F8-66FD-A37D-4CF4952DF00F}"/>
+          </ac:spMkLst>
+        </pc:spChg>
+      </pc:sldChg>
+      <pc:sldChg chg="modSp">
+        <pc:chgData name="Uyen P. Nguyen" userId="S::unguyen7@jh.edu::92021b55-417f-458a-90a7-cf14ced67da3" providerId="AD" clId="Web-{1C5DA43F-1144-560B-A996-9F9957834AF2}" dt="2026-05-03T00:49:00.532" v="72" actId="20577"/>
+        <pc:sldMkLst>
+          <pc:docMk/>
+          <pc:sldMk cId="1284274485" sldId="259"/>
+        </pc:sldMkLst>
+        <pc:spChg chg="mod">
+          <ac:chgData name="Uyen P. Nguyen" userId="S::unguyen7@jh.edu::92021b55-417f-458a-90a7-cf14ced67da3" providerId="AD" clId="Web-{1C5DA43F-1144-560B-A996-9F9957834AF2}" dt="2026-05-03T00:49:00.532" v="72" actId="20577"/>
+          <ac:spMkLst>
+            <pc:docMk/>
+            <pc:sldMk cId="1284274485" sldId="259"/>
+            <ac:spMk id="7" creationId="{32741F24-76C7-9C01-1DBD-5EE3762FAACA}"/>
+          </ac:spMkLst>
+        </pc:spChg>
+      </pc:sldChg>
+      <pc:sldChg chg="modSp">
+        <pc:chgData name="Uyen P. Nguyen" userId="S::unguyen7@jh.edu::92021b55-417f-458a-90a7-cf14ced67da3" providerId="AD" clId="Web-{1C5DA43F-1144-560B-A996-9F9957834AF2}" dt="2026-05-03T00:48:55.797" v="67" actId="20577"/>
+        <pc:sldMkLst>
+          <pc:docMk/>
+          <pc:sldMk cId="1027488440" sldId="260"/>
+        </pc:sldMkLst>
+        <pc:spChg chg="mod">
+          <ac:chgData name="Uyen P. Nguyen" userId="S::unguyen7@jh.edu::92021b55-417f-458a-90a7-cf14ced67da3" providerId="AD" clId="Web-{1C5DA43F-1144-560B-A996-9F9957834AF2}" dt="2026-05-03T00:48:55.797" v="67" actId="20577"/>
+          <ac:spMkLst>
+            <pc:docMk/>
+            <pc:sldMk cId="1027488440" sldId="260"/>
+            <ac:spMk id="7" creationId="{2C42AF74-C537-A886-53B7-E8DF3240B7B7}"/>
+          </ac:spMkLst>
+        </pc:spChg>
+      </pc:sldChg>
+      <pc:sldChg chg="modSp">
+        <pc:chgData name="Uyen P. Nguyen" userId="S::unguyen7@jh.edu::92021b55-417f-458a-90a7-cf14ced67da3" providerId="AD" clId="Web-{1C5DA43F-1144-560B-A996-9F9957834AF2}" dt="2026-05-03T00:46:37.606" v="25"/>
+        <pc:sldMkLst>
+          <pc:docMk/>
+          <pc:sldMk cId="2092433718" sldId="265"/>
+        </pc:sldMkLst>
+        <pc:graphicFrameChg chg="mod modGraphic">
+          <ac:chgData name="Uyen P. Nguyen" userId="S::unguyen7@jh.edu::92021b55-417f-458a-90a7-cf14ced67da3" providerId="AD" clId="Web-{1C5DA43F-1144-560B-A996-9F9957834AF2}" dt="2026-05-03T00:46:37.606" v="25"/>
+          <ac:graphicFrameMkLst>
+            <pc:docMk/>
+            <pc:sldMk cId="2092433718" sldId="265"/>
+            <ac:graphicFrameMk id="3" creationId="{15498308-56C6-0976-7133-85BE4FA98101}"/>
+          </ac:graphicFrameMkLst>
+        </pc:graphicFrameChg>
       </pc:sldChg>
     </pc:docChg>
   </pc:docChgLst>
@@ -387,83 +465,6 @@
             <ac:picMk id="8" creationId="{B38A110A-4554-DD53-7B39-D305EC31083C}"/>
           </ac:picMkLst>
         </pc:picChg>
-      </pc:sldChg>
-    </pc:docChg>
-  </pc:docChgLst>
-  <pc:docChgLst>
-    <pc:chgData name="Uyen P. Nguyen" userId="S::unguyen7@jh.edu::92021b55-417f-458a-90a7-cf14ced67da3" providerId="AD" clId="Web-{1C5DA43F-1144-560B-A996-9F9957834AF2}"/>
-    <pc:docChg chg="modSld">
-      <pc:chgData name="Uyen P. Nguyen" userId="S::unguyen7@jh.edu::92021b55-417f-458a-90a7-cf14ced67da3" providerId="AD" clId="Web-{1C5DA43F-1144-560B-A996-9F9957834AF2}" dt="2026-05-03T01:28:46.789" v="180" actId="20577"/>
-      <pc:docMkLst>
-        <pc:docMk/>
-      </pc:docMkLst>
-      <pc:sldChg chg="modSp">
-        <pc:chgData name="Uyen P. Nguyen" userId="S::unguyen7@jh.edu::92021b55-417f-458a-90a7-cf14ced67da3" providerId="AD" clId="Web-{1C5DA43F-1144-560B-A996-9F9957834AF2}" dt="2026-05-03T01:28:46.789" v="180" actId="20577"/>
-        <pc:sldMkLst>
-          <pc:docMk/>
-          <pc:sldMk cId="2133178391" sldId="257"/>
-        </pc:sldMkLst>
-        <pc:spChg chg="mod">
-          <ac:chgData name="Uyen P. Nguyen" userId="S::unguyen7@jh.edu::92021b55-417f-458a-90a7-cf14ced67da3" providerId="AD" clId="Web-{1C5DA43F-1144-560B-A996-9F9957834AF2}" dt="2026-05-03T00:49:04.439" v="76" actId="20577"/>
-          <ac:spMkLst>
-            <pc:docMk/>
-            <pc:sldMk cId="2133178391" sldId="257"/>
-            <ac:spMk id="7" creationId="{D159B653-A360-6E33-D2F6-A0D58B9935A5}"/>
-          </ac:spMkLst>
-        </pc:spChg>
-        <pc:spChg chg="mod">
-          <ac:chgData name="Uyen P. Nguyen" userId="S::unguyen7@jh.edu::92021b55-417f-458a-90a7-cf14ced67da3" providerId="AD" clId="Web-{1C5DA43F-1144-560B-A996-9F9957834AF2}" dt="2026-05-03T01:28:46.789" v="180" actId="20577"/>
-          <ac:spMkLst>
-            <pc:docMk/>
-            <pc:sldMk cId="2133178391" sldId="257"/>
-            <ac:spMk id="9" creationId="{EABC739E-24F8-66FD-A37D-4CF4952DF00F}"/>
-          </ac:spMkLst>
-        </pc:spChg>
-      </pc:sldChg>
-      <pc:sldChg chg="modSp">
-        <pc:chgData name="Uyen P. Nguyen" userId="S::unguyen7@jh.edu::92021b55-417f-458a-90a7-cf14ced67da3" providerId="AD" clId="Web-{1C5DA43F-1144-560B-A996-9F9957834AF2}" dt="2026-05-03T00:49:00.532" v="72" actId="20577"/>
-        <pc:sldMkLst>
-          <pc:docMk/>
-          <pc:sldMk cId="1284274485" sldId="259"/>
-        </pc:sldMkLst>
-        <pc:spChg chg="mod">
-          <ac:chgData name="Uyen P. Nguyen" userId="S::unguyen7@jh.edu::92021b55-417f-458a-90a7-cf14ced67da3" providerId="AD" clId="Web-{1C5DA43F-1144-560B-A996-9F9957834AF2}" dt="2026-05-03T00:49:00.532" v="72" actId="20577"/>
-          <ac:spMkLst>
-            <pc:docMk/>
-            <pc:sldMk cId="1284274485" sldId="259"/>
-            <ac:spMk id="7" creationId="{32741F24-76C7-9C01-1DBD-5EE3762FAACA}"/>
-          </ac:spMkLst>
-        </pc:spChg>
-      </pc:sldChg>
-      <pc:sldChg chg="modSp">
-        <pc:chgData name="Uyen P. Nguyen" userId="S::unguyen7@jh.edu::92021b55-417f-458a-90a7-cf14ced67da3" providerId="AD" clId="Web-{1C5DA43F-1144-560B-A996-9F9957834AF2}" dt="2026-05-03T00:48:55.797" v="67" actId="20577"/>
-        <pc:sldMkLst>
-          <pc:docMk/>
-          <pc:sldMk cId="1027488440" sldId="260"/>
-        </pc:sldMkLst>
-        <pc:spChg chg="mod">
-          <ac:chgData name="Uyen P. Nguyen" userId="S::unguyen7@jh.edu::92021b55-417f-458a-90a7-cf14ced67da3" providerId="AD" clId="Web-{1C5DA43F-1144-560B-A996-9F9957834AF2}" dt="2026-05-03T00:48:55.797" v="67" actId="20577"/>
-          <ac:spMkLst>
-            <pc:docMk/>
-            <pc:sldMk cId="1027488440" sldId="260"/>
-            <ac:spMk id="7" creationId="{2C42AF74-C537-A886-53B7-E8DF3240B7B7}"/>
-          </ac:spMkLst>
-        </pc:spChg>
-      </pc:sldChg>
-      <pc:sldChg chg="modSp">
-        <pc:chgData name="Uyen P. Nguyen" userId="S::unguyen7@jh.edu::92021b55-417f-458a-90a7-cf14ced67da3" providerId="AD" clId="Web-{1C5DA43F-1144-560B-A996-9F9957834AF2}" dt="2026-05-03T00:46:37.606" v="25"/>
-        <pc:sldMkLst>
-          <pc:docMk/>
-          <pc:sldMk cId="2092433718" sldId="265"/>
-        </pc:sldMkLst>
-        <pc:graphicFrameChg chg="mod modGraphic">
-          <ac:chgData name="Uyen P. Nguyen" userId="S::unguyen7@jh.edu::92021b55-417f-458a-90a7-cf14ced67da3" providerId="AD" clId="Web-{1C5DA43F-1144-560B-A996-9F9957834AF2}" dt="2026-05-03T00:46:37.606" v="25"/>
-          <ac:graphicFrameMkLst>
-            <pc:docMk/>
-            <pc:sldMk cId="2092433718" sldId="265"/>
-            <ac:graphicFrameMk id="3" creationId="{15498308-56C6-0976-7133-85BE4FA98101}"/>
-          </ac:graphicFrameMkLst>
-        </pc:graphicFrameChg>
       </pc:sldChg>
     </pc:docChg>
   </pc:docChgLst>
@@ -4476,8 +4477,8 @@
           </a:p>
         </p:txBody>
       </p:sp>
-      <mc:AlternateContent xmlns:mc="http://schemas.openxmlformats.org/markup-compatibility/2006" xmlns:a14="http://schemas.microsoft.com/office/drawing/2010/main">
-        <mc:Choice Requires="a14">
+      <mc:AlternateContent xmlns:mc="http://schemas.openxmlformats.org/markup-compatibility/2006">
+        <mc:Choice xmlns:a14="http://schemas.microsoft.com/office/drawing/2010/main" Requires="a14">
           <p:sp>
             <p:nvSpPr>
               <p:cNvPr id="9" name="TextBox 8">
@@ -4543,7 +4544,7 @@
                     <a:ea typeface="Calibri"/>
                     <a:cs typeface="Calibri"/>
                   </a:rPr>
-                  <a:t>Cascade Procedure</a:t>
+                  <a:t>Cascade Procedure [1]</a:t>
                 </a:r>
               </a:p>
               <a:p>
@@ -4824,7 +4825,7 @@
             </p:txBody>
           </p:sp>
         </mc:Choice>
-        <mc:Fallback xmlns="">
+        <mc:Fallback>
           <p:sp>
             <p:nvSpPr>
               <p:cNvPr id="9" name="TextBox 8">
@@ -4989,8 +4990,8 @@
           </a:p>
         </p:txBody>
       </p:sp>
-      <mc:AlternateContent xmlns:mc="http://schemas.openxmlformats.org/markup-compatibility/2006" xmlns:a14="http://schemas.microsoft.com/office/drawing/2010/main">
-        <mc:Choice Requires="a14">
+      <mc:AlternateContent xmlns:mc="http://schemas.openxmlformats.org/markup-compatibility/2006">
+        <mc:Choice xmlns:a14="http://schemas.microsoft.com/office/drawing/2010/main" Requires="a14">
           <p:sp>
             <p:nvSpPr>
               <p:cNvPr id="9" name="TextBox 8">
@@ -5058,7 +5059,7 @@
                 </a:r>
                 <a:r>
                   <a:rPr lang="en-US" dirty="0"/>
-                  <a:t>bit string to maximize entropy</a:t>
+                  <a:t>bit string to maximize entropy [2]</a:t>
                 </a:r>
               </a:p>
               <a:p>
@@ -5369,14 +5370,14 @@
                     <a:ea typeface="+mn-lt"/>
                     <a:cs typeface="+mn-lt"/>
                   </a:rPr>
-                  <a:t>Key:  11110111001101011111011010111100</a:t>
+                  <a:t>Key (bit string shared by Alice and Bob):  11110111001101011111011010111100</a:t>
                 </a:r>
               </a:p>
               <a:p>
                 <a:pPr lvl="2"/>
                 <a:r>
                   <a:rPr lang="en-US" dirty="0"/>
-                  <a:t>Cipher Text: 11001111101011000101001111011001</a:t>
+                  <a:t>Cipher Text (bit string encryption of “BB84” by Alice): 11001111101011000101001111011001</a:t>
                 </a:r>
               </a:p>
               <a:p>
@@ -5386,7 +5387,7 @@
                     <a:ea typeface="Calibri" panose="020F0502020204030204"/>
                     <a:cs typeface="Calibri" panose="020F0502020204030204"/>
                   </a:rPr>
-                  <a:t>Decoded: </a:t>
+                  <a:t>Decoded (bit string decryption of cipher by Bob): </a:t>
                 </a:r>
                 <a:r>
                   <a:rPr lang="en-US" dirty="0">
@@ -5400,7 +5401,7 @@
             </p:txBody>
           </p:sp>
         </mc:Choice>
-        <mc:Fallback xmlns="">
+        <mc:Fallback>
           <p:sp>
             <p:nvSpPr>
               <p:cNvPr id="9" name="TextBox 8">
@@ -5582,7 +5583,7 @@
             <p:spPr>
               <a:xfrm>
                 <a:off x="457200" y="1181100"/>
-                <a:ext cx="10590028" cy="3785652"/>
+                <a:ext cx="10590028" cy="4093428"/>
               </a:xfrm>
               <a:prstGeom prst="rect">
                 <a:avLst/>
@@ -5667,7 +5668,7 @@
                         <a:latin typeface="Cambria Math" panose="02040503050406030204" pitchFamily="18" charset="0"/>
                         <a:cs typeface="Calibri" panose="020F0502020204030204" pitchFamily="34" charset="0"/>
                       </a:rPr>
-                      <m:t>&lt;11%</m:t>
+                      <m:t>&lt;11% </m:t>
                     </m:r>
                   </m:oMath>
                 </a14:m>
@@ -5679,7 +5680,7 @@
                     <a:latin typeface="Calibri" panose="020F0502020204030204" pitchFamily="34" charset="0"/>
                     <a:cs typeface="Calibri" panose="020F0502020204030204" pitchFamily="34" charset="0"/>
                   </a:rPr>
-                  <a:t>)</a:t>
+                  <a:t>[3])</a:t>
                 </a:r>
               </a:p>
               <a:p>
@@ -5776,7 +5777,7 @@
                     <a:ea typeface="Calibri"/>
                     <a:cs typeface="Calibri" panose="020F0502020204030204" pitchFamily="34" charset="0"/>
                   </a:rPr>
-                  <a:t>Cascade protocol can be replaced with a low-density parity check (LDPC) protocol to improve reconciliation efficiency</a:t>
+                  <a:t>Cascade protocol can be replaced with a low-density parity check (LDPC) protocol to improve reconciliation efficiency [4]</a:t>
                 </a:r>
               </a:p>
               <a:p>
@@ -5796,29 +5797,7 @@
                     <a:ea typeface="Calibri"/>
                     <a:cs typeface="Calibri" panose="020F0502020204030204" pitchFamily="34" charset="0"/>
                   </a:rPr>
-                  <a:t>Later QKD protocols such as </a:t>
-                </a:r>
-                <a:r>
-                  <a:rPr lang="en-US" sz="2000">
-                    <a:solidFill>
-                      <a:srgbClr val="202123"/>
-                    </a:solidFill>
-                    <a:latin typeface="Calibri" panose="020F0502020204030204" pitchFamily="34" charset="0"/>
-                    <a:ea typeface="Calibri"/>
-                    <a:cs typeface="Calibri" panose="020F0502020204030204" pitchFamily="34" charset="0"/>
-                  </a:rPr>
-                  <a:t>E91 uses </a:t>
-                </a:r>
-                <a:r>
-                  <a:rPr lang="en-US" sz="2000" dirty="0">
-                    <a:solidFill>
-                      <a:srgbClr val="202123"/>
-                    </a:solidFill>
-                    <a:latin typeface="Calibri" panose="020F0502020204030204" pitchFamily="34" charset="0"/>
-                    <a:ea typeface="Calibri"/>
-                    <a:cs typeface="Calibri" panose="020F0502020204030204" pitchFamily="34" charset="0"/>
-                  </a:rPr>
-                  <a:t>entanglement to provide device-independent security</a:t>
+                  <a:t>Later QKD protocols such as E91 uses entanglement to provide device-independent security [5]</a:t>
                 </a:r>
               </a:p>
             </p:txBody>
@@ -5842,7 +5821,7 @@
             <p:spPr>
               <a:xfrm>
                 <a:off x="457200" y="1181100"/>
-                <a:ext cx="10590028" cy="3785652"/>
+                <a:ext cx="10590028" cy="4093428"/>
               </a:xfrm>
               <a:prstGeom prst="rect">
                 <a:avLst/>
@@ -5850,7 +5829,7 @@
               <a:blipFill>
                 <a:blip r:embed="rId2"/>
                 <a:stretch>
-                  <a:fillRect l="-518" t="-966" r="-230" b="-1932"/>
+                  <a:fillRect l="-518" t="-894" r="-230" b="-1788"/>
                 </a:stretch>
               </a:blipFill>
             </p:spPr>
@@ -5890,7 +5869,7 @@
         <p:cNvPr id="1" name="">
           <a:extLst>
             <a:ext uri="{FF2B5EF4-FFF2-40B4-BE49-F238E27FC236}">
-              <a16:creationId xmlns:a16="http://schemas.microsoft.com/office/drawing/2014/main" id="{2AC4A3D5-C1C1-2131-970F-D325EBE3F643}"/>
+              <a16:creationId xmlns:a16="http://schemas.microsoft.com/office/drawing/2014/main" id="{B6BBCB00-2422-1CCD-376A-DA9BFEE5784D}"/>
             </a:ext>
           </a:extLst>
         </p:cNvPr>
@@ -5910,7 +5889,7 @@
           <p:cNvPr id="7" name="Title 1">
             <a:extLst>
               <a:ext uri="{FF2B5EF4-FFF2-40B4-BE49-F238E27FC236}">
-                <a16:creationId xmlns:a16="http://schemas.microsoft.com/office/drawing/2014/main" id="{7400B334-7665-58DA-2250-9B9D61176C73}"/>
+                <a16:creationId xmlns:a16="http://schemas.microsoft.com/office/drawing/2014/main" id="{90A989AD-B9F0-9CCD-E295-6B689EE9CA05}"/>
               </a:ext>
             </a:extLst>
           </p:cNvPr>
@@ -5970,6 +5949,251 @@
               <a:defRPr/>
             </a:pPr>
             <a:r>
+              <a:rPr kumimoji="0" lang="en-US" sz="3600" b="1" i="0" u="none" strike="noStrike" kern="1200" cap="none" spc="0" normalizeH="0" baseline="0" noProof="0" dirty="0" err="1">
+                <a:ln>
+                  <a:noFill/>
+                </a:ln>
+                <a:solidFill>
+                  <a:srgbClr val="002C73"/>
+                </a:solidFill>
+                <a:effectLst/>
+                <a:uLnTx/>
+                <a:uFillTx/>
+                <a:latin typeface="Arial" panose="020B0604020202020204"/>
+                <a:ea typeface="+mj-ea"/>
+                <a:cs typeface="+mj-cs"/>
+              </a:rPr>
+              <a:t>Referenes</a:t>
+            </a:r>
+            <a:endParaRPr kumimoji="0" lang="en-US" sz="3600" b="1" i="0" u="none" strike="noStrike" kern="1200" cap="none" spc="0" normalizeH="0" baseline="0" noProof="0" dirty="0">
+              <a:ln>
+                <a:noFill/>
+              </a:ln>
+              <a:solidFill>
+                <a:srgbClr val="002C73"/>
+              </a:solidFill>
+              <a:effectLst/>
+              <a:uLnTx/>
+              <a:uFillTx/>
+              <a:latin typeface="Arial" panose="020B0604020202020204"/>
+              <a:ea typeface="+mj-ea"/>
+              <a:cs typeface="+mj-cs"/>
+            </a:endParaRPr>
+          </a:p>
+        </p:txBody>
+      </p:sp>
+      <p:sp>
+        <p:nvSpPr>
+          <p:cNvPr id="9" name="TextBox 8">
+            <a:extLst>
+              <a:ext uri="{FF2B5EF4-FFF2-40B4-BE49-F238E27FC236}">
+                <a16:creationId xmlns:a16="http://schemas.microsoft.com/office/drawing/2014/main" id="{C89F4900-C9E0-428B-42D2-0030EA9D93D9}"/>
+              </a:ext>
+            </a:extLst>
+          </p:cNvPr>
+          <p:cNvSpPr txBox="1"/>
+          <p:nvPr/>
+        </p:nvSpPr>
+        <p:spPr>
+          <a:xfrm>
+            <a:off x="457200" y="1143350"/>
+            <a:ext cx="10590028" cy="4093428"/>
+          </a:xfrm>
+          <a:prstGeom prst="rect">
+            <a:avLst/>
+          </a:prstGeom>
+          <a:noFill/>
+        </p:spPr>
+        <p:txBody>
+          <a:bodyPr wrap="square" lIns="91440" tIns="45720" rIns="91440" bIns="45720" anchor="t">
+            <a:spAutoFit/>
+          </a:bodyPr>
+          <a:lstStyle/>
+          <a:p>
+            <a:pPr marL="457200" indent="-457200">
+              <a:buFont typeface="+mj-lt"/>
+              <a:buAutoNum type="arabicPeriod"/>
+            </a:pPr>
+            <a:r>
+              <a:rPr lang="en-US" sz="2000" dirty="0"/>
+              <a:t>G. Brassard and L. Salvail, ‘‘Secret-key reconciliation by public dis </a:t>
+            </a:r>
+            <a:r>
+              <a:rPr lang="en-US" sz="2000" dirty="0" err="1"/>
+              <a:t>cussion</a:t>
+            </a:r>
+            <a:r>
+              <a:rPr lang="en-US" sz="2000" dirty="0"/>
+              <a:t>,’’ in Advances in Cryptology—EUROCRYPT (Lecture Notes in Computer Science), T. </a:t>
+            </a:r>
+            <a:r>
+              <a:rPr lang="en-US" sz="2000" dirty="0" err="1"/>
+              <a:t>Helleseth</a:t>
+            </a:r>
+            <a:r>
+              <a:rPr lang="en-US" sz="2000" dirty="0"/>
+              <a:t>, Ed. vol. 765. Berlin, Germany: Springer, 1994.</a:t>
+            </a:r>
+          </a:p>
+          <a:p>
+            <a:pPr marL="457200" indent="-457200">
+              <a:buFont typeface="+mj-lt"/>
+              <a:buAutoNum type="arabicPeriod"/>
+            </a:pPr>
+            <a:r>
+              <a:rPr lang="en-US" sz="2000" dirty="0"/>
+              <a:t>C. H. Bennett, G. Brassard, and J.-M. Robert, “Privacy amplification by public discussion,” SIAM Journal on Computing, vol. 17, no. 2, pp. 210–229, 1988. [Online]. Available: https://doi.org/10.1137/0217014</a:t>
+            </a:r>
+          </a:p>
+          <a:p>
+            <a:pPr marL="457200" indent="-457200">
+              <a:buFont typeface="+mj-lt"/>
+              <a:buAutoNum type="arabicPeriod"/>
+            </a:pPr>
+            <a:r>
+              <a:rPr lang="en-US" sz="2000" dirty="0"/>
+              <a:t>P. W. Shor and J. </a:t>
+            </a:r>
+            <a:r>
+              <a:rPr lang="en-US" sz="2000" dirty="0" err="1"/>
+              <a:t>Preskill</a:t>
+            </a:r>
+            <a:r>
+              <a:rPr lang="en-US" sz="2000" dirty="0"/>
+              <a:t>, “Simple proof of security of the bb84 quantum key distribution protocol,” Physical Review Letters, vol. 85, no. 2, p. 441–444, 2000. [Online]. Available: http: //dx.doi.org/10.1103/PhysRevLett.85.441</a:t>
+            </a:r>
+          </a:p>
+          <a:p>
+            <a:pPr marL="457200" indent="-457200">
+              <a:buFont typeface="+mj-lt"/>
+              <a:buAutoNum type="arabicPeriod"/>
+            </a:pPr>
+            <a:r>
+              <a:rPr lang="en-US" sz="2000" dirty="0"/>
+              <a:t>Elkouss, David, Jesús Martínez-Mateo, and Vicente Martín. "Information Reconciliation for Quantum Key Distribution Using Low-Density Parity-Check Codes," 2009.</a:t>
+            </a:r>
+          </a:p>
+          <a:p>
+            <a:pPr marL="457200" indent="-457200">
+              <a:buFont typeface="+mj-lt"/>
+              <a:buAutoNum type="arabicPeriod"/>
+            </a:pPr>
+            <a:r>
+              <a:rPr lang="en-US" sz="2000" dirty="0"/>
+              <a:t>M. A. Nielsen and I. L. Chuang, “Quantum Computation and Quan-tum Information: 10th Anniversary Edition”. Cambridge: </a:t>
+            </a:r>
+            <a:r>
+              <a:rPr lang="en-US" sz="2000" dirty="0" err="1"/>
+              <a:t>CambridgeUniversity</a:t>
+            </a:r>
+            <a:r>
+              <a:rPr lang="en-US" sz="2000" dirty="0"/>
+              <a:t> Press, 2010.</a:t>
+            </a:r>
+          </a:p>
+        </p:txBody>
+      </p:sp>
+    </p:spTree>
+    <p:extLst>
+      <p:ext uri="{BB962C8B-B14F-4D97-AF65-F5344CB8AC3E}">
+        <p14:creationId xmlns:p14="http://schemas.microsoft.com/office/powerpoint/2010/main" val="105113814"/>
+      </p:ext>
+    </p:extLst>
+  </p:cSld>
+  <p:clrMapOvr>
+    <a:masterClrMapping/>
+  </p:clrMapOvr>
+</p:sld>
+</file>
+
+<file path=ppt/slides/slide14.xml><?xml version="1.0" encoding="utf-8"?>
+<p:sld xmlns:a="http://schemas.openxmlformats.org/drawingml/2006/main" xmlns:r="http://schemas.openxmlformats.org/officeDocument/2006/relationships" xmlns:p="http://schemas.openxmlformats.org/presentationml/2006/main">
+  <p:cSld>
+    <p:spTree>
+      <p:nvGrpSpPr>
+        <p:cNvPr id="1" name="">
+          <a:extLst>
+            <a:ext uri="{FF2B5EF4-FFF2-40B4-BE49-F238E27FC236}">
+              <a16:creationId xmlns:a16="http://schemas.microsoft.com/office/drawing/2014/main" id="{2AC4A3D5-C1C1-2131-970F-D325EBE3F643}"/>
+            </a:ext>
+          </a:extLst>
+        </p:cNvPr>
+        <p:cNvGrpSpPr/>
+        <p:nvPr/>
+      </p:nvGrpSpPr>
+      <p:grpSpPr>
+        <a:xfrm>
+          <a:off x="0" y="0"/>
+          <a:ext cx="0" cy="0"/>
+          <a:chOff x="0" y="0"/>
+          <a:chExt cx="0" cy="0"/>
+        </a:xfrm>
+      </p:grpSpPr>
+      <p:sp>
+        <p:nvSpPr>
+          <p:cNvPr id="7" name="Title 1">
+            <a:extLst>
+              <a:ext uri="{FF2B5EF4-FFF2-40B4-BE49-F238E27FC236}">
+                <a16:creationId xmlns:a16="http://schemas.microsoft.com/office/drawing/2014/main" id="{7400B334-7665-58DA-2250-9B9D61176C73}"/>
+              </a:ext>
+            </a:extLst>
+          </p:cNvPr>
+          <p:cNvSpPr txBox="1">
+            <a:spLocks/>
+          </p:cNvSpPr>
+          <p:nvPr/>
+        </p:nvSpPr>
+        <p:spPr>
+          <a:xfrm>
+            <a:off x="457200" y="419100"/>
+            <a:ext cx="11277600" cy="762000"/>
+          </a:xfrm>
+          <a:prstGeom prst="rect">
+            <a:avLst/>
+          </a:prstGeom>
+        </p:spPr>
+        <p:txBody>
+          <a:bodyPr vert="horz" lIns="0" tIns="0" rIns="0" bIns="0" rtlCol="0" anchor="t" anchorCtr="0">
+            <a:normAutofit/>
+          </a:bodyPr>
+          <a:lstStyle>
+            <a:lvl1pPr algn="l" defTabSz="914400" rtl="0" eaLnBrk="1" latinLnBrk="0" hangingPunct="1">
+              <a:lnSpc>
+                <a:spcPct val="90000"/>
+              </a:lnSpc>
+              <a:spcBef>
+                <a:spcPct val="0"/>
+              </a:spcBef>
+              <a:buNone/>
+              <a:defRPr sz="3600" b="1" kern="1200" baseline="0">
+                <a:solidFill>
+                  <a:schemeClr val="accent1"/>
+                </a:solidFill>
+                <a:latin typeface="+mj-lt"/>
+                <a:ea typeface="+mj-ea"/>
+                <a:cs typeface="+mj-cs"/>
+              </a:defRPr>
+            </a:lvl1pPr>
+          </a:lstStyle>
+          <a:p>
+            <a:pPr marL="0" marR="0" lvl="0" indent="0" algn="l" defTabSz="914400" rtl="0" eaLnBrk="1" fontAlgn="auto" latinLnBrk="0" hangingPunct="1">
+              <a:lnSpc>
+                <a:spcPct val="90000"/>
+              </a:lnSpc>
+              <a:spcBef>
+                <a:spcPct val="0"/>
+              </a:spcBef>
+              <a:spcAft>
+                <a:spcPts val="0"/>
+              </a:spcAft>
+              <a:buClrTx/>
+              <a:buSzTx/>
+              <a:buFontTx/>
+              <a:buNone/>
+              <a:tabLst/>
+              <a:defRPr/>
+            </a:pPr>
+            <a:r>
               <a:rPr kumimoji="0" lang="en-US" sz="3600" b="1" i="0" u="none" strike="noStrike" kern="1200" cap="none" spc="0" normalizeH="0" baseline="0" noProof="0">
                 <a:ln>
                   <a:noFill/>
@@ -6022,7 +6246,7 @@
               <a:buChar char="•"/>
             </a:pPr>
             <a:r>
-              <a:rPr lang="en-US" sz="2000">
+              <a:rPr lang="en-US" sz="2000" dirty="0">
                 <a:latin typeface="Calibri"/>
                 <a:ea typeface="Calibri"/>
                 <a:cs typeface="Calibri"/>
@@ -6036,7 +6260,7 @@
               <a:buChar char="o"/>
             </a:pPr>
             <a:r>
-              <a:rPr lang="en-US" sz="2000">
+              <a:rPr lang="en-US" sz="2000" dirty="0">
                 <a:latin typeface="Calibri" panose="020F0502020204030204" pitchFamily="34" charset="0"/>
                 <a:cs typeface="Calibri" panose="020F0502020204030204" pitchFamily="34" charset="0"/>
               </a:rPr>
@@ -6052,17 +6276,30 @@
               <a:buChar char="o"/>
             </a:pPr>
             <a:r>
-              <a:rPr lang="en-US" sz="2000">
+              <a:rPr lang="en-US" sz="2000" dirty="0">
                 <a:latin typeface="Calibri"/>
                 <a:ea typeface="Calibri"/>
                 <a:cs typeface="Calibri"/>
               </a:rPr>
-              <a:t>Implemented code in Qiskit</a:t>
-            </a:r>
+              <a:t>Implemented code in </a:t>
+            </a:r>
+            <a:r>
+              <a:rPr lang="en-US" sz="2000" dirty="0" err="1">
+                <a:latin typeface="Calibri"/>
+                <a:ea typeface="Calibri"/>
+                <a:cs typeface="Calibri"/>
+              </a:rPr>
+              <a:t>Qiskit</a:t>
+            </a:r>
+            <a:endParaRPr lang="en-US" sz="2000" dirty="0">
+              <a:latin typeface="Calibri"/>
+              <a:ea typeface="Calibri"/>
+              <a:cs typeface="Calibri"/>
+            </a:endParaRPr>
           </a:p>
           <a:p>
             <a:pPr lvl="1"/>
-            <a:endParaRPr lang="en-US" sz="2000">
+            <a:endParaRPr lang="en-US" sz="2000" dirty="0">
               <a:latin typeface="Calibri" panose="020F0502020204030204" pitchFamily="34" charset="0"/>
               <a:ea typeface="Calibri"/>
               <a:cs typeface="Calibri" panose="020F0502020204030204" pitchFamily="34" charset="0"/>
@@ -6572,7 +6809,7 @@
 </p:sld>
 </file>
 
-<file path=ppt/slides/slide14.xml><?xml version="1.0" encoding="utf-8"?>
+<file path=ppt/slides/slide15.xml><?xml version="1.0" encoding="utf-8"?>
 <p:sld xmlns:a="http://schemas.openxmlformats.org/drawingml/2006/main" xmlns:r="http://schemas.openxmlformats.org/officeDocument/2006/relationships" xmlns:p="http://schemas.openxmlformats.org/presentationml/2006/main">
   <p:cSld>
     <p:spTree>

--- a/615_781_Kuta_Nguyen_McLain.pptx
+++ b/615_781_Kuta_Nguyen_McLain.pptx
@@ -205,83 +205,6 @@
     </pc:docChg>
   </pc:docChgLst>
   <pc:docChgLst>
-    <pc:chgData name="Uyen P. Nguyen" userId="S::unguyen7@jh.edu::92021b55-417f-458a-90a7-cf14ced67da3" providerId="AD" clId="Web-{1C5DA43F-1144-560B-A996-9F9957834AF2}"/>
-    <pc:docChg chg="modSld">
-      <pc:chgData name="Uyen P. Nguyen" userId="S::unguyen7@jh.edu::92021b55-417f-458a-90a7-cf14ced67da3" providerId="AD" clId="Web-{1C5DA43F-1144-560B-A996-9F9957834AF2}" dt="2026-05-03T01:28:46.789" v="180" actId="20577"/>
-      <pc:docMkLst>
-        <pc:docMk/>
-      </pc:docMkLst>
-      <pc:sldChg chg="modSp">
-        <pc:chgData name="Uyen P. Nguyen" userId="S::unguyen7@jh.edu::92021b55-417f-458a-90a7-cf14ced67da3" providerId="AD" clId="Web-{1C5DA43F-1144-560B-A996-9F9957834AF2}" dt="2026-05-03T01:28:46.789" v="180" actId="20577"/>
-        <pc:sldMkLst>
-          <pc:docMk/>
-          <pc:sldMk cId="2133178391" sldId="257"/>
-        </pc:sldMkLst>
-        <pc:spChg chg="mod">
-          <ac:chgData name="Uyen P. Nguyen" userId="S::unguyen7@jh.edu::92021b55-417f-458a-90a7-cf14ced67da3" providerId="AD" clId="Web-{1C5DA43F-1144-560B-A996-9F9957834AF2}" dt="2026-05-03T00:49:04.439" v="76" actId="20577"/>
-          <ac:spMkLst>
-            <pc:docMk/>
-            <pc:sldMk cId="2133178391" sldId="257"/>
-            <ac:spMk id="7" creationId="{D159B653-A360-6E33-D2F6-A0D58B9935A5}"/>
-          </ac:spMkLst>
-        </pc:spChg>
-        <pc:spChg chg="mod">
-          <ac:chgData name="Uyen P. Nguyen" userId="S::unguyen7@jh.edu::92021b55-417f-458a-90a7-cf14ced67da3" providerId="AD" clId="Web-{1C5DA43F-1144-560B-A996-9F9957834AF2}" dt="2026-05-03T01:28:46.789" v="180" actId="20577"/>
-          <ac:spMkLst>
-            <pc:docMk/>
-            <pc:sldMk cId="2133178391" sldId="257"/>
-            <ac:spMk id="9" creationId="{EABC739E-24F8-66FD-A37D-4CF4952DF00F}"/>
-          </ac:spMkLst>
-        </pc:spChg>
-      </pc:sldChg>
-      <pc:sldChg chg="modSp">
-        <pc:chgData name="Uyen P. Nguyen" userId="S::unguyen7@jh.edu::92021b55-417f-458a-90a7-cf14ced67da3" providerId="AD" clId="Web-{1C5DA43F-1144-560B-A996-9F9957834AF2}" dt="2026-05-03T00:49:00.532" v="72" actId="20577"/>
-        <pc:sldMkLst>
-          <pc:docMk/>
-          <pc:sldMk cId="1284274485" sldId="259"/>
-        </pc:sldMkLst>
-        <pc:spChg chg="mod">
-          <ac:chgData name="Uyen P. Nguyen" userId="S::unguyen7@jh.edu::92021b55-417f-458a-90a7-cf14ced67da3" providerId="AD" clId="Web-{1C5DA43F-1144-560B-A996-9F9957834AF2}" dt="2026-05-03T00:49:00.532" v="72" actId="20577"/>
-          <ac:spMkLst>
-            <pc:docMk/>
-            <pc:sldMk cId="1284274485" sldId="259"/>
-            <ac:spMk id="7" creationId="{32741F24-76C7-9C01-1DBD-5EE3762FAACA}"/>
-          </ac:spMkLst>
-        </pc:spChg>
-      </pc:sldChg>
-      <pc:sldChg chg="modSp">
-        <pc:chgData name="Uyen P. Nguyen" userId="S::unguyen7@jh.edu::92021b55-417f-458a-90a7-cf14ced67da3" providerId="AD" clId="Web-{1C5DA43F-1144-560B-A996-9F9957834AF2}" dt="2026-05-03T00:48:55.797" v="67" actId="20577"/>
-        <pc:sldMkLst>
-          <pc:docMk/>
-          <pc:sldMk cId="1027488440" sldId="260"/>
-        </pc:sldMkLst>
-        <pc:spChg chg="mod">
-          <ac:chgData name="Uyen P. Nguyen" userId="S::unguyen7@jh.edu::92021b55-417f-458a-90a7-cf14ced67da3" providerId="AD" clId="Web-{1C5DA43F-1144-560B-A996-9F9957834AF2}" dt="2026-05-03T00:48:55.797" v="67" actId="20577"/>
-          <ac:spMkLst>
-            <pc:docMk/>
-            <pc:sldMk cId="1027488440" sldId="260"/>
-            <ac:spMk id="7" creationId="{2C42AF74-C537-A886-53B7-E8DF3240B7B7}"/>
-          </ac:spMkLst>
-        </pc:spChg>
-      </pc:sldChg>
-      <pc:sldChg chg="modSp">
-        <pc:chgData name="Uyen P. Nguyen" userId="S::unguyen7@jh.edu::92021b55-417f-458a-90a7-cf14ced67da3" providerId="AD" clId="Web-{1C5DA43F-1144-560B-A996-9F9957834AF2}" dt="2026-05-03T00:46:37.606" v="25"/>
-        <pc:sldMkLst>
-          <pc:docMk/>
-          <pc:sldMk cId="2092433718" sldId="265"/>
-        </pc:sldMkLst>
-        <pc:graphicFrameChg chg="mod modGraphic">
-          <ac:chgData name="Uyen P. Nguyen" userId="S::unguyen7@jh.edu::92021b55-417f-458a-90a7-cf14ced67da3" providerId="AD" clId="Web-{1C5DA43F-1144-560B-A996-9F9957834AF2}" dt="2026-05-03T00:46:37.606" v="25"/>
-          <ac:graphicFrameMkLst>
-            <pc:docMk/>
-            <pc:sldMk cId="2092433718" sldId="265"/>
-            <ac:graphicFrameMk id="3" creationId="{15498308-56C6-0976-7133-85BE4FA98101}"/>
-          </ac:graphicFrameMkLst>
-        </pc:graphicFrameChg>
-      </pc:sldChg>
-    </pc:docChg>
-  </pc:docChgLst>
-  <pc:docChgLst>
     <pc:chgData name="Uyen P. Nguyen" userId="S::unguyen7@jh.edu::92021b55-417f-458a-90a7-cf14ced67da3" providerId="AD" clId="Web-{C8FECEF0-CD1E-8A61-D6A9-E78BD7F5FC65}"/>
     <pc:docChg chg="addSld modSld sldOrd">
       <pc:chgData name="Uyen P. Nguyen" userId="S::unguyen7@jh.edu::92021b55-417f-458a-90a7-cf14ced67da3" providerId="AD" clId="Web-{C8FECEF0-CD1E-8A61-D6A9-E78BD7F5FC65}" dt="2026-05-03T02:56:56.270" v="1241" actId="20577"/>
@@ -465,6 +388,83 @@
             <ac:picMk id="8" creationId="{B38A110A-4554-DD53-7B39-D305EC31083C}"/>
           </ac:picMkLst>
         </pc:picChg>
+      </pc:sldChg>
+    </pc:docChg>
+  </pc:docChgLst>
+  <pc:docChgLst>
+    <pc:chgData name="Uyen P. Nguyen" userId="S::unguyen7@jh.edu::92021b55-417f-458a-90a7-cf14ced67da3" providerId="AD" clId="Web-{1C5DA43F-1144-560B-A996-9F9957834AF2}"/>
+    <pc:docChg chg="modSld">
+      <pc:chgData name="Uyen P. Nguyen" userId="S::unguyen7@jh.edu::92021b55-417f-458a-90a7-cf14ced67da3" providerId="AD" clId="Web-{1C5DA43F-1144-560B-A996-9F9957834AF2}" dt="2026-05-03T01:28:46.789" v="180" actId="20577"/>
+      <pc:docMkLst>
+        <pc:docMk/>
+      </pc:docMkLst>
+      <pc:sldChg chg="modSp">
+        <pc:chgData name="Uyen P. Nguyen" userId="S::unguyen7@jh.edu::92021b55-417f-458a-90a7-cf14ced67da3" providerId="AD" clId="Web-{1C5DA43F-1144-560B-A996-9F9957834AF2}" dt="2026-05-03T01:28:46.789" v="180" actId="20577"/>
+        <pc:sldMkLst>
+          <pc:docMk/>
+          <pc:sldMk cId="2133178391" sldId="257"/>
+        </pc:sldMkLst>
+        <pc:spChg chg="mod">
+          <ac:chgData name="Uyen P. Nguyen" userId="S::unguyen7@jh.edu::92021b55-417f-458a-90a7-cf14ced67da3" providerId="AD" clId="Web-{1C5DA43F-1144-560B-A996-9F9957834AF2}" dt="2026-05-03T00:49:04.439" v="76" actId="20577"/>
+          <ac:spMkLst>
+            <pc:docMk/>
+            <pc:sldMk cId="2133178391" sldId="257"/>
+            <ac:spMk id="7" creationId="{D159B653-A360-6E33-D2F6-A0D58B9935A5}"/>
+          </ac:spMkLst>
+        </pc:spChg>
+        <pc:spChg chg="mod">
+          <ac:chgData name="Uyen P. Nguyen" userId="S::unguyen7@jh.edu::92021b55-417f-458a-90a7-cf14ced67da3" providerId="AD" clId="Web-{1C5DA43F-1144-560B-A996-9F9957834AF2}" dt="2026-05-03T01:28:46.789" v="180" actId="20577"/>
+          <ac:spMkLst>
+            <pc:docMk/>
+            <pc:sldMk cId="2133178391" sldId="257"/>
+            <ac:spMk id="9" creationId="{EABC739E-24F8-66FD-A37D-4CF4952DF00F}"/>
+          </ac:spMkLst>
+        </pc:spChg>
+      </pc:sldChg>
+      <pc:sldChg chg="modSp">
+        <pc:chgData name="Uyen P. Nguyen" userId="S::unguyen7@jh.edu::92021b55-417f-458a-90a7-cf14ced67da3" providerId="AD" clId="Web-{1C5DA43F-1144-560B-A996-9F9957834AF2}" dt="2026-05-03T00:49:00.532" v="72" actId="20577"/>
+        <pc:sldMkLst>
+          <pc:docMk/>
+          <pc:sldMk cId="1284274485" sldId="259"/>
+        </pc:sldMkLst>
+        <pc:spChg chg="mod">
+          <ac:chgData name="Uyen P. Nguyen" userId="S::unguyen7@jh.edu::92021b55-417f-458a-90a7-cf14ced67da3" providerId="AD" clId="Web-{1C5DA43F-1144-560B-A996-9F9957834AF2}" dt="2026-05-03T00:49:00.532" v="72" actId="20577"/>
+          <ac:spMkLst>
+            <pc:docMk/>
+            <pc:sldMk cId="1284274485" sldId="259"/>
+            <ac:spMk id="7" creationId="{32741F24-76C7-9C01-1DBD-5EE3762FAACA}"/>
+          </ac:spMkLst>
+        </pc:spChg>
+      </pc:sldChg>
+      <pc:sldChg chg="modSp">
+        <pc:chgData name="Uyen P. Nguyen" userId="S::unguyen7@jh.edu::92021b55-417f-458a-90a7-cf14ced67da3" providerId="AD" clId="Web-{1C5DA43F-1144-560B-A996-9F9957834AF2}" dt="2026-05-03T00:48:55.797" v="67" actId="20577"/>
+        <pc:sldMkLst>
+          <pc:docMk/>
+          <pc:sldMk cId="1027488440" sldId="260"/>
+        </pc:sldMkLst>
+        <pc:spChg chg="mod">
+          <ac:chgData name="Uyen P. Nguyen" userId="S::unguyen7@jh.edu::92021b55-417f-458a-90a7-cf14ced67da3" providerId="AD" clId="Web-{1C5DA43F-1144-560B-A996-9F9957834AF2}" dt="2026-05-03T00:48:55.797" v="67" actId="20577"/>
+          <ac:spMkLst>
+            <pc:docMk/>
+            <pc:sldMk cId="1027488440" sldId="260"/>
+            <ac:spMk id="7" creationId="{2C42AF74-C537-A886-53B7-E8DF3240B7B7}"/>
+          </ac:spMkLst>
+        </pc:spChg>
+      </pc:sldChg>
+      <pc:sldChg chg="modSp">
+        <pc:chgData name="Uyen P. Nguyen" userId="S::unguyen7@jh.edu::92021b55-417f-458a-90a7-cf14ced67da3" providerId="AD" clId="Web-{1C5DA43F-1144-560B-A996-9F9957834AF2}" dt="2026-05-03T00:46:37.606" v="25"/>
+        <pc:sldMkLst>
+          <pc:docMk/>
+          <pc:sldMk cId="2092433718" sldId="265"/>
+        </pc:sldMkLst>
+        <pc:graphicFrameChg chg="mod modGraphic">
+          <ac:chgData name="Uyen P. Nguyen" userId="S::unguyen7@jh.edu::92021b55-417f-458a-90a7-cf14ced67da3" providerId="AD" clId="Web-{1C5DA43F-1144-560B-A996-9F9957834AF2}" dt="2026-05-03T00:46:37.606" v="25"/>
+          <ac:graphicFrameMkLst>
+            <pc:docMk/>
+            <pc:sldMk cId="2092433718" sldId="265"/>
+            <ac:graphicFrameMk id="3" creationId="{15498308-56C6-0976-7133-85BE4FA98101}"/>
+          </ac:graphicFrameMkLst>
+        </pc:graphicFrameChg>
       </pc:sldChg>
     </pc:docChg>
   </pc:docChgLst>
@@ -4477,8 +4477,8 @@
           </a:p>
         </p:txBody>
       </p:sp>
-      <mc:AlternateContent xmlns:mc="http://schemas.openxmlformats.org/markup-compatibility/2006">
-        <mc:Choice xmlns:a14="http://schemas.microsoft.com/office/drawing/2010/main" Requires="a14">
+      <mc:AlternateContent xmlns:mc="http://schemas.openxmlformats.org/markup-compatibility/2006" xmlns:a14="http://schemas.microsoft.com/office/drawing/2010/main">
+        <mc:Choice Requires="a14">
           <p:sp>
             <p:nvSpPr>
               <p:cNvPr id="9" name="TextBox 8">
@@ -4825,7 +4825,7 @@
             </p:txBody>
           </p:sp>
         </mc:Choice>
-        <mc:Fallback>
+        <mc:Fallback xmlns="">
           <p:sp>
             <p:nvSpPr>
               <p:cNvPr id="9" name="TextBox 8">
@@ -4990,8 +4990,8 @@
           </a:p>
         </p:txBody>
       </p:sp>
-      <mc:AlternateContent xmlns:mc="http://schemas.openxmlformats.org/markup-compatibility/2006">
-        <mc:Choice xmlns:a14="http://schemas.microsoft.com/office/drawing/2010/main" Requires="a14">
+      <mc:AlternateContent xmlns:mc="http://schemas.openxmlformats.org/markup-compatibility/2006" xmlns:a14="http://schemas.microsoft.com/office/drawing/2010/main">
+        <mc:Choice Requires="a14">
           <p:sp>
             <p:nvSpPr>
               <p:cNvPr id="9" name="TextBox 8">
@@ -5401,7 +5401,7 @@
             </p:txBody>
           </p:sp>
         </mc:Choice>
-        <mc:Fallback>
+        <mc:Fallback xmlns="">
           <p:sp>
             <p:nvSpPr>
               <p:cNvPr id="9" name="TextBox 8">
@@ -5566,8 +5566,8 @@
           </a:p>
         </p:txBody>
       </p:sp>
-      <mc:AlternateContent xmlns:mc="http://schemas.openxmlformats.org/markup-compatibility/2006">
-        <mc:Choice xmlns:a14="http://schemas.microsoft.com/office/drawing/2010/main" Requires="a14">
+      <mc:AlternateContent xmlns:mc="http://schemas.openxmlformats.org/markup-compatibility/2006" xmlns:a14="http://schemas.microsoft.com/office/drawing/2010/main">
+        <mc:Choice Requires="a14">
           <p:sp>
             <p:nvSpPr>
               <p:cNvPr id="9" name="TextBox 8">
@@ -5803,7 +5803,7 @@
             </p:txBody>
           </p:sp>
         </mc:Choice>
-        <mc:Fallback>
+        <mc:Fallback xmlns="">
           <p:sp>
             <p:nvSpPr>
               <p:cNvPr id="9" name="TextBox 8">
@@ -5963,7 +5963,33 @@
                 <a:ea typeface="+mj-ea"/>
                 <a:cs typeface="+mj-cs"/>
               </a:rPr>
-              <a:t>Referenes</a:t>
+              <a:t>Referen</a:t>
+            </a:r>
+            <a:r>
+              <a:rPr lang="en-US">
+                <a:solidFill>
+                  <a:srgbClr val="002C73"/>
+                </a:solidFill>
+                <a:latin typeface="Arial" panose="020B0604020202020204"/>
+              </a:rPr>
+              <a:t>c</a:t>
+            </a:r>
+            <a:r>
+              <a:rPr kumimoji="0" lang="en-US" sz="3600" b="1" i="0" u="none" strike="noStrike" kern="1200" cap="none" spc="0" normalizeH="0" baseline="0" noProof="0">
+                <a:ln>
+                  <a:noFill/>
+                </a:ln>
+                <a:solidFill>
+                  <a:srgbClr val="002C73"/>
+                </a:solidFill>
+                <a:effectLst/>
+                <a:uLnTx/>
+                <a:uFillTx/>
+                <a:latin typeface="Arial" panose="020B0604020202020204"/>
+                <a:ea typeface="+mj-ea"/>
+                <a:cs typeface="+mj-cs"/>
+              </a:rPr>
+              <a:t>es</a:t>
             </a:r>
             <a:endParaRPr kumimoji="0" lang="en-US" sz="3600" b="1" i="0" u="none" strike="noStrike" kern="1200" cap="none" spc="0" normalizeH="0" baseline="0" noProof="0" dirty="0">
               <a:ln>

--- a/615_781_Kuta_Nguyen_McLain.pptx
+++ b/615_781_Kuta_Nguyen_McLain.pptx
@@ -14,10 +14,10 @@
     <p:sldId id="261" r:id="rId8"/>
     <p:sldId id="269" r:id="rId9"/>
     <p:sldId id="270" r:id="rId10"/>
-    <p:sldId id="262" r:id="rId11"/>
+    <p:sldId id="272" r:id="rId11"/>
     <p:sldId id="263" r:id="rId12"/>
     <p:sldId id="264" r:id="rId13"/>
-    <p:sldId id="272" r:id="rId14"/>
+    <p:sldId id="273" r:id="rId14"/>
     <p:sldId id="265" r:id="rId15"/>
     <p:sldId id="266" r:id="rId16"/>
   </p:sldIdLst>
@@ -118,11 +118,6 @@
       </a:defRPr>
     </a:lvl9pPr>
   </p:defaultTextStyle>
-  <p:extLst>
-    <p:ext uri="{EFAFB233-063F-42B5-8137-9DF3F51BA10A}">
-      <p15:sldGuideLst xmlns:p15="http://schemas.microsoft.com/office/powerpoint/2012/main"/>
-    </p:ext>
-  </p:extLst>
 </p:presentation>
 </file>
 
@@ -130,16 +125,435 @@
 <p1510:revInfo xmlns:a="http://schemas.openxmlformats.org/drawingml/2006/main" xmlns:r="http://schemas.openxmlformats.org/officeDocument/2006/relationships" xmlns:p1510="http://schemas.microsoft.com/office/powerpoint/2015/10/main">
   <p1510:revLst>
     <p1510:client id="{1C5DA43F-1144-560B-A996-9F9957834AF2}" v="315" dt="2026-05-03T01:30:45.062"/>
+    <p1510:client id="{1DF5E942-3C2B-2D8D-1909-51A3ACEF6D6C}" v="1878" dt="2026-05-03T13:46:09.294"/>
     <p1510:client id="{28CD629A-B9DB-A9CF-B99B-10A7A00C23E7}" v="256" dt="2026-05-02T18:18:27.084"/>
     <p1510:client id="{82DD5B66-D6D0-4284-8F09-97618DA8F3FA}" v="20" dt="2026-05-02T04:50:48.110"/>
     <p1510:client id="{B1BC418C-BAB6-675B-4F89-BC1A6E61C09C}" v="3824" dt="2026-05-03T03:11:41.358"/>
-    <p1510:client id="{C8FECEF0-CD1E-8A61-D6A9-E78BD7F5FC65}" v="2340" dt="2026-05-03T02:56:57.567"/>
+    <p1510:client id="{C8FECEF0-CD1E-8A61-D6A9-E78BD7F5FC65}" v="2618" dt="2026-05-03T18:17:18.540"/>
+    <p1510:client id="{DC34001B-F5F7-B5C9-777E-0A9D433890D2}" v="7" dt="2026-05-03T19:56:38.024"/>
+    <p1510:client id="{E84C4308-77C0-F4DE-1A91-B76D5F18DE1F}" v="3426" dt="2026-05-03T16:17:40.522"/>
   </p1510:revLst>
 </p1510:revInfo>
 </file>
 
 <file path=ppt/changesInfos/changesInfo1.xml><?xml version="1.0" encoding="utf-8"?>
 <pc:chgInfo xmlns:a="http://schemas.openxmlformats.org/drawingml/2006/main" xmlns:r="http://schemas.openxmlformats.org/officeDocument/2006/relationships" xmlns:ac="http://schemas.microsoft.com/office/drawing/2013/main/command" xmlns:pc="http://schemas.microsoft.com/office/powerpoint/2013/main/command">
+  <pc:docChgLst>
+    <pc:chgData name="Uyen P. Nguyen" userId="S::unguyen7@jh.edu::92021b55-417f-458a-90a7-cf14ced67da3" providerId="AD" clId="Web-{E84C4308-77C0-F4DE-1A91-B76D5F18DE1F}"/>
+    <pc:docChg chg="modSld">
+      <pc:chgData name="Uyen P. Nguyen" userId="S::unguyen7@jh.edu::92021b55-417f-458a-90a7-cf14ced67da3" providerId="AD" clId="Web-{E84C4308-77C0-F4DE-1A91-B76D5F18DE1F}" dt="2026-05-03T16:17:39.756" v="1859" actId="20577"/>
+      <pc:docMkLst>
+        <pc:docMk/>
+      </pc:docMkLst>
+      <pc:sldChg chg="modSp">
+        <pc:chgData name="Uyen P. Nguyen" userId="S::unguyen7@jh.edu::92021b55-417f-458a-90a7-cf14ced67da3" providerId="AD" clId="Web-{E84C4308-77C0-F4DE-1A91-B76D5F18DE1F}" dt="2026-05-03T14:40:15.162" v="1074" actId="20577"/>
+        <pc:sldMkLst>
+          <pc:docMk/>
+          <pc:sldMk cId="4131611360" sldId="256"/>
+        </pc:sldMkLst>
+        <pc:spChg chg="mod">
+          <ac:chgData name="Uyen P. Nguyen" userId="S::unguyen7@jh.edu::92021b55-417f-458a-90a7-cf14ced67da3" providerId="AD" clId="Web-{E84C4308-77C0-F4DE-1A91-B76D5F18DE1F}" dt="2026-05-03T14:40:15.162" v="1074" actId="20577"/>
+          <ac:spMkLst>
+            <pc:docMk/>
+            <pc:sldMk cId="4131611360" sldId="256"/>
+            <ac:spMk id="8" creationId="{B0ADC276-8C44-979E-44AE-06EDF5CFA260}"/>
+          </ac:spMkLst>
+        </pc:spChg>
+      </pc:sldChg>
+      <pc:sldChg chg="modSp">
+        <pc:chgData name="Uyen P. Nguyen" userId="S::unguyen7@jh.edu::92021b55-417f-458a-90a7-cf14ced67da3" providerId="AD" clId="Web-{E84C4308-77C0-F4DE-1A91-B76D5F18DE1F}" dt="2026-05-03T16:01:49.048" v="1668" actId="1076"/>
+        <pc:sldMkLst>
+          <pc:docMk/>
+          <pc:sldMk cId="2133178391" sldId="257"/>
+        </pc:sldMkLst>
+        <pc:spChg chg="mod">
+          <ac:chgData name="Uyen P. Nguyen" userId="S::unguyen7@jh.edu::92021b55-417f-458a-90a7-cf14ced67da3" providerId="AD" clId="Web-{E84C4308-77C0-F4DE-1A91-B76D5F18DE1F}" dt="2026-05-03T14:25:46.869" v="993" actId="20577"/>
+          <ac:spMkLst>
+            <pc:docMk/>
+            <pc:sldMk cId="2133178391" sldId="257"/>
+            <ac:spMk id="7" creationId="{D159B653-A360-6E33-D2F6-A0D58B9935A5}"/>
+          </ac:spMkLst>
+        </pc:spChg>
+        <pc:spChg chg="mod">
+          <ac:chgData name="Uyen P. Nguyen" userId="S::unguyen7@jh.edu::92021b55-417f-458a-90a7-cf14ced67da3" providerId="AD" clId="Web-{E84C4308-77C0-F4DE-1A91-B76D5F18DE1F}" dt="2026-05-03T16:00:35.185" v="1665" actId="20577"/>
+          <ac:spMkLst>
+            <pc:docMk/>
+            <pc:sldMk cId="2133178391" sldId="257"/>
+            <ac:spMk id="9" creationId="{EABC739E-24F8-66FD-A37D-4CF4952DF00F}"/>
+          </ac:spMkLst>
+        </pc:spChg>
+        <pc:spChg chg="mod">
+          <ac:chgData name="Uyen P. Nguyen" userId="S::unguyen7@jh.edu::92021b55-417f-458a-90a7-cf14ced67da3" providerId="AD" clId="Web-{E84C4308-77C0-F4DE-1A91-B76D5F18DE1F}" dt="2026-05-03T16:01:42.719" v="1667" actId="1076"/>
+          <ac:spMkLst>
+            <pc:docMk/>
+            <pc:sldMk cId="2133178391" sldId="257"/>
+            <ac:spMk id="13" creationId="{D2ACF8E7-10AB-DA1C-BA6F-A274DD497892}"/>
+          </ac:spMkLst>
+        </pc:spChg>
+        <pc:spChg chg="mod">
+          <ac:chgData name="Uyen P. Nguyen" userId="S::unguyen7@jh.edu::92021b55-417f-458a-90a7-cf14ced67da3" providerId="AD" clId="Web-{E84C4308-77C0-F4DE-1A91-B76D5F18DE1F}" dt="2026-05-03T16:01:49.048" v="1668" actId="1076"/>
+          <ac:spMkLst>
+            <pc:docMk/>
+            <pc:sldMk cId="2133178391" sldId="257"/>
+            <ac:spMk id="14" creationId="{4F966584-5456-179C-4BCE-EE0C1F576C15}"/>
+          </ac:spMkLst>
+        </pc:spChg>
+      </pc:sldChg>
+      <pc:sldChg chg="addSp delSp modSp">
+        <pc:chgData name="Uyen P. Nguyen" userId="S::unguyen7@jh.edu::92021b55-417f-458a-90a7-cf14ced67da3" providerId="AD" clId="Web-{E84C4308-77C0-F4DE-1A91-B76D5F18DE1F}" dt="2026-05-03T16:05:49.665" v="1694" actId="1076"/>
+        <pc:sldMkLst>
+          <pc:docMk/>
+          <pc:sldMk cId="1284274485" sldId="259"/>
+        </pc:sldMkLst>
+        <pc:spChg chg="mod">
+          <ac:chgData name="Uyen P. Nguyen" userId="S::unguyen7@jh.edu::92021b55-417f-458a-90a7-cf14ced67da3" providerId="AD" clId="Web-{E84C4308-77C0-F4DE-1A91-B76D5F18DE1F}" dt="2026-05-03T15:58:27.523" v="1595" actId="1076"/>
+          <ac:spMkLst>
+            <pc:docMk/>
+            <pc:sldMk cId="1284274485" sldId="259"/>
+            <ac:spMk id="4" creationId="{BF8CA26C-9A84-E19D-C8E6-3A2E93AB0C45}"/>
+          </ac:spMkLst>
+        </pc:spChg>
+        <pc:spChg chg="mod">
+          <ac:chgData name="Uyen P. Nguyen" userId="S::unguyen7@jh.edu::92021b55-417f-458a-90a7-cf14ced67da3" providerId="AD" clId="Web-{E84C4308-77C0-F4DE-1A91-B76D5F18DE1F}" dt="2026-05-03T16:05:21.821" v="1691" actId="20577"/>
+          <ac:spMkLst>
+            <pc:docMk/>
+            <pc:sldMk cId="1284274485" sldId="259"/>
+            <ac:spMk id="9" creationId="{8DEAAD5C-2D15-E82B-FA78-5A05362D915A}"/>
+          </ac:spMkLst>
+        </pc:spChg>
+        <pc:spChg chg="add mod">
+          <ac:chgData name="Uyen P. Nguyen" userId="S::unguyen7@jh.edu::92021b55-417f-458a-90a7-cf14ced67da3" providerId="AD" clId="Web-{E84C4308-77C0-F4DE-1A91-B76D5F18DE1F}" dt="2026-05-03T14:11:54.582" v="577" actId="1076"/>
+          <ac:spMkLst>
+            <pc:docMk/>
+            <pc:sldMk cId="1284274485" sldId="259"/>
+            <ac:spMk id="13" creationId="{28E78F0F-7DCC-7FC0-9EA6-640C34960432}"/>
+          </ac:spMkLst>
+        </pc:spChg>
+        <pc:grpChg chg="add mod">
+          <ac:chgData name="Uyen P. Nguyen" userId="S::unguyen7@jh.edu::92021b55-417f-458a-90a7-cf14ced67da3" providerId="AD" clId="Web-{E84C4308-77C0-F4DE-1A91-B76D5F18DE1F}" dt="2026-05-03T16:05:49.665" v="1694" actId="1076"/>
+          <ac:grpSpMkLst>
+            <pc:docMk/>
+            <pc:sldMk cId="1284274485" sldId="259"/>
+            <ac:grpSpMk id="2" creationId="{E5871074-6492-CAEF-817F-7F41A3225F1D}"/>
+          </ac:grpSpMkLst>
+        </pc:grpChg>
+        <pc:grpChg chg="add mod">
+          <ac:chgData name="Uyen P. Nguyen" userId="S::unguyen7@jh.edu::92021b55-417f-458a-90a7-cf14ced67da3" providerId="AD" clId="Web-{E84C4308-77C0-F4DE-1A91-B76D5F18DE1F}" dt="2026-05-03T16:05:38.587" v="1692" actId="1076"/>
+          <ac:grpSpMkLst>
+            <pc:docMk/>
+            <pc:sldMk cId="1284274485" sldId="259"/>
+            <ac:grpSpMk id="14" creationId="{110E308D-3E05-2827-E307-2AC4363544D6}"/>
+          </ac:grpSpMkLst>
+        </pc:grpChg>
+        <pc:picChg chg="mod">
+          <ac:chgData name="Uyen P. Nguyen" userId="S::unguyen7@jh.edu::92021b55-417f-458a-90a7-cf14ced67da3" providerId="AD" clId="Web-{E84C4308-77C0-F4DE-1A91-B76D5F18DE1F}" dt="2026-05-03T16:05:43.353" v="1693" actId="1076"/>
+          <ac:picMkLst>
+            <pc:docMk/>
+            <pc:sldMk cId="1284274485" sldId="259"/>
+            <ac:picMk id="3" creationId="{AC31E98A-22CB-73CD-105C-A566161329C6}"/>
+          </ac:picMkLst>
+        </pc:picChg>
+        <pc:picChg chg="add mod">
+          <ac:chgData name="Uyen P. Nguyen" userId="S::unguyen7@jh.edu::92021b55-417f-458a-90a7-cf14ced67da3" providerId="AD" clId="Web-{E84C4308-77C0-F4DE-1A91-B76D5F18DE1F}" dt="2026-05-03T14:09:05.439" v="547" actId="1076"/>
+          <ac:picMkLst>
+            <pc:docMk/>
+            <pc:sldMk cId="1284274485" sldId="259"/>
+            <ac:picMk id="5" creationId="{D58125D5-5A34-DD66-DA57-82952284B985}"/>
+          </ac:picMkLst>
+        </pc:picChg>
+        <pc:picChg chg="add del mod">
+          <ac:chgData name="Uyen P. Nguyen" userId="S::unguyen7@jh.edu::92021b55-417f-458a-90a7-cf14ced67da3" providerId="AD" clId="Web-{E84C4308-77C0-F4DE-1A91-B76D5F18DE1F}" dt="2026-05-03T14:10:08.596" v="562"/>
+          <ac:picMkLst>
+            <pc:docMk/>
+            <pc:sldMk cId="1284274485" sldId="259"/>
+            <ac:picMk id="6" creationId="{8241D970-B60C-439E-737E-06EBFC18E80F}"/>
+          </ac:picMkLst>
+        </pc:picChg>
+        <pc:picChg chg="add del mod">
+          <ac:chgData name="Uyen P. Nguyen" userId="S::unguyen7@jh.edu::92021b55-417f-458a-90a7-cf14ced67da3" providerId="AD" clId="Web-{E84C4308-77C0-F4DE-1A91-B76D5F18DE1F}" dt="2026-05-03T14:10:22.643" v="564"/>
+          <ac:picMkLst>
+            <pc:docMk/>
+            <pc:sldMk cId="1284274485" sldId="259"/>
+            <ac:picMk id="8" creationId="{D322E25B-EECA-06D3-0689-3A5B186561AB}"/>
+          </ac:picMkLst>
+        </pc:picChg>
+        <pc:picChg chg="add del mod">
+          <ac:chgData name="Uyen P. Nguyen" userId="S::unguyen7@jh.edu::92021b55-417f-458a-90a7-cf14ced67da3" providerId="AD" clId="Web-{E84C4308-77C0-F4DE-1A91-B76D5F18DE1F}" dt="2026-05-03T14:10:39.769" v="566"/>
+          <ac:picMkLst>
+            <pc:docMk/>
+            <pc:sldMk cId="1284274485" sldId="259"/>
+            <ac:picMk id="10" creationId="{19AC54CE-969E-0A0B-0F82-EAB35197C6BA}"/>
+          </ac:picMkLst>
+        </pc:picChg>
+        <pc:picChg chg="add del mod">
+          <ac:chgData name="Uyen P. Nguyen" userId="S::unguyen7@jh.edu::92021b55-417f-458a-90a7-cf14ced67da3" providerId="AD" clId="Web-{E84C4308-77C0-F4DE-1A91-B76D5F18DE1F}" dt="2026-05-03T14:11:24.066" v="573"/>
+          <ac:picMkLst>
+            <pc:docMk/>
+            <pc:sldMk cId="1284274485" sldId="259"/>
+            <ac:picMk id="11" creationId="{A4DD8562-F3DD-7B40-DC03-AC9ACFA48032}"/>
+          </ac:picMkLst>
+        </pc:picChg>
+      </pc:sldChg>
+      <pc:sldChg chg="addSp delSp modSp">
+        <pc:chgData name="Uyen P. Nguyen" userId="S::unguyen7@jh.edu::92021b55-417f-458a-90a7-cf14ced67da3" providerId="AD" clId="Web-{E84C4308-77C0-F4DE-1A91-B76D5F18DE1F}" dt="2026-05-03T16:17:39.756" v="1859" actId="20577"/>
+        <pc:sldMkLst>
+          <pc:docMk/>
+          <pc:sldMk cId="1027488440" sldId="260"/>
+        </pc:sldMkLst>
+        <pc:spChg chg="del">
+          <ac:chgData name="Uyen P. Nguyen" userId="S::unguyen7@jh.edu::92021b55-417f-458a-90a7-cf14ced67da3" providerId="AD" clId="Web-{E84C4308-77C0-F4DE-1A91-B76D5F18DE1F}" dt="2026-05-03T14:31:17.912" v="1052"/>
+          <ac:spMkLst>
+            <pc:docMk/>
+            <pc:sldMk cId="1027488440" sldId="260"/>
+            <ac:spMk id="3" creationId="{1B2681E1-C30A-4694-4E82-C776EAF05DC0}"/>
+          </ac:spMkLst>
+        </pc:spChg>
+        <pc:spChg chg="mod">
+          <ac:chgData name="Uyen P. Nguyen" userId="S::unguyen7@jh.edu::92021b55-417f-458a-90a7-cf14ced67da3" providerId="AD" clId="Web-{E84C4308-77C0-F4DE-1A91-B76D5F18DE1F}" dt="2026-05-03T14:47:28.727" v="1226" actId="20577"/>
+          <ac:spMkLst>
+            <pc:docMk/>
+            <pc:sldMk cId="1027488440" sldId="260"/>
+            <ac:spMk id="7" creationId="{2C42AF74-C537-A886-53B7-E8DF3240B7B7}"/>
+          </ac:spMkLst>
+        </pc:spChg>
+        <pc:spChg chg="mod">
+          <ac:chgData name="Uyen P. Nguyen" userId="S::unguyen7@jh.edu::92021b55-417f-458a-90a7-cf14ced67da3" providerId="AD" clId="Web-{E84C4308-77C0-F4DE-1A91-B76D5F18DE1F}" dt="2026-05-03T16:17:09.833" v="1852" actId="20577"/>
+          <ac:spMkLst>
+            <pc:docMk/>
+            <pc:sldMk cId="1027488440" sldId="260"/>
+            <ac:spMk id="9" creationId="{3635BDD3-4D84-2737-85CD-6BC4B8FF6EBF}"/>
+          </ac:spMkLst>
+        </pc:spChg>
+        <pc:spChg chg="add del mod">
+          <ac:chgData name="Uyen P. Nguyen" userId="S::unguyen7@jh.edu::92021b55-417f-458a-90a7-cf14ced67da3" providerId="AD" clId="Web-{E84C4308-77C0-F4DE-1A91-B76D5F18DE1F}" dt="2026-05-03T16:09:14.654" v="1700"/>
+          <ac:spMkLst>
+            <pc:docMk/>
+            <pc:sldMk cId="1027488440" sldId="260"/>
+            <ac:spMk id="14" creationId="{5DB13BAE-D26F-3C7B-4CD1-4558CC7FF277}"/>
+          </ac:spMkLst>
+        </pc:spChg>
+        <pc:spChg chg="add mod">
+          <ac:chgData name="Uyen P. Nguyen" userId="S::unguyen7@jh.edu::92021b55-417f-458a-90a7-cf14ced67da3" providerId="AD" clId="Web-{E84C4308-77C0-F4DE-1A91-B76D5F18DE1F}" dt="2026-05-03T16:17:20.990" v="1855" actId="20577"/>
+          <ac:spMkLst>
+            <pc:docMk/>
+            <pc:sldMk cId="1027488440" sldId="260"/>
+            <ac:spMk id="15" creationId="{0FF16120-2605-4757-A434-039FC19F3048}"/>
+          </ac:spMkLst>
+        </pc:spChg>
+        <pc:spChg chg="add mod">
+          <ac:chgData name="Uyen P. Nguyen" userId="S::unguyen7@jh.edu::92021b55-417f-458a-90a7-cf14ced67da3" providerId="AD" clId="Web-{E84C4308-77C0-F4DE-1A91-B76D5F18DE1F}" dt="2026-05-03T16:17:39.756" v="1859" actId="20577"/>
+          <ac:spMkLst>
+            <pc:docMk/>
+            <pc:sldMk cId="1027488440" sldId="260"/>
+            <ac:spMk id="16" creationId="{25AE3242-A225-289A-D522-0F12CAE1AE6A}"/>
+          </ac:spMkLst>
+        </pc:spChg>
+        <pc:grpChg chg="add del">
+          <ac:chgData name="Uyen P. Nguyen" userId="S::unguyen7@jh.edu::92021b55-417f-458a-90a7-cf14ced67da3" providerId="AD" clId="Web-{E84C4308-77C0-F4DE-1A91-B76D5F18DE1F}" dt="2026-05-03T14:52:15.979" v="1265"/>
+          <ac:grpSpMkLst>
+            <pc:docMk/>
+            <pc:sldMk cId="1027488440" sldId="260"/>
+            <ac:grpSpMk id="8" creationId="{2C8E933C-1DFE-76C8-26A8-979B9817B517}"/>
+          </ac:grpSpMkLst>
+        </pc:grpChg>
+        <pc:grpChg chg="add mod">
+          <ac:chgData name="Uyen P. Nguyen" userId="S::unguyen7@jh.edu::92021b55-417f-458a-90a7-cf14ced67da3" providerId="AD" clId="Web-{E84C4308-77C0-F4DE-1A91-B76D5F18DE1F}" dt="2026-05-03T14:57:22.021" v="1280" actId="1076"/>
+          <ac:grpSpMkLst>
+            <pc:docMk/>
+            <pc:sldMk cId="1027488440" sldId="260"/>
+            <ac:grpSpMk id="13" creationId="{7BB4382A-4745-A1A8-9F39-D7A86DDA7055}"/>
+          </ac:grpSpMkLst>
+        </pc:grpChg>
+        <pc:picChg chg="del">
+          <ac:chgData name="Uyen P. Nguyen" userId="S::unguyen7@jh.edu::92021b55-417f-458a-90a7-cf14ced67da3" providerId="AD" clId="Web-{E84C4308-77C0-F4DE-1A91-B76D5F18DE1F}" dt="2026-05-03T14:44:27.120" v="1149"/>
+          <ac:picMkLst>
+            <pc:docMk/>
+            <pc:sldMk cId="1027488440" sldId="260"/>
+            <ac:picMk id="2" creationId="{276BC741-5F16-9902-C12D-2B45AF52D43E}"/>
+          </ac:picMkLst>
+        </pc:picChg>
+      </pc:sldChg>
+      <pc:sldChg chg="addSp delSp modSp">
+        <pc:chgData name="Uyen P. Nguyen" userId="S::unguyen7@jh.edu::92021b55-417f-458a-90a7-cf14ced67da3" providerId="AD" clId="Web-{E84C4308-77C0-F4DE-1A91-B76D5F18DE1F}" dt="2026-05-03T14:52:50.324" v="1272" actId="20577"/>
+        <pc:sldMkLst>
+          <pc:docMk/>
+          <pc:sldMk cId="1012508739" sldId="261"/>
+        </pc:sldMkLst>
+        <pc:spChg chg="mod">
+          <ac:chgData name="Uyen P. Nguyen" userId="S::unguyen7@jh.edu::92021b55-417f-458a-90a7-cf14ced67da3" providerId="AD" clId="Web-{E84C4308-77C0-F4DE-1A91-B76D5F18DE1F}" dt="2026-05-03T14:49:15.064" v="1257" actId="20577"/>
+          <ac:spMkLst>
+            <pc:docMk/>
+            <pc:sldMk cId="1012508739" sldId="261"/>
+            <ac:spMk id="7" creationId="{B5A9ED97-5617-AC34-6228-0B0DB0944E58}"/>
+          </ac:spMkLst>
+        </pc:spChg>
+        <pc:spChg chg="mod">
+          <ac:chgData name="Uyen P. Nguyen" userId="S::unguyen7@jh.edu::92021b55-417f-458a-90a7-cf14ced67da3" providerId="AD" clId="Web-{E84C4308-77C0-F4DE-1A91-B76D5F18DE1F}" dt="2026-05-03T14:52:50.324" v="1272" actId="20577"/>
+          <ac:spMkLst>
+            <pc:docMk/>
+            <pc:sldMk cId="1012508739" sldId="261"/>
+            <ac:spMk id="9" creationId="{82DEF5E0-71FC-25BF-8225-2CF699BAE283}"/>
+          </ac:spMkLst>
+        </pc:spChg>
+        <pc:grpChg chg="add del mod">
+          <ac:chgData name="Uyen P. Nguyen" userId="S::unguyen7@jh.edu::92021b55-417f-458a-90a7-cf14ced67da3" providerId="AD" clId="Web-{E84C4308-77C0-F4DE-1A91-B76D5F18DE1F}" dt="2026-05-03T14:50:31.302" v="1262"/>
+          <ac:grpSpMkLst>
+            <pc:docMk/>
+            <pc:sldMk cId="1012508739" sldId="261"/>
+            <ac:grpSpMk id="6" creationId="{F4A9FA3D-0F57-56D1-2536-4282AD2D0870}"/>
+          </ac:grpSpMkLst>
+        </pc:grpChg>
+        <pc:grpChg chg="add mod">
+          <ac:chgData name="Uyen P. Nguyen" userId="S::unguyen7@jh.edu::92021b55-417f-458a-90a7-cf14ced67da3" providerId="AD" clId="Web-{E84C4308-77C0-F4DE-1A91-B76D5F18DE1F}" dt="2026-05-03T14:52:26.354" v="1268" actId="1076"/>
+          <ac:grpSpMkLst>
+            <pc:docMk/>
+            <pc:sldMk cId="1012508739" sldId="261"/>
+            <ac:grpSpMk id="12" creationId="{06E8952E-9FAB-6109-AF73-DD85F54196E4}"/>
+          </ac:grpSpMkLst>
+        </pc:grpChg>
+        <pc:picChg chg="add del">
+          <ac:chgData name="Uyen P. Nguyen" userId="S::unguyen7@jh.edu::92021b55-417f-458a-90a7-cf14ced67da3" providerId="AD" clId="Web-{E84C4308-77C0-F4DE-1A91-B76D5F18DE1F}" dt="2026-05-03T14:52:20.823" v="1266"/>
+          <ac:picMkLst>
+            <pc:docMk/>
+            <pc:sldMk cId="1012508739" sldId="261"/>
+            <ac:picMk id="3" creationId="{C4B46866-D574-0180-207E-15A941723AAF}"/>
+          </ac:picMkLst>
+        </pc:picChg>
+      </pc:sldChg>
+      <pc:sldChg chg="modSp">
+        <pc:chgData name="Uyen P. Nguyen" userId="S::unguyen7@jh.edu::92021b55-417f-458a-90a7-cf14ced67da3" providerId="AD" clId="Web-{E84C4308-77C0-F4DE-1A91-B76D5F18DE1F}" dt="2026-05-03T14:25:17.446" v="982" actId="20577"/>
+        <pc:sldMkLst>
+          <pc:docMk/>
+          <pc:sldMk cId="1503209594" sldId="262"/>
+        </pc:sldMkLst>
+        <pc:spChg chg="mod">
+          <ac:chgData name="Uyen P. Nguyen" userId="S::unguyen7@jh.edu::92021b55-417f-458a-90a7-cf14ced67da3" providerId="AD" clId="Web-{E84C4308-77C0-F4DE-1A91-B76D5F18DE1F}" dt="2026-05-03T14:25:17.446" v="982" actId="20577"/>
+          <ac:spMkLst>
+            <pc:docMk/>
+            <pc:sldMk cId="1503209594" sldId="262"/>
+            <ac:spMk id="9" creationId="{B508FDDF-3951-0564-B047-DD35ABA722F0}"/>
+          </ac:spMkLst>
+        </pc:spChg>
+      </pc:sldChg>
+      <pc:sldChg chg="modSp">
+        <pc:chgData name="Uyen P. Nguyen" userId="S::unguyen7@jh.edu::92021b55-417f-458a-90a7-cf14ced67da3" providerId="AD" clId="Web-{E84C4308-77C0-F4DE-1A91-B76D5F18DE1F}" dt="2026-05-03T15:15:20.062" v="1414" actId="20577"/>
+        <pc:sldMkLst>
+          <pc:docMk/>
+          <pc:sldMk cId="3518611568" sldId="268"/>
+        </pc:sldMkLst>
+        <pc:spChg chg="mod">
+          <ac:chgData name="Uyen P. Nguyen" userId="S::unguyen7@jh.edu::92021b55-417f-458a-90a7-cf14ced67da3" providerId="AD" clId="Web-{E84C4308-77C0-F4DE-1A91-B76D5F18DE1F}" dt="2026-05-03T14:47:23.430" v="1215" actId="20577"/>
+          <ac:spMkLst>
+            <pc:docMk/>
+            <pc:sldMk cId="3518611568" sldId="268"/>
+            <ac:spMk id="7" creationId="{E4E18DA6-D2B6-C95C-2B21-106CCD3998D5}"/>
+          </ac:spMkLst>
+        </pc:spChg>
+        <pc:spChg chg="mod">
+          <ac:chgData name="Uyen P. Nguyen" userId="S::unguyen7@jh.edu::92021b55-417f-458a-90a7-cf14ced67da3" providerId="AD" clId="Web-{E84C4308-77C0-F4DE-1A91-B76D5F18DE1F}" dt="2026-05-03T15:15:20.062" v="1414" actId="20577"/>
+          <ac:spMkLst>
+            <pc:docMk/>
+            <pc:sldMk cId="3518611568" sldId="268"/>
+            <ac:spMk id="12" creationId="{C9835228-B49B-1902-18C5-E49186D55E26}"/>
+          </ac:spMkLst>
+        </pc:spChg>
+      </pc:sldChg>
+      <pc:sldChg chg="modSp">
+        <pc:chgData name="Uyen P. Nguyen" userId="S::unguyen7@jh.edu::92021b55-417f-458a-90a7-cf14ced67da3" providerId="AD" clId="Web-{E84C4308-77C0-F4DE-1A91-B76D5F18DE1F}" dt="2026-05-03T15:15:30.656" v="1426" actId="20577"/>
+        <pc:sldMkLst>
+          <pc:docMk/>
+          <pc:sldMk cId="3184180411" sldId="269"/>
+        </pc:sldMkLst>
+        <pc:spChg chg="mod">
+          <ac:chgData name="Uyen P. Nguyen" userId="S::unguyen7@jh.edu::92021b55-417f-458a-90a7-cf14ced67da3" providerId="AD" clId="Web-{E84C4308-77C0-F4DE-1A91-B76D5F18DE1F}" dt="2026-05-03T14:47:52.354" v="1238" actId="20577"/>
+          <ac:spMkLst>
+            <pc:docMk/>
+            <pc:sldMk cId="3184180411" sldId="269"/>
+            <ac:spMk id="7" creationId="{3CDEBB5F-84A9-8F5A-2813-A797EF6A3B76}"/>
+          </ac:spMkLst>
+        </pc:spChg>
+        <pc:spChg chg="mod">
+          <ac:chgData name="Uyen P. Nguyen" userId="S::unguyen7@jh.edu::92021b55-417f-458a-90a7-cf14ced67da3" providerId="AD" clId="Web-{E84C4308-77C0-F4DE-1A91-B76D5F18DE1F}" dt="2026-05-03T15:15:30.656" v="1426" actId="20577"/>
+          <ac:spMkLst>
+            <pc:docMk/>
+            <pc:sldMk cId="3184180411" sldId="269"/>
+            <ac:spMk id="12" creationId="{A6A554D2-D37E-1CB5-3350-39ADF0933854}"/>
+          </ac:spMkLst>
+        </pc:spChg>
+      </pc:sldChg>
+      <pc:sldChg chg="addSp delSp modSp">
+        <pc:chgData name="Uyen P. Nguyen" userId="S::unguyen7@jh.edu::92021b55-417f-458a-90a7-cf14ced67da3" providerId="AD" clId="Web-{E84C4308-77C0-F4DE-1A91-B76D5F18DE1F}" dt="2026-05-03T14:28:09.230" v="1034" actId="20577"/>
+        <pc:sldMkLst>
+          <pc:docMk/>
+          <pc:sldMk cId="4084286138" sldId="271"/>
+        </pc:sldMkLst>
+        <pc:spChg chg="topLvl">
+          <ac:chgData name="Uyen P. Nguyen" userId="S::unguyen7@jh.edu::92021b55-417f-458a-90a7-cf14ced67da3" providerId="AD" clId="Web-{E84C4308-77C0-F4DE-1A91-B76D5F18DE1F}" dt="2026-05-03T14:11:12.754" v="571"/>
+          <ac:spMkLst>
+            <pc:docMk/>
+            <pc:sldMk cId="4084286138" sldId="271"/>
+            <ac:spMk id="6" creationId="{3E7EDD00-390A-5E3B-78D6-7817CB208F6F}"/>
+          </ac:spMkLst>
+        </pc:spChg>
+        <pc:spChg chg="mod">
+          <ac:chgData name="Uyen P. Nguyen" userId="S::unguyen7@jh.edu::92021b55-417f-458a-90a7-cf14ced67da3" providerId="AD" clId="Web-{E84C4308-77C0-F4DE-1A91-B76D5F18DE1F}" dt="2026-05-03T14:28:09.230" v="1034" actId="20577"/>
+          <ac:spMkLst>
+            <pc:docMk/>
+            <pc:sldMk cId="4084286138" sldId="271"/>
+            <ac:spMk id="9" creationId="{1A137F4C-C655-AEC0-1CB2-0EA82D3940A6}"/>
+          </ac:spMkLst>
+        </pc:spChg>
+        <pc:spChg chg="add del">
+          <ac:chgData name="Uyen P. Nguyen" userId="S::unguyen7@jh.edu::92021b55-417f-458a-90a7-cf14ced67da3" providerId="AD" clId="Web-{E84C4308-77C0-F4DE-1A91-B76D5F18DE1F}" dt="2026-05-03T14:11:43.551" v="575"/>
+          <ac:spMkLst>
+            <pc:docMk/>
+            <pc:sldMk cId="4084286138" sldId="271"/>
+            <ac:spMk id="10" creationId="{3D432227-9DEF-97E4-D4D0-7CD5561EEB3A}"/>
+          </ac:spMkLst>
+        </pc:spChg>
+        <pc:grpChg chg="del">
+          <ac:chgData name="Uyen P. Nguyen" userId="S::unguyen7@jh.edu::92021b55-417f-458a-90a7-cf14ced67da3" providerId="AD" clId="Web-{E84C4308-77C0-F4DE-1A91-B76D5F18DE1F}" dt="2026-05-03T14:11:12.754" v="571"/>
+          <ac:grpSpMkLst>
+            <pc:docMk/>
+            <pc:sldMk cId="4084286138" sldId="271"/>
+            <ac:grpSpMk id="8" creationId="{CE22BC7B-AD93-5DDC-030F-485BB30A49A6}"/>
+          </ac:grpSpMkLst>
+        </pc:grpChg>
+        <pc:grpChg chg="add">
+          <ac:chgData name="Uyen P. Nguyen" userId="S::unguyen7@jh.edu::92021b55-417f-458a-90a7-cf14ced67da3" providerId="AD" clId="Web-{E84C4308-77C0-F4DE-1A91-B76D5F18DE1F}" dt="2026-05-03T14:21:44.926" v="797"/>
+          <ac:grpSpMkLst>
+            <pc:docMk/>
+            <pc:sldMk cId="4084286138" sldId="271"/>
+            <ac:grpSpMk id="11" creationId="{99B44497-0356-D927-EFB0-C40F50E9D1BF}"/>
+          </ac:grpSpMkLst>
+        </pc:grpChg>
+        <pc:picChg chg="topLvl">
+          <ac:chgData name="Uyen P. Nguyen" userId="S::unguyen7@jh.edu::92021b55-417f-458a-90a7-cf14ced67da3" providerId="AD" clId="Web-{E84C4308-77C0-F4DE-1A91-B76D5F18DE1F}" dt="2026-05-03T14:11:12.754" v="571"/>
+          <ac:picMkLst>
+            <pc:docMk/>
+            <pc:sldMk cId="4084286138" sldId="271"/>
+            <ac:picMk id="2" creationId="{8B18167F-D03A-6DEA-F279-DAFEC96155E0}"/>
+          </ac:picMkLst>
+        </pc:picChg>
+        <pc:picChg chg="add del mod">
+          <ac:chgData name="Uyen P. Nguyen" userId="S::unguyen7@jh.edu::92021b55-417f-458a-90a7-cf14ced67da3" providerId="AD" clId="Web-{E84C4308-77C0-F4DE-1A91-B76D5F18DE1F}" dt="2026-05-03T14:10:48.519" v="568"/>
+          <ac:picMkLst>
+            <pc:docMk/>
+            <pc:sldMk cId="4084286138" sldId="271"/>
+            <ac:picMk id="4" creationId="{36B5B7BC-AA05-AC3A-D731-158E27E48145}"/>
+          </ac:picMkLst>
+        </pc:picChg>
+        <pc:picChg chg="add del mod">
+          <ac:chgData name="Uyen P. Nguyen" userId="S::unguyen7@jh.edu::92021b55-417f-458a-90a7-cf14ced67da3" providerId="AD" clId="Web-{E84C4308-77C0-F4DE-1A91-B76D5F18DE1F}" dt="2026-05-03T14:10:56.847" v="570"/>
+          <ac:picMkLst>
+            <pc:docMk/>
+            <pc:sldMk cId="4084286138" sldId="271"/>
+            <ac:picMk id="5" creationId="{A79A14EC-468B-D031-6C3F-E4439562DB8D}"/>
+          </ac:picMkLst>
+        </pc:picChg>
+      </pc:sldChg>
+    </pc:docChg>
+  </pc:docChgLst>
   <pc:docChgLst>
     <pc:chgData name="Uyen P. Nguyen" userId="S::unguyen7@jh.edu::92021b55-417f-458a-90a7-cf14ced67da3" providerId="AD" clId="Web-{28CD629A-B9DB-A9CF-B99B-10A7A00C23E7}"/>
     <pc:docChg chg="modSld">
@@ -171,6 +585,666 @@
         </pc:graphicFrameChg>
         <pc:graphicFrameChg chg="add mod modGraphic">
           <ac:chgData name="Uyen P. Nguyen" userId="S::unguyen7@jh.edu::92021b55-417f-458a-90a7-cf14ced67da3" providerId="AD" clId="Web-{28CD629A-B9DB-A9CF-B99B-10A7A00C23E7}" dt="2026-05-02T18:18:27.084" v="241" actId="1076"/>
+          <ac:graphicFrameMkLst>
+            <pc:docMk/>
+            <pc:sldMk cId="2092433718" sldId="265"/>
+            <ac:graphicFrameMk id="3" creationId="{15498308-56C6-0976-7133-85BE4FA98101}"/>
+          </ac:graphicFrameMkLst>
+        </pc:graphicFrameChg>
+      </pc:sldChg>
+    </pc:docChg>
+  </pc:docChgLst>
+  <pc:docChgLst>
+    <pc:chgData name="Uyen P. Nguyen" userId="S::unguyen7@jh.edu::92021b55-417f-458a-90a7-cf14ced67da3" providerId="AD" clId="Web-{1DF5E942-3C2B-2D8D-1909-51A3ACEF6D6C}"/>
+    <pc:docChg chg="modSld">
+      <pc:chgData name="Uyen P. Nguyen" userId="S::unguyen7@jh.edu::92021b55-417f-458a-90a7-cf14ced67da3" providerId="AD" clId="Web-{1DF5E942-3C2B-2D8D-1909-51A3ACEF6D6C}" dt="2026-05-03T13:46:09.294" v="987" actId="20577"/>
+      <pc:docMkLst>
+        <pc:docMk/>
+      </pc:docMkLst>
+      <pc:sldChg chg="addSp delSp modSp">
+        <pc:chgData name="Uyen P. Nguyen" userId="S::unguyen7@jh.edu::92021b55-417f-458a-90a7-cf14ced67da3" providerId="AD" clId="Web-{1DF5E942-3C2B-2D8D-1909-51A3ACEF6D6C}" dt="2026-05-03T12:34:39.430" v="825" actId="14100"/>
+        <pc:sldMkLst>
+          <pc:docMk/>
+          <pc:sldMk cId="2133178391" sldId="257"/>
+        </pc:sldMkLst>
+        <pc:spChg chg="add mod">
+          <ac:chgData name="Uyen P. Nguyen" userId="S::unguyen7@jh.edu::92021b55-417f-458a-90a7-cf14ced67da3" providerId="AD" clId="Web-{1DF5E942-3C2B-2D8D-1909-51A3ACEF6D6C}" dt="2026-05-03T11:48:14.919" v="277" actId="1076"/>
+          <ac:spMkLst>
+            <pc:docMk/>
+            <pc:sldMk cId="2133178391" sldId="257"/>
+            <ac:spMk id="4" creationId="{D84E4C64-A6D9-21BB-F7BF-A138474493AD}"/>
+          </ac:spMkLst>
+        </pc:spChg>
+        <pc:spChg chg="del topLvl">
+          <ac:chgData name="Uyen P. Nguyen" userId="S::unguyen7@jh.edu::92021b55-417f-458a-90a7-cf14ced67da3" providerId="AD" clId="Web-{1DF5E942-3C2B-2D8D-1909-51A3ACEF6D6C}" dt="2026-05-03T12:33:32.802" v="817"/>
+          <ac:spMkLst>
+            <pc:docMk/>
+            <pc:sldMk cId="2133178391" sldId="257"/>
+            <ac:spMk id="6" creationId="{284E19C5-94C8-8021-8399-C0DFDCAA4B46}"/>
+          </ac:spMkLst>
+        </pc:spChg>
+        <pc:spChg chg="del">
+          <ac:chgData name="Uyen P. Nguyen" userId="S::unguyen7@jh.edu::92021b55-417f-458a-90a7-cf14ced67da3" providerId="AD" clId="Web-{1DF5E942-3C2B-2D8D-1909-51A3ACEF6D6C}" dt="2026-05-03T11:35:34.855" v="6"/>
+          <ac:spMkLst>
+            <pc:docMk/>
+            <pc:sldMk cId="2133178391" sldId="257"/>
+            <ac:spMk id="6" creationId="{AC1BE2C5-A31E-34A4-5D30-482B264F9B75}"/>
+          </ac:spMkLst>
+        </pc:spChg>
+        <pc:spChg chg="mod">
+          <ac:chgData name="Uyen P. Nguyen" userId="S::unguyen7@jh.edu::92021b55-417f-458a-90a7-cf14ced67da3" providerId="AD" clId="Web-{1DF5E942-3C2B-2D8D-1909-51A3ACEF6D6C}" dt="2026-05-03T12:09:24.361" v="786" actId="20577"/>
+          <ac:spMkLst>
+            <pc:docMk/>
+            <pc:sldMk cId="2133178391" sldId="257"/>
+            <ac:spMk id="9" creationId="{EABC739E-24F8-66FD-A37D-4CF4952DF00F}"/>
+          </ac:spMkLst>
+        </pc:spChg>
+        <pc:spChg chg="add del mod">
+          <ac:chgData name="Uyen P. Nguyen" userId="S::unguyen7@jh.edu::92021b55-417f-458a-90a7-cf14ced67da3" providerId="AD" clId="Web-{1DF5E942-3C2B-2D8D-1909-51A3ACEF6D6C}" dt="2026-05-03T11:49:08.594" v="282"/>
+          <ac:spMkLst>
+            <pc:docMk/>
+            <pc:sldMk cId="2133178391" sldId="257"/>
+            <ac:spMk id="10" creationId="{912FE331-8F18-C346-EB29-242EC9532846}"/>
+          </ac:spMkLst>
+        </pc:spChg>
+        <pc:spChg chg="add mod">
+          <ac:chgData name="Uyen P. Nguyen" userId="S::unguyen7@jh.edu::92021b55-417f-458a-90a7-cf14ced67da3" providerId="AD" clId="Web-{1DF5E942-3C2B-2D8D-1909-51A3ACEF6D6C}" dt="2026-05-03T12:08:40.609" v="783" actId="1076"/>
+          <ac:spMkLst>
+            <pc:docMk/>
+            <pc:sldMk cId="2133178391" sldId="257"/>
+            <ac:spMk id="13" creationId="{D2ACF8E7-10AB-DA1C-BA6F-A274DD497892}"/>
+          </ac:spMkLst>
+        </pc:spChg>
+        <pc:spChg chg="add mod">
+          <ac:chgData name="Uyen P. Nguyen" userId="S::unguyen7@jh.edu::92021b55-417f-458a-90a7-cf14ced67da3" providerId="AD" clId="Web-{1DF5E942-3C2B-2D8D-1909-51A3ACEF6D6C}" dt="2026-05-03T12:08:51.891" v="784" actId="1076"/>
+          <ac:spMkLst>
+            <pc:docMk/>
+            <pc:sldMk cId="2133178391" sldId="257"/>
+            <ac:spMk id="14" creationId="{4F966584-5456-179C-4BCE-EE0C1F576C15}"/>
+          </ac:spMkLst>
+        </pc:spChg>
+        <pc:spChg chg="del mod topLvl">
+          <ac:chgData name="Uyen P. Nguyen" userId="S::unguyen7@jh.edu::92021b55-417f-458a-90a7-cf14ced67da3" providerId="AD" clId="Web-{1DF5E942-3C2B-2D8D-1909-51A3ACEF6D6C}" dt="2026-05-03T12:34:07.898" v="823"/>
+          <ac:spMkLst>
+            <pc:docMk/>
+            <pc:sldMk cId="2133178391" sldId="257"/>
+            <ac:spMk id="16" creationId="{61EF8976-CF0C-E17C-3FFC-25D0CF16ABD8}"/>
+          </ac:spMkLst>
+        </pc:spChg>
+        <pc:grpChg chg="add mod">
+          <ac:chgData name="Uyen P. Nguyen" userId="S::unguyen7@jh.edu::92021b55-417f-458a-90a7-cf14ced67da3" providerId="AD" clId="Web-{1DF5E942-3C2B-2D8D-1909-51A3ACEF6D6C}" dt="2026-05-03T11:49:54.282" v="313" actId="1076"/>
+          <ac:grpSpMkLst>
+            <pc:docMk/>
+            <pc:sldMk cId="2133178391" sldId="257"/>
+            <ac:grpSpMk id="8" creationId="{7C1ECD8A-362D-0EE5-CE67-A1945EF49C2C}"/>
+          </ac:grpSpMkLst>
+        </pc:grpChg>
+        <pc:grpChg chg="add del mod">
+          <ac:chgData name="Uyen P. Nguyen" userId="S::unguyen7@jh.edu::92021b55-417f-458a-90a7-cf14ced67da3" providerId="AD" clId="Web-{1DF5E942-3C2B-2D8D-1909-51A3ACEF6D6C}" dt="2026-05-03T12:33:32.802" v="817"/>
+          <ac:grpSpMkLst>
+            <pc:docMk/>
+            <pc:sldMk cId="2133178391" sldId="257"/>
+            <ac:grpSpMk id="10" creationId="{CDF2F855-A3D7-CC4B-E436-D58214B660E2}"/>
+          </ac:grpSpMkLst>
+        </pc:grpChg>
+        <pc:grpChg chg="add del mod">
+          <ac:chgData name="Uyen P. Nguyen" userId="S::unguyen7@jh.edu::92021b55-417f-458a-90a7-cf14ced67da3" providerId="AD" clId="Web-{1DF5E942-3C2B-2D8D-1909-51A3ACEF6D6C}" dt="2026-05-03T12:34:01.632" v="822"/>
+          <ac:grpSpMkLst>
+            <pc:docMk/>
+            <pc:sldMk cId="2133178391" sldId="257"/>
+            <ac:grpSpMk id="17" creationId="{7B3C493C-E5D1-70CE-0299-A8A167569042}"/>
+          </ac:grpSpMkLst>
+        </pc:grpChg>
+        <pc:picChg chg="add mod">
+          <ac:chgData name="Uyen P. Nguyen" userId="S::unguyen7@jh.edu::92021b55-417f-458a-90a7-cf14ced67da3" providerId="AD" clId="Web-{1DF5E942-3C2B-2D8D-1909-51A3ACEF6D6C}" dt="2026-05-03T11:48:14.919" v="276" actId="1076"/>
+          <ac:picMkLst>
+            <pc:docMk/>
+            <pc:sldMk cId="2133178391" sldId="257"/>
+            <ac:picMk id="2" creationId="{5D10825A-881A-C54E-4854-82977DF67C8E}"/>
+          </ac:picMkLst>
+        </pc:picChg>
+        <pc:picChg chg="del">
+          <ac:chgData name="Uyen P. Nguyen" userId="S::unguyen7@jh.edu::92021b55-417f-458a-90a7-cf14ced67da3" providerId="AD" clId="Web-{1DF5E942-3C2B-2D8D-1909-51A3ACEF6D6C}" dt="2026-05-03T11:35:29.871" v="5"/>
+          <ac:picMkLst>
+            <pc:docMk/>
+            <pc:sldMk cId="2133178391" sldId="257"/>
+            <ac:picMk id="3" creationId="{8B02BF0E-5668-4499-1048-1609015D312D}"/>
+          </ac:picMkLst>
+        </pc:picChg>
+        <pc:picChg chg="del mod">
+          <ac:chgData name="Uyen P. Nguyen" userId="S::unguyen7@jh.edu::92021b55-417f-458a-90a7-cf14ced67da3" providerId="AD" clId="Web-{1DF5E942-3C2B-2D8D-1909-51A3ACEF6D6C}" dt="2026-05-03T11:44:50.635" v="215"/>
+          <ac:picMkLst>
+            <pc:docMk/>
+            <pc:sldMk cId="2133178391" sldId="257"/>
+            <ac:picMk id="5" creationId="{659EEF7E-8B90-3FFC-CFF0-C5E61DDDF975}"/>
+          </ac:picMkLst>
+        </pc:picChg>
+        <pc:picChg chg="del topLvl">
+          <ac:chgData name="Uyen P. Nguyen" userId="S::unguyen7@jh.edu::92021b55-417f-458a-90a7-cf14ced67da3" providerId="AD" clId="Web-{1DF5E942-3C2B-2D8D-1909-51A3ACEF6D6C}" dt="2026-05-03T12:33:39.474" v="818"/>
+          <ac:picMkLst>
+            <pc:docMk/>
+            <pc:sldMk cId="2133178391" sldId="257"/>
+            <ac:picMk id="5" creationId="{7FCADC20-81C0-7456-2786-D90BD4156D84}"/>
+          </ac:picMkLst>
+        </pc:picChg>
+        <pc:picChg chg="add del mod">
+          <ac:chgData name="Uyen P. Nguyen" userId="S::unguyen7@jh.edu::92021b55-417f-458a-90a7-cf14ced67da3" providerId="AD" clId="Web-{1DF5E942-3C2B-2D8D-1909-51A3ACEF6D6C}" dt="2026-05-03T12:33:20.489" v="814"/>
+          <ac:picMkLst>
+            <pc:docMk/>
+            <pc:sldMk cId="2133178391" sldId="257"/>
+            <ac:picMk id="12" creationId="{820B7B6B-AD2D-8E2B-C22F-8EC64DDDF549}"/>
+          </ac:picMkLst>
+        </pc:picChg>
+        <pc:picChg chg="mod topLvl">
+          <ac:chgData name="Uyen P. Nguyen" userId="S::unguyen7@jh.edu::92021b55-417f-458a-90a7-cf14ced67da3" providerId="AD" clId="Web-{1DF5E942-3C2B-2D8D-1909-51A3ACEF6D6C}" dt="2026-05-03T12:34:39.430" v="825" actId="14100"/>
+          <ac:picMkLst>
+            <pc:docMk/>
+            <pc:sldMk cId="2133178391" sldId="257"/>
+            <ac:picMk id="15" creationId="{948AF9DA-EB71-9393-F755-3C86B7EF305B}"/>
+          </ac:picMkLst>
+        </pc:picChg>
+      </pc:sldChg>
+      <pc:sldChg chg="addSp delSp modSp">
+        <pc:chgData name="Uyen P. Nguyen" userId="S::unguyen7@jh.edu::92021b55-417f-458a-90a7-cf14ced67da3" providerId="AD" clId="Web-{1DF5E942-3C2B-2D8D-1909-51A3ACEF6D6C}" dt="2026-05-03T13:46:09.294" v="987" actId="20577"/>
+        <pc:sldMkLst>
+          <pc:docMk/>
+          <pc:sldMk cId="1284274485" sldId="259"/>
+        </pc:sldMkLst>
+        <pc:spChg chg="del mod">
+          <ac:chgData name="Uyen P. Nguyen" userId="S::unguyen7@jh.edu::92021b55-417f-458a-90a7-cf14ced67da3" providerId="AD" clId="Web-{1DF5E942-3C2B-2D8D-1909-51A3ACEF6D6C}" dt="2026-05-03T13:41:18.599" v="836"/>
+          <ac:spMkLst>
+            <pc:docMk/>
+            <pc:sldMk cId="1284274485" sldId="259"/>
+            <ac:spMk id="2" creationId="{6D7D5D24-0228-DB90-2628-3F899EC62B3D}"/>
+          </ac:spMkLst>
+        </pc:spChg>
+        <pc:spChg chg="add mod">
+          <ac:chgData name="Uyen P. Nguyen" userId="S::unguyen7@jh.edu::92021b55-417f-458a-90a7-cf14ced67da3" providerId="AD" clId="Web-{1DF5E942-3C2B-2D8D-1909-51A3ACEF6D6C}" dt="2026-05-03T13:46:09.294" v="987" actId="20577"/>
+          <ac:spMkLst>
+            <pc:docMk/>
+            <pc:sldMk cId="1284274485" sldId="259"/>
+            <ac:spMk id="4" creationId="{BF8CA26C-9A84-E19D-C8E6-3A2E93AB0C45}"/>
+          </ac:spMkLst>
+        </pc:spChg>
+        <pc:spChg chg="mod">
+          <ac:chgData name="Uyen P. Nguyen" userId="S::unguyen7@jh.edu::92021b55-417f-458a-90a7-cf14ced67da3" providerId="AD" clId="Web-{1DF5E942-3C2B-2D8D-1909-51A3ACEF6D6C}" dt="2026-05-03T13:43:26.085" v="927" actId="20577"/>
+          <ac:spMkLst>
+            <pc:docMk/>
+            <pc:sldMk cId="1284274485" sldId="259"/>
+            <ac:spMk id="9" creationId="{8DEAAD5C-2D15-E82B-FA78-5A05362D915A}"/>
+          </ac:spMkLst>
+        </pc:spChg>
+        <pc:picChg chg="add mod">
+          <ac:chgData name="Uyen P. Nguyen" userId="S::unguyen7@jh.edu::92021b55-417f-458a-90a7-cf14ced67da3" providerId="AD" clId="Web-{1DF5E942-3C2B-2D8D-1909-51A3ACEF6D6C}" dt="2026-05-03T13:43:38.867" v="928" actId="1076"/>
+          <ac:picMkLst>
+            <pc:docMk/>
+            <pc:sldMk cId="1284274485" sldId="259"/>
+            <ac:picMk id="3" creationId="{AC31E98A-22CB-73CD-105C-A566161329C6}"/>
+          </ac:picMkLst>
+        </pc:picChg>
+      </pc:sldChg>
+      <pc:sldChg chg="addSp delSp modSp">
+        <pc:chgData name="Uyen P. Nguyen" userId="S::unguyen7@jh.edu::92021b55-417f-458a-90a7-cf14ced67da3" providerId="AD" clId="Web-{1DF5E942-3C2B-2D8D-1909-51A3ACEF6D6C}" dt="2026-05-03T12:33:14.020" v="813"/>
+        <pc:sldMkLst>
+          <pc:docMk/>
+          <pc:sldMk cId="4084286138" sldId="271"/>
+        </pc:sldMkLst>
+        <pc:spChg chg="add mod">
+          <ac:chgData name="Uyen P. Nguyen" userId="S::unguyen7@jh.edu::92021b55-417f-458a-90a7-cf14ced67da3" providerId="AD" clId="Web-{1DF5E942-3C2B-2D8D-1909-51A3ACEF6D6C}" dt="2026-05-03T12:32:49.066" v="812" actId="1076"/>
+          <ac:spMkLst>
+            <pc:docMk/>
+            <pc:sldMk cId="4084286138" sldId="271"/>
+            <ac:spMk id="6" creationId="{3E7EDD00-390A-5E3B-78D6-7817CB208F6F}"/>
+          </ac:spMkLst>
+        </pc:spChg>
+        <pc:spChg chg="mod">
+          <ac:chgData name="Uyen P. Nguyen" userId="S::unguyen7@jh.edu::92021b55-417f-458a-90a7-cf14ced67da3" providerId="AD" clId="Web-{1DF5E942-3C2B-2D8D-1909-51A3ACEF6D6C}" dt="2026-05-03T12:10:54.554" v="796" actId="1076"/>
+          <ac:spMkLst>
+            <pc:docMk/>
+            <pc:sldMk cId="4084286138" sldId="271"/>
+            <ac:spMk id="9" creationId="{1A137F4C-C655-AEC0-1CB2-0EA82D3940A6}"/>
+          </ac:spMkLst>
+        </pc:spChg>
+        <pc:grpChg chg="add">
+          <ac:chgData name="Uyen P. Nguyen" userId="S::unguyen7@jh.edu::92021b55-417f-458a-90a7-cf14ced67da3" providerId="AD" clId="Web-{1DF5E942-3C2B-2D8D-1909-51A3ACEF6D6C}" dt="2026-05-03T12:33:14.020" v="813"/>
+          <ac:grpSpMkLst>
+            <pc:docMk/>
+            <pc:sldMk cId="4084286138" sldId="271"/>
+            <ac:grpSpMk id="8" creationId="{CE22BC7B-AD93-5DDC-030F-485BB30A49A6}"/>
+          </ac:grpSpMkLst>
+        </pc:grpChg>
+        <pc:picChg chg="add mod">
+          <ac:chgData name="Uyen P. Nguyen" userId="S::unguyen7@jh.edu::92021b55-417f-458a-90a7-cf14ced67da3" providerId="AD" clId="Web-{1DF5E942-3C2B-2D8D-1909-51A3ACEF6D6C}" dt="2026-05-03T11:35:24.715" v="4" actId="14100"/>
+          <ac:picMkLst>
+            <pc:docMk/>
+            <pc:sldMk cId="4084286138" sldId="271"/>
+            <ac:picMk id="2" creationId="{8B18167F-D03A-6DEA-F279-DAFEC96155E0}"/>
+          </ac:picMkLst>
+        </pc:picChg>
+        <pc:picChg chg="mod">
+          <ac:chgData name="Uyen P. Nguyen" userId="S::unguyen7@jh.edu::92021b55-417f-458a-90a7-cf14ced67da3" providerId="AD" clId="Web-{1DF5E942-3C2B-2D8D-1909-51A3ACEF6D6C}" dt="2026-05-03T12:10:49.101" v="795" actId="1076"/>
+          <ac:picMkLst>
+            <pc:docMk/>
+            <pc:sldMk cId="4084286138" sldId="271"/>
+            <ac:picMk id="3" creationId="{61CE029C-81A4-01FF-5310-3BDCA89CE4C5}"/>
+          </ac:picMkLst>
+        </pc:picChg>
+        <pc:picChg chg="add del mod">
+          <ac:chgData name="Uyen P. Nguyen" userId="S::unguyen7@jh.edu::92021b55-417f-458a-90a7-cf14ced67da3" providerId="AD" clId="Web-{1DF5E942-3C2B-2D8D-1909-51A3ACEF6D6C}" dt="2026-05-03T12:31:49.017" v="799"/>
+          <ac:picMkLst>
+            <pc:docMk/>
+            <pc:sldMk cId="4084286138" sldId="271"/>
+            <ac:picMk id="4" creationId="{50E9F3A4-27A1-758B-7D3E-F85FAE932BC1}"/>
+          </ac:picMkLst>
+        </pc:picChg>
+        <pc:picChg chg="add del mod">
+          <ac:chgData name="Uyen P. Nguyen" userId="S::unguyen7@jh.edu::92021b55-417f-458a-90a7-cf14ced67da3" providerId="AD" clId="Web-{1DF5E942-3C2B-2D8D-1909-51A3ACEF6D6C}" dt="2026-05-03T12:32:04.939" v="801"/>
+          <ac:picMkLst>
+            <pc:docMk/>
+            <pc:sldMk cId="4084286138" sldId="271"/>
+            <ac:picMk id="5" creationId="{6011E0BA-DC91-C7A8-6F1F-BD1A18528D30}"/>
+          </ac:picMkLst>
+        </pc:picChg>
+        <pc:picChg chg="del">
+          <ac:chgData name="Uyen P. Nguyen" userId="S::unguyen7@jh.edu::92021b55-417f-458a-90a7-cf14ced67da3" providerId="AD" clId="Web-{1DF5E942-3C2B-2D8D-1909-51A3ACEF6D6C}" dt="2026-05-03T11:35:01.886" v="0"/>
+          <ac:picMkLst>
+            <pc:docMk/>
+            <pc:sldMk cId="4084286138" sldId="271"/>
+            <ac:picMk id="8" creationId="{B38A110A-4554-DD53-7B39-D305EC31083C}"/>
+          </ac:picMkLst>
+        </pc:picChg>
+      </pc:sldChg>
+    </pc:docChg>
+  </pc:docChgLst>
+  <pc:docChgLst>
+    <pc:chgData name="Uyen P. Nguyen" userId="S::unguyen7@jh.edu::92021b55-417f-458a-90a7-cf14ced67da3" providerId="AD" clId="Web-{C8FECEF0-CD1E-8A61-D6A9-E78BD7F5FC65}"/>
+    <pc:docChg chg="addSld modSld sldOrd">
+      <pc:chgData name="Uyen P. Nguyen" userId="S::unguyen7@jh.edu::92021b55-417f-458a-90a7-cf14ced67da3" providerId="AD" clId="Web-{C8FECEF0-CD1E-8A61-D6A9-E78BD7F5FC65}" dt="2026-05-03T18:17:18.540" v="1408" actId="1076"/>
+      <pc:docMkLst>
+        <pc:docMk/>
+      </pc:docMkLst>
+      <pc:sldChg chg="modSp">
+        <pc:chgData name="Uyen P. Nguyen" userId="S::unguyen7@jh.edu::92021b55-417f-458a-90a7-cf14ced67da3" providerId="AD" clId="Web-{C8FECEF0-CD1E-8A61-D6A9-E78BD7F5FC65}" dt="2026-05-03T01:33:00.650" v="1" actId="20577"/>
+        <pc:sldMkLst>
+          <pc:docMk/>
+          <pc:sldMk cId="4131611360" sldId="256"/>
+        </pc:sldMkLst>
+        <pc:spChg chg="mod">
+          <ac:chgData name="Uyen P. Nguyen" userId="S::unguyen7@jh.edu::92021b55-417f-458a-90a7-cf14ced67da3" providerId="AD" clId="Web-{C8FECEF0-CD1E-8A61-D6A9-E78BD7F5FC65}" dt="2026-05-03T01:33:00.650" v="1" actId="20577"/>
+          <ac:spMkLst>
+            <pc:docMk/>
+            <pc:sldMk cId="4131611360" sldId="256"/>
+            <ac:spMk id="7" creationId="{E4378A81-279B-CA9A-8E50-130D2D276DA6}"/>
+          </ac:spMkLst>
+        </pc:spChg>
+      </pc:sldChg>
+      <pc:sldChg chg="addSp modSp ord">
+        <pc:chgData name="Uyen P. Nguyen" userId="S::unguyen7@jh.edu::92021b55-417f-458a-90a7-cf14ced67da3" providerId="AD" clId="Web-{C8FECEF0-CD1E-8A61-D6A9-E78BD7F5FC65}" dt="2026-05-03T02:51:57.704" v="1229" actId="20577"/>
+        <pc:sldMkLst>
+          <pc:docMk/>
+          <pc:sldMk cId="2133178391" sldId="257"/>
+        </pc:sldMkLst>
+        <pc:spChg chg="add mod">
+          <ac:chgData name="Uyen P. Nguyen" userId="S::unguyen7@jh.edu::92021b55-417f-458a-90a7-cf14ced67da3" providerId="AD" clId="Web-{C8FECEF0-CD1E-8A61-D6A9-E78BD7F5FC65}" dt="2026-05-03T02:51:57.704" v="1229" actId="20577"/>
+          <ac:spMkLst>
+            <pc:docMk/>
+            <pc:sldMk cId="2133178391" sldId="257"/>
+            <ac:spMk id="6" creationId="{AC1BE2C5-A31E-34A4-5D30-482B264F9B75}"/>
+          </ac:spMkLst>
+        </pc:spChg>
+        <pc:spChg chg="mod">
+          <ac:chgData name="Uyen P. Nguyen" userId="S::unguyen7@jh.edu::92021b55-417f-458a-90a7-cf14ced67da3" providerId="AD" clId="Web-{C8FECEF0-CD1E-8A61-D6A9-E78BD7F5FC65}" dt="2026-05-03T02:50:59.611" v="1212" actId="20577"/>
+          <ac:spMkLst>
+            <pc:docMk/>
+            <pc:sldMk cId="2133178391" sldId="257"/>
+            <ac:spMk id="7" creationId="{D159B653-A360-6E33-D2F6-A0D58B9935A5}"/>
+          </ac:spMkLst>
+        </pc:spChg>
+        <pc:spChg chg="mod">
+          <ac:chgData name="Uyen P. Nguyen" userId="S::unguyen7@jh.edu::92021b55-417f-458a-90a7-cf14ced67da3" providerId="AD" clId="Web-{C8FECEF0-CD1E-8A61-D6A9-E78BD7F5FC65}" dt="2026-05-03T02:51:06.907" v="1225" actId="20577"/>
+          <ac:spMkLst>
+            <pc:docMk/>
+            <pc:sldMk cId="2133178391" sldId="257"/>
+            <ac:spMk id="9" creationId="{EABC739E-24F8-66FD-A37D-4CF4952DF00F}"/>
+          </ac:spMkLst>
+        </pc:spChg>
+        <pc:picChg chg="add">
+          <ac:chgData name="Uyen P. Nguyen" userId="S::unguyen7@jh.edu::92021b55-417f-458a-90a7-cf14ced67da3" providerId="AD" clId="Web-{C8FECEF0-CD1E-8A61-D6A9-E78BD7F5FC65}" dt="2026-05-03T02:39:07.340" v="850"/>
+          <ac:picMkLst>
+            <pc:docMk/>
+            <pc:sldMk cId="2133178391" sldId="257"/>
+            <ac:picMk id="3" creationId="{8B02BF0E-5668-4499-1048-1609015D312D}"/>
+          </ac:picMkLst>
+        </pc:picChg>
+        <pc:picChg chg="add">
+          <ac:chgData name="Uyen P. Nguyen" userId="S::unguyen7@jh.edu::92021b55-417f-458a-90a7-cf14ced67da3" providerId="AD" clId="Web-{C8FECEF0-CD1E-8A61-D6A9-E78BD7F5FC65}" dt="2026-05-03T02:39:44.637" v="852"/>
+          <ac:picMkLst>
+            <pc:docMk/>
+            <pc:sldMk cId="2133178391" sldId="257"/>
+            <ac:picMk id="5" creationId="{659EEF7E-8B90-3FFC-CFF0-C5E61DDDF975}"/>
+          </ac:picMkLst>
+        </pc:picChg>
+      </pc:sldChg>
+      <pc:sldChg chg="addSp modSp">
+        <pc:chgData name="Uyen P. Nguyen" userId="S::unguyen7@jh.edu::92021b55-417f-458a-90a7-cf14ced67da3" providerId="AD" clId="Web-{C8FECEF0-CD1E-8A61-D6A9-E78BD7F5FC65}" dt="2026-05-03T17:37:27.002" v="1278" actId="20577"/>
+        <pc:sldMkLst>
+          <pc:docMk/>
+          <pc:sldMk cId="1284274485" sldId="259"/>
+        </pc:sldMkLst>
+        <pc:spChg chg="add mod">
+          <ac:chgData name="Uyen P. Nguyen" userId="S::unguyen7@jh.edu::92021b55-417f-458a-90a7-cf14ced67da3" providerId="AD" clId="Web-{C8FECEF0-CD1E-8A61-D6A9-E78BD7F5FC65}" dt="2026-05-03T02:52:11.657" v="1233" actId="20577"/>
+          <ac:spMkLst>
+            <pc:docMk/>
+            <pc:sldMk cId="1284274485" sldId="259"/>
+            <ac:spMk id="2" creationId="{6D7D5D24-0228-DB90-2628-3F899EC62B3D}"/>
+          </ac:spMkLst>
+        </pc:spChg>
+        <pc:spChg chg="add mod">
+          <ac:chgData name="Uyen P. Nguyen" userId="S::unguyen7@jh.edu::92021b55-417f-458a-90a7-cf14ced67da3" providerId="AD" clId="Web-{C8FECEF0-CD1E-8A61-D6A9-E78BD7F5FC65}" dt="2026-05-03T17:37:27.002" v="1278" actId="20577"/>
+          <ac:spMkLst>
+            <pc:docMk/>
+            <pc:sldMk cId="1284274485" sldId="259"/>
+            <ac:spMk id="8" creationId="{C9384A4F-5EFF-6C8E-5C65-26386522D403}"/>
+          </ac:spMkLst>
+        </pc:spChg>
+        <pc:spChg chg="mod">
+          <ac:chgData name="Uyen P. Nguyen" userId="S::unguyen7@jh.edu::92021b55-417f-458a-90a7-cf14ced67da3" providerId="AD" clId="Web-{C8FECEF0-CD1E-8A61-D6A9-E78BD7F5FC65}" dt="2026-05-03T17:36:51.954" v="1271" actId="20577"/>
+          <ac:spMkLst>
+            <pc:docMk/>
+            <pc:sldMk cId="1284274485" sldId="259"/>
+            <ac:spMk id="9" creationId="{8DEAAD5C-2D15-E82B-FA78-5A05362D915A}"/>
+          </ac:spMkLst>
+        </pc:spChg>
+      </pc:sldChg>
+      <pc:sldChg chg="addSp modSp">
+        <pc:chgData name="Uyen P. Nguyen" userId="S::unguyen7@jh.edu::92021b55-417f-458a-90a7-cf14ced67da3" providerId="AD" clId="Web-{C8FECEF0-CD1E-8A61-D6A9-E78BD7F5FC65}" dt="2026-05-03T17:57:40.280" v="1335" actId="20577"/>
+        <pc:sldMkLst>
+          <pc:docMk/>
+          <pc:sldMk cId="1027488440" sldId="260"/>
+        </pc:sldMkLst>
+        <pc:spChg chg="add mod">
+          <ac:chgData name="Uyen P. Nguyen" userId="S::unguyen7@jh.edu::92021b55-417f-458a-90a7-cf14ced67da3" providerId="AD" clId="Web-{C8FECEF0-CD1E-8A61-D6A9-E78BD7F5FC65}" dt="2026-05-03T02:56:56.270" v="1241" actId="20577"/>
+          <ac:spMkLst>
+            <pc:docMk/>
+            <pc:sldMk cId="1027488440" sldId="260"/>
+            <ac:spMk id="3" creationId="{1B2681E1-C30A-4694-4E82-C776EAF05DC0}"/>
+          </ac:spMkLst>
+        </pc:spChg>
+        <pc:spChg chg="add mod">
+          <ac:chgData name="Uyen P. Nguyen" userId="S::unguyen7@jh.edu::92021b55-417f-458a-90a7-cf14ced67da3" providerId="AD" clId="Web-{C8FECEF0-CD1E-8A61-D6A9-E78BD7F5FC65}" dt="2026-05-03T17:52:13.745" v="1286" actId="14100"/>
+          <ac:spMkLst>
+            <pc:docMk/>
+            <pc:sldMk cId="1027488440" sldId="260"/>
+            <ac:spMk id="4" creationId="{0047EC74-E7E3-9E6F-B96D-C90D95A5F1CF}"/>
+          </ac:spMkLst>
+        </pc:spChg>
+        <pc:spChg chg="add mod">
+          <ac:chgData name="Uyen P. Nguyen" userId="S::unguyen7@jh.edu::92021b55-417f-458a-90a7-cf14ced67da3" providerId="AD" clId="Web-{C8FECEF0-CD1E-8A61-D6A9-E78BD7F5FC65}" dt="2026-05-03T17:52:20.699" v="1287" actId="14100"/>
+          <ac:spMkLst>
+            <pc:docMk/>
+            <pc:sldMk cId="1027488440" sldId="260"/>
+            <ac:spMk id="5" creationId="{A3A5365B-4431-55DA-3501-ABB4E561D1D8}"/>
+          </ac:spMkLst>
+        </pc:spChg>
+        <pc:spChg chg="add mod">
+          <ac:chgData name="Uyen P. Nguyen" userId="S::unguyen7@jh.edu::92021b55-417f-458a-90a7-cf14ced67da3" providerId="AD" clId="Web-{C8FECEF0-CD1E-8A61-D6A9-E78BD7F5FC65}" dt="2026-05-03T17:53:03.183" v="1292" actId="14100"/>
+          <ac:spMkLst>
+            <pc:docMk/>
+            <pc:sldMk cId="1027488440" sldId="260"/>
+            <ac:spMk id="6" creationId="{469CA3D6-06D6-AFC3-0CED-30B96C35403B}"/>
+          </ac:spMkLst>
+        </pc:spChg>
+        <pc:spChg chg="add mod">
+          <ac:chgData name="Uyen P. Nguyen" userId="S::unguyen7@jh.edu::92021b55-417f-458a-90a7-cf14ced67da3" providerId="AD" clId="Web-{C8FECEF0-CD1E-8A61-D6A9-E78BD7F5FC65}" dt="2026-05-03T17:54:47.512" v="1313" actId="1076"/>
+          <ac:spMkLst>
+            <pc:docMk/>
+            <pc:sldMk cId="1027488440" sldId="260"/>
+            <ac:spMk id="8" creationId="{026E776A-7272-1C4E-6AB8-877A05406ADA}"/>
+          </ac:spMkLst>
+        </pc:spChg>
+        <pc:spChg chg="add mod">
+          <ac:chgData name="Uyen P. Nguyen" userId="S::unguyen7@jh.edu::92021b55-417f-458a-90a7-cf14ced67da3" providerId="AD" clId="Web-{C8FECEF0-CD1E-8A61-D6A9-E78BD7F5FC65}" dt="2026-05-03T17:57:32.608" v="1331" actId="20577"/>
+          <ac:spMkLst>
+            <pc:docMk/>
+            <pc:sldMk cId="1027488440" sldId="260"/>
+            <ac:spMk id="10" creationId="{67BA9D2E-112C-D879-95ED-9A6CE696CA3A}"/>
+          </ac:spMkLst>
+        </pc:spChg>
+        <pc:spChg chg="add mod">
+          <ac:chgData name="Uyen P. Nguyen" userId="S::unguyen7@jh.edu::92021b55-417f-458a-90a7-cf14ced67da3" providerId="AD" clId="Web-{C8FECEF0-CD1E-8A61-D6A9-E78BD7F5FC65}" dt="2026-05-03T17:57:40.280" v="1335" actId="20577"/>
+          <ac:spMkLst>
+            <pc:docMk/>
+            <pc:sldMk cId="1027488440" sldId="260"/>
+            <ac:spMk id="14" creationId="{10DF5516-49FF-DA3B-DBBA-19CB4001338E}"/>
+          </ac:spMkLst>
+        </pc:spChg>
+        <pc:grpChg chg="mod">
+          <ac:chgData name="Uyen P. Nguyen" userId="S::unguyen7@jh.edu::92021b55-417f-458a-90a7-cf14ced67da3" providerId="AD" clId="Web-{C8FECEF0-CD1E-8A61-D6A9-E78BD7F5FC65}" dt="2026-05-03T17:56:37.154" v="1327" actId="1076"/>
+          <ac:grpSpMkLst>
+            <pc:docMk/>
+            <pc:sldMk cId="1027488440" sldId="260"/>
+            <ac:grpSpMk id="13" creationId="{7BB4382A-4745-A1A8-9F39-D7A86DDA7055}"/>
+          </ac:grpSpMkLst>
+        </pc:grpChg>
+        <pc:grpChg chg="add">
+          <ac:chgData name="Uyen P. Nguyen" userId="S::unguyen7@jh.edu::92021b55-417f-458a-90a7-cf14ced67da3" providerId="AD" clId="Web-{C8FECEF0-CD1E-8A61-D6A9-E78BD7F5FC65}" dt="2026-05-03T17:55:28.403" v="1321"/>
+          <ac:grpSpMkLst>
+            <pc:docMk/>
+            <pc:sldMk cId="1027488440" sldId="260"/>
+            <ac:grpSpMk id="17" creationId="{975A04D3-DE8F-A4B9-D2A6-5650BC663E3B}"/>
+          </ac:grpSpMkLst>
+        </pc:grpChg>
+        <pc:grpChg chg="add">
+          <ac:chgData name="Uyen P. Nguyen" userId="S::unguyen7@jh.edu::92021b55-417f-458a-90a7-cf14ced67da3" providerId="AD" clId="Web-{C8FECEF0-CD1E-8A61-D6A9-E78BD7F5FC65}" dt="2026-05-03T17:55:37.528" v="1322"/>
+          <ac:grpSpMkLst>
+            <pc:docMk/>
+            <pc:sldMk cId="1027488440" sldId="260"/>
+            <ac:grpSpMk id="18" creationId="{980FE866-56D1-DE66-D0B3-0CFA7CA99B90}"/>
+          </ac:grpSpMkLst>
+        </pc:grpChg>
+        <pc:grpChg chg="add">
+          <ac:chgData name="Uyen P. Nguyen" userId="S::unguyen7@jh.edu::92021b55-417f-458a-90a7-cf14ced67da3" providerId="AD" clId="Web-{C8FECEF0-CD1E-8A61-D6A9-E78BD7F5FC65}" dt="2026-05-03T17:55:49.403" v="1323"/>
+          <ac:grpSpMkLst>
+            <pc:docMk/>
+            <pc:sldMk cId="1027488440" sldId="260"/>
+            <ac:grpSpMk id="19" creationId="{68D3C207-3132-7CBD-163E-F7754582A7CD}"/>
+          </ac:grpSpMkLst>
+        </pc:grpChg>
+        <pc:grpChg chg="add">
+          <ac:chgData name="Uyen P. Nguyen" userId="S::unguyen7@jh.edu::92021b55-417f-458a-90a7-cf14ced67da3" providerId="AD" clId="Web-{C8FECEF0-CD1E-8A61-D6A9-E78BD7F5FC65}" dt="2026-05-03T17:55:59.903" v="1324"/>
+          <ac:grpSpMkLst>
+            <pc:docMk/>
+            <pc:sldMk cId="1027488440" sldId="260"/>
+            <ac:grpSpMk id="20" creationId="{BD5A7A0A-D72D-4001-AB1A-C87526CA86BA}"/>
+          </ac:grpSpMkLst>
+        </pc:grpChg>
+        <pc:grpChg chg="add">
+          <ac:chgData name="Uyen P. Nguyen" userId="S::unguyen7@jh.edu::92021b55-417f-458a-90a7-cf14ced67da3" providerId="AD" clId="Web-{C8FECEF0-CD1E-8A61-D6A9-E78BD7F5FC65}" dt="2026-05-03T17:56:26.216" v="1325"/>
+          <ac:grpSpMkLst>
+            <pc:docMk/>
+            <pc:sldMk cId="1027488440" sldId="260"/>
+            <ac:grpSpMk id="21" creationId="{C10CC78D-8020-C571-38C7-A61ED4EC7BD1}"/>
+          </ac:grpSpMkLst>
+        </pc:grpChg>
+      </pc:sldChg>
+      <pc:sldChg chg="modSp">
+        <pc:chgData name="Uyen P. Nguyen" userId="S::unguyen7@jh.edu::92021b55-417f-458a-90a7-cf14ced67da3" providerId="AD" clId="Web-{C8FECEF0-CD1E-8A61-D6A9-E78BD7F5FC65}" dt="2026-05-03T17:33:46.905" v="1257"/>
+        <pc:sldMkLst>
+          <pc:docMk/>
+          <pc:sldMk cId="2092433718" sldId="265"/>
+        </pc:sldMkLst>
+        <pc:graphicFrameChg chg="mod modGraphic">
+          <ac:chgData name="Uyen P. Nguyen" userId="S::unguyen7@jh.edu::92021b55-417f-458a-90a7-cf14ced67da3" providerId="AD" clId="Web-{C8FECEF0-CD1E-8A61-D6A9-E78BD7F5FC65}" dt="2026-05-03T17:33:46.905" v="1257"/>
+          <ac:graphicFrameMkLst>
+            <pc:docMk/>
+            <pc:sldMk cId="2092433718" sldId="265"/>
+            <ac:graphicFrameMk id="3" creationId="{15498308-56C6-0976-7133-85BE4FA98101}"/>
+          </ac:graphicFrameMkLst>
+        </pc:graphicFrameChg>
+      </pc:sldChg>
+      <pc:sldChg chg="modSp">
+        <pc:chgData name="Uyen P. Nguyen" userId="S::unguyen7@jh.edu::92021b55-417f-458a-90a7-cf14ced67da3" providerId="AD" clId="Web-{C8FECEF0-CD1E-8A61-D6A9-E78BD7F5FC65}" dt="2026-05-03T18:15:51.130" v="1400" actId="1076"/>
+        <pc:sldMkLst>
+          <pc:docMk/>
+          <pc:sldMk cId="3518611568" sldId="268"/>
+        </pc:sldMkLst>
+        <pc:spChg chg="mod">
+          <ac:chgData name="Uyen P. Nguyen" userId="S::unguyen7@jh.edu::92021b55-417f-458a-90a7-cf14ced67da3" providerId="AD" clId="Web-{C8FECEF0-CD1E-8A61-D6A9-E78BD7F5FC65}" dt="2026-05-03T18:15:51.130" v="1400" actId="1076"/>
+          <ac:spMkLst>
+            <pc:docMk/>
+            <pc:sldMk cId="3518611568" sldId="268"/>
+            <ac:spMk id="12" creationId="{C9835228-B49B-1902-18C5-E49186D55E26}"/>
+          </ac:spMkLst>
+        </pc:spChg>
+      </pc:sldChg>
+      <pc:sldChg chg="modSp">
+        <pc:chgData name="Uyen P. Nguyen" userId="S::unguyen7@jh.edu::92021b55-417f-458a-90a7-cf14ced67da3" providerId="AD" clId="Web-{C8FECEF0-CD1E-8A61-D6A9-E78BD7F5FC65}" dt="2026-05-03T18:17:18.540" v="1408" actId="1076"/>
+        <pc:sldMkLst>
+          <pc:docMk/>
+          <pc:sldMk cId="3184180411" sldId="269"/>
+        </pc:sldMkLst>
+        <pc:spChg chg="mod">
+          <ac:chgData name="Uyen P. Nguyen" userId="S::unguyen7@jh.edu::92021b55-417f-458a-90a7-cf14ced67da3" providerId="AD" clId="Web-{C8FECEF0-CD1E-8A61-D6A9-E78BD7F5FC65}" dt="2026-05-03T18:17:18.540" v="1408" actId="1076"/>
+          <ac:spMkLst>
+            <pc:docMk/>
+            <pc:sldMk cId="3184180411" sldId="269"/>
+            <ac:spMk id="12" creationId="{A6A554D2-D37E-1CB5-3350-39ADF0933854}"/>
+          </ac:spMkLst>
+        </pc:spChg>
+      </pc:sldChg>
+      <pc:sldChg chg="addSp delSp modSp add replId">
+        <pc:chgData name="Uyen P. Nguyen" userId="S::unguyen7@jh.edu::92021b55-417f-458a-90a7-cf14ced67da3" providerId="AD" clId="Web-{C8FECEF0-CD1E-8A61-D6A9-E78BD7F5FC65}" dt="2026-05-03T02:50:11.282" v="1180" actId="1076"/>
+        <pc:sldMkLst>
+          <pc:docMk/>
+          <pc:sldMk cId="4084286138" sldId="271"/>
+        </pc:sldMkLst>
+        <pc:spChg chg="mod">
+          <ac:chgData name="Uyen P. Nguyen" userId="S::unguyen7@jh.edu::92021b55-417f-458a-90a7-cf14ced67da3" providerId="AD" clId="Web-{C8FECEF0-CD1E-8A61-D6A9-E78BD7F5FC65}" dt="2026-05-03T02:46:33.278" v="1175" actId="20577"/>
+          <ac:spMkLst>
+            <pc:docMk/>
+            <pc:sldMk cId="4084286138" sldId="271"/>
+            <ac:spMk id="9" creationId="{1A137F4C-C655-AEC0-1CB2-0EA82D3940A6}"/>
+          </ac:spMkLst>
+        </pc:spChg>
+        <pc:picChg chg="add del mod">
+          <ac:chgData name="Uyen P. Nguyen" userId="S::unguyen7@jh.edu::92021b55-417f-458a-90a7-cf14ced67da3" providerId="AD" clId="Web-{C8FECEF0-CD1E-8A61-D6A9-E78BD7F5FC65}" dt="2026-05-03T02:17:07.089" v="690"/>
+          <ac:picMkLst>
+            <pc:docMk/>
+            <pc:sldMk cId="4084286138" sldId="271"/>
+            <ac:picMk id="2" creationId="{AE18F132-165E-C014-30E8-5E3ED3F7A2F0}"/>
+          </ac:picMkLst>
+        </pc:picChg>
+        <pc:picChg chg="add mod">
+          <ac:chgData name="Uyen P. Nguyen" userId="S::unguyen7@jh.edu::92021b55-417f-458a-90a7-cf14ced67da3" providerId="AD" clId="Web-{C8FECEF0-CD1E-8A61-D6A9-E78BD7F5FC65}" dt="2026-05-03T02:50:11.282" v="1180" actId="1076"/>
+          <ac:picMkLst>
+            <pc:docMk/>
+            <pc:sldMk cId="4084286138" sldId="271"/>
+            <ac:picMk id="3" creationId="{61CE029C-81A4-01FF-5310-3BDCA89CE4C5}"/>
+          </ac:picMkLst>
+        </pc:picChg>
+        <pc:picChg chg="add del mod">
+          <ac:chgData name="Uyen P. Nguyen" userId="S::unguyen7@jh.edu::92021b55-417f-458a-90a7-cf14ced67da3" providerId="AD" clId="Web-{C8FECEF0-CD1E-8A61-D6A9-E78BD7F5FC65}" dt="2026-05-03T02:49:54.611" v="1176"/>
+          <ac:picMkLst>
+            <pc:docMk/>
+            <pc:sldMk cId="4084286138" sldId="271"/>
+            <ac:picMk id="4" creationId="{1921E75B-1887-5316-4F3E-031DBD7723FA}"/>
+          </ac:picMkLst>
+        </pc:picChg>
+        <pc:picChg chg="add del mod">
+          <ac:chgData name="Uyen P. Nguyen" userId="S::unguyen7@jh.edu::92021b55-417f-458a-90a7-cf14ced67da3" providerId="AD" clId="Web-{C8FECEF0-CD1E-8A61-D6A9-E78BD7F5FC65}" dt="2026-05-03T02:38:44.481" v="848"/>
+          <ac:picMkLst>
+            <pc:docMk/>
+            <pc:sldMk cId="4084286138" sldId="271"/>
+            <ac:picMk id="5" creationId="{A4C3CCE7-63B8-FEC2-602B-82F342CD37C9}"/>
+          </ac:picMkLst>
+        </pc:picChg>
+        <pc:picChg chg="add del mod">
+          <ac:chgData name="Uyen P. Nguyen" userId="S::unguyen7@jh.edu::92021b55-417f-458a-90a7-cf14ced67da3" providerId="AD" clId="Web-{C8FECEF0-CD1E-8A61-D6A9-E78BD7F5FC65}" dt="2026-05-03T02:39:48.606" v="853"/>
+          <ac:picMkLst>
+            <pc:docMk/>
+            <pc:sldMk cId="4084286138" sldId="271"/>
+            <ac:picMk id="6" creationId="{1CAE2227-7CE6-3B01-6B7D-9017B908CB88}"/>
+          </ac:picMkLst>
+        </pc:picChg>
+        <pc:picChg chg="add mod">
+          <ac:chgData name="Uyen P. Nguyen" userId="S::unguyen7@jh.edu::92021b55-417f-458a-90a7-cf14ced67da3" providerId="AD" clId="Web-{C8FECEF0-CD1E-8A61-D6A9-E78BD7F5FC65}" dt="2026-05-03T02:50:08.845" v="1179" actId="1076"/>
+          <ac:picMkLst>
+            <pc:docMk/>
+            <pc:sldMk cId="4084286138" sldId="271"/>
+            <ac:picMk id="8" creationId="{B38A110A-4554-DD53-7B39-D305EC31083C}"/>
+          </ac:picMkLst>
+        </pc:picChg>
+      </pc:sldChg>
+    </pc:docChg>
+  </pc:docChgLst>
+  <pc:docChgLst>
+    <pc:chgData name="Uyen P. Nguyen" userId="S::unguyen7@jh.edu::92021b55-417f-458a-90a7-cf14ced67da3" providerId="AD" clId="Web-{1C5DA43F-1144-560B-A996-9F9957834AF2}"/>
+    <pc:docChg chg="modSld">
+      <pc:chgData name="Uyen P. Nguyen" userId="S::unguyen7@jh.edu::92021b55-417f-458a-90a7-cf14ced67da3" providerId="AD" clId="Web-{1C5DA43F-1144-560B-A996-9F9957834AF2}" dt="2026-05-03T01:28:46.789" v="180" actId="20577"/>
+      <pc:docMkLst>
+        <pc:docMk/>
+      </pc:docMkLst>
+      <pc:sldChg chg="modSp">
+        <pc:chgData name="Uyen P. Nguyen" userId="S::unguyen7@jh.edu::92021b55-417f-458a-90a7-cf14ced67da3" providerId="AD" clId="Web-{1C5DA43F-1144-560B-A996-9F9957834AF2}" dt="2026-05-03T01:28:46.789" v="180" actId="20577"/>
+        <pc:sldMkLst>
+          <pc:docMk/>
+          <pc:sldMk cId="2133178391" sldId="257"/>
+        </pc:sldMkLst>
+        <pc:spChg chg="mod">
+          <ac:chgData name="Uyen P. Nguyen" userId="S::unguyen7@jh.edu::92021b55-417f-458a-90a7-cf14ced67da3" providerId="AD" clId="Web-{1C5DA43F-1144-560B-A996-9F9957834AF2}" dt="2026-05-03T00:49:04.439" v="76" actId="20577"/>
+          <ac:spMkLst>
+            <pc:docMk/>
+            <pc:sldMk cId="2133178391" sldId="257"/>
+            <ac:spMk id="7" creationId="{D159B653-A360-6E33-D2F6-A0D58B9935A5}"/>
+          </ac:spMkLst>
+        </pc:spChg>
+        <pc:spChg chg="mod">
+          <ac:chgData name="Uyen P. Nguyen" userId="S::unguyen7@jh.edu::92021b55-417f-458a-90a7-cf14ced67da3" providerId="AD" clId="Web-{1C5DA43F-1144-560B-A996-9F9957834AF2}" dt="2026-05-03T01:28:46.789" v="180" actId="20577"/>
+          <ac:spMkLst>
+            <pc:docMk/>
+            <pc:sldMk cId="2133178391" sldId="257"/>
+            <ac:spMk id="9" creationId="{EABC739E-24F8-66FD-A37D-4CF4952DF00F}"/>
+          </ac:spMkLst>
+        </pc:spChg>
+      </pc:sldChg>
+      <pc:sldChg chg="modSp">
+        <pc:chgData name="Uyen P. Nguyen" userId="S::unguyen7@jh.edu::92021b55-417f-458a-90a7-cf14ced67da3" providerId="AD" clId="Web-{1C5DA43F-1144-560B-A996-9F9957834AF2}" dt="2026-05-03T00:49:00.532" v="72" actId="20577"/>
+        <pc:sldMkLst>
+          <pc:docMk/>
+          <pc:sldMk cId="1284274485" sldId="259"/>
+        </pc:sldMkLst>
+        <pc:spChg chg="mod">
+          <ac:chgData name="Uyen P. Nguyen" userId="S::unguyen7@jh.edu::92021b55-417f-458a-90a7-cf14ced67da3" providerId="AD" clId="Web-{1C5DA43F-1144-560B-A996-9F9957834AF2}" dt="2026-05-03T00:49:00.532" v="72" actId="20577"/>
+          <ac:spMkLst>
+            <pc:docMk/>
+            <pc:sldMk cId="1284274485" sldId="259"/>
+            <ac:spMk id="7" creationId="{32741F24-76C7-9C01-1DBD-5EE3762FAACA}"/>
+          </ac:spMkLst>
+        </pc:spChg>
+      </pc:sldChg>
+      <pc:sldChg chg="modSp">
+        <pc:chgData name="Uyen P. Nguyen" userId="S::unguyen7@jh.edu::92021b55-417f-458a-90a7-cf14ced67da3" providerId="AD" clId="Web-{1C5DA43F-1144-560B-A996-9F9957834AF2}" dt="2026-05-03T00:48:55.797" v="67" actId="20577"/>
+        <pc:sldMkLst>
+          <pc:docMk/>
+          <pc:sldMk cId="1027488440" sldId="260"/>
+        </pc:sldMkLst>
+        <pc:spChg chg="mod">
+          <ac:chgData name="Uyen P. Nguyen" userId="S::unguyen7@jh.edu::92021b55-417f-458a-90a7-cf14ced67da3" providerId="AD" clId="Web-{1C5DA43F-1144-560B-A996-9F9957834AF2}" dt="2026-05-03T00:48:55.797" v="67" actId="20577"/>
+          <ac:spMkLst>
+            <pc:docMk/>
+            <pc:sldMk cId="1027488440" sldId="260"/>
+            <ac:spMk id="7" creationId="{2C42AF74-C537-A886-53B7-E8DF3240B7B7}"/>
+          </ac:spMkLst>
+        </pc:spChg>
+      </pc:sldChg>
+      <pc:sldChg chg="modSp">
+        <pc:chgData name="Uyen P. Nguyen" userId="S::unguyen7@jh.edu::92021b55-417f-458a-90a7-cf14ced67da3" providerId="AD" clId="Web-{1C5DA43F-1144-560B-A996-9F9957834AF2}" dt="2026-05-03T00:46:37.606" v="25"/>
+        <pc:sldMkLst>
+          <pc:docMk/>
+          <pc:sldMk cId="2092433718" sldId="265"/>
+        </pc:sldMkLst>
+        <pc:graphicFrameChg chg="mod modGraphic">
+          <ac:chgData name="Uyen P. Nguyen" userId="S::unguyen7@jh.edu::92021b55-417f-458a-90a7-cf14ced67da3" providerId="AD" clId="Web-{1C5DA43F-1144-560B-A996-9F9957834AF2}" dt="2026-05-03T00:46:37.606" v="25"/>
           <ac:graphicFrameMkLst>
             <pc:docMk/>
             <pc:sldMk cId="2092433718" sldId="265"/>
@@ -205,266 +1279,46 @@
     </pc:docChg>
   </pc:docChgLst>
   <pc:docChgLst>
-    <pc:chgData name="Uyen P. Nguyen" userId="S::unguyen7@jh.edu::92021b55-417f-458a-90a7-cf14ced67da3" providerId="AD" clId="Web-{C8FECEF0-CD1E-8A61-D6A9-E78BD7F5FC65}"/>
-    <pc:docChg chg="addSld modSld sldOrd">
-      <pc:chgData name="Uyen P. Nguyen" userId="S::unguyen7@jh.edu::92021b55-417f-458a-90a7-cf14ced67da3" providerId="AD" clId="Web-{C8FECEF0-CD1E-8A61-D6A9-E78BD7F5FC65}" dt="2026-05-03T02:56:56.270" v="1241" actId="20577"/>
+    <pc:chgData name="Uyen P. Nguyen" userId="S::unguyen7@jh.edu::92021b55-417f-458a-90a7-cf14ced67da3" providerId="AD" clId="Web-{DC34001B-F5F7-B5C9-777E-0A9D433890D2}"/>
+    <pc:docChg chg="addSld delSld">
+      <pc:chgData name="Uyen P. Nguyen" userId="S::unguyen7@jh.edu::92021b55-417f-458a-90a7-cf14ced67da3" providerId="AD" clId="Web-{DC34001B-F5F7-B5C9-777E-0A9D433890D2}" dt="2026-05-03T19:56:38.024" v="6"/>
       <pc:docMkLst>
         <pc:docMk/>
       </pc:docMkLst>
-      <pc:sldChg chg="modSp">
-        <pc:chgData name="Uyen P. Nguyen" userId="S::unguyen7@jh.edu::92021b55-417f-458a-90a7-cf14ced67da3" providerId="AD" clId="Web-{C8FECEF0-CD1E-8A61-D6A9-E78BD7F5FC65}" dt="2026-05-03T01:33:00.650" v="1" actId="20577"/>
+      <pc:sldChg chg="del">
+        <pc:chgData name="Uyen P. Nguyen" userId="S::unguyen7@jh.edu::92021b55-417f-458a-90a7-cf14ced67da3" providerId="AD" clId="Web-{DC34001B-F5F7-B5C9-777E-0A9D433890D2}" dt="2026-05-03T19:55:35.680" v="1"/>
         <pc:sldMkLst>
           <pc:docMk/>
-          <pc:sldMk cId="4131611360" sldId="256"/>
+          <pc:sldMk cId="1503209594" sldId="262"/>
         </pc:sldMkLst>
-        <pc:spChg chg="mod">
-          <ac:chgData name="Uyen P. Nguyen" userId="S::unguyen7@jh.edu::92021b55-417f-458a-90a7-cf14ced67da3" providerId="AD" clId="Web-{C8FECEF0-CD1E-8A61-D6A9-E78BD7F5FC65}" dt="2026-05-03T01:33:00.650" v="1" actId="20577"/>
-          <ac:spMkLst>
-            <pc:docMk/>
-            <pc:sldMk cId="4131611360" sldId="256"/>
-            <ac:spMk id="7" creationId="{E4378A81-279B-CA9A-8E50-130D2D276DA6}"/>
-          </ac:spMkLst>
-        </pc:spChg>
       </pc:sldChg>
-      <pc:sldChg chg="addSp modSp ord">
-        <pc:chgData name="Uyen P. Nguyen" userId="S::unguyen7@jh.edu::92021b55-417f-458a-90a7-cf14ced67da3" providerId="AD" clId="Web-{C8FECEF0-CD1E-8A61-D6A9-E78BD7F5FC65}" dt="2026-05-03T02:51:57.704" v="1229" actId="20577"/>
+      <pc:sldChg chg="add del">
+        <pc:chgData name="Uyen P. Nguyen" userId="S::unguyen7@jh.edu::92021b55-417f-458a-90a7-cf14ced67da3" providerId="AD" clId="Web-{DC34001B-F5F7-B5C9-777E-0A9D433890D2}" dt="2026-05-03T19:55:57.008" v="4"/>
         <pc:sldMkLst>
           <pc:docMk/>
-          <pc:sldMk cId="2133178391" sldId="257"/>
+          <pc:sldMk cId="3045145814" sldId="263"/>
         </pc:sldMkLst>
-        <pc:spChg chg="add mod">
-          <ac:chgData name="Uyen P. Nguyen" userId="S::unguyen7@jh.edu::92021b55-417f-458a-90a7-cf14ced67da3" providerId="AD" clId="Web-{C8FECEF0-CD1E-8A61-D6A9-E78BD7F5FC65}" dt="2026-05-03T02:51:57.704" v="1229" actId="20577"/>
-          <ac:spMkLst>
-            <pc:docMk/>
-            <pc:sldMk cId="2133178391" sldId="257"/>
-            <ac:spMk id="6" creationId="{AC1BE2C5-A31E-34A4-5D30-482B264F9B75}"/>
-          </ac:spMkLst>
-        </pc:spChg>
-        <pc:spChg chg="mod">
-          <ac:chgData name="Uyen P. Nguyen" userId="S::unguyen7@jh.edu::92021b55-417f-458a-90a7-cf14ced67da3" providerId="AD" clId="Web-{C8FECEF0-CD1E-8A61-D6A9-E78BD7F5FC65}" dt="2026-05-03T02:50:59.611" v="1212" actId="20577"/>
-          <ac:spMkLst>
-            <pc:docMk/>
-            <pc:sldMk cId="2133178391" sldId="257"/>
-            <ac:spMk id="7" creationId="{D159B653-A360-6E33-D2F6-A0D58B9935A5}"/>
-          </ac:spMkLst>
-        </pc:spChg>
-        <pc:spChg chg="mod">
-          <ac:chgData name="Uyen P. Nguyen" userId="S::unguyen7@jh.edu::92021b55-417f-458a-90a7-cf14ced67da3" providerId="AD" clId="Web-{C8FECEF0-CD1E-8A61-D6A9-E78BD7F5FC65}" dt="2026-05-03T02:51:06.907" v="1225" actId="20577"/>
-          <ac:spMkLst>
-            <pc:docMk/>
-            <pc:sldMk cId="2133178391" sldId="257"/>
-            <ac:spMk id="9" creationId="{EABC739E-24F8-66FD-A37D-4CF4952DF00F}"/>
-          </ac:spMkLst>
-        </pc:spChg>
-        <pc:picChg chg="add">
-          <ac:chgData name="Uyen P. Nguyen" userId="S::unguyen7@jh.edu::92021b55-417f-458a-90a7-cf14ced67da3" providerId="AD" clId="Web-{C8FECEF0-CD1E-8A61-D6A9-E78BD7F5FC65}" dt="2026-05-03T02:39:07.340" v="850"/>
-          <ac:picMkLst>
-            <pc:docMk/>
-            <pc:sldMk cId="2133178391" sldId="257"/>
-            <ac:picMk id="3" creationId="{8B02BF0E-5668-4499-1048-1609015D312D}"/>
-          </ac:picMkLst>
-        </pc:picChg>
-        <pc:picChg chg="add">
-          <ac:chgData name="Uyen P. Nguyen" userId="S::unguyen7@jh.edu::92021b55-417f-458a-90a7-cf14ced67da3" providerId="AD" clId="Web-{C8FECEF0-CD1E-8A61-D6A9-E78BD7F5FC65}" dt="2026-05-03T02:39:44.637" v="852"/>
-          <ac:picMkLst>
-            <pc:docMk/>
-            <pc:sldMk cId="2133178391" sldId="257"/>
-            <ac:picMk id="5" creationId="{659EEF7E-8B90-3FFC-CFF0-C5E61DDDF975}"/>
-          </ac:picMkLst>
-        </pc:picChg>
       </pc:sldChg>
-      <pc:sldChg chg="addSp modSp">
-        <pc:chgData name="Uyen P. Nguyen" userId="S::unguyen7@jh.edu::92021b55-417f-458a-90a7-cf14ced67da3" providerId="AD" clId="Web-{C8FECEF0-CD1E-8A61-D6A9-E78BD7F5FC65}" dt="2026-05-03T02:52:11.657" v="1233" actId="20577"/>
+      <pc:sldChg chg="add del">
+        <pc:chgData name="Uyen P. Nguyen" userId="S::unguyen7@jh.edu::92021b55-417f-458a-90a7-cf14ced67da3" providerId="AD" clId="Web-{DC34001B-F5F7-B5C9-777E-0A9D433890D2}" dt="2026-05-03T19:56:26.508" v="5"/>
         <pc:sldMkLst>
           <pc:docMk/>
-          <pc:sldMk cId="1284274485" sldId="259"/>
+          <pc:sldMk cId="1775556368" sldId="264"/>
         </pc:sldMkLst>
-        <pc:spChg chg="add mod">
-          <ac:chgData name="Uyen P. Nguyen" userId="S::unguyen7@jh.edu::92021b55-417f-458a-90a7-cf14ced67da3" providerId="AD" clId="Web-{C8FECEF0-CD1E-8A61-D6A9-E78BD7F5FC65}" dt="2026-05-03T02:52:11.657" v="1233" actId="20577"/>
-          <ac:spMkLst>
-            <pc:docMk/>
-            <pc:sldMk cId="1284274485" sldId="259"/>
-            <ac:spMk id="2" creationId="{6D7D5D24-0228-DB90-2628-3F899EC62B3D}"/>
-          </ac:spMkLst>
-        </pc:spChg>
-        <pc:spChg chg="mod">
-          <ac:chgData name="Uyen P. Nguyen" userId="S::unguyen7@jh.edu::92021b55-417f-458a-90a7-cf14ced67da3" providerId="AD" clId="Web-{C8FECEF0-CD1E-8A61-D6A9-E78BD7F5FC65}" dt="2026-05-03T02:25:32.262" v="779" actId="20577"/>
-          <ac:spMkLst>
-            <pc:docMk/>
-            <pc:sldMk cId="1284274485" sldId="259"/>
-            <ac:spMk id="9" creationId="{8DEAAD5C-2D15-E82B-FA78-5A05362D915A}"/>
-          </ac:spMkLst>
-        </pc:spChg>
       </pc:sldChg>
-      <pc:sldChg chg="addSp modSp">
-        <pc:chgData name="Uyen P. Nguyen" userId="S::unguyen7@jh.edu::92021b55-417f-458a-90a7-cf14ced67da3" providerId="AD" clId="Web-{C8FECEF0-CD1E-8A61-D6A9-E78BD7F5FC65}" dt="2026-05-03T02:56:56.270" v="1241" actId="20577"/>
+      <pc:sldChg chg="add">
+        <pc:chgData name="Uyen P. Nguyen" userId="S::unguyen7@jh.edu::92021b55-417f-458a-90a7-cf14ced67da3" providerId="AD" clId="Web-{DC34001B-F5F7-B5C9-777E-0A9D433890D2}" dt="2026-05-03T19:55:31.070" v="0"/>
         <pc:sldMkLst>
           <pc:docMk/>
-          <pc:sldMk cId="1027488440" sldId="260"/>
+          <pc:sldMk cId="244233412" sldId="272"/>
         </pc:sldMkLst>
-        <pc:spChg chg="add mod">
-          <ac:chgData name="Uyen P. Nguyen" userId="S::unguyen7@jh.edu::92021b55-417f-458a-90a7-cf14ced67da3" providerId="AD" clId="Web-{C8FECEF0-CD1E-8A61-D6A9-E78BD7F5FC65}" dt="2026-05-03T02:56:56.270" v="1241" actId="20577"/>
-          <ac:spMkLst>
-            <pc:docMk/>
-            <pc:sldMk cId="1027488440" sldId="260"/>
-            <ac:spMk id="3" creationId="{1B2681E1-C30A-4694-4E82-C776EAF05DC0}"/>
-          </ac:spMkLst>
-        </pc:spChg>
       </pc:sldChg>
-      <pc:sldChg chg="modSp">
-        <pc:chgData name="Uyen P. Nguyen" userId="S::unguyen7@jh.edu::92021b55-417f-458a-90a7-cf14ced67da3" providerId="AD" clId="Web-{C8FECEF0-CD1E-8A61-D6A9-E78BD7F5FC65}" dt="2026-05-03T02:54:29.457" v="1237"/>
+      <pc:sldChg chg="add">
+        <pc:chgData name="Uyen P. Nguyen" userId="S::unguyen7@jh.edu::92021b55-417f-458a-90a7-cf14ced67da3" providerId="AD" clId="Web-{DC34001B-F5F7-B5C9-777E-0A9D433890D2}" dt="2026-05-03T19:56:38.024" v="6"/>
         <pc:sldMkLst>
           <pc:docMk/>
-          <pc:sldMk cId="2092433718" sldId="265"/>
+          <pc:sldMk cId="105113814" sldId="273"/>
         </pc:sldMkLst>
-        <pc:graphicFrameChg chg="mod modGraphic">
-          <ac:chgData name="Uyen P. Nguyen" userId="S::unguyen7@jh.edu::92021b55-417f-458a-90a7-cf14ced67da3" providerId="AD" clId="Web-{C8FECEF0-CD1E-8A61-D6A9-E78BD7F5FC65}" dt="2026-05-03T02:54:29.457" v="1237"/>
-          <ac:graphicFrameMkLst>
-            <pc:docMk/>
-            <pc:sldMk cId="2092433718" sldId="265"/>
-            <ac:graphicFrameMk id="3" creationId="{15498308-56C6-0976-7133-85BE4FA98101}"/>
-          </ac:graphicFrameMkLst>
-        </pc:graphicFrameChg>
-      </pc:sldChg>
-      <pc:sldChg chg="addSp delSp modSp add replId">
-        <pc:chgData name="Uyen P. Nguyen" userId="S::unguyen7@jh.edu::92021b55-417f-458a-90a7-cf14ced67da3" providerId="AD" clId="Web-{C8FECEF0-CD1E-8A61-D6A9-E78BD7F5FC65}" dt="2026-05-03T02:50:11.282" v="1180" actId="1076"/>
-        <pc:sldMkLst>
-          <pc:docMk/>
-          <pc:sldMk cId="4084286138" sldId="271"/>
-        </pc:sldMkLst>
-        <pc:spChg chg="mod">
-          <ac:chgData name="Uyen P. Nguyen" userId="S::unguyen7@jh.edu::92021b55-417f-458a-90a7-cf14ced67da3" providerId="AD" clId="Web-{C8FECEF0-CD1E-8A61-D6A9-E78BD7F5FC65}" dt="2026-05-03T02:46:33.278" v="1175" actId="20577"/>
-          <ac:spMkLst>
-            <pc:docMk/>
-            <pc:sldMk cId="4084286138" sldId="271"/>
-            <ac:spMk id="9" creationId="{1A137F4C-C655-AEC0-1CB2-0EA82D3940A6}"/>
-          </ac:spMkLst>
-        </pc:spChg>
-        <pc:picChg chg="add del mod">
-          <ac:chgData name="Uyen P. Nguyen" userId="S::unguyen7@jh.edu::92021b55-417f-458a-90a7-cf14ced67da3" providerId="AD" clId="Web-{C8FECEF0-CD1E-8A61-D6A9-E78BD7F5FC65}" dt="2026-05-03T02:17:07.089" v="690"/>
-          <ac:picMkLst>
-            <pc:docMk/>
-            <pc:sldMk cId="4084286138" sldId="271"/>
-            <ac:picMk id="2" creationId="{AE18F132-165E-C014-30E8-5E3ED3F7A2F0}"/>
-          </ac:picMkLst>
-        </pc:picChg>
-        <pc:picChg chg="add mod">
-          <ac:chgData name="Uyen P. Nguyen" userId="S::unguyen7@jh.edu::92021b55-417f-458a-90a7-cf14ced67da3" providerId="AD" clId="Web-{C8FECEF0-CD1E-8A61-D6A9-E78BD7F5FC65}" dt="2026-05-03T02:50:11.282" v="1180" actId="1076"/>
-          <ac:picMkLst>
-            <pc:docMk/>
-            <pc:sldMk cId="4084286138" sldId="271"/>
-            <ac:picMk id="3" creationId="{61CE029C-81A4-01FF-5310-3BDCA89CE4C5}"/>
-          </ac:picMkLst>
-        </pc:picChg>
-        <pc:picChg chg="add del mod">
-          <ac:chgData name="Uyen P. Nguyen" userId="S::unguyen7@jh.edu::92021b55-417f-458a-90a7-cf14ced67da3" providerId="AD" clId="Web-{C8FECEF0-CD1E-8A61-D6A9-E78BD7F5FC65}" dt="2026-05-03T02:49:54.611" v="1176"/>
-          <ac:picMkLst>
-            <pc:docMk/>
-            <pc:sldMk cId="4084286138" sldId="271"/>
-            <ac:picMk id="4" creationId="{1921E75B-1887-5316-4F3E-031DBD7723FA}"/>
-          </ac:picMkLst>
-        </pc:picChg>
-        <pc:picChg chg="add del mod">
-          <ac:chgData name="Uyen P. Nguyen" userId="S::unguyen7@jh.edu::92021b55-417f-458a-90a7-cf14ced67da3" providerId="AD" clId="Web-{C8FECEF0-CD1E-8A61-D6A9-E78BD7F5FC65}" dt="2026-05-03T02:38:44.481" v="848"/>
-          <ac:picMkLst>
-            <pc:docMk/>
-            <pc:sldMk cId="4084286138" sldId="271"/>
-            <ac:picMk id="5" creationId="{A4C3CCE7-63B8-FEC2-602B-82F342CD37C9}"/>
-          </ac:picMkLst>
-        </pc:picChg>
-        <pc:picChg chg="add del mod">
-          <ac:chgData name="Uyen P. Nguyen" userId="S::unguyen7@jh.edu::92021b55-417f-458a-90a7-cf14ced67da3" providerId="AD" clId="Web-{C8FECEF0-CD1E-8A61-D6A9-E78BD7F5FC65}" dt="2026-05-03T02:39:48.606" v="853"/>
-          <ac:picMkLst>
-            <pc:docMk/>
-            <pc:sldMk cId="4084286138" sldId="271"/>
-            <ac:picMk id="6" creationId="{1CAE2227-7CE6-3B01-6B7D-9017B908CB88}"/>
-          </ac:picMkLst>
-        </pc:picChg>
-        <pc:picChg chg="add mod">
-          <ac:chgData name="Uyen P. Nguyen" userId="S::unguyen7@jh.edu::92021b55-417f-458a-90a7-cf14ced67da3" providerId="AD" clId="Web-{C8FECEF0-CD1E-8A61-D6A9-E78BD7F5FC65}" dt="2026-05-03T02:50:08.845" v="1179" actId="1076"/>
-          <ac:picMkLst>
-            <pc:docMk/>
-            <pc:sldMk cId="4084286138" sldId="271"/>
-            <ac:picMk id="8" creationId="{B38A110A-4554-DD53-7B39-D305EC31083C}"/>
-          </ac:picMkLst>
-        </pc:picChg>
-      </pc:sldChg>
-    </pc:docChg>
-  </pc:docChgLst>
-  <pc:docChgLst>
-    <pc:chgData name="Uyen P. Nguyen" userId="S::unguyen7@jh.edu::92021b55-417f-458a-90a7-cf14ced67da3" providerId="AD" clId="Web-{1C5DA43F-1144-560B-A996-9F9957834AF2}"/>
-    <pc:docChg chg="modSld">
-      <pc:chgData name="Uyen P. Nguyen" userId="S::unguyen7@jh.edu::92021b55-417f-458a-90a7-cf14ced67da3" providerId="AD" clId="Web-{1C5DA43F-1144-560B-A996-9F9957834AF2}" dt="2026-05-03T01:28:46.789" v="180" actId="20577"/>
-      <pc:docMkLst>
-        <pc:docMk/>
-      </pc:docMkLst>
-      <pc:sldChg chg="modSp">
-        <pc:chgData name="Uyen P. Nguyen" userId="S::unguyen7@jh.edu::92021b55-417f-458a-90a7-cf14ced67da3" providerId="AD" clId="Web-{1C5DA43F-1144-560B-A996-9F9957834AF2}" dt="2026-05-03T01:28:46.789" v="180" actId="20577"/>
-        <pc:sldMkLst>
-          <pc:docMk/>
-          <pc:sldMk cId="2133178391" sldId="257"/>
-        </pc:sldMkLst>
-        <pc:spChg chg="mod">
-          <ac:chgData name="Uyen P. Nguyen" userId="S::unguyen7@jh.edu::92021b55-417f-458a-90a7-cf14ced67da3" providerId="AD" clId="Web-{1C5DA43F-1144-560B-A996-9F9957834AF2}" dt="2026-05-03T00:49:04.439" v="76" actId="20577"/>
-          <ac:spMkLst>
-            <pc:docMk/>
-            <pc:sldMk cId="2133178391" sldId="257"/>
-            <ac:spMk id="7" creationId="{D159B653-A360-6E33-D2F6-A0D58B9935A5}"/>
-          </ac:spMkLst>
-        </pc:spChg>
-        <pc:spChg chg="mod">
-          <ac:chgData name="Uyen P. Nguyen" userId="S::unguyen7@jh.edu::92021b55-417f-458a-90a7-cf14ced67da3" providerId="AD" clId="Web-{1C5DA43F-1144-560B-A996-9F9957834AF2}" dt="2026-05-03T01:28:46.789" v="180" actId="20577"/>
-          <ac:spMkLst>
-            <pc:docMk/>
-            <pc:sldMk cId="2133178391" sldId="257"/>
-            <ac:spMk id="9" creationId="{EABC739E-24F8-66FD-A37D-4CF4952DF00F}"/>
-          </ac:spMkLst>
-        </pc:spChg>
-      </pc:sldChg>
-      <pc:sldChg chg="modSp">
-        <pc:chgData name="Uyen P. Nguyen" userId="S::unguyen7@jh.edu::92021b55-417f-458a-90a7-cf14ced67da3" providerId="AD" clId="Web-{1C5DA43F-1144-560B-A996-9F9957834AF2}" dt="2026-05-03T00:49:00.532" v="72" actId="20577"/>
-        <pc:sldMkLst>
-          <pc:docMk/>
-          <pc:sldMk cId="1284274485" sldId="259"/>
-        </pc:sldMkLst>
-        <pc:spChg chg="mod">
-          <ac:chgData name="Uyen P. Nguyen" userId="S::unguyen7@jh.edu::92021b55-417f-458a-90a7-cf14ced67da3" providerId="AD" clId="Web-{1C5DA43F-1144-560B-A996-9F9957834AF2}" dt="2026-05-03T00:49:00.532" v="72" actId="20577"/>
-          <ac:spMkLst>
-            <pc:docMk/>
-            <pc:sldMk cId="1284274485" sldId="259"/>
-            <ac:spMk id="7" creationId="{32741F24-76C7-9C01-1DBD-5EE3762FAACA}"/>
-          </ac:spMkLst>
-        </pc:spChg>
-      </pc:sldChg>
-      <pc:sldChg chg="modSp">
-        <pc:chgData name="Uyen P. Nguyen" userId="S::unguyen7@jh.edu::92021b55-417f-458a-90a7-cf14ced67da3" providerId="AD" clId="Web-{1C5DA43F-1144-560B-A996-9F9957834AF2}" dt="2026-05-03T00:48:55.797" v="67" actId="20577"/>
-        <pc:sldMkLst>
-          <pc:docMk/>
-          <pc:sldMk cId="1027488440" sldId="260"/>
-        </pc:sldMkLst>
-        <pc:spChg chg="mod">
-          <ac:chgData name="Uyen P. Nguyen" userId="S::unguyen7@jh.edu::92021b55-417f-458a-90a7-cf14ced67da3" providerId="AD" clId="Web-{1C5DA43F-1144-560B-A996-9F9957834AF2}" dt="2026-05-03T00:48:55.797" v="67" actId="20577"/>
-          <ac:spMkLst>
-            <pc:docMk/>
-            <pc:sldMk cId="1027488440" sldId="260"/>
-            <ac:spMk id="7" creationId="{2C42AF74-C537-A886-53B7-E8DF3240B7B7}"/>
-          </ac:spMkLst>
-        </pc:spChg>
-      </pc:sldChg>
-      <pc:sldChg chg="modSp">
-        <pc:chgData name="Uyen P. Nguyen" userId="S::unguyen7@jh.edu::92021b55-417f-458a-90a7-cf14ced67da3" providerId="AD" clId="Web-{1C5DA43F-1144-560B-A996-9F9957834AF2}" dt="2026-05-03T00:46:37.606" v="25"/>
-        <pc:sldMkLst>
-          <pc:docMk/>
-          <pc:sldMk cId="2092433718" sldId="265"/>
-        </pc:sldMkLst>
-        <pc:graphicFrameChg chg="mod modGraphic">
-          <ac:chgData name="Uyen P. Nguyen" userId="S::unguyen7@jh.edu::92021b55-417f-458a-90a7-cf14ced67da3" providerId="AD" clId="Web-{1C5DA43F-1144-560B-A996-9F9957834AF2}" dt="2026-05-03T00:46:37.606" v="25"/>
-          <ac:graphicFrameMkLst>
-            <pc:docMk/>
-            <pc:sldMk cId="2092433718" sldId="265"/>
-            <ac:graphicFrameMk id="3" creationId="{15498308-56C6-0976-7133-85BE4FA98101}"/>
-          </ac:graphicFrameMkLst>
-        </pc:graphicFrameChg>
       </pc:sldChg>
     </pc:docChg>
   </pc:docChgLst>
@@ -4349,10 +5203,10 @@
                 <a:solidFill>
                   <a:srgbClr val="002060"/>
                 </a:solidFill>
-                <a:latin typeface="Arial" panose="020B0604020202020204" pitchFamily="34" charset="0"/>
-                <a:cs typeface="Arial" panose="020B0604020202020204" pitchFamily="34" charset="0"/>
+                <a:latin typeface="Arial"/>
+                <a:cs typeface="Arial"/>
               </a:rPr>
-              <a:t>Distribution Protocol</a:t>
+              <a:t>Quantum Key Distribution Protocol</a:t>
             </a:r>
           </a:p>
         </p:txBody>
@@ -4477,8 +5331,8 @@
           </a:p>
         </p:txBody>
       </p:sp>
-      <mc:AlternateContent xmlns:mc="http://schemas.openxmlformats.org/markup-compatibility/2006" xmlns:a14="http://schemas.microsoft.com/office/drawing/2010/main">
-        <mc:Choice Requires="a14">
+      <mc:AlternateContent xmlns:mc="http://schemas.openxmlformats.org/markup-compatibility/2006">
+        <mc:Choice xmlns:a14="http://schemas.microsoft.com/office/drawing/2010/main" Requires="a14">
           <p:sp>
             <p:nvSpPr>
               <p:cNvPr id="9" name="TextBox 8">
@@ -4512,7 +5366,7 @@
                   <a:buChar char="•"/>
                 </a:pPr>
                 <a:r>
-                  <a:rPr lang="en-US" sz="2000" dirty="0">
+                  <a:rPr lang="en-US" sz="2000">
                     <a:solidFill>
                       <a:srgbClr val="202123"/>
                     </a:solidFill>
@@ -4522,7 +5376,7 @@
                   </a:rPr>
                   <a:t>After achieving a sifted key, how do we know it is correct?</a:t>
                 </a:r>
-                <a:endParaRPr lang="en-US" sz="2000" dirty="0">
+                <a:endParaRPr lang="en-US" sz="2000">
                   <a:solidFill>
                     <a:srgbClr val="202123"/>
                   </a:solidFill>
@@ -4536,7 +5390,7 @@
                   <a:buChar char="o"/>
                 </a:pPr>
                 <a:r>
-                  <a:rPr lang="en-US" sz="2000" dirty="0">
+                  <a:rPr lang="en-US" sz="2000">
                     <a:solidFill>
                       <a:srgbClr val="202123"/>
                     </a:solidFill>
@@ -4553,7 +5407,7 @@
                   <a:buChar char="§"/>
                 </a:pPr>
                 <a:r>
-                  <a:rPr lang="en-US" sz="2000" dirty="0">
+                  <a:rPr lang="en-US" sz="2000">
                     <a:solidFill>
                       <a:srgbClr val="202123"/>
                     </a:solidFill>
@@ -4570,7 +5424,7 @@
                   <a:buChar char="§"/>
                 </a:pPr>
                 <a:r>
-                  <a:rPr lang="en-US" sz="2000" dirty="0">
+                  <a:rPr lang="en-US" sz="2000">
                     <a:solidFill>
                       <a:srgbClr val="202123"/>
                     </a:solidFill>
@@ -4635,7 +5489,7 @@
                     </m:f>
                   </m:oMath>
                 </a14:m>
-                <a:endParaRPr lang="en-US" sz="2000" dirty="0">
+                <a:endParaRPr lang="en-US" sz="2000">
                   <a:solidFill>
                     <a:srgbClr val="202123"/>
                   </a:solidFill>
@@ -4650,7 +5504,7 @@
                   <a:buChar char="§"/>
                 </a:pPr>
                 <a:r>
-                  <a:rPr lang="en-US" sz="2000" dirty="0">
+                  <a:rPr lang="en-US" sz="2000">
                     <a:solidFill>
                       <a:srgbClr val="202123"/>
                     </a:solidFill>
@@ -4667,7 +5521,7 @@
                   <a:buChar char="§"/>
                 </a:pPr>
                 <a:r>
-                  <a:rPr lang="en-US" sz="2000" dirty="0">
+                  <a:rPr lang="en-US" sz="2000">
                     <a:solidFill>
                       <a:srgbClr val="202123"/>
                     </a:solidFill>
@@ -4676,7 +5530,7 @@
                   </a:rPr>
                   <a:t>Each parity comparison leaks a bit of information to eavesdropper</a:t>
                 </a:r>
-                <a:endParaRPr lang="en-US" sz="2000" dirty="0">
+                <a:endParaRPr lang="en-US" sz="2000">
                   <a:solidFill>
                     <a:srgbClr val="202123"/>
                   </a:solidFill>
@@ -4691,7 +5545,7 @@
                   <a:buChar char="§"/>
                 </a:pPr>
                 <a:r>
-                  <a:rPr lang="en-US" sz="2000" dirty="0">
+                  <a:rPr lang="en-US" sz="2000">
                     <a:solidFill>
                       <a:srgbClr val="202123"/>
                     </a:solidFill>
@@ -4708,7 +5562,7 @@
                   <a:buChar char="§"/>
                 </a:pPr>
                 <a:r>
-                  <a:rPr lang="en-US" sz="2000" dirty="0">
+                  <a:rPr lang="en-US" sz="2000">
                     <a:solidFill>
                       <a:srgbClr val="202123"/>
                     </a:solidFill>
@@ -4725,7 +5579,7 @@
                   <a:buChar char="o"/>
                 </a:pPr>
                 <a:r>
-                  <a:rPr lang="en-US" sz="2000" dirty="0">
+                  <a:rPr lang="en-US" sz="2000">
                     <a:solidFill>
                       <a:srgbClr val="202123"/>
                     </a:solidFill>
@@ -4745,7 +5599,7 @@
                   <a:buChar char="•"/>
                 </a:pPr>
                 <a:r>
-                  <a:rPr lang="en-US" sz="2000" dirty="0">
+                  <a:rPr lang="en-US" sz="2000">
                     <a:solidFill>
                       <a:srgbClr val="202123"/>
                     </a:solidFill>
@@ -4761,7 +5615,7 @@
                   <a:buChar char="o"/>
                 </a:pPr>
                 <a:r>
-                  <a:rPr lang="en-US" dirty="0">
+                  <a:rPr lang="en-US">
                     <a:solidFill>
                       <a:srgbClr val="202123"/>
                     </a:solidFill>
@@ -4771,7 +5625,7 @@
                   </a:rPr>
                   <a:t>Pre-correction QBER: 92% match (59 of 64 bits)</a:t>
                 </a:r>
-                <a:endParaRPr lang="en-US" dirty="0">
+                <a:endParaRPr lang="en-US">
                   <a:solidFill>
                     <a:srgbClr val="202123"/>
                   </a:solidFill>
@@ -4786,7 +5640,7 @@
                   <a:buChar char="o"/>
                 </a:pPr>
                 <a:r>
-                  <a:rPr lang="en-US" dirty="0">
+                  <a:rPr lang="en-US">
                     <a:solidFill>
                       <a:srgbClr val="202123"/>
                     </a:solidFill>
@@ -4803,7 +5657,7 @@
                   <a:buChar char="§"/>
                 </a:pPr>
                 <a:r>
-                  <a:rPr lang="en-US" dirty="0">
+                  <a:rPr lang="en-US">
                     <a:solidFill>
                       <a:srgbClr val="202123"/>
                     </a:solidFill>
@@ -4813,7 +5667,7 @@
                   </a:rPr>
                   <a:t>Up to 5 bits leaked to Eve</a:t>
                 </a:r>
-                <a:endParaRPr lang="en-US" dirty="0">
+                <a:endParaRPr lang="en-US">
                   <a:solidFill>
                     <a:srgbClr val="202123"/>
                   </a:solidFill>
@@ -4825,7 +5679,7 @@
             </p:txBody>
           </p:sp>
         </mc:Choice>
-        <mc:Fallback xmlns="">
+        <mc:Fallback>
           <p:sp>
             <p:nvSpPr>
               <p:cNvPr id="9" name="TextBox 8">
@@ -4873,7 +5727,7 @@
     </p:spTree>
     <p:extLst>
       <p:ext uri="{BB962C8B-B14F-4D97-AF65-F5344CB8AC3E}">
-        <p14:creationId xmlns:p14="http://schemas.microsoft.com/office/powerpoint/2010/main" val="1503209594"/>
+        <p14:creationId xmlns:p14="http://schemas.microsoft.com/office/powerpoint/2010/main" val="244233412"/>
       </p:ext>
     </p:extLst>
   </p:cSld>
@@ -4990,8 +5844,8 @@
           </a:p>
         </p:txBody>
       </p:sp>
-      <mc:AlternateContent xmlns:mc="http://schemas.openxmlformats.org/markup-compatibility/2006" xmlns:a14="http://schemas.microsoft.com/office/drawing/2010/main">
-        <mc:Choice Requires="a14">
+      <mc:AlternateContent xmlns:mc="http://schemas.openxmlformats.org/markup-compatibility/2006">
+        <mc:Choice xmlns:a14="http://schemas.microsoft.com/office/drawing/2010/main" Requires="a14">
           <p:sp>
             <p:nvSpPr>
               <p:cNvPr id="9" name="TextBox 8">
@@ -5025,7 +5879,7 @@
                   <a:buChar char="•"/>
                 </a:pPr>
                 <a:r>
-                  <a:rPr lang="en-US" sz="2000" dirty="0">
+                  <a:rPr lang="en-US" sz="2000">
                     <a:solidFill>
                       <a:srgbClr val="202123"/>
                     </a:solidFill>
@@ -5042,23 +5896,23 @@
                   <a:buChar char="•"/>
                 </a:pPr>
                 <a:r>
-                  <a:rPr lang="en-US" dirty="0"/>
+                  <a:rPr lang="en-US"/>
                   <a:t>Compress length </a:t>
                 </a:r>
                 <a:r>
-                  <a:rPr lang="en-US" i="1" dirty="0"/>
+                  <a:rPr lang="en-US" i="1"/>
                   <a:t>n</a:t>
                 </a:r>
                 <a:r>
-                  <a:rPr lang="en-US" dirty="0"/>
+                  <a:rPr lang="en-US"/>
                   <a:t> bit string to length </a:t>
                 </a:r>
                 <a:r>
-                  <a:rPr lang="en-US" i="1" dirty="0"/>
+                  <a:rPr lang="en-US" i="1"/>
                   <a:t>m </a:t>
                 </a:r>
                 <a:r>
-                  <a:rPr lang="en-US" dirty="0"/>
+                  <a:rPr lang="en-US"/>
                   <a:t>bit string to maximize entropy [2]</a:t>
                 </a:r>
               </a:p>
@@ -5163,7 +6017,7 @@
                     </m:sSub>
                   </m:oMath>
                 </a14:m>
-                <a:endParaRPr lang="en-US" dirty="0"/>
+                <a:endParaRPr lang="en-US"/>
               </a:p>
               <a:p>
                 <a:pPr marL="742950" lvl="1" indent="-285750">
@@ -5171,7 +6025,7 @@
                   <a:buChar char="•"/>
                 </a:pPr>
                 <a:r>
-                  <a:rPr lang="en-US" dirty="0"/>
+                  <a:rPr lang="en-US"/>
                   <a:t>For QBER greater than </a:t>
                 </a:r>
                 <a14:m>
@@ -5185,7 +6039,7 @@
                   </m:oMath>
                 </a14:m>
                 <a:r>
-                  <a:rPr lang="en-US" dirty="0"/>
+                  <a:rPr lang="en-US"/>
                   <a:t>, the information Eve has prohibits compression (i.e. </a:t>
                 </a:r>
                 <a14:m>
@@ -5205,7 +6059,7 @@
                   </m:oMath>
                 </a14:m>
                 <a:r>
-                  <a:rPr lang="en-US" dirty="0"/>
+                  <a:rPr lang="en-US"/>
                   <a:t>)</a:t>
                 </a:r>
               </a:p>
@@ -5215,7 +6069,7 @@
                   <a:buChar char="•"/>
                 </a:pPr>
                 <a:r>
-                  <a:rPr lang="en-US" sz="2000" dirty="0">
+                  <a:rPr lang="en-US" sz="2000">
                     <a:solidFill>
                       <a:srgbClr val="202123"/>
                     </a:solidFill>
@@ -5225,7 +6079,7 @@
                   </a:rPr>
                   <a:t>By what method? Hashing</a:t>
                 </a:r>
-                <a:endParaRPr lang="en-US" dirty="0"/>
+                <a:endParaRPr lang="en-US"/>
               </a:p>
               <a:p>
                 <a:pPr marL="742950" lvl="1" indent="-285750">
@@ -5233,7 +6087,7 @@
                   <a:buChar char="o"/>
                 </a:pPr>
                 <a:r>
-                  <a:rPr lang="en-US" sz="2000" dirty="0">
+                  <a:rPr lang="en-US" sz="2000">
                     <a:solidFill>
                       <a:srgbClr val="202123"/>
                     </a:solidFill>
@@ -5250,7 +6104,7 @@
                   <a:buChar char="o"/>
                 </a:pPr>
                 <a:r>
-                  <a:rPr lang="en-US" sz="2000" dirty="0">
+                  <a:rPr lang="en-US" sz="2000">
                     <a:solidFill>
                       <a:srgbClr val="202123"/>
                     </a:solidFill>
@@ -5267,7 +6121,7 @@
                   <a:buChar char="•"/>
                 </a:pPr>
                 <a:r>
-                  <a:rPr lang="en-US" sz="2000" dirty="0">
+                  <a:rPr lang="en-US" sz="2000">
                     <a:solidFill>
                       <a:srgbClr val="202123"/>
                     </a:solidFill>
@@ -5283,7 +6137,7 @@
                   <a:buChar char="o"/>
                 </a:pPr>
                 <a:r>
-                  <a:rPr lang="en-US" dirty="0">
+                  <a:rPr lang="en-US">
                     <a:solidFill>
                       <a:srgbClr val="202123"/>
                     </a:solidFill>
@@ -5300,7 +6154,7 @@
                   <a:buChar char="o"/>
                 </a:pPr>
                 <a:r>
-                  <a:rPr lang="en-US" dirty="0">
+                  <a:rPr lang="en-US">
                     <a:solidFill>
                       <a:srgbClr val="202123"/>
                     </a:solidFill>
@@ -5310,7 +6164,7 @@
                   </a:rPr>
                   <a:t>A shorter but more secure key</a:t>
                 </a:r>
-                <a:endParaRPr lang="en-US" dirty="0">
+                <a:endParaRPr lang="en-US">
                   <a:solidFill>
                     <a:srgbClr val="202123"/>
                   </a:solidFill>
@@ -5325,7 +6179,7 @@
                   <a:buChar char="o"/>
                 </a:pPr>
                 <a:r>
-                  <a:rPr lang="en-US" dirty="0">
+                  <a:rPr lang="en-US">
                     <a:solidFill>
                       <a:srgbClr val="202123"/>
                     </a:solidFill>
@@ -5335,7 +6189,7 @@
                   </a:rPr>
                   <a:t>Example:</a:t>
                 </a:r>
-                <a:endParaRPr lang="en-US" dirty="0">
+                <a:endParaRPr lang="en-US">
                   <a:solidFill>
                     <a:srgbClr val="202123"/>
                   </a:solidFill>
@@ -5350,7 +6204,7 @@
                   <a:buChar char="§"/>
                 </a:pPr>
                 <a:r>
-                  <a:rPr lang="en-US" dirty="0">
+                  <a:rPr lang="en-US">
                     <a:solidFill>
                       <a:srgbClr val="202123"/>
                     </a:solidFill>
@@ -5363,7 +6217,7 @@
               <a:p>
                 <a:pPr lvl="2"/>
                 <a:r>
-                  <a:rPr lang="en-US" dirty="0">
+                  <a:rPr lang="en-US">
                     <a:solidFill>
                       <a:srgbClr val="202123"/>
                     </a:solidFill>
@@ -5376,32 +6230,32 @@
               <a:p>
                 <a:pPr lvl="2"/>
                 <a:r>
-                  <a:rPr lang="en-US" dirty="0"/>
+                  <a:rPr lang="en-US"/>
                   <a:t>Cipher Text (bit string encryption of “BB84” by Alice): 11001111101011000101001111011001</a:t>
                 </a:r>
               </a:p>
               <a:p>
                 <a:pPr lvl="2"/>
                 <a:r>
-                  <a:rPr lang="en-US" dirty="0">
+                  <a:rPr lang="en-US">
                     <a:ea typeface="Calibri" panose="020F0502020204030204"/>
                     <a:cs typeface="Calibri" panose="020F0502020204030204"/>
                   </a:rPr>
                   <a:t>Decoded (bit string decryption of cipher by Bob): </a:t>
                 </a:r>
                 <a:r>
-                  <a:rPr lang="en-US" dirty="0">
+                  <a:rPr lang="en-US">
                     <a:ea typeface="+mn-lt"/>
                     <a:cs typeface="+mn-lt"/>
                   </a:rPr>
                   <a:t>00000000010000100000100000000010</a:t>
                 </a:r>
-                <a:endParaRPr lang="en-US" dirty="0"/>
+                <a:endParaRPr lang="en-US"/>
               </a:p>
             </p:txBody>
           </p:sp>
         </mc:Choice>
-        <mc:Fallback xmlns="">
+        <mc:Fallback>
           <p:sp>
             <p:nvSpPr>
               <p:cNvPr id="9" name="TextBox 8">
@@ -5566,8 +6420,8 @@
           </a:p>
         </p:txBody>
       </p:sp>
-      <mc:AlternateContent xmlns:mc="http://schemas.openxmlformats.org/markup-compatibility/2006" xmlns:a14="http://schemas.microsoft.com/office/drawing/2010/main">
-        <mc:Choice Requires="a14">
+      <mc:AlternateContent xmlns:mc="http://schemas.openxmlformats.org/markup-compatibility/2006">
+        <mc:Choice xmlns:a14="http://schemas.microsoft.com/office/drawing/2010/main" Requires="a14">
           <p:sp>
             <p:nvSpPr>
               <p:cNvPr id="9" name="TextBox 8">
@@ -5601,7 +6455,7 @@
                   <a:buChar char="•"/>
                 </a:pPr>
                 <a:r>
-                  <a:rPr lang="en-US" sz="2000" dirty="0">
+                  <a:rPr lang="en-US" sz="2000">
                     <a:solidFill>
                       <a:srgbClr val="202123"/>
                     </a:solidFill>
@@ -5620,7 +6474,7 @@
                   <a:buChar char="•"/>
                 </a:pPr>
                 <a:r>
-                  <a:rPr lang="en-US" sz="2000" dirty="0">
+                  <a:rPr lang="en-US" sz="2000">
                     <a:solidFill>
                       <a:srgbClr val="202123"/>
                     </a:solidFill>
@@ -5639,7 +6493,7 @@
                   <a:buChar char="•"/>
                 </a:pPr>
                 <a:r>
-                  <a:rPr lang="en-US" sz="2000" dirty="0">
+                  <a:rPr lang="en-US" sz="2000">
                     <a:solidFill>
                       <a:srgbClr val="202123"/>
                     </a:solidFill>
@@ -5673,7 +6527,7 @@
                   </m:oMath>
                 </a14:m>
                 <a:r>
-                  <a:rPr lang="en-US" sz="2000" dirty="0">
+                  <a:rPr lang="en-US" sz="2000">
                     <a:solidFill>
                       <a:srgbClr val="202123"/>
                     </a:solidFill>
@@ -5692,7 +6546,7 @@
                   <a:buChar char="•"/>
                 </a:pPr>
                 <a:r>
-                  <a:rPr lang="en-US" sz="2000" dirty="0">
+                  <a:rPr lang="en-US" sz="2000">
                     <a:solidFill>
                       <a:srgbClr val="202123"/>
                     </a:solidFill>
@@ -5711,7 +6565,7 @@
                   <a:buChar char="•"/>
                 </a:pPr>
                 <a:r>
-                  <a:rPr lang="en-US" sz="2000" dirty="0">
+                  <a:rPr lang="en-US" sz="2000">
                     <a:solidFill>
                       <a:srgbClr val="202123"/>
                     </a:solidFill>
@@ -5730,7 +6584,7 @@
                   <a:buChar char="•"/>
                 </a:pPr>
                 <a:r>
-                  <a:rPr lang="en-US" sz="2000" dirty="0">
+                  <a:rPr lang="en-US" sz="2000">
                     <a:solidFill>
                       <a:srgbClr val="202123"/>
                     </a:solidFill>
@@ -5749,7 +6603,7 @@
                   <a:buChar char="•"/>
                 </a:pPr>
                 <a:r>
-                  <a:rPr lang="en-US" sz="2000" dirty="0">
+                  <a:rPr lang="en-US" sz="2000">
                     <a:solidFill>
                       <a:srgbClr val="202123"/>
                     </a:solidFill>
@@ -5769,7 +6623,7 @@
                   <a:buChar char="•"/>
                 </a:pPr>
                 <a:r>
-                  <a:rPr lang="en-US" sz="2000" dirty="0">
+                  <a:rPr lang="en-US" sz="2000">
                     <a:solidFill>
                       <a:srgbClr val="202123"/>
                     </a:solidFill>
@@ -5789,7 +6643,7 @@
                   <a:buChar char="•"/>
                 </a:pPr>
                 <a:r>
-                  <a:rPr lang="en-US" sz="2000" dirty="0">
+                  <a:rPr lang="en-US" sz="2000">
                     <a:solidFill>
                       <a:srgbClr val="202123"/>
                     </a:solidFill>
@@ -5803,7 +6657,7 @@
             </p:txBody>
           </p:sp>
         </mc:Choice>
-        <mc:Fallback xmlns="">
+        <mc:Fallback>
           <p:sp>
             <p:nvSpPr>
               <p:cNvPr id="9" name="TextBox 8">
@@ -5949,7 +6803,7 @@
               <a:defRPr/>
             </a:pPr>
             <a:r>
-              <a:rPr kumimoji="0" lang="en-US" sz="3600" b="1" i="0" u="none" strike="noStrike" kern="1200" cap="none" spc="0" normalizeH="0" baseline="0" noProof="0" dirty="0" err="1">
+              <a:rPr kumimoji="0" lang="en-US" sz="3600" b="1" i="0" u="none" strike="noStrike" kern="1200" cap="none" spc="0" normalizeH="0" baseline="0" noProof="0" err="1">
                 <a:ln>
                   <a:noFill/>
                 </a:ln>
@@ -5991,20 +6845,6 @@
               </a:rPr>
               <a:t>es</a:t>
             </a:r>
-            <a:endParaRPr kumimoji="0" lang="en-US" sz="3600" b="1" i="0" u="none" strike="noStrike" kern="1200" cap="none" spc="0" normalizeH="0" baseline="0" noProof="0" dirty="0">
-              <a:ln>
-                <a:noFill/>
-              </a:ln>
-              <a:solidFill>
-                <a:srgbClr val="002C73"/>
-              </a:solidFill>
-              <a:effectLst/>
-              <a:uLnTx/>
-              <a:uFillTx/>
-              <a:latin typeface="Arial" panose="020B0604020202020204"/>
-              <a:ea typeface="+mj-ea"/>
-              <a:cs typeface="+mj-cs"/>
-            </a:endParaRPr>
           </a:p>
         </p:txBody>
       </p:sp>
@@ -6041,23 +6881,23 @@
               <a:buAutoNum type="arabicPeriod"/>
             </a:pPr>
             <a:r>
-              <a:rPr lang="en-US" sz="2000" dirty="0"/>
+              <a:rPr lang="en-US" sz="2000"/>
               <a:t>G. Brassard and L. Salvail, ‘‘Secret-key reconciliation by public dis </a:t>
             </a:r>
             <a:r>
-              <a:rPr lang="en-US" sz="2000" dirty="0" err="1"/>
+              <a:rPr lang="en-US" sz="2000" err="1"/>
               <a:t>cussion</a:t>
             </a:r>
             <a:r>
-              <a:rPr lang="en-US" sz="2000" dirty="0"/>
+              <a:rPr lang="en-US" sz="2000"/>
               <a:t>,’’ in Advances in Cryptology—EUROCRYPT (Lecture Notes in Computer Science), T. </a:t>
             </a:r>
             <a:r>
-              <a:rPr lang="en-US" sz="2000" dirty="0" err="1"/>
+              <a:rPr lang="en-US" sz="2000" err="1"/>
               <a:t>Helleseth</a:t>
             </a:r>
             <a:r>
-              <a:rPr lang="en-US" sz="2000" dirty="0"/>
+              <a:rPr lang="en-US" sz="2000"/>
               <a:t>, Ed. vol. 765. Berlin, Germany: Springer, 1994.</a:t>
             </a:r>
           </a:p>
@@ -6067,7 +6907,7 @@
               <a:buAutoNum type="arabicPeriod"/>
             </a:pPr>
             <a:r>
-              <a:rPr lang="en-US" sz="2000" dirty="0"/>
+              <a:rPr lang="en-US" sz="2000"/>
               <a:t>C. H. Bennett, G. Brassard, and J.-M. Robert, “Privacy amplification by public discussion,” SIAM Journal on Computing, vol. 17, no. 2, pp. 210–229, 1988. [Online]. Available: https://doi.org/10.1137/0217014</a:t>
             </a:r>
           </a:p>
@@ -6077,15 +6917,15 @@
               <a:buAutoNum type="arabicPeriod"/>
             </a:pPr>
             <a:r>
-              <a:rPr lang="en-US" sz="2000" dirty="0"/>
+              <a:rPr lang="en-US" sz="2000"/>
               <a:t>P. W. Shor and J. </a:t>
             </a:r>
             <a:r>
-              <a:rPr lang="en-US" sz="2000" dirty="0" err="1"/>
+              <a:rPr lang="en-US" sz="2000" err="1"/>
               <a:t>Preskill</a:t>
             </a:r>
             <a:r>
-              <a:rPr lang="en-US" sz="2000" dirty="0"/>
+              <a:rPr lang="en-US" sz="2000"/>
               <a:t>, “Simple proof of security of the bb84 quantum key distribution protocol,” Physical Review Letters, vol. 85, no. 2, p. 441–444, 2000. [Online]. Available: http: //dx.doi.org/10.1103/PhysRevLett.85.441</a:t>
             </a:r>
           </a:p>
@@ -6095,7 +6935,7 @@
               <a:buAutoNum type="arabicPeriod"/>
             </a:pPr>
             <a:r>
-              <a:rPr lang="en-US" sz="2000" dirty="0"/>
+              <a:rPr lang="en-US" sz="2000"/>
               <a:t>Elkouss, David, Jesús Martínez-Mateo, and Vicente Martín. "Information Reconciliation for Quantum Key Distribution Using Low-Density Parity-Check Codes," 2009.</a:t>
             </a:r>
           </a:p>
@@ -6105,15 +6945,15 @@
               <a:buAutoNum type="arabicPeriod"/>
             </a:pPr>
             <a:r>
-              <a:rPr lang="en-US" sz="2000" dirty="0"/>
+              <a:rPr lang="en-US" sz="2000"/>
               <a:t>M. A. Nielsen and I. L. Chuang, “Quantum Computation and Quan-tum Information: 10th Anniversary Edition”. Cambridge: </a:t>
             </a:r>
             <a:r>
-              <a:rPr lang="en-US" sz="2000" dirty="0" err="1"/>
+              <a:rPr lang="en-US" sz="2000" err="1"/>
               <a:t>CambridgeUniversity</a:t>
             </a:r>
             <a:r>
-              <a:rPr lang="en-US" sz="2000" dirty="0"/>
+              <a:rPr lang="en-US" sz="2000"/>
               <a:t> Press, 2010.</a:t>
             </a:r>
           </a:p>
@@ -6272,7 +7112,7 @@
               <a:buChar char="•"/>
             </a:pPr>
             <a:r>
-              <a:rPr lang="en-US" sz="2000" dirty="0">
+              <a:rPr lang="en-US" sz="2000">
                 <a:latin typeface="Calibri"/>
                 <a:ea typeface="Calibri"/>
                 <a:cs typeface="Calibri"/>
@@ -6286,7 +7126,7 @@
               <a:buChar char="o"/>
             </a:pPr>
             <a:r>
-              <a:rPr lang="en-US" sz="2000" dirty="0">
+              <a:rPr lang="en-US" sz="2000">
                 <a:latin typeface="Calibri" panose="020F0502020204030204" pitchFamily="34" charset="0"/>
                 <a:cs typeface="Calibri" panose="020F0502020204030204" pitchFamily="34" charset="0"/>
               </a:rPr>
@@ -6302,30 +7142,17 @@
               <a:buChar char="o"/>
             </a:pPr>
             <a:r>
-              <a:rPr lang="en-US" sz="2000" dirty="0">
+              <a:rPr lang="en-US" sz="2000">
                 <a:latin typeface="Calibri"/>
                 <a:ea typeface="Calibri"/>
                 <a:cs typeface="Calibri"/>
               </a:rPr>
-              <a:t>Implemented code in </a:t>
-            </a:r>
-            <a:r>
-              <a:rPr lang="en-US" sz="2000" dirty="0" err="1">
-                <a:latin typeface="Calibri"/>
-                <a:ea typeface="Calibri"/>
-                <a:cs typeface="Calibri"/>
-              </a:rPr>
-              <a:t>Qiskit</a:t>
-            </a:r>
-            <a:endParaRPr lang="en-US" sz="2000" dirty="0">
-              <a:latin typeface="Calibri"/>
-              <a:ea typeface="Calibri"/>
-              <a:cs typeface="Calibri"/>
-            </a:endParaRPr>
+              <a:t>Implemented code in Qiskit</a:t>
+            </a:r>
           </a:p>
           <a:p>
             <a:pPr lvl="1"/>
-            <a:endParaRPr lang="en-US" sz="2000" dirty="0">
+            <a:endParaRPr lang="en-US" sz="2000">
               <a:latin typeface="Calibri" panose="020F0502020204030204" pitchFamily="34" charset="0"/>
               <a:ea typeface="Calibri"/>
               <a:cs typeface="Calibri" panose="020F0502020204030204" pitchFamily="34" charset="0"/>
@@ -6348,7 +7175,7 @@
           <p:nvPr>
             <p:extLst>
               <p:ext uri="{D42A27DB-BD31-4B8C-83A1-F6EECF244321}">
-                <p14:modId xmlns:p14="http://schemas.microsoft.com/office/powerpoint/2010/main" val="3557237552"/>
+                <p14:modId xmlns:p14="http://schemas.microsoft.com/office/powerpoint/2010/main" val="3773857810"/>
               </p:ext>
             </p:extLst>
           </p:nvPr>
@@ -6593,7 +7420,7 @@
                     <a:p>
                       <a:r>
                         <a:rPr lang="en-US"/>
-                        <a:t>26</a:t>
+                        <a:t>32</a:t>
                       </a:r>
                     </a:p>
                   </a:txBody>
@@ -6679,7 +7506,7 @@
                     <a:p>
                       <a:r>
                         <a:rPr lang="en-US"/>
-                        <a:t>26</a:t>
+                        <a:t>27</a:t>
                       </a:r>
                     </a:p>
                   </a:txBody>
@@ -7033,8 +7860,8 @@
         </p:nvSpPr>
         <p:spPr>
           <a:xfrm>
-            <a:off x="457200" y="961895"/>
-            <a:ext cx="10590028" cy="5632311"/>
+            <a:off x="457200" y="1122316"/>
+            <a:ext cx="10590028" cy="4862870"/>
           </a:xfrm>
           <a:prstGeom prst="rect">
             <a:avLst/>
@@ -7048,6 +7875,9 @@
           <a:lstStyle/>
           <a:p>
             <a:pPr marL="342900" indent="-342900">
+              <a:spcAft>
+                <a:spcPts val="600"/>
+              </a:spcAft>
               <a:buFont typeface="Arial"/>
               <a:buChar char="•"/>
             </a:pPr>
@@ -7099,12 +7929,6 @@
             </a:endParaRPr>
           </a:p>
           <a:p>
-            <a:endParaRPr lang="en-US" sz="2000">
-              <a:ea typeface="Calibri"/>
-              <a:cs typeface="Calibri"/>
-            </a:endParaRPr>
-          </a:p>
-          <a:p>
             <a:pPr marL="285750" indent="-285750">
               <a:buFont typeface="Arial" panose="020B0604020202020204" pitchFamily="34" charset="0"/>
               <a:buChar char="•"/>
@@ -7142,6 +7966,9 @@
           </a:p>
           <a:p>
             <a:pPr marL="742950" lvl="1" indent="-285750">
+              <a:spcAft>
+                <a:spcPts val="600"/>
+              </a:spcAft>
               <a:buFont typeface="Courier New" panose="020B0604020202020204" pitchFamily="34" charset="0"/>
               <a:buChar char="o"/>
             </a:pPr>
@@ -7164,15 +7991,6 @@
             </a:r>
           </a:p>
           <a:p>
-            <a:r>
-              <a:rPr lang="en-US" sz="2000">
-                <a:ea typeface="Calibri"/>
-                <a:cs typeface="Calibri"/>
-              </a:rPr>
-              <a:t>  </a:t>
-            </a:r>
-          </a:p>
-          <a:p>
             <a:pPr marL="285750" indent="-285750">
               <a:spcBef>
                 <a:spcPts val="600"/>
@@ -7241,6 +8059,9 @@
               <a:spcBef>
                 <a:spcPts val="600"/>
               </a:spcBef>
+              <a:spcAft>
+                <a:spcPts val="600"/>
+              </a:spcAft>
               <a:buFont typeface="Courier New" panose="020B0604020202020204" pitchFamily="34" charset="0"/>
               <a:buChar char="o"/>
             </a:pPr>
@@ -7251,17 +8072,6 @@
               </a:rPr>
               <a:t>Simplest QKD protocol: only need preparation (Alice) &amp; measurements (Bob)</a:t>
             </a:r>
-          </a:p>
-          <a:p>
-            <a:pPr lvl="1">
-              <a:spcBef>
-                <a:spcPts val="600"/>
-              </a:spcBef>
-            </a:pPr>
-            <a:endParaRPr lang="en-US" sz="2000">
-              <a:ea typeface="Calibri"/>
-              <a:cs typeface="Calibri"/>
-            </a:endParaRPr>
           </a:p>
           <a:p>
             <a:pPr marL="285750" indent="-285750">
@@ -7276,7 +8086,7 @@
                 <a:ea typeface="Calibri"/>
                 <a:cs typeface="Calibri"/>
               </a:rPr>
-              <a:t>Overview of BB84</a:t>
+              <a:t>BB84: Big Picture</a:t>
             </a:r>
           </a:p>
           <a:p>
@@ -7367,7 +8177,7 @@
         </p:blipFill>
         <p:spPr>
           <a:xfrm>
-            <a:off x="10138513" y="1711890"/>
+            <a:off x="9978092" y="1832206"/>
             <a:ext cx="1466067" cy="2233809"/>
           </a:xfrm>
           <a:prstGeom prst="rect">
@@ -7375,36 +8185,102 @@
           </a:prstGeom>
         </p:spPr>
       </p:pic>
-      <p:pic>
-        <p:nvPicPr>
-          <p:cNvPr id="8" name="Picture 7" descr="A diagram of a classical channel&#10;&#10;AI-generated content may be incorrect.">
+      <p:grpSp>
+        <p:nvGrpSpPr>
+          <p:cNvPr id="11" name="Group 10">
             <a:extLst>
               <a:ext uri="{FF2B5EF4-FFF2-40B4-BE49-F238E27FC236}">
-                <a16:creationId xmlns:a16="http://schemas.microsoft.com/office/drawing/2014/main" id="{B38A110A-4554-DD53-7B39-D305EC31083C}"/>
+                <a16:creationId xmlns:a16="http://schemas.microsoft.com/office/drawing/2014/main" id="{99B44497-0356-D927-EFB0-C40F50E9D1BF}"/>
               </a:ext>
             </a:extLst>
           </p:cNvPr>
-          <p:cNvPicPr>
-            <a:picLocks noChangeAspect="1"/>
-          </p:cNvPicPr>
+          <p:cNvGrpSpPr/>
           <p:nvPr/>
-        </p:nvPicPr>
-        <p:blipFill>
-          <a:blip r:embed="rId3"/>
-          <a:stretch>
-            <a:fillRect/>
-          </a:stretch>
-        </p:blipFill>
-        <p:spPr>
+        </p:nvGrpSpPr>
+        <p:grpSpPr>
           <a:xfrm>
-            <a:off x="7837118" y="4431279"/>
-            <a:ext cx="3772422" cy="2066403"/>
+            <a:off x="7018421" y="4279816"/>
+            <a:ext cx="5307264" cy="2535737"/>
+            <a:chOff x="7018421" y="4279816"/>
+            <a:chExt cx="5307264" cy="2535737"/>
           </a:xfrm>
-          <a:prstGeom prst="rect">
-            <a:avLst/>
-          </a:prstGeom>
-        </p:spPr>
-      </p:pic>
+        </p:grpSpPr>
+        <p:pic>
+          <p:nvPicPr>
+            <p:cNvPr id="2" name="Picture 1" descr="A diagram of a diagram of a person and person&#10;&#10;AI-generated content may be incorrect.">
+              <a:extLst>
+                <a:ext uri="{FF2B5EF4-FFF2-40B4-BE49-F238E27FC236}">
+                  <a16:creationId xmlns:a16="http://schemas.microsoft.com/office/drawing/2014/main" id="{8B18167F-D03A-6DEA-F279-DAFEC96155E0}"/>
+                </a:ext>
+              </a:extLst>
+            </p:cNvPr>
+            <p:cNvPicPr>
+              <a:picLocks noChangeAspect="1"/>
+            </p:cNvPicPr>
+            <p:nvPr/>
+          </p:nvPicPr>
+          <p:blipFill>
+            <a:blip r:embed="rId3"/>
+            <a:stretch>
+              <a:fillRect/>
+            </a:stretch>
+          </p:blipFill>
+          <p:spPr>
+            <a:xfrm>
+              <a:off x="7595937" y="4279816"/>
+              <a:ext cx="4152233" cy="2188579"/>
+            </a:xfrm>
+            <a:prstGeom prst="rect">
+              <a:avLst/>
+            </a:prstGeom>
+          </p:spPr>
+        </p:pic>
+        <p:sp>
+          <p:nvSpPr>
+            <p:cNvPr id="6" name="TextBox 5">
+              <a:extLst>
+                <a:ext uri="{FF2B5EF4-FFF2-40B4-BE49-F238E27FC236}">
+                  <a16:creationId xmlns:a16="http://schemas.microsoft.com/office/drawing/2014/main" id="{3E7EDD00-390A-5E3B-78D6-7817CB208F6F}"/>
+                </a:ext>
+              </a:extLst>
+            </p:cNvPr>
+            <p:cNvSpPr txBox="1"/>
+            <p:nvPr/>
+          </p:nvSpPr>
+          <p:spPr>
+            <a:xfrm>
+              <a:off x="7018421" y="6476999"/>
+              <a:ext cx="5307264" cy="338554"/>
+            </a:xfrm>
+            <a:prstGeom prst="rect">
+              <a:avLst/>
+            </a:prstGeom>
+            <a:noFill/>
+          </p:spPr>
+          <p:txBody>
+            <a:bodyPr rot="0" spcFirstLastPara="0" vertOverflow="overflow" horzOverflow="overflow" vert="horz" wrap="square" lIns="91440" tIns="45720" rIns="91440" bIns="45720" numCol="1" spcCol="0" rtlCol="0" fromWordArt="0" anchor="t" anchorCtr="0" forceAA="0" compatLnSpc="1">
+              <a:prstTxWarp prst="textNoShape">
+                <a:avLst/>
+              </a:prstTxWarp>
+              <a:spAutoFit/>
+            </a:bodyPr>
+            <a:lstStyle/>
+            <a:p>
+              <a:r>
+                <a:rPr lang="en-US" sz="800"/>
+                <a:t>https://uwaterloo.ca/institute-for-quantum-computing/sites/default/files/uploads/files/02-qcrypto-activity-answers.pdf</a:t>
+              </a:r>
+            </a:p>
+            <a:p>
+              <a:pPr algn="ctr"/>
+              <a:endParaRPr lang="en-US" sz="800">
+                <a:ea typeface="Calibri"/>
+                <a:cs typeface="Calibri"/>
+              </a:endParaRPr>
+            </a:p>
+          </p:txBody>
+        </p:sp>
+      </p:grpSp>
     </p:spTree>
     <p:extLst>
       <p:ext uri="{BB962C8B-B14F-4D97-AF65-F5344CB8AC3E}">
@@ -7493,7 +8369,7 @@
                 <a:latin typeface="Arial" panose="020B0604020202020204"/>
                 <a:cs typeface="Arial"/>
               </a:rPr>
-              <a:t>BB84 Protocol </a:t>
+              <a:t>BB84 Protocol Overview</a:t>
             </a:r>
             <a:endParaRPr lang="en-US" sz="3600" b="1" i="0" u="none" strike="noStrike" kern="1200" cap="none" spc="0" normalizeH="0" baseline="0" noProof="0">
               <a:ln>
@@ -7525,8 +8401,8 @@
         </p:nvSpPr>
         <p:spPr>
           <a:xfrm>
-            <a:off x="457200" y="1181100"/>
-            <a:ext cx="10590028" cy="4062651"/>
+            <a:off x="457200" y="862888"/>
+            <a:ext cx="10590028" cy="6140142"/>
           </a:xfrm>
           <a:prstGeom prst="rect">
             <a:avLst/>
@@ -7539,6 +8415,17 @@
           </a:bodyPr>
           <a:lstStyle/>
           <a:p>
+            <a:pPr marL="342900" indent="-342900">
+              <a:buFont typeface="Arial"/>
+              <a:buChar char="•"/>
+            </a:pPr>
+            <a:r>
+              <a:rPr lang="en-US" sz="2000">
+                <a:ea typeface="Calibri"/>
+                <a:cs typeface="Calibri"/>
+              </a:rPr>
+              <a:t>SETUP STAGE</a:t>
+            </a:r>
             <a:endParaRPr lang="en-US" sz="2000">
               <a:latin typeface="OpenSans"/>
               <a:ea typeface="Calibri"/>
@@ -7546,106 +8433,262 @@
             </a:endParaRPr>
           </a:p>
           <a:p>
+            <a:pPr marL="800100" lvl="1" indent="-342900">
+              <a:buFont typeface="Courier New"/>
+              <a:buChar char="o"/>
+            </a:pPr>
             <a:r>
               <a:rPr lang="en-US" sz="2000">
                 <a:ea typeface="Calibri"/>
                 <a:cs typeface="Calibri"/>
               </a:rPr>
-              <a:t>  </a:t>
-            </a:r>
-          </a:p>
-          <a:p>
-            <a:pPr>
-              <a:spcBef>
-                <a:spcPts val="600"/>
-              </a:spcBef>
-            </a:pPr>
-            <a:endParaRPr lang="en-US" sz="2000">
+              <a:t>Alice generates (1) a random bit string and </a:t>
+            </a:r>
+            <a:endParaRPr lang="en-US">
               <a:ea typeface="Calibri"/>
               <a:cs typeface="Calibri"/>
             </a:endParaRPr>
           </a:p>
           <a:p>
-            <a:pPr>
-              <a:spcBef>
-                <a:spcPts val="600"/>
-              </a:spcBef>
-            </a:pPr>
-            <a:endParaRPr lang="en-US" sz="2000">
-              <a:ea typeface="Calibri"/>
-              <a:cs typeface="Calibri"/>
-            </a:endParaRPr>
-          </a:p>
-          <a:p>
-            <a:pPr>
-              <a:spcBef>
-                <a:spcPts val="600"/>
-              </a:spcBef>
-            </a:pPr>
-            <a:endParaRPr lang="en-US" sz="2000">
-              <a:ea typeface="Calibri"/>
-              <a:cs typeface="Calibri"/>
-            </a:endParaRPr>
-          </a:p>
-          <a:p>
-            <a:pPr>
-              <a:spcBef>
-                <a:spcPts val="600"/>
-              </a:spcBef>
-            </a:pPr>
-            <a:endParaRPr lang="en-US" sz="2000">
-              <a:ea typeface="Calibri"/>
-              <a:cs typeface="Calibri"/>
-            </a:endParaRPr>
-          </a:p>
-          <a:p>
-            <a:pPr>
-              <a:spcBef>
-                <a:spcPts val="600"/>
-              </a:spcBef>
-            </a:pPr>
+            <a:pPr lvl="1"/>
             <a:r>
               <a:rPr lang="en-US" sz="2000">
                 <a:ea typeface="Calibri"/>
                 <a:cs typeface="Calibri"/>
               </a:rPr>
-              <a:t>Assumptions</a:t>
-            </a:r>
-          </a:p>
-          <a:p>
-            <a:pPr>
-              <a:spcBef>
+              <a:t>                                  (2) a random list of bases {Z, X} of same length</a:t>
+            </a:r>
+            <a:endParaRPr lang="en-US">
+              <a:ea typeface="Calibri" panose="020F0502020204030204"/>
+              <a:cs typeface="Calibri" panose="020F0502020204030204"/>
+            </a:endParaRPr>
+          </a:p>
+          <a:p>
+            <a:pPr marL="800100" lvl="1" indent="-342900">
+              <a:spcAft>
                 <a:spcPts val="600"/>
-              </a:spcBef>
-            </a:pPr>
-            <a:endParaRPr lang="en-US" sz="2000">
-              <a:ea typeface="Calibri"/>
-              <a:cs typeface="Calibri"/>
-            </a:endParaRPr>
-          </a:p>
-          <a:p>
-            <a:pPr>
-              <a:spcBef>
-                <a:spcPts val="600"/>
-              </a:spcBef>
-            </a:pPr>
-            <a:endParaRPr lang="en-US" sz="2000">
-              <a:ea typeface="Calibri"/>
-              <a:cs typeface="Calibri"/>
-            </a:endParaRPr>
-          </a:p>
-          <a:p>
-            <a:pPr>
-              <a:spcBef>
-                <a:spcPts val="600"/>
-              </a:spcBef>
+              </a:spcAft>
+              <a:buFont typeface="Courier New"/>
+              <a:buChar char="o"/>
             </a:pPr>
             <a:r>
               <a:rPr lang="en-US" sz="2000">
                 <a:ea typeface="Calibri"/>
                 <a:cs typeface="Calibri"/>
               </a:rPr>
-              <a:t>Set up</a:t>
+              <a:t>Bob generates his own random list of bases {Z, X}</a:t>
+            </a:r>
+          </a:p>
+          <a:p>
+            <a:pPr marL="342900" indent="-342900">
+              <a:buFont typeface="Arial"/>
+              <a:buChar char="•"/>
+            </a:pPr>
+            <a:r>
+              <a:rPr lang="en-US" sz="2000">
+                <a:ea typeface="Calibri"/>
+                <a:cs typeface="Calibri"/>
+              </a:rPr>
+              <a:t>QUANTUM STAGE</a:t>
+            </a:r>
+          </a:p>
+          <a:p>
+            <a:pPr marL="800100" lvl="1" indent="-342900">
+              <a:buFont typeface="Courier New"/>
+              <a:buChar char="o"/>
+            </a:pPr>
+            <a:r>
+              <a:rPr lang="en-US" sz="2000">
+                <a:ea typeface="Calibri"/>
+                <a:cs typeface="Calibri"/>
+              </a:rPr>
+              <a:t>Alice sends Bob polarized photons based on an encoding scheme</a:t>
+            </a:r>
+          </a:p>
+          <a:p>
+            <a:pPr marL="800100" lvl="1" indent="-342900">
+              <a:buFont typeface="Courier New"/>
+              <a:buChar char="o"/>
+            </a:pPr>
+            <a:r>
+              <a:rPr lang="en-US" sz="2000">
+                <a:ea typeface="Calibri"/>
+                <a:cs typeface="Calibri"/>
+              </a:rPr>
+              <a:t>Bob measures each photon with his basis and decodes it</a:t>
+            </a:r>
+          </a:p>
+          <a:p>
+            <a:pPr marL="800100" lvl="1" indent="-342900">
+              <a:buFont typeface="Courier New"/>
+              <a:buChar char="o"/>
+            </a:pPr>
+            <a:r>
+              <a:rPr lang="en-US" sz="2000">
+                <a:ea typeface="Calibri"/>
+                <a:cs typeface="Calibri"/>
+              </a:rPr>
+              <a:t>Example: If Alice sends |+&gt; and Bob's basis is Z</a:t>
+            </a:r>
+          </a:p>
+          <a:p>
+            <a:pPr lvl="1"/>
+            <a:r>
+              <a:rPr lang="en-US" sz="2000">
+                <a:ea typeface="Calibri"/>
+                <a:cs typeface="Calibri"/>
+              </a:rPr>
+              <a:t>                               Bob gets |0&gt; or |1&gt; half of the time.</a:t>
+            </a:r>
+          </a:p>
+          <a:p>
+            <a:pPr lvl="1"/>
+            <a:r>
+              <a:rPr lang="en-US" sz="2000">
+                <a:ea typeface="Calibri"/>
+                <a:cs typeface="Calibri"/>
+              </a:rPr>
+              <a:t>                               Bob's decoded bit: 0 or 1 half of the time.</a:t>
+            </a:r>
+          </a:p>
+          <a:p>
+            <a:pPr lvl="1"/>
+            <a:r>
+              <a:rPr lang="en-US" sz="2000">
+                <a:ea typeface="Calibri"/>
+                <a:cs typeface="Calibri"/>
+              </a:rPr>
+              <a:t>                If Bob's basis is X, his bit = 0 = Alice's bit.</a:t>
+            </a:r>
+          </a:p>
+          <a:p>
+            <a:pPr marL="342900" indent="-342900">
+              <a:spcBef>
+                <a:spcPts val="600"/>
+              </a:spcBef>
+              <a:buFont typeface="Arial"/>
+              <a:buChar char="•"/>
+            </a:pPr>
+            <a:r>
+              <a:rPr lang="en-US" sz="2000">
+                <a:ea typeface="Calibri"/>
+                <a:cs typeface="Calibri"/>
+              </a:rPr>
+              <a:t>CLASSICAL STAGE</a:t>
+            </a:r>
+          </a:p>
+          <a:p>
+            <a:pPr marL="800100" lvl="1" indent="-342900">
+              <a:spcBef>
+                <a:spcPts val="600"/>
+              </a:spcBef>
+              <a:buFont typeface="Courier New"/>
+              <a:buChar char="o"/>
+            </a:pPr>
+            <a:r>
+              <a:rPr lang="en-US" sz="2000">
+                <a:ea typeface="Calibri"/>
+                <a:cs typeface="Calibri"/>
+              </a:rPr>
+              <a:t>Alice &amp; Bob tell each other their basis choices (not their bits)</a:t>
+            </a:r>
+          </a:p>
+          <a:p>
+            <a:pPr marL="800100" lvl="1" indent="-342900">
+              <a:spcBef>
+                <a:spcPts val="600"/>
+              </a:spcBef>
+              <a:buFont typeface="Courier New"/>
+              <a:buChar char="o"/>
+            </a:pPr>
+            <a:r>
+              <a:rPr lang="en-US" sz="2000">
+                <a:ea typeface="Calibri"/>
+                <a:cs typeface="Calibri"/>
+              </a:rPr>
+              <a:t>They only retain the bits with matched bases to derive sifted keys</a:t>
+            </a:r>
+          </a:p>
+          <a:p>
+            <a:pPr marL="800100" lvl="1" indent="-342900">
+              <a:spcBef>
+                <a:spcPts val="600"/>
+              </a:spcBef>
+              <a:buFont typeface="Courier New"/>
+              <a:buChar char="o"/>
+            </a:pPr>
+            <a:r>
+              <a:rPr lang="en-US" sz="2000">
+                <a:ea typeface="Calibri"/>
+                <a:cs typeface="Calibri"/>
+              </a:rPr>
+              <a:t>They estimate qubit error rate (QBER) to detect eavesdropping</a:t>
+            </a:r>
+          </a:p>
+          <a:p>
+            <a:pPr marL="800100" lvl="1" indent="-342900">
+              <a:spcBef>
+                <a:spcPts val="600"/>
+              </a:spcBef>
+              <a:buFont typeface="Courier New"/>
+              <a:buChar char="o"/>
+            </a:pPr>
+            <a:r>
+              <a:rPr lang="en-US" sz="2000">
+                <a:ea typeface="Calibri"/>
+                <a:cs typeface="Calibri"/>
+              </a:rPr>
+              <a:t>If QBER is low, Bob performs </a:t>
+            </a:r>
+            <a:r>
+              <a:rPr lang="en-US" sz="2000">
+                <a:solidFill>
+                  <a:srgbClr val="FF0000"/>
+                </a:solidFill>
+                <a:ea typeface="Calibri"/>
+                <a:cs typeface="Calibri"/>
+              </a:rPr>
+              <a:t>error correction</a:t>
+            </a:r>
+            <a:r>
+              <a:rPr lang="en-US" sz="2000">
+                <a:ea typeface="Calibri"/>
+                <a:cs typeface="Calibri"/>
+              </a:rPr>
+              <a:t>  </a:t>
+            </a:r>
+          </a:p>
+          <a:p>
+            <a:pPr marL="800100" lvl="1" indent="-342900">
+              <a:spcBef>
+                <a:spcPts val="600"/>
+              </a:spcBef>
+              <a:buFont typeface="Courier New"/>
+              <a:buChar char="o"/>
+            </a:pPr>
+            <a:r>
+              <a:rPr lang="en-US" sz="2000">
+                <a:ea typeface="Calibri"/>
+                <a:cs typeface="Calibri"/>
+              </a:rPr>
+              <a:t>They perform </a:t>
+            </a:r>
+            <a:r>
+              <a:rPr lang="en-US" sz="2000">
+                <a:solidFill>
+                  <a:srgbClr val="FF0000"/>
+                </a:solidFill>
+                <a:ea typeface="Calibri"/>
+                <a:cs typeface="Calibri"/>
+              </a:rPr>
+              <a:t>privacy amplification</a:t>
+            </a:r>
+            <a:r>
+              <a:rPr lang="en-US" sz="2000">
+                <a:ea typeface="Calibri"/>
+                <a:cs typeface="Calibri"/>
+              </a:rPr>
+              <a:t> </a:t>
             </a:r>
           </a:p>
           <a:p>
@@ -7657,42 +8700,198 @@
           </a:p>
         </p:txBody>
       </p:sp>
-      <p:pic>
-        <p:nvPicPr>
-          <p:cNvPr id="3" name="Picture 2">
+      <p:grpSp>
+        <p:nvGrpSpPr>
+          <p:cNvPr id="8" name="Group 7">
             <a:extLst>
               <a:ext uri="{FF2B5EF4-FFF2-40B4-BE49-F238E27FC236}">
-                <a16:creationId xmlns:a16="http://schemas.microsoft.com/office/drawing/2014/main" id="{8B02BF0E-5668-4499-1048-1609015D312D}"/>
+                <a16:creationId xmlns:a16="http://schemas.microsoft.com/office/drawing/2014/main" id="{7C1ECD8A-362D-0EE5-CE67-A1945EF49C2C}"/>
               </a:ext>
             </a:extLst>
           </p:cNvPr>
-          <p:cNvPicPr>
-            <a:picLocks noChangeAspect="1"/>
-          </p:cNvPicPr>
+          <p:cNvGrpSpPr/>
           <p:nvPr/>
-        </p:nvPicPr>
-        <p:blipFill>
-          <a:blip r:embed="rId2"/>
-          <a:stretch>
-            <a:fillRect/>
-          </a:stretch>
-        </p:blipFill>
+        </p:nvGrpSpPr>
+        <p:grpSpPr>
+          <a:xfrm>
+            <a:off x="8532657" y="3252146"/>
+            <a:ext cx="3663994" cy="3059236"/>
+            <a:chOff x="7886112" y="2086055"/>
+            <a:chExt cx="3663994" cy="3059236"/>
+          </a:xfrm>
+        </p:grpSpPr>
+        <p:pic>
+          <p:nvPicPr>
+            <p:cNvPr id="2" name="Picture 1">
+              <a:extLst>
+                <a:ext uri="{FF2B5EF4-FFF2-40B4-BE49-F238E27FC236}">
+                  <a16:creationId xmlns:a16="http://schemas.microsoft.com/office/drawing/2014/main" id="{5D10825A-881A-C54E-4854-82977DF67C8E}"/>
+                </a:ext>
+              </a:extLst>
+            </p:cNvPr>
+            <p:cNvPicPr>
+              <a:picLocks noChangeAspect="1"/>
+            </p:cNvPicPr>
+            <p:nvPr/>
+          </p:nvPicPr>
+          <p:blipFill>
+            <a:blip r:embed="rId2"/>
+            <a:stretch>
+              <a:fillRect/>
+            </a:stretch>
+          </p:blipFill>
+          <p:spPr>
+            <a:xfrm>
+              <a:off x="7886112" y="2086055"/>
+              <a:ext cx="3663994" cy="2511599"/>
+            </a:xfrm>
+            <a:prstGeom prst="rect">
+              <a:avLst/>
+            </a:prstGeom>
+          </p:spPr>
+        </p:pic>
+        <p:sp>
+          <p:nvSpPr>
+            <p:cNvPr id="4" name="TextBox 3">
+              <a:extLst>
+                <a:ext uri="{FF2B5EF4-FFF2-40B4-BE49-F238E27FC236}">
+                  <a16:creationId xmlns:a16="http://schemas.microsoft.com/office/drawing/2014/main" id="{D84E4C64-A6D9-21BB-F7BF-A138474493AD}"/>
+                </a:ext>
+              </a:extLst>
+            </p:cNvPr>
+            <p:cNvSpPr txBox="1"/>
+            <p:nvPr/>
+          </p:nvSpPr>
+          <p:spPr>
+            <a:xfrm>
+              <a:off x="8628783" y="4745181"/>
+              <a:ext cx="2177762" cy="400110"/>
+            </a:xfrm>
+            <a:prstGeom prst="rect">
+              <a:avLst/>
+            </a:prstGeom>
+            <a:noFill/>
+          </p:spPr>
+          <p:txBody>
+            <a:bodyPr rot="0" spcFirstLastPara="0" vertOverflow="overflow" horzOverflow="overflow" vert="horz" wrap="square" lIns="91440" tIns="45720" rIns="91440" bIns="45720" numCol="1" spcCol="0" rtlCol="0" fromWordArt="0" anchor="t" anchorCtr="0" forceAA="0" compatLnSpc="1">
+              <a:prstTxWarp prst="textNoShape">
+                <a:avLst/>
+              </a:prstTxWarp>
+              <a:spAutoFit/>
+            </a:bodyPr>
+            <a:lstStyle/>
+            <a:p>
+              <a:pPr algn="ctr"/>
+              <a:r>
+                <a:rPr lang="en-US" sz="2000">
+                  <a:ea typeface="Calibri"/>
+                  <a:cs typeface="Calibri"/>
+                </a:rPr>
+                <a:t>Encoding Scheme</a:t>
+              </a:r>
+              <a:endParaRPr lang="en-US"/>
+            </a:p>
+          </p:txBody>
+        </p:sp>
+      </p:grpSp>
+      <p:sp>
+        <p:nvSpPr>
+          <p:cNvPr id="13" name="Arrow: Right 12">
+            <a:extLst>
+              <a:ext uri="{FF2B5EF4-FFF2-40B4-BE49-F238E27FC236}">
+                <a16:creationId xmlns:a16="http://schemas.microsoft.com/office/drawing/2014/main" id="{D2ACF8E7-10AB-DA1C-BA6F-A274DD497892}"/>
+              </a:ext>
+            </a:extLst>
+          </p:cNvPr>
+          <p:cNvSpPr/>
+          <p:nvPr/>
+        </p:nvSpPr>
         <p:spPr>
           <a:xfrm>
-            <a:off x="5581323" y="4536770"/>
-            <a:ext cx="3972969" cy="2158131"/>
+            <a:off x="2306205" y="3563217"/>
+            <a:ext cx="408419" cy="134214"/>
           </a:xfrm>
-          <a:prstGeom prst="rect">
+          <a:prstGeom prst="rightArrow">
             <a:avLst/>
           </a:prstGeom>
         </p:spPr>
-      </p:pic>
+        <p:style>
+          <a:lnRef idx="2">
+            <a:schemeClr val="accent1">
+              <a:shade val="15000"/>
+            </a:schemeClr>
+          </a:lnRef>
+          <a:fillRef idx="1">
+            <a:schemeClr val="accent1"/>
+          </a:fillRef>
+          <a:effectRef idx="0">
+            <a:schemeClr val="accent1"/>
+          </a:effectRef>
+          <a:fontRef idx="minor">
+            <a:schemeClr val="lt1"/>
+          </a:fontRef>
+        </p:style>
+        <p:txBody>
+          <a:bodyPr rtlCol="0" anchor="ctr"/>
+          <a:lstStyle/>
+          <a:p>
+            <a:pPr algn="ctr"/>
+            <a:endParaRPr lang="en-US"/>
+          </a:p>
+        </p:txBody>
+      </p:sp>
+      <p:sp>
+        <p:nvSpPr>
+          <p:cNvPr id="14" name="Arrow: Right 13">
+            <a:extLst>
+              <a:ext uri="{FF2B5EF4-FFF2-40B4-BE49-F238E27FC236}">
+                <a16:creationId xmlns:a16="http://schemas.microsoft.com/office/drawing/2014/main" id="{4F966584-5456-179C-4BCE-EE0C1F576C15}"/>
+              </a:ext>
+            </a:extLst>
+          </p:cNvPr>
+          <p:cNvSpPr/>
+          <p:nvPr/>
+        </p:nvSpPr>
+        <p:spPr>
+          <a:xfrm flipV="1">
+            <a:off x="2304759" y="3870614"/>
+            <a:ext cx="405535" cy="124113"/>
+          </a:xfrm>
+          <a:prstGeom prst="rightArrow">
+            <a:avLst/>
+          </a:prstGeom>
+        </p:spPr>
+        <p:style>
+          <a:lnRef idx="2">
+            <a:schemeClr val="accent1">
+              <a:shade val="15000"/>
+            </a:schemeClr>
+          </a:lnRef>
+          <a:fillRef idx="1">
+            <a:schemeClr val="accent1"/>
+          </a:fillRef>
+          <a:effectRef idx="0">
+            <a:schemeClr val="accent1"/>
+          </a:effectRef>
+          <a:fontRef idx="minor">
+            <a:schemeClr val="lt1"/>
+          </a:fontRef>
+        </p:style>
+        <p:txBody>
+          <a:bodyPr rtlCol="0" anchor="ctr"/>
+          <a:lstStyle/>
+          <a:p>
+            <a:pPr algn="ctr"/>
+            <a:endParaRPr lang="en-US"/>
+          </a:p>
+        </p:txBody>
+      </p:sp>
       <p:pic>
         <p:nvPicPr>
-          <p:cNvPr id="5" name="Picture 4" descr="A diagram of a mathematical equation&#10;&#10;AI-generated content may be incorrect.">
+          <p:cNvPr id="15" name="Picture 14" descr="A diagram of a diagram of a person and person&#10;&#10;AI-generated content may be incorrect.">
             <a:extLst>
               <a:ext uri="{FF2B5EF4-FFF2-40B4-BE49-F238E27FC236}">
-                <a16:creationId xmlns:a16="http://schemas.microsoft.com/office/drawing/2014/main" id="{659EEF7E-8B90-3FFC-CFF0-C5E61DDDF975}"/>
+                <a16:creationId xmlns:a16="http://schemas.microsoft.com/office/drawing/2014/main" id="{948AF9DA-EB71-9393-F755-3C86B7EF305B}"/>
               </a:ext>
             </a:extLst>
           </p:cNvPr>
@@ -7709,56 +8908,14 @@
         </p:blipFill>
         <p:spPr>
           <a:xfrm>
-            <a:off x="458610" y="4474147"/>
-            <a:ext cx="3419642" cy="2275138"/>
+            <a:off x="8064023" y="622216"/>
+            <a:ext cx="3999833" cy="2112379"/>
           </a:xfrm>
           <a:prstGeom prst="rect">
             <a:avLst/>
           </a:prstGeom>
         </p:spPr>
       </p:pic>
-      <p:sp>
-        <p:nvSpPr>
-          <p:cNvPr id="6" name="TextBox 5">
-            <a:extLst>
-              <a:ext uri="{FF2B5EF4-FFF2-40B4-BE49-F238E27FC236}">
-                <a16:creationId xmlns:a16="http://schemas.microsoft.com/office/drawing/2014/main" id="{AC1BE2C5-A31E-34A4-5D30-482B264F9B75}"/>
-              </a:ext>
-            </a:extLst>
-          </p:cNvPr>
-          <p:cNvSpPr txBox="1"/>
-          <p:nvPr/>
-        </p:nvSpPr>
-        <p:spPr>
-          <a:xfrm>
-            <a:off x="3455096" y="1894562"/>
-            <a:ext cx="6096000" cy="646331"/>
-          </a:xfrm>
-          <a:prstGeom prst="rect">
-            <a:avLst/>
-          </a:prstGeom>
-          <a:noFill/>
-        </p:spPr>
-        <p:txBody>
-          <a:bodyPr rot="0" spcFirstLastPara="0" vertOverflow="overflow" horzOverflow="overflow" vert="horz" wrap="square" lIns="91440" tIns="45720" rIns="91440" bIns="45720" numCol="1" spcCol="0" rtlCol="0" fromWordArt="0" anchor="t" anchorCtr="0" forceAA="0" compatLnSpc="1">
-            <a:prstTxWarp prst="textNoShape">
-              <a:avLst/>
-            </a:prstTxWarp>
-            <a:spAutoFit/>
-          </a:bodyPr>
-          <a:lstStyle/>
-          <a:p>
-            <a:r>
-              <a:rPr lang="en-US" b="1"/>
-              <a:t>WILL FINISH TMR</a:t>
-            </a:r>
-          </a:p>
-          <a:p>
-            <a:pPr algn="ctr"/>
-            <a:endParaRPr lang="en-US"/>
-          </a:p>
-        </p:txBody>
-      </p:sp>
     </p:spTree>
     <p:extLst>
       <p:ext uri="{BB962C8B-B14F-4D97-AF65-F5344CB8AC3E}">
@@ -7879,8 +9036,8 @@
         </p:nvSpPr>
         <p:spPr>
           <a:xfrm>
-            <a:off x="457200" y="1181100"/>
-            <a:ext cx="10590028" cy="3970318"/>
+            <a:off x="457201" y="1073749"/>
+            <a:ext cx="10590028" cy="5447645"/>
           </a:xfrm>
           <a:prstGeom prst="rect">
             <a:avLst/>
@@ -7893,23 +9050,10 @@
           </a:bodyPr>
           <a:lstStyle/>
           <a:p>
-            <a:pPr marL="285750" indent="-285750">
-              <a:buFont typeface="Arial" panose="020B0604020202020204" pitchFamily="34" charset="0"/>
-              <a:buChar char="•"/>
-            </a:pPr>
-            <a:endParaRPr lang="en-US" sz="2000">
-              <a:solidFill>
-                <a:srgbClr val="202123"/>
-              </a:solidFill>
-              <a:latin typeface="Calibri"/>
-              <a:ea typeface="Calibri"/>
-              <a:cs typeface="Calibri"/>
-            </a:endParaRPr>
-          </a:p>
-          <a:p>
-            <a:pPr marL="285750" indent="-285750">
-              <a:buFont typeface="Arial" panose="020B0604020202020204" pitchFamily="34" charset="0"/>
-              <a:buChar char="•"/>
+            <a:pPr>
+              <a:spcAft>
+                <a:spcPts val="600"/>
+              </a:spcAft>
             </a:pPr>
             <a:r>
               <a:rPr lang="en-US" sz="2000">
@@ -7920,7 +9064,7 @@
                 <a:ea typeface="Calibri"/>
                 <a:cs typeface="Calibri"/>
               </a:rPr>
-              <a:t>Implement BB84 using </a:t>
+              <a:t>Implement BB84 in </a:t>
             </a:r>
             <a:r>
               <a:rPr lang="en-US" sz="2000" err="1">
@@ -7942,50 +9086,16 @@
                 <a:ea typeface="Calibri"/>
                 <a:cs typeface="Calibri"/>
               </a:rPr>
-              <a:t> on:</a:t>
-            </a:r>
-            <a:endParaRPr lang="en-US">
-              <a:latin typeface="Calibri"/>
-              <a:ea typeface="Calibri"/>
-              <a:cs typeface="Calibri"/>
-            </a:endParaRPr>
-          </a:p>
-          <a:p>
-            <a:pPr marL="800100" lvl="1" indent="-342900">
-              <a:buFont typeface="Courier New" panose="02070309020205020404" pitchFamily="49" charset="0"/>
-              <a:buChar char="o"/>
-            </a:pPr>
-            <a:r>
-              <a:rPr lang="en-US" sz="2000">
-                <a:solidFill>
-                  <a:srgbClr val="202123"/>
-                </a:solidFill>
-                <a:latin typeface="Calibri" panose="020F0502020204030204" pitchFamily="34" charset="0"/>
-                <a:cs typeface="Calibri" panose="020F0502020204030204" pitchFamily="34" charset="0"/>
-              </a:rPr>
-              <a:t>Idea BB84 (no Eve):</a:t>
-            </a:r>
-          </a:p>
-          <a:p>
-            <a:pPr marL="1371600" lvl="2" indent="-457200">
-              <a:buFont typeface="+mj-lt"/>
-              <a:buAutoNum type="arabicParenR"/>
-            </a:pPr>
-            <a:r>
-              <a:rPr lang="en-US">
-                <a:solidFill>
-                  <a:srgbClr val="202123"/>
-                </a:solidFill>
-                <a:latin typeface="Calibri" panose="020F0502020204030204" pitchFamily="34" charset="0"/>
-                <a:cs typeface="Calibri" panose="020F0502020204030204" pitchFamily="34" charset="0"/>
-              </a:rPr>
-              <a:t>Local simulation: no noise, no Eve</a:t>
-            </a:r>
-          </a:p>
-          <a:p>
-            <a:pPr marL="1371600" lvl="2" indent="-457200">
-              <a:buFont typeface="+mj-lt"/>
-              <a:buAutoNum type="arabicParenR"/>
+              <a:t>* (# of qubits/run = 20)</a:t>
+            </a:r>
+          </a:p>
+          <a:p>
+            <a:pPr marL="285750" indent="-285750">
+              <a:spcAft>
+                <a:spcPts val="600"/>
+              </a:spcAft>
+              <a:buFont typeface="Arial"/>
+              <a:buChar char="•"/>
             </a:pPr>
             <a:r>
               <a:rPr lang="en-US">
@@ -7996,7 +9106,27 @@
                 <a:ea typeface="Calibri"/>
                 <a:cs typeface="Calibri"/>
               </a:rPr>
-              <a:t>Local simulation with depolarizing noise + sweep across error rates</a:t>
+              <a:t>Quantum circuit simulates Alice's preparation &amp; Bob's measurement</a:t>
+            </a:r>
+          </a:p>
+          <a:p>
+            <a:pPr marL="285750" indent="-285750">
+              <a:spcAft>
+                <a:spcPts val="600"/>
+              </a:spcAft>
+              <a:buFont typeface="Arial"/>
+              <a:buChar char="•"/>
+            </a:pPr>
+            <a:r>
+              <a:rPr lang="en-US" sz="2000">
+                <a:solidFill>
+                  <a:srgbClr val="202123"/>
+                </a:solidFill>
+                <a:latin typeface="Calibri"/>
+                <a:ea typeface="Calibri"/>
+                <a:cs typeface="Calibri"/>
+              </a:rPr>
+              <a:t>Base Line (No eavesdropping):</a:t>
             </a:r>
             <a:endParaRPr lang="en-US">
               <a:solidFill>
@@ -8008,151 +9138,524 @@
             </a:endParaRPr>
           </a:p>
           <a:p>
-            <a:pPr marL="1371600" lvl="2" indent="-457200">
-              <a:buFont typeface="+mj-lt"/>
-              <a:buAutoNum type="arabicParenR"/>
+            <a:pPr marL="742950" lvl="1" indent="-285750">
+              <a:spcAft>
+                <a:spcPts val="600"/>
+              </a:spcAft>
+              <a:buFont typeface="Courier New"/>
+              <a:buChar char="o"/>
             </a:pPr>
             <a:r>
               <a:rPr lang="en-US">
                 <a:solidFill>
                   <a:srgbClr val="202123"/>
                 </a:solidFill>
-                <a:latin typeface="Calibri" panose="020F0502020204030204" pitchFamily="34" charset="0"/>
-                <a:cs typeface="Calibri" panose="020F0502020204030204" pitchFamily="34" charset="0"/>
+                <a:latin typeface="Calibri"/>
+                <a:ea typeface="Calibri"/>
+                <a:cs typeface="Calibri"/>
               </a:rPr>
-              <a:t>Simulation of BB84 on IBM platform</a:t>
-            </a:r>
-          </a:p>
-          <a:p>
-            <a:pPr marL="800100" lvl="1" indent="-342900">
-              <a:spcBef>
+              <a:t>Local simulation: noiseless</a:t>
+            </a:r>
+            <a:endParaRPr lang="en-US">
+              <a:solidFill>
+                <a:srgbClr val="202123"/>
+              </a:solidFill>
+              <a:latin typeface="Calibri" panose="020F0502020204030204" pitchFamily="34" charset="0"/>
+              <a:ea typeface="Calibri"/>
+              <a:cs typeface="Calibri" panose="020F0502020204030204" pitchFamily="34" charset="0"/>
+            </a:endParaRPr>
+          </a:p>
+          <a:p>
+            <a:pPr marL="742950" lvl="1" indent="-285750">
+              <a:spcAft>
                 <a:spcPts val="600"/>
-              </a:spcBef>
-              <a:buFont typeface="Courier New" panose="02070309020205020404" pitchFamily="49" charset="0"/>
+              </a:spcAft>
+              <a:buFont typeface="Courier New"/>
               <a:buChar char="o"/>
+            </a:pPr>
+            <a:r>
+              <a:rPr lang="en-US">
+                <a:solidFill>
+                  <a:srgbClr val="202123"/>
+                </a:solidFill>
+                <a:latin typeface="Calibri"/>
+                <a:ea typeface="Calibri"/>
+                <a:cs typeface="Calibri"/>
+              </a:rPr>
+              <a:t>Local simulation with depolarizing noise (various error rates)</a:t>
+            </a:r>
+            <a:endParaRPr lang="en-US">
+              <a:solidFill>
+                <a:srgbClr val="202123"/>
+              </a:solidFill>
+              <a:latin typeface="Calibri" panose="020F0502020204030204" pitchFamily="34" charset="0"/>
+              <a:ea typeface="Calibri"/>
+              <a:cs typeface="Calibri" panose="020F0502020204030204" pitchFamily="34" charset="0"/>
+            </a:endParaRPr>
+          </a:p>
+          <a:p>
+            <a:pPr marL="742950" lvl="1" indent="-285750">
+              <a:spcAft>
+                <a:spcPts val="600"/>
+              </a:spcAft>
+              <a:buFont typeface="Courier New"/>
+              <a:buChar char="o"/>
+            </a:pPr>
+            <a:r>
+              <a:rPr lang="en-US">
+                <a:solidFill>
+                  <a:srgbClr val="202123"/>
+                </a:solidFill>
+                <a:latin typeface="Calibri"/>
+                <a:ea typeface="Calibri"/>
+                <a:cs typeface="Calibri"/>
+              </a:rPr>
+              <a:t>Simulation on IBM platform</a:t>
+            </a:r>
+            <a:endParaRPr lang="en-US">
+              <a:solidFill>
+                <a:srgbClr val="202123"/>
+              </a:solidFill>
+              <a:latin typeface="Calibri" panose="020F0502020204030204" pitchFamily="34" charset="0"/>
+              <a:ea typeface="Calibri"/>
+              <a:cs typeface="Calibri" panose="020F0502020204030204" pitchFamily="34" charset="0"/>
+            </a:endParaRPr>
+          </a:p>
+          <a:p>
+            <a:pPr marL="285750" indent="-285750">
+              <a:spcAft>
+                <a:spcPts val="600"/>
+              </a:spcAft>
+              <a:buFont typeface="Arial"/>
+              <a:buChar char="•"/>
+            </a:pPr>
+            <a:r>
+              <a:rPr lang="en-US">
+                <a:solidFill>
+                  <a:srgbClr val="202123"/>
+                </a:solidFill>
+                <a:latin typeface="Calibri"/>
+                <a:ea typeface="Calibri"/>
+                <a:cs typeface="Calibri"/>
+              </a:rPr>
+              <a:t>Metrics: </a:t>
+            </a:r>
+          </a:p>
+          <a:p>
+            <a:pPr marL="742950" lvl="1" indent="-285750">
+              <a:spcAft>
+                <a:spcPts val="600"/>
+              </a:spcAft>
+              <a:buFont typeface="Courier New"/>
+              <a:buChar char="o"/>
+            </a:pPr>
+            <a:r>
+              <a:rPr lang="en-US">
+                <a:solidFill>
+                  <a:srgbClr val="202123"/>
+                </a:solidFill>
+                <a:latin typeface="Calibri"/>
+                <a:ea typeface="Calibri"/>
+                <a:cs typeface="Calibri"/>
+              </a:rPr>
+              <a:t>QBER/Loss = % of Alice &amp; Bob's mismatched bits in sifted key</a:t>
+            </a:r>
+            <a:endParaRPr lang="en-US">
+              <a:solidFill>
+                <a:srgbClr val="000000"/>
+              </a:solidFill>
+              <a:latin typeface="Calibri"/>
+              <a:ea typeface="Calibri"/>
+              <a:cs typeface="Calibri"/>
+            </a:endParaRPr>
+          </a:p>
+          <a:p>
+            <a:pPr marL="285750" indent="-285750">
+              <a:spcAft>
+                <a:spcPts val="600"/>
+              </a:spcAft>
+              <a:buFont typeface="Arial"/>
+              <a:buChar char="•"/>
             </a:pPr>
             <a:r>
               <a:rPr lang="en-US" sz="2000">
                 <a:solidFill>
                   <a:srgbClr val="202123"/>
                 </a:solidFill>
-                <a:latin typeface="Calibri" panose="020F0502020204030204" pitchFamily="34" charset="0"/>
-                <a:cs typeface="Calibri" panose="020F0502020204030204" pitchFamily="34" charset="0"/>
+                <a:latin typeface="Calibri"/>
+                <a:ea typeface="Calibri"/>
+                <a:cs typeface="Calibri"/>
               </a:rPr>
-              <a:t>Then extend the pipeline with:</a:t>
-            </a:r>
-          </a:p>
-          <a:p>
-            <a:pPr marL="1257300" lvl="2" indent="-342900">
-              <a:buFont typeface="+mj-lt"/>
-              <a:buAutoNum type="arabicParenR"/>
+              <a:t>Extend to Eavesdropping:</a:t>
+            </a:r>
+            <a:endParaRPr lang="en-US">
+              <a:solidFill>
+                <a:srgbClr val="202123"/>
+              </a:solidFill>
+              <a:latin typeface="Calibri" panose="020F0502020204030204" pitchFamily="34" charset="0"/>
+              <a:ea typeface="Calibri"/>
+              <a:cs typeface="Calibri" panose="020F0502020204030204" pitchFamily="34" charset="0"/>
+            </a:endParaRPr>
+          </a:p>
+          <a:p>
+            <a:pPr marL="742950" lvl="1" indent="-285750">
+              <a:spcAft>
+                <a:spcPts val="600"/>
+              </a:spcAft>
+              <a:buFont typeface="Courier New"/>
+              <a:buChar char="o"/>
             </a:pPr>
             <a:r>
               <a:rPr lang="en-US">
                 <a:solidFill>
                   <a:srgbClr val="202123"/>
                 </a:solidFill>
-                <a:latin typeface="Calibri" panose="020F0502020204030204" pitchFamily="34" charset="0"/>
-                <a:cs typeface="Calibri" panose="020F0502020204030204" pitchFamily="34" charset="0"/>
+                <a:latin typeface="Calibri"/>
+                <a:ea typeface="Calibri"/>
+                <a:cs typeface="Calibri"/>
               </a:rPr>
-              <a:t>Eavesdropper</a:t>
-            </a:r>
-          </a:p>
-          <a:p>
-            <a:pPr marL="1257300" lvl="2" indent="-342900">
-              <a:buFont typeface="+mj-lt"/>
-              <a:buAutoNum type="arabicParenR"/>
+              <a:t>Eve intercepts, measures, resends all Alice's qubits</a:t>
+            </a:r>
+            <a:endParaRPr lang="en-US">
+              <a:solidFill>
+                <a:srgbClr val="202123"/>
+              </a:solidFill>
+              <a:latin typeface="Calibri" panose="020F0502020204030204" pitchFamily="34" charset="0"/>
+              <a:ea typeface="Calibri"/>
+              <a:cs typeface="Calibri" panose="020F0502020204030204" pitchFamily="34" charset="0"/>
+            </a:endParaRPr>
+          </a:p>
+          <a:p>
+            <a:pPr marL="285750" indent="-285750">
+              <a:spcAft>
+                <a:spcPts val="600"/>
+              </a:spcAft>
+              <a:buFont typeface="Arial"/>
+              <a:buChar char="•"/>
+            </a:pPr>
+            <a:r>
+              <a:rPr lang="en-US" sz="2000">
+                <a:solidFill>
+                  <a:srgbClr val="202123"/>
+                </a:solidFill>
+                <a:latin typeface="Calibri"/>
+                <a:ea typeface="Calibri"/>
+                <a:cs typeface="Calibri"/>
+              </a:rPr>
+              <a:t>Classical Post-Processing</a:t>
+            </a:r>
+          </a:p>
+          <a:p>
+            <a:pPr marL="742950" lvl="1" indent="-285750">
+              <a:spcAft>
+                <a:spcPts val="600"/>
+              </a:spcAft>
+              <a:buFont typeface="Courier New"/>
+              <a:buChar char="o"/>
             </a:pPr>
             <a:r>
               <a:rPr lang="en-US">
                 <a:solidFill>
                   <a:srgbClr val="202123"/>
                 </a:solidFill>
-                <a:latin typeface="Calibri" panose="020F0502020204030204" pitchFamily="34" charset="0"/>
-                <a:cs typeface="Calibri" panose="020F0502020204030204" pitchFamily="34" charset="0"/>
+                <a:latin typeface="Calibri"/>
+                <a:ea typeface="Calibri"/>
+                <a:cs typeface="Calibri"/>
               </a:rPr>
-              <a:t>Error correction</a:t>
-            </a:r>
-          </a:p>
-          <a:p>
-            <a:pPr marL="1257300" lvl="2" indent="-342900">
-              <a:buFont typeface="+mj-lt"/>
-              <a:buAutoNum type="arabicParenR"/>
+              <a:t>Estimate QBER. If QBER &gt; 11%, abort protocol.</a:t>
+            </a:r>
+          </a:p>
+          <a:p>
+            <a:pPr marL="742950" lvl="1" indent="-285750">
+              <a:spcAft>
+                <a:spcPts val="600"/>
+              </a:spcAft>
+              <a:buFont typeface="Courier New"/>
+              <a:buChar char="o"/>
             </a:pPr>
             <a:r>
               <a:rPr lang="en-US">
                 <a:solidFill>
                   <a:srgbClr val="202123"/>
                 </a:solidFill>
-                <a:latin typeface="Calibri" panose="020F0502020204030204" pitchFamily="34" charset="0"/>
-                <a:cs typeface="Calibri" panose="020F0502020204030204" pitchFamily="34" charset="0"/>
+                <a:latin typeface="Calibri"/>
+                <a:ea typeface="Calibri"/>
+                <a:cs typeface="Calibri"/>
               </a:rPr>
-              <a:t>Privacy amplification</a:t>
-            </a:r>
-          </a:p>
-          <a:p>
-            <a:pPr marL="342900" indent="-342900">
-              <a:spcBef>
+              <a:t>If QBER ≤ 11%, correct Bob's wrong bits to match Alice's bits via </a:t>
+            </a:r>
+            <a:r>
+              <a:rPr lang="en-US">
+                <a:solidFill>
+                  <a:srgbClr val="FF0000"/>
+                </a:solidFill>
+                <a:latin typeface="Calibri"/>
+                <a:ea typeface="Calibri"/>
+                <a:cs typeface="Calibri"/>
+              </a:rPr>
+              <a:t>Cascade Protocol</a:t>
+            </a:r>
+            <a:endParaRPr lang="en-US"/>
+          </a:p>
+          <a:p>
+            <a:pPr marL="742950" lvl="1" indent="-285750">
+              <a:spcAft>
                 <a:spcPts val="600"/>
-              </a:spcBef>
-              <a:buFont typeface="Arial" panose="020B0604020202020204" pitchFamily="34" charset="0"/>
-              <a:buChar char="•"/>
+              </a:spcAft>
+              <a:buFont typeface="Courier New"/>
+              <a:buChar char="o"/>
             </a:pPr>
             <a:r>
               <a:rPr lang="en-US">
                 <a:solidFill>
                   <a:srgbClr val="202123"/>
                 </a:solidFill>
-                <a:latin typeface="Calibri" panose="020F0502020204030204" pitchFamily="34" charset="0"/>
-                <a:cs typeface="Calibri" panose="020F0502020204030204" pitchFamily="34" charset="0"/>
+                <a:latin typeface="Calibri"/>
+                <a:ea typeface="Calibri"/>
+                <a:cs typeface="Calibri"/>
               </a:rPr>
-              <a:t>Metrics:</a:t>
-            </a:r>
-          </a:p>
-          <a:p>
-            <a:pPr marL="800100" lvl="1" indent="-342900">
-              <a:buFont typeface="Courier New" panose="02070309020205020404" pitchFamily="49" charset="0"/>
-              <a:buChar char="o"/>
+              <a:t>Privacy amplification if QBER ≤ 11% via</a:t>
+            </a:r>
+            <a:r>
+              <a:rPr lang="en-US">
+                <a:solidFill>
+                  <a:srgbClr val="FF0000"/>
+                </a:solidFill>
+                <a:latin typeface="Calibri"/>
+                <a:ea typeface="Calibri"/>
+                <a:cs typeface="Calibri"/>
+              </a:rPr>
+              <a:t> Toeplitz Matrix Hashing</a:t>
+            </a:r>
+          </a:p>
+          <a:p>
+            <a:pPr marL="285750" indent="-285750">
+              <a:spcAft>
+                <a:spcPts val="600"/>
+              </a:spcAft>
+              <a:buFont typeface="Arial"/>
+              <a:buChar char="•"/>
             </a:pPr>
             <a:r>
               <a:rPr lang="en-US">
                 <a:solidFill>
                   <a:srgbClr val="202123"/>
                 </a:solidFill>
-                <a:latin typeface="Calibri" panose="020F0502020204030204" pitchFamily="34" charset="0"/>
-                <a:cs typeface="Calibri" panose="020F0502020204030204" pitchFamily="34" charset="0"/>
+                <a:latin typeface="Calibri"/>
+                <a:ea typeface="Calibri"/>
+                <a:cs typeface="Calibri"/>
               </a:rPr>
-              <a:t>QBER</a:t>
-            </a:r>
-          </a:p>
-          <a:p>
-            <a:pPr marL="800100" lvl="1" indent="-342900">
-              <a:buFont typeface="Courier New" panose="02070309020205020404" pitchFamily="49" charset="0"/>
-              <a:buChar char="o"/>
-            </a:pPr>
-            <a:r>
-              <a:rPr lang="en-US">
-                <a:solidFill>
-                  <a:srgbClr val="202123"/>
-                </a:solidFill>
-                <a:latin typeface="Calibri" panose="020F0502020204030204" pitchFamily="34" charset="0"/>
-                <a:cs typeface="Calibri" panose="020F0502020204030204" pitchFamily="34" charset="0"/>
-              </a:rPr>
-              <a:t>Fidelity</a:t>
+              <a:t>One-time pad encryption/decryption of "BB84"</a:t>
             </a:r>
             <a:endParaRPr lang="en-US">
+              <a:solidFill>
+                <a:srgbClr val="202123"/>
+              </a:solidFill>
               <a:latin typeface="Calibri" panose="020F0502020204030204" pitchFamily="34" charset="0"/>
+              <a:ea typeface="Calibri"/>
               <a:cs typeface="Calibri" panose="020F0502020204030204" pitchFamily="34" charset="0"/>
             </a:endParaRPr>
           </a:p>
         </p:txBody>
       </p:sp>
+      <p:grpSp>
+        <p:nvGrpSpPr>
+          <p:cNvPr id="2" name="Group 1">
+            <a:extLst>
+              <a:ext uri="{FF2B5EF4-FFF2-40B4-BE49-F238E27FC236}">
+                <a16:creationId xmlns:a16="http://schemas.microsoft.com/office/drawing/2014/main" id="{E5871074-6492-CAEF-817F-7F41A3225F1D}"/>
+              </a:ext>
+            </a:extLst>
+          </p:cNvPr>
+          <p:cNvGrpSpPr/>
+          <p:nvPr/>
+        </p:nvGrpSpPr>
+        <p:grpSpPr>
+          <a:xfrm>
+            <a:off x="7428511" y="612920"/>
+            <a:ext cx="4592678" cy="2540728"/>
+            <a:chOff x="7567056" y="1802102"/>
+            <a:chExt cx="4592678" cy="2540728"/>
+          </a:xfrm>
+        </p:grpSpPr>
+        <p:pic>
+          <p:nvPicPr>
+            <p:cNvPr id="3" name="Picture 2" descr="A diagram of a wire&#10;&#10;AI-generated content may be incorrect.">
+              <a:extLst>
+                <a:ext uri="{FF2B5EF4-FFF2-40B4-BE49-F238E27FC236}">
+                  <a16:creationId xmlns:a16="http://schemas.microsoft.com/office/drawing/2014/main" id="{AC31E98A-22CB-73CD-105C-A566161329C6}"/>
+                </a:ext>
+              </a:extLst>
+            </p:cNvPr>
+            <p:cNvPicPr>
+              <a:picLocks noChangeAspect="1"/>
+            </p:cNvPicPr>
+            <p:nvPr/>
+          </p:nvPicPr>
+          <p:blipFill>
+            <a:blip r:embed="rId2"/>
+            <a:stretch>
+              <a:fillRect/>
+            </a:stretch>
+          </p:blipFill>
+          <p:spPr>
+            <a:xfrm>
+              <a:off x="7572107" y="1802102"/>
+              <a:ext cx="4587627" cy="2246752"/>
+            </a:xfrm>
+            <a:prstGeom prst="rect">
+              <a:avLst/>
+            </a:prstGeom>
+          </p:spPr>
+        </p:pic>
+        <p:sp>
+          <p:nvSpPr>
+            <p:cNvPr id="4" name="TextBox 3">
+              <a:extLst>
+                <a:ext uri="{FF2B5EF4-FFF2-40B4-BE49-F238E27FC236}">
+                  <a16:creationId xmlns:a16="http://schemas.microsoft.com/office/drawing/2014/main" id="{BF8CA26C-9A84-E19D-C8E6-3A2E93AB0C45}"/>
+                </a:ext>
+              </a:extLst>
+            </p:cNvPr>
+            <p:cNvSpPr txBox="1"/>
+            <p:nvPr/>
+          </p:nvSpPr>
+          <p:spPr>
+            <a:xfrm>
+              <a:off x="7567056" y="4035053"/>
+              <a:ext cx="4592203" cy="307777"/>
+            </a:xfrm>
+            <a:prstGeom prst="rect">
+              <a:avLst/>
+            </a:prstGeom>
+            <a:noFill/>
+            <a:ln>
+              <a:noFill/>
+            </a:ln>
+          </p:spPr>
+          <p:txBody>
+            <a:bodyPr rot="0" spcFirstLastPara="0" vertOverflow="overflow" horzOverflow="overflow" vert="horz" wrap="square" lIns="91440" tIns="45720" rIns="91440" bIns="45720" numCol="1" spcCol="0" rtlCol="0" fromWordArt="0" anchor="t" anchorCtr="0" forceAA="0" compatLnSpc="1">
+              <a:prstTxWarp prst="textNoShape">
+                <a:avLst/>
+              </a:prstTxWarp>
+              <a:spAutoFit/>
+            </a:bodyPr>
+            <a:lstStyle/>
+            <a:p>
+              <a:pPr algn="ctr"/>
+              <a:r>
+                <a:rPr lang="en-US" sz="1400">
+                  <a:ea typeface="Calibri"/>
+                  <a:cs typeface="Calibri"/>
+                </a:rPr>
+                <a:t>Circuit simulating Alice's preparation &amp; Bob's measurement</a:t>
+              </a:r>
+            </a:p>
+          </p:txBody>
+        </p:sp>
+      </p:grpSp>
+      <p:grpSp>
+        <p:nvGrpSpPr>
+          <p:cNvPr id="14" name="Group 13">
+            <a:extLst>
+              <a:ext uri="{FF2B5EF4-FFF2-40B4-BE49-F238E27FC236}">
+                <a16:creationId xmlns:a16="http://schemas.microsoft.com/office/drawing/2014/main" id="{110E308D-3E05-2827-E307-2AC4363544D6}"/>
+              </a:ext>
+            </a:extLst>
+          </p:cNvPr>
+          <p:cNvGrpSpPr/>
+          <p:nvPr/>
+        </p:nvGrpSpPr>
+        <p:grpSpPr>
+          <a:xfrm>
+            <a:off x="7076149" y="3311669"/>
+            <a:ext cx="5307264" cy="2245428"/>
+            <a:chOff x="7145421" y="3912034"/>
+            <a:chExt cx="5307264" cy="2245428"/>
+          </a:xfrm>
+        </p:grpSpPr>
+        <p:pic>
+          <p:nvPicPr>
+            <p:cNvPr id="5" name="Picture 4">
+              <a:extLst>
+                <a:ext uri="{FF2B5EF4-FFF2-40B4-BE49-F238E27FC236}">
+                  <a16:creationId xmlns:a16="http://schemas.microsoft.com/office/drawing/2014/main" id="{D58125D5-5A34-DD66-DA57-82952284B985}"/>
+                </a:ext>
+              </a:extLst>
+            </p:cNvPr>
+            <p:cNvPicPr>
+              <a:picLocks noChangeAspect="1"/>
+            </p:cNvPicPr>
+            <p:nvPr/>
+          </p:nvPicPr>
+          <p:blipFill>
+            <a:blip r:embed="rId3"/>
+            <a:stretch>
+              <a:fillRect/>
+            </a:stretch>
+          </p:blipFill>
+          <p:spPr>
+            <a:xfrm>
+              <a:off x="7649153" y="3912034"/>
+              <a:ext cx="4375151" cy="1747117"/>
+            </a:xfrm>
+            <a:prstGeom prst="rect">
+              <a:avLst/>
+            </a:prstGeom>
+          </p:spPr>
+        </p:pic>
+        <p:sp>
+          <p:nvSpPr>
+            <p:cNvPr id="13" name="TextBox 12">
+              <a:extLst>
+                <a:ext uri="{FF2B5EF4-FFF2-40B4-BE49-F238E27FC236}">
+                  <a16:creationId xmlns:a16="http://schemas.microsoft.com/office/drawing/2014/main" id="{28E78F0F-7DCC-7FC0-9EA6-640C34960432}"/>
+                </a:ext>
+              </a:extLst>
+            </p:cNvPr>
+            <p:cNvSpPr txBox="1"/>
+            <p:nvPr/>
+          </p:nvSpPr>
+          <p:spPr>
+            <a:xfrm>
+              <a:off x="7145421" y="5818908"/>
+              <a:ext cx="5307264" cy="338554"/>
+            </a:xfrm>
+            <a:prstGeom prst="rect">
+              <a:avLst/>
+            </a:prstGeom>
+            <a:noFill/>
+          </p:spPr>
+          <p:txBody>
+            <a:bodyPr rot="0" spcFirstLastPara="0" vertOverflow="overflow" horzOverflow="overflow" vert="horz" wrap="square" lIns="91440" tIns="45720" rIns="91440" bIns="45720" numCol="1" spcCol="0" rtlCol="0" fromWordArt="0" anchor="t" anchorCtr="0" forceAA="0" compatLnSpc="1">
+              <a:prstTxWarp prst="textNoShape">
+                <a:avLst/>
+              </a:prstTxWarp>
+              <a:spAutoFit/>
+            </a:bodyPr>
+            <a:lstStyle/>
+            <a:p>
+              <a:r>
+                <a:rPr lang="en-US" sz="800"/>
+                <a:t>https://uwaterloo.ca/institute-for-quantum-computing/sites/default/files/uploads/files/02-qcrypto-activity-answers.pdf</a:t>
+              </a:r>
+            </a:p>
+            <a:p>
+              <a:pPr algn="ctr"/>
+              <a:endParaRPr lang="en-US" sz="800">
+                <a:ea typeface="Calibri"/>
+                <a:cs typeface="Calibri"/>
+              </a:endParaRPr>
+            </a:p>
+          </p:txBody>
+        </p:sp>
+      </p:grpSp>
       <p:sp>
         <p:nvSpPr>
-          <p:cNvPr id="2" name="TextBox 1">
+          <p:cNvPr id="8" name="TextBox 7">
             <a:extLst>
               <a:ext uri="{FF2B5EF4-FFF2-40B4-BE49-F238E27FC236}">
-                <a16:creationId xmlns:a16="http://schemas.microsoft.com/office/drawing/2014/main" id="{6D7D5D24-0228-DB90-2628-3F899EC62B3D}"/>
+                <a16:creationId xmlns:a16="http://schemas.microsoft.com/office/drawing/2014/main" id="{C9384A4F-5EFF-6C8E-5C65-26386522D403}"/>
               </a:ext>
             </a:extLst>
           </p:cNvPr>
@@ -8161,8 +9664,8 @@
         </p:nvSpPr>
         <p:spPr>
           <a:xfrm>
-            <a:off x="6096000" y="3429000"/>
-            <a:ext cx="6096000" cy="646331"/>
+            <a:off x="459288" y="6591822"/>
+            <a:ext cx="10177396" cy="577081"/>
           </a:xfrm>
           <a:prstGeom prst="rect">
             <a:avLst/>
@@ -8179,13 +9682,32 @@
           <a:lstStyle/>
           <a:p>
             <a:r>
-              <a:rPr lang="en-US" b="1"/>
-              <a:t>WILL FINISH TMR</a:t>
-            </a:r>
+              <a:rPr lang="en-US" sz="1050"/>
+              <a:t>[*] </a:t>
+            </a:r>
+            <a:r>
+              <a:rPr lang="en-US" sz="1050">
+                <a:hlinkClick r:id="rId4"/>
+              </a:rPr>
+              <a:t>https://github.com/stm5340/EN.615.781.81.SP26_Final_Project</a:t>
+            </a:r>
+            <a:endParaRPr lang="en-US" sz="1050">
+              <a:ea typeface="Calibri"/>
+              <a:cs typeface="Calibri"/>
+            </a:endParaRPr>
+          </a:p>
+          <a:p>
+            <a:endParaRPr lang="en-US" sz="1050">
+              <a:ea typeface="Calibri"/>
+              <a:cs typeface="Calibri"/>
+            </a:endParaRPr>
           </a:p>
           <a:p>
             <a:pPr algn="ctr"/>
-            <a:endParaRPr lang="en-US"/>
+            <a:endParaRPr lang="en-US" sz="1050">
+              <a:ea typeface="Calibri"/>
+              <a:cs typeface="Calibri"/>
+            </a:endParaRPr>
           </a:p>
         </p:txBody>
       </p:sp>
@@ -8276,357 +9798,1040 @@
               <a:defRPr/>
             </a:pPr>
             <a:r>
-              <a:rPr kumimoji="0" lang="en-US" sz="3600" b="1" i="0" u="none" strike="noStrike" kern="1200" cap="none" spc="0" normalizeH="0" baseline="0" noProof="0">
+              <a:rPr lang="en-US">
+                <a:solidFill>
+                  <a:srgbClr val="002C73"/>
+                </a:solidFill>
+                <a:latin typeface="Arial" panose="020B0604020202020204"/>
+              </a:rPr>
+              <a:t>Baseline Experiments: No Eavesdropping</a:t>
+            </a:r>
+            <a:endParaRPr lang="en-US" sz="3600" b="1" i="0" u="none" strike="noStrike" kern="1200" cap="none" spc="0" normalizeH="0" baseline="0" noProof="0" err="1">
+              <a:ln>
+                <a:noFill/>
+              </a:ln>
+              <a:solidFill>
+                <a:srgbClr val="002C73"/>
+              </a:solidFill>
+              <a:effectLst/>
+              <a:uLnTx/>
+              <a:uFillTx/>
+              <a:latin typeface="Arial" panose="020B0604020202020204"/>
+              <a:cs typeface="Arial"/>
+            </a:endParaRPr>
+          </a:p>
+        </p:txBody>
+      </p:sp>
+      <p:grpSp>
+        <p:nvGrpSpPr>
+          <p:cNvPr id="13" name="Group 12">
+            <a:extLst>
+              <a:ext uri="{FF2B5EF4-FFF2-40B4-BE49-F238E27FC236}">
+                <a16:creationId xmlns:a16="http://schemas.microsoft.com/office/drawing/2014/main" id="{7BB4382A-4745-A1A8-9F39-D7A86DDA7055}"/>
+              </a:ext>
+            </a:extLst>
+          </p:cNvPr>
+          <p:cNvGrpSpPr/>
+          <p:nvPr/>
+        </p:nvGrpSpPr>
+        <p:grpSpPr>
+          <a:xfrm>
+            <a:off x="6754616" y="1919166"/>
+            <a:ext cx="5432524" cy="2702750"/>
+            <a:chOff x="7018421" y="4279816"/>
+            <a:chExt cx="5307264" cy="2535737"/>
+          </a:xfrm>
+        </p:grpSpPr>
+        <p:pic>
+          <p:nvPicPr>
+            <p:cNvPr id="11" name="Picture 10" descr="A diagram of a diagram of a person and person&#10;&#10;AI-generated content may be incorrect.">
+              <a:extLst>
+                <a:ext uri="{FF2B5EF4-FFF2-40B4-BE49-F238E27FC236}">
+                  <a16:creationId xmlns:a16="http://schemas.microsoft.com/office/drawing/2014/main" id="{7080FFEE-EAAA-A011-BC33-E58E9F0AF4CE}"/>
+                </a:ext>
+              </a:extLst>
+            </p:cNvPr>
+            <p:cNvPicPr>
+              <a:picLocks noChangeAspect="1"/>
+            </p:cNvPicPr>
+            <p:nvPr/>
+          </p:nvPicPr>
+          <p:blipFill>
+            <a:blip r:embed="rId2"/>
+            <a:stretch>
+              <a:fillRect/>
+            </a:stretch>
+          </p:blipFill>
+          <p:spPr>
+            <a:xfrm>
+              <a:off x="7595937" y="4279816"/>
+              <a:ext cx="4152233" cy="2188579"/>
+            </a:xfrm>
+            <a:prstGeom prst="rect">
+              <a:avLst/>
+            </a:prstGeom>
+          </p:spPr>
+        </p:pic>
+        <p:sp>
+          <p:nvSpPr>
+            <p:cNvPr id="12" name="TextBox 11">
+              <a:extLst>
+                <a:ext uri="{FF2B5EF4-FFF2-40B4-BE49-F238E27FC236}">
+                  <a16:creationId xmlns:a16="http://schemas.microsoft.com/office/drawing/2014/main" id="{290421A2-4ED0-2060-2A9B-EC95316D198F}"/>
+                </a:ext>
+              </a:extLst>
+            </p:cNvPr>
+            <p:cNvSpPr txBox="1"/>
+            <p:nvPr/>
+          </p:nvSpPr>
+          <p:spPr>
+            <a:xfrm>
+              <a:off x="7018421" y="6476999"/>
+              <a:ext cx="5307264" cy="338554"/>
+            </a:xfrm>
+            <a:prstGeom prst="rect">
+              <a:avLst/>
+            </a:prstGeom>
+            <a:noFill/>
+          </p:spPr>
+          <p:txBody>
+            <a:bodyPr rot="0" spcFirstLastPara="0" vertOverflow="overflow" horzOverflow="overflow" vert="horz" wrap="square" lIns="91440" tIns="45720" rIns="91440" bIns="45720" numCol="1" spcCol="0" rtlCol="0" fromWordArt="0" anchor="t" anchorCtr="0" forceAA="0" compatLnSpc="1">
+              <a:prstTxWarp prst="textNoShape">
+                <a:avLst/>
+              </a:prstTxWarp>
+              <a:spAutoFit/>
+            </a:bodyPr>
+            <a:lstStyle/>
+            <a:p>
+              <a:r>
+                <a:rPr lang="en-US" sz="800"/>
+                <a:t>https://uwaterloo.ca/institute-for-quantum-computing/sites/default/files/uploads/files/02-qcrypto-activity-answers.pdf</a:t>
+              </a:r>
+            </a:p>
+            <a:p>
+              <a:pPr algn="ctr"/>
+              <a:endParaRPr lang="en-US" sz="800">
+                <a:ea typeface="Calibri"/>
+                <a:cs typeface="Calibri"/>
+              </a:endParaRPr>
+            </a:p>
+          </p:txBody>
+        </p:sp>
+      </p:grpSp>
+      <p:grpSp>
+        <p:nvGrpSpPr>
+          <p:cNvPr id="21" name="Group 20">
+            <a:extLst>
+              <a:ext uri="{FF2B5EF4-FFF2-40B4-BE49-F238E27FC236}">
+                <a16:creationId xmlns:a16="http://schemas.microsoft.com/office/drawing/2014/main" id="{C10CC78D-8020-C571-38C7-A61ED4EC7BD1}"/>
+              </a:ext>
+            </a:extLst>
+          </p:cNvPr>
+          <p:cNvGrpSpPr/>
+          <p:nvPr/>
+        </p:nvGrpSpPr>
+        <p:grpSpPr>
+          <a:xfrm>
+            <a:off x="457200" y="996373"/>
+            <a:ext cx="7346644" cy="5630386"/>
+            <a:chOff x="457200" y="996373"/>
+            <a:chExt cx="7346644" cy="5630386"/>
+          </a:xfrm>
+        </p:grpSpPr>
+        <p:grpSp>
+          <p:nvGrpSpPr>
+            <p:cNvPr id="20" name="Group 19">
+              <a:extLst>
+                <a:ext uri="{FF2B5EF4-FFF2-40B4-BE49-F238E27FC236}">
+                  <a16:creationId xmlns:a16="http://schemas.microsoft.com/office/drawing/2014/main" id="{BD5A7A0A-D72D-4001-AB1A-C87526CA86BA}"/>
+                </a:ext>
+              </a:extLst>
+            </p:cNvPr>
+            <p:cNvGrpSpPr/>
+            <p:nvPr/>
+          </p:nvGrpSpPr>
+          <p:grpSpPr>
+            <a:xfrm>
+              <a:off x="457200" y="996373"/>
+              <a:ext cx="7346644" cy="1851701"/>
+              <a:chOff x="457200" y="996373"/>
+              <a:chExt cx="7346644" cy="1851701"/>
+            </a:xfrm>
+          </p:grpSpPr>
+          <p:sp>
+            <p:nvSpPr>
+              <p:cNvPr id="9" name="TextBox 8">
+                <a:extLst>
+                  <a:ext uri="{FF2B5EF4-FFF2-40B4-BE49-F238E27FC236}">
+                    <a16:creationId xmlns:a16="http://schemas.microsoft.com/office/drawing/2014/main" id="{3635BDD3-4D84-2737-85CD-6BC4B8FF6EBF}"/>
+                  </a:ext>
+                </a:extLst>
+              </p:cNvPr>
+              <p:cNvSpPr txBox="1"/>
+              <p:nvPr/>
+            </p:nvSpPr>
+            <p:spPr>
+              <a:xfrm>
+                <a:off x="457200" y="996373"/>
+                <a:ext cx="7346644" cy="1846659"/>
+              </a:xfrm>
+              <a:prstGeom prst="rect">
+                <a:avLst/>
+              </a:prstGeom>
+              <a:noFill/>
+            </p:spPr>
+            <p:txBody>
+              <a:bodyPr wrap="square" lIns="91440" tIns="45720" rIns="91440" bIns="45720" anchor="t">
+                <a:spAutoFit/>
+              </a:bodyPr>
+              <a:lstStyle/>
+              <a:p>
+                <a:pPr marL="342900" indent="-342900">
+                  <a:buFont typeface="Arial"/>
+                  <a:buChar char="•"/>
+                </a:pPr>
+                <a:r>
+                  <a:rPr lang="en-US" b="1">
+                    <a:solidFill>
+                      <a:srgbClr val="202123"/>
+                    </a:solidFill>
+                    <a:latin typeface="Calibri"/>
+                    <a:ea typeface="Calibri"/>
+                    <a:cs typeface="Calibri"/>
+                  </a:rPr>
+                  <a:t>Results of one run: no noise</a:t>
+                </a:r>
+              </a:p>
+              <a:p>
+                <a:pPr marL="742950" lvl="1" indent="-285750">
+                  <a:buFont typeface="Courier New" panose="020B0604020202020204" pitchFamily="34" charset="0"/>
+                  <a:buChar char="o"/>
+                </a:pPr>
+                <a:r>
+                  <a:rPr lang="en-US" sz="1600">
+                    <a:solidFill>
+                      <a:srgbClr val="202123"/>
+                    </a:solidFill>
+                    <a:latin typeface="Calibri"/>
+                    <a:ea typeface="Calibri"/>
+                    <a:cs typeface="Calibri"/>
+                  </a:rPr>
+                  <a:t>Alice's Bits:</a:t>
+                </a:r>
+                <a:r>
+                  <a:rPr lang="en-US" sz="1600">
+                    <a:solidFill>
+                      <a:srgbClr val="202123"/>
+                    </a:solidFill>
+                    <a:ea typeface="+mn-lt"/>
+                    <a:cs typeface="+mn-lt"/>
+                  </a:rPr>
+                  <a:t> 0,1,1,0,1,0,0,0,0,0,0,1,0,1,0,0,1,1,1,1</a:t>
+                </a:r>
+              </a:p>
+              <a:p>
+                <a:pPr marL="742950" lvl="1" indent="-285750">
+                  <a:buFont typeface="Courier New" panose="020B0604020202020204" pitchFamily="34" charset="0"/>
+                  <a:buChar char="o"/>
+                </a:pPr>
+                <a:r>
+                  <a:rPr lang="en-US" sz="1600">
+                    <a:solidFill>
+                      <a:srgbClr val="202123"/>
+                    </a:solidFill>
+                    <a:ea typeface="+mn-lt"/>
+                    <a:cs typeface="+mn-lt"/>
+                  </a:rPr>
+                  <a:t>Alice's Bases: Z,X,Z,Z,Z,X,X,Z,Z,X,Z,X,Z,X,X,Z,X,X,Z,X </a:t>
+                </a:r>
+              </a:p>
+              <a:p>
+                <a:pPr marL="742950" lvl="1" indent="-285750">
+                  <a:buFont typeface="Courier New" panose="020B0604020202020204" pitchFamily="34" charset="0"/>
+                  <a:buChar char="o"/>
+                </a:pPr>
+                <a:r>
+                  <a:rPr lang="en-US" sz="1600">
+                    <a:solidFill>
+                      <a:srgbClr val="202123"/>
+                    </a:solidFill>
+                    <a:ea typeface="+mn-lt"/>
+                    <a:cs typeface="+mn-lt"/>
+                  </a:rPr>
+                  <a:t>Bob's Bases: X,Z,Z,Z,Z,Z,Z,X,Z,Z,Z,Z,Z,Z,Z,X,Z,X,Z,X</a:t>
+                </a:r>
+              </a:p>
+              <a:p>
+                <a:pPr marL="742950" lvl="1" indent="-285750">
+                  <a:buFont typeface="Courier New" panose="020B0604020202020204" pitchFamily="34" charset="0"/>
+                  <a:buChar char="o"/>
+                </a:pPr>
+                <a:r>
+                  <a:rPr lang="en-US" sz="1600">
+                    <a:solidFill>
+                      <a:srgbClr val="202123"/>
+                    </a:solidFill>
+                    <a:ea typeface="+mn-lt"/>
+                    <a:cs typeface="+mn-lt"/>
+                  </a:rPr>
+                  <a:t>Bob's Bits: 0,0,1,0,1,0,1,1,0,1,0,1,0,1,1,0,0,1,1,1</a:t>
+                </a:r>
+              </a:p>
+              <a:p>
+                <a:pPr marL="742950" lvl="1" indent="-285750">
+                  <a:buFont typeface="Courier New" panose="020B0604020202020204" pitchFamily="34" charset="0"/>
+                  <a:buChar char="o"/>
+                </a:pPr>
+                <a:r>
+                  <a:rPr lang="en-US" sz="1600">
+                    <a:solidFill>
+                      <a:srgbClr val="202123"/>
+                    </a:solidFill>
+                    <a:ea typeface="+mn-lt"/>
+                    <a:cs typeface="+mn-lt"/>
+                  </a:rPr>
+                  <a:t>Alice's Sifted Key: </a:t>
+                </a:r>
+                <a:r>
+                  <a:rPr lang="en-US" sz="1600">
+                    <a:solidFill>
+                      <a:srgbClr val="FF0000"/>
+                    </a:solidFill>
+                    <a:ea typeface="+mn-lt"/>
+                    <a:cs typeface="+mn-lt"/>
+                  </a:rPr>
+                  <a:t>1, 0, 1, 0, 0, 0, 1, 1, 1</a:t>
+                </a:r>
+              </a:p>
+              <a:p>
+                <a:pPr marL="742950" lvl="1" indent="-285750">
+                  <a:buFont typeface="Courier New" panose="020B0604020202020204" pitchFamily="34" charset="0"/>
+                  <a:buChar char="o"/>
+                </a:pPr>
+                <a:r>
+                  <a:rPr lang="en-US" sz="1600">
+                    <a:solidFill>
+                      <a:srgbClr val="202123"/>
+                    </a:solidFill>
+                    <a:ea typeface="+mn-lt"/>
+                    <a:cs typeface="+mn-lt"/>
+                  </a:rPr>
+                  <a:t>Bob's Sifted Key: </a:t>
+                </a:r>
+                <a:r>
+                  <a:rPr lang="en-US" sz="1600">
+                    <a:solidFill>
+                      <a:srgbClr val="FF0000"/>
+                    </a:solidFill>
+                    <a:ea typeface="+mn-lt"/>
+                    <a:cs typeface="+mn-lt"/>
+                  </a:rPr>
+                  <a:t>1, 0, 1, 0, 0, 0, 1, 1, 1</a:t>
+                </a:r>
+                <a:r>
+                  <a:rPr lang="en-US" sz="1600">
+                    <a:solidFill>
+                      <a:srgbClr val="202123"/>
+                    </a:solidFill>
+                    <a:ea typeface="+mn-lt"/>
+                    <a:cs typeface="+mn-lt"/>
+                  </a:rPr>
+                  <a:t> </a:t>
+                </a:r>
+              </a:p>
+            </p:txBody>
+          </p:sp>
+          <p:sp>
+            <p:nvSpPr>
+              <p:cNvPr id="4" name="Right Brace 3">
+                <a:extLst>
+                  <a:ext uri="{FF2B5EF4-FFF2-40B4-BE49-F238E27FC236}">
+                    <a16:creationId xmlns:a16="http://schemas.microsoft.com/office/drawing/2014/main" id="{0047EC74-E7E3-9E6F-B96D-C90D95A5F1CF}"/>
+                  </a:ext>
+                </a:extLst>
+              </p:cNvPr>
+              <p:cNvSpPr/>
+              <p:nvPr/>
+            </p:nvSpPr>
+            <p:spPr>
+              <a:xfrm>
+                <a:off x="4587734" y="2318293"/>
+                <a:ext cx="279722" cy="529781"/>
+              </a:xfrm>
+              <a:prstGeom prst="rightBrace">
+                <a:avLst/>
+              </a:prstGeom>
+              <a:ln>
+                <a:solidFill>
+                  <a:srgbClr val="FF0000"/>
+                </a:solidFill>
+              </a:ln>
+            </p:spPr>
+            <p:style>
+              <a:lnRef idx="1">
+                <a:schemeClr val="accent1"/>
+              </a:lnRef>
+              <a:fillRef idx="0">
+                <a:schemeClr val="accent1"/>
+              </a:fillRef>
+              <a:effectRef idx="0">
+                <a:schemeClr val="accent1"/>
+              </a:effectRef>
+              <a:fontRef idx="minor">
+                <a:schemeClr val="tx1"/>
+              </a:fontRef>
+            </p:style>
+            <p:txBody>
+              <a:bodyPr rtlCol="0" anchor="ctr"/>
+              <a:lstStyle/>
+              <a:p>
+                <a:pPr algn="ctr"/>
+                <a:endParaRPr lang="en-US">
+                  <a:solidFill>
+                    <a:srgbClr val="FF0000"/>
+                  </a:solidFill>
+                </a:endParaRPr>
+              </a:p>
+            </p:txBody>
+          </p:sp>
+          <p:sp>
+            <p:nvSpPr>
+              <p:cNvPr id="8" name="TextBox 7">
+                <a:extLst>
+                  <a:ext uri="{FF2B5EF4-FFF2-40B4-BE49-F238E27FC236}">
+                    <a16:creationId xmlns:a16="http://schemas.microsoft.com/office/drawing/2014/main" id="{026E776A-7272-1C4E-6AB8-877A05406ADA}"/>
+                  </a:ext>
+                </a:extLst>
+              </p:cNvPr>
+              <p:cNvSpPr txBox="1"/>
+              <p:nvPr/>
+            </p:nvSpPr>
+            <p:spPr>
+              <a:xfrm>
+                <a:off x="4859903" y="2409456"/>
+                <a:ext cx="1554686" cy="369332"/>
+              </a:xfrm>
+              <a:prstGeom prst="rect">
+                <a:avLst/>
+              </a:prstGeom>
+              <a:noFill/>
+              <a:ln>
+                <a:noFill/>
+              </a:ln>
+            </p:spPr>
+            <p:txBody>
+              <a:bodyPr rot="0" spcFirstLastPara="0" vertOverflow="overflow" horzOverflow="overflow" vert="horz" wrap="square" lIns="91440" tIns="45720" rIns="91440" bIns="45720" numCol="1" spcCol="0" rtlCol="0" fromWordArt="0" anchor="t" anchorCtr="0" forceAA="0" compatLnSpc="1">
+                <a:prstTxWarp prst="textNoShape">
+                  <a:avLst/>
+                </a:prstTxWarp>
+                <a:spAutoFit/>
+              </a:bodyPr>
+              <a:lstStyle/>
+              <a:p>
+                <a:pPr algn="ctr"/>
+                <a:r>
+                  <a:rPr lang="en-US">
+                    <a:solidFill>
+                      <a:srgbClr val="FF0000"/>
+                    </a:solidFill>
+                    <a:ea typeface="Calibri"/>
+                    <a:cs typeface="Calibri"/>
+                  </a:rPr>
+                  <a:t>QBER = 0%</a:t>
+                </a:r>
+                <a:endParaRPr lang="en-US">
+                  <a:solidFill>
+                    <a:srgbClr val="FF0000"/>
+                  </a:solidFill>
+                </a:endParaRPr>
+              </a:p>
+            </p:txBody>
+          </p:sp>
+        </p:grpSp>
+        <p:grpSp>
+          <p:nvGrpSpPr>
+            <p:cNvPr id="19" name="Group 18">
+              <a:extLst>
+                <a:ext uri="{FF2B5EF4-FFF2-40B4-BE49-F238E27FC236}">
+                  <a16:creationId xmlns:a16="http://schemas.microsoft.com/office/drawing/2014/main" id="{68D3C207-3132-7CBD-163E-F7754582A7CD}"/>
+                </a:ext>
+              </a:extLst>
+            </p:cNvPr>
+            <p:cNvGrpSpPr/>
+            <p:nvPr/>
+          </p:nvGrpSpPr>
+          <p:grpSpPr>
+            <a:xfrm>
+              <a:off x="461818" y="2932545"/>
+              <a:ext cx="6788727" cy="1846659"/>
+              <a:chOff x="461818" y="2932545"/>
+              <a:chExt cx="6788727" cy="1846659"/>
+            </a:xfrm>
+          </p:grpSpPr>
+          <p:sp>
+            <p:nvSpPr>
+              <p:cNvPr id="15" name="TextBox 14">
+                <a:extLst>
+                  <a:ext uri="{FF2B5EF4-FFF2-40B4-BE49-F238E27FC236}">
+                    <a16:creationId xmlns:a16="http://schemas.microsoft.com/office/drawing/2014/main" id="{0FF16120-2605-4757-A434-039FC19F3048}"/>
+                  </a:ext>
+                </a:extLst>
+              </p:cNvPr>
+              <p:cNvSpPr txBox="1"/>
+              <p:nvPr/>
+            </p:nvSpPr>
+            <p:spPr>
+              <a:xfrm>
+                <a:off x="461818" y="2932545"/>
+                <a:ext cx="6788727" cy="1846659"/>
+              </a:xfrm>
+              <a:prstGeom prst="rect">
+                <a:avLst/>
+              </a:prstGeom>
+              <a:noFill/>
+            </p:spPr>
+            <p:txBody>
+              <a:bodyPr rot="0" spcFirstLastPara="0" vertOverflow="overflow" horzOverflow="overflow" vert="horz" wrap="square" lIns="91440" tIns="45720" rIns="91440" bIns="45720" numCol="1" spcCol="0" rtlCol="0" fromWordArt="0" anchor="t" anchorCtr="0" forceAA="0" compatLnSpc="1">
+                <a:prstTxWarp prst="textNoShape">
+                  <a:avLst/>
+                </a:prstTxWarp>
+                <a:spAutoFit/>
+              </a:bodyPr>
+              <a:lstStyle/>
+              <a:p>
+                <a:pPr marL="285750" indent="-285750">
+                  <a:buFont typeface="Arial"/>
+                  <a:buChar char="•"/>
+                </a:pPr>
+                <a:r>
+                  <a:rPr lang="en-US" b="1">
+                    <a:ea typeface="Calibri" panose="020F0502020204030204"/>
+                    <a:cs typeface="Calibri" panose="020F0502020204030204"/>
+                  </a:rPr>
+                  <a:t>Results of one run: locally with noise</a:t>
+                </a:r>
+              </a:p>
+              <a:p>
+                <a:pPr marL="742950" lvl="1" indent="-285750">
+                  <a:buFont typeface="Courier New"/>
+                  <a:buChar char="o"/>
+                </a:pPr>
+                <a:r>
+                  <a:rPr lang="en-US" sz="1600">
+                    <a:ea typeface="Calibri" panose="020F0502020204030204"/>
+                    <a:cs typeface="Calibri" panose="020F0502020204030204"/>
+                  </a:rPr>
+                  <a:t>Alice’s</a:t>
+                </a:r>
+                <a:r>
+                  <a:rPr lang="en-US" sz="1600"/>
+                  <a:t> Bits: 0, 1, 1, 0, 1, 0, 0, 0, 0, 0, 0, 1, 0, 1, 0, 0, 1, 1, 1, 1 </a:t>
+                </a:r>
+                <a:endParaRPr lang="en-US" sz="1600">
+                  <a:ea typeface="Calibri" panose="020F0502020204030204"/>
+                  <a:cs typeface="Calibri" panose="020F0502020204030204"/>
+                </a:endParaRPr>
+              </a:p>
+              <a:p>
+                <a:pPr marL="742950" lvl="1" indent="-285750">
+                  <a:buFont typeface="Courier New"/>
+                  <a:buChar char="o"/>
+                </a:pPr>
+                <a:r>
+                  <a:rPr lang="en-US" sz="1600"/>
+                  <a:t>Alice’s Bases: Z, X, Z, Z, Z, X, X, Z, Z, X, Z, X, Z, X, X, Z, X, X, Z, X </a:t>
+                </a:r>
+                <a:endParaRPr lang="en-US" sz="1600">
+                  <a:ea typeface="Calibri" panose="020F0502020204030204"/>
+                  <a:cs typeface="Calibri" panose="020F0502020204030204"/>
+                </a:endParaRPr>
+              </a:p>
+              <a:p>
+                <a:pPr marL="742950" lvl="1" indent="-285750">
+                  <a:buFont typeface="Courier New"/>
+                  <a:buChar char="o"/>
+                </a:pPr>
+                <a:r>
+                  <a:rPr lang="en-US" sz="1600"/>
+                  <a:t>Bob’s Bases: X, Z, Z, Z, Z, Z, Z, X, Z, Z, Z, Z, Z, Z, Z, X, Z, X, Z, </a:t>
+                </a:r>
+                <a:endParaRPr lang="en-US" sz="1600">
+                  <a:ea typeface="Calibri"/>
+                  <a:cs typeface="Calibri"/>
+                </a:endParaRPr>
+              </a:p>
+              <a:p>
+                <a:pPr marL="742950" lvl="1" indent="-285750">
+                  <a:buFont typeface="Courier New"/>
+                  <a:buChar char="o"/>
+                </a:pPr>
+                <a:r>
+                  <a:rPr lang="en-US" sz="1600"/>
+                  <a:t>Bob’s Bits: 1, 0, 1, 1, 1, 1, 0, 0, 0, 0, 0, 1, 0, 0, 0, 1, 1, 1, 0, 1 </a:t>
+                </a:r>
+                <a:endParaRPr lang="en-US" sz="1600">
+                  <a:ea typeface="Calibri"/>
+                  <a:cs typeface="Calibri"/>
+                </a:endParaRPr>
+              </a:p>
+              <a:p>
+                <a:pPr marL="742950" lvl="1" indent="-285750">
+                  <a:buFont typeface="Courier New"/>
+                  <a:buChar char="o"/>
+                </a:pPr>
+                <a:r>
+                  <a:rPr lang="en-US" sz="1600"/>
+                  <a:t>Alice’s Sifted Key: </a:t>
+                </a:r>
+                <a:r>
+                  <a:rPr lang="en-US" sz="1600">
+                    <a:solidFill>
+                      <a:srgbClr val="FF0000"/>
+                    </a:solidFill>
+                  </a:rPr>
+                  <a:t>1, 0, 1, 0, 0, 0, 1, 1, 1</a:t>
+                </a:r>
+                <a:r>
+                  <a:rPr lang="en-US" sz="1600"/>
+                  <a:t> </a:t>
+                </a:r>
+                <a:endParaRPr lang="en-US" sz="1600">
+                  <a:ea typeface="Calibri"/>
+                  <a:cs typeface="Calibri"/>
+                </a:endParaRPr>
+              </a:p>
+              <a:p>
+                <a:pPr marL="742950" lvl="1" indent="-285750">
+                  <a:buFont typeface="Courier New"/>
+                  <a:buChar char="o"/>
+                </a:pPr>
+                <a:r>
+                  <a:rPr lang="en-US" sz="1600"/>
+                  <a:t>Bob’s Sifted Key: </a:t>
+                </a:r>
+                <a:r>
+                  <a:rPr lang="en-US" sz="1600">
+                    <a:solidFill>
+                      <a:srgbClr val="FF0000"/>
+                    </a:solidFill>
+                  </a:rPr>
+                  <a:t>1, 1, 1, 0, 0, 0, 1, 0, 1</a:t>
+                </a:r>
+                <a:endParaRPr lang="en-US" sz="1600">
+                  <a:solidFill>
+                    <a:srgbClr val="FF0000"/>
+                  </a:solidFill>
+                  <a:ea typeface="Calibri" panose="020F0502020204030204"/>
+                  <a:cs typeface="Calibri" panose="020F0502020204030204"/>
+                </a:endParaRPr>
+              </a:p>
+            </p:txBody>
+          </p:sp>
+          <p:sp>
+            <p:nvSpPr>
+              <p:cNvPr id="5" name="Right Brace 4">
+                <a:extLst>
+                  <a:ext uri="{FF2B5EF4-FFF2-40B4-BE49-F238E27FC236}">
+                    <a16:creationId xmlns:a16="http://schemas.microsoft.com/office/drawing/2014/main" id="{A3A5365B-4431-55DA-3501-ABB4E561D1D8}"/>
+                  </a:ext>
+                </a:extLst>
+              </p:cNvPr>
+              <p:cNvSpPr/>
+              <p:nvPr/>
+            </p:nvSpPr>
+            <p:spPr>
+              <a:xfrm>
+                <a:off x="4587734" y="4280703"/>
+                <a:ext cx="279722" cy="498466"/>
+              </a:xfrm>
+              <a:prstGeom prst="rightBrace">
+                <a:avLst/>
+              </a:prstGeom>
+              <a:ln>
+                <a:solidFill>
+                  <a:srgbClr val="FF0000"/>
+                </a:solidFill>
+              </a:ln>
+            </p:spPr>
+            <p:style>
+              <a:lnRef idx="1">
+                <a:schemeClr val="accent1"/>
+              </a:lnRef>
+              <a:fillRef idx="0">
+                <a:schemeClr val="accent1"/>
+              </a:fillRef>
+              <a:effectRef idx="0">
+                <a:schemeClr val="accent1"/>
+              </a:effectRef>
+              <a:fontRef idx="minor">
+                <a:schemeClr val="tx1"/>
+              </a:fontRef>
+            </p:style>
+            <p:txBody>
+              <a:bodyPr rtlCol="0" anchor="ctr"/>
+              <a:lstStyle/>
+              <a:p>
+                <a:pPr algn="ctr"/>
+                <a:endParaRPr lang="en-US">
+                  <a:solidFill>
+                    <a:srgbClr val="FF0000"/>
+                  </a:solidFill>
+                </a:endParaRPr>
+              </a:p>
+            </p:txBody>
+          </p:sp>
+          <p:sp>
+            <p:nvSpPr>
+              <p:cNvPr id="10" name="TextBox 9">
+                <a:extLst>
+                  <a:ext uri="{FF2B5EF4-FFF2-40B4-BE49-F238E27FC236}">
+                    <a16:creationId xmlns:a16="http://schemas.microsoft.com/office/drawing/2014/main" id="{67BA9D2E-112C-D879-95ED-9A6CE696CA3A}"/>
+                  </a:ext>
+                </a:extLst>
+              </p:cNvPr>
+              <p:cNvSpPr txBox="1"/>
+              <p:nvPr/>
+            </p:nvSpPr>
+            <p:spPr>
+              <a:xfrm>
+                <a:off x="4859903" y="4350990"/>
+                <a:ext cx="1554686" cy="369332"/>
+              </a:xfrm>
+              <a:prstGeom prst="rect">
+                <a:avLst/>
+              </a:prstGeom>
+              <a:noFill/>
+              <a:ln>
+                <a:noFill/>
+              </a:ln>
+            </p:spPr>
+            <p:txBody>
+              <a:bodyPr rot="0" spcFirstLastPara="0" vertOverflow="overflow" horzOverflow="overflow" vert="horz" wrap="square" lIns="91440" tIns="45720" rIns="91440" bIns="45720" numCol="1" spcCol="0" rtlCol="0" fromWordArt="0" anchor="t" anchorCtr="0" forceAA="0" compatLnSpc="1">
+                <a:prstTxWarp prst="textNoShape">
+                  <a:avLst/>
+                </a:prstTxWarp>
+                <a:spAutoFit/>
+              </a:bodyPr>
+              <a:lstStyle/>
+              <a:p>
+                <a:pPr algn="ctr"/>
+                <a:r>
+                  <a:rPr lang="en-US">
+                    <a:solidFill>
+                      <a:srgbClr val="FF0000"/>
+                    </a:solidFill>
+                    <a:ea typeface="Calibri"/>
+                    <a:cs typeface="Calibri"/>
+                  </a:rPr>
+                  <a:t>QBER ~ 22%</a:t>
+                </a:r>
+                <a:endParaRPr lang="en-US">
+                  <a:solidFill>
+                    <a:srgbClr val="FF0000"/>
+                  </a:solidFill>
+                </a:endParaRPr>
+              </a:p>
+            </p:txBody>
+          </p:sp>
+        </p:grpSp>
+        <p:grpSp>
+          <p:nvGrpSpPr>
+            <p:cNvPr id="18" name="Group 17">
+              <a:extLst>
+                <a:ext uri="{FF2B5EF4-FFF2-40B4-BE49-F238E27FC236}">
+                  <a16:creationId xmlns:a16="http://schemas.microsoft.com/office/drawing/2014/main" id="{980FE866-56D1-DE66-D0B3-0CFA7CA99B90}"/>
+                </a:ext>
+              </a:extLst>
+            </p:cNvPr>
+            <p:cNvGrpSpPr/>
+            <p:nvPr/>
+          </p:nvGrpSpPr>
+          <p:grpSpPr>
+            <a:xfrm>
+              <a:off x="461818" y="4779818"/>
+              <a:ext cx="6488545" cy="1846941"/>
+              <a:chOff x="461818" y="4779818"/>
+              <a:chExt cx="6488545" cy="1846941"/>
+            </a:xfrm>
+          </p:grpSpPr>
+          <p:sp>
+            <p:nvSpPr>
+              <p:cNvPr id="16" name="TextBox 15">
+                <a:extLst>
+                  <a:ext uri="{FF2B5EF4-FFF2-40B4-BE49-F238E27FC236}">
+                    <a16:creationId xmlns:a16="http://schemas.microsoft.com/office/drawing/2014/main" id="{25AE3242-A225-289A-D522-0F12CAE1AE6A}"/>
+                  </a:ext>
+                </a:extLst>
+              </p:cNvPr>
+              <p:cNvSpPr txBox="1"/>
+              <p:nvPr/>
+            </p:nvSpPr>
+            <p:spPr>
+              <a:xfrm>
+                <a:off x="461818" y="4779818"/>
+                <a:ext cx="6488545" cy="1846659"/>
+              </a:xfrm>
+              <a:prstGeom prst="rect">
+                <a:avLst/>
+              </a:prstGeom>
+              <a:noFill/>
+            </p:spPr>
+            <p:txBody>
+              <a:bodyPr rot="0" spcFirstLastPara="0" vertOverflow="overflow" horzOverflow="overflow" vert="horz" wrap="square" lIns="91440" tIns="45720" rIns="91440" bIns="45720" numCol="1" spcCol="0" rtlCol="0" fromWordArt="0" anchor="t" anchorCtr="0" forceAA="0" compatLnSpc="1">
+                <a:prstTxWarp prst="textNoShape">
+                  <a:avLst/>
+                </a:prstTxWarp>
+                <a:spAutoFit/>
+              </a:bodyPr>
+              <a:lstStyle/>
+              <a:p>
+                <a:pPr marL="285750" indent="-285750">
+                  <a:buFont typeface="Arial"/>
+                  <a:buChar char="•"/>
+                </a:pPr>
+                <a:r>
+                  <a:rPr lang="en-US" b="1"/>
+                  <a:t>Results of one run: on IBM hardware</a:t>
+                </a:r>
+                <a:endParaRPr lang="en-US"/>
+              </a:p>
+              <a:p>
+                <a:pPr marL="742950" lvl="1" indent="-285750">
+                  <a:buFont typeface="Courier New"/>
+                  <a:buChar char="o"/>
+                </a:pPr>
+                <a:r>
+                  <a:rPr lang="en-US" sz="1600"/>
+                  <a:t>Alice’s Bits: 0, 1, 1, 0, 1, 0, 0, 0, 0, 0, 0, 1, 0, 1, 0, 0, 1, 1, 1, 1 </a:t>
+                </a:r>
+                <a:endParaRPr lang="en-US">
+                  <a:ea typeface="Calibri"/>
+                  <a:cs typeface="Calibri"/>
+                </a:endParaRPr>
+              </a:p>
+              <a:p>
+                <a:pPr marL="742950" lvl="1" indent="-285750">
+                  <a:buFont typeface="Courier New"/>
+                  <a:buChar char="o"/>
+                </a:pPr>
+                <a:r>
+                  <a:rPr lang="en-US" sz="1600"/>
+                  <a:t>Alice’s Bases: Z, X, Z, Z, Z, X, X, Z, Z, X, Z, X, Z, X, X, Z, X, X, Z, X </a:t>
+                </a:r>
+                <a:endParaRPr lang="en-US">
+                  <a:ea typeface="Calibri" panose="020F0502020204030204"/>
+                  <a:cs typeface="Calibri" panose="020F0502020204030204"/>
+                </a:endParaRPr>
+              </a:p>
+              <a:p>
+                <a:pPr marL="742950" lvl="1" indent="-285750">
+                  <a:buFont typeface="Courier New"/>
+                  <a:buChar char="o"/>
+                </a:pPr>
+                <a:r>
+                  <a:rPr lang="en-US" sz="1600"/>
+                  <a:t>Bob’s Bases: X, Z, Z, Z, Z, Z, Z, X, Z, Z, Z, Z, Z, Z, Z, X, Z, X, Z, X </a:t>
+                </a:r>
+                <a:endParaRPr lang="en-US">
+                  <a:ea typeface="Calibri" panose="020F0502020204030204"/>
+                  <a:cs typeface="Calibri" panose="020F0502020204030204"/>
+                </a:endParaRPr>
+              </a:p>
+              <a:p>
+                <a:pPr marL="742950" lvl="1" indent="-285750">
+                  <a:buFont typeface="Courier New"/>
+                  <a:buChar char="o"/>
+                </a:pPr>
+                <a:r>
+                  <a:rPr lang="en-US" sz="1600"/>
+                  <a:t>Bob’s Bits: 0, 0, 0, 0, 1, 0, 0, 0, 0, 0, 0, 0, 0, 0, 1, 1, 1, 1, 1, 1 </a:t>
+                </a:r>
+                <a:endParaRPr lang="en-US">
+                  <a:ea typeface="Calibri" panose="020F0502020204030204"/>
+                  <a:cs typeface="Calibri" panose="020F0502020204030204"/>
+                </a:endParaRPr>
+              </a:p>
+              <a:p>
+                <a:pPr marL="742950" lvl="1" indent="-285750">
+                  <a:buFont typeface="Courier New"/>
+                  <a:buChar char="o"/>
+                </a:pPr>
+                <a:r>
+                  <a:rPr lang="en-US" sz="1600"/>
+                  <a:t>Alice’s Sifted Key: </a:t>
+                </a:r>
+                <a:r>
+                  <a:rPr lang="en-US" sz="1600">
+                    <a:solidFill>
+                      <a:srgbClr val="FF0000"/>
+                    </a:solidFill>
+                  </a:rPr>
+                  <a:t>1, 0, 1, 0, 0, 0, 1, 1, 1 </a:t>
+                </a:r>
+                <a:endParaRPr lang="en-US">
+                  <a:solidFill>
+                    <a:srgbClr val="FF0000"/>
+                  </a:solidFill>
+                  <a:ea typeface="Calibri" panose="020F0502020204030204"/>
+                  <a:cs typeface="Calibri" panose="020F0502020204030204"/>
+                </a:endParaRPr>
+              </a:p>
+              <a:p>
+                <a:pPr marL="742950" lvl="1" indent="-285750">
+                  <a:buFont typeface="Courier New"/>
+                  <a:buChar char="o"/>
+                </a:pPr>
+                <a:r>
+                  <a:rPr lang="en-US" sz="1600"/>
+                  <a:t>Bob’s Sifted Key: </a:t>
+                </a:r>
+                <a:r>
+                  <a:rPr lang="en-US" sz="1600">
+                    <a:solidFill>
+                      <a:srgbClr val="FF0000"/>
+                    </a:solidFill>
+                  </a:rPr>
+                  <a:t>0, 0, 1, 0, 0, 0, 1, 1, 1</a:t>
+                </a:r>
+                <a:endParaRPr lang="en-US">
+                  <a:solidFill>
+                    <a:srgbClr val="FF0000"/>
+                  </a:solidFill>
+                  <a:ea typeface="Calibri"/>
+                  <a:cs typeface="Calibri"/>
+                </a:endParaRPr>
+              </a:p>
+            </p:txBody>
+          </p:sp>
+          <p:grpSp>
+            <p:nvGrpSpPr>
+              <p:cNvPr id="17" name="Group 16">
+                <a:extLst>
+                  <a:ext uri="{FF2B5EF4-FFF2-40B4-BE49-F238E27FC236}">
+                    <a16:creationId xmlns:a16="http://schemas.microsoft.com/office/drawing/2014/main" id="{975A04D3-DE8F-A4B9-D2A6-5650BC663E3B}"/>
+                  </a:ext>
+                </a:extLst>
+              </p:cNvPr>
+              <p:cNvGrpSpPr/>
+              <p:nvPr/>
+            </p:nvGrpSpPr>
+            <p:grpSpPr>
+              <a:xfrm>
+                <a:off x="4577296" y="6128293"/>
+                <a:ext cx="1837293" cy="498466"/>
+                <a:chOff x="4577296" y="6128293"/>
+                <a:chExt cx="1837293" cy="498466"/>
+              </a:xfrm>
+            </p:grpSpPr>
+            <p:sp>
+              <p:nvSpPr>
+                <p:cNvPr id="6" name="Right Brace 5">
+                  <a:extLst>
+                    <a:ext uri="{FF2B5EF4-FFF2-40B4-BE49-F238E27FC236}">
+                      <a16:creationId xmlns:a16="http://schemas.microsoft.com/office/drawing/2014/main" id="{469CA3D6-06D6-AFC3-0CED-30B96C35403B}"/>
+                    </a:ext>
+                  </a:extLst>
+                </p:cNvPr>
+                <p:cNvSpPr/>
+                <p:nvPr/>
+              </p:nvSpPr>
+              <p:spPr>
+                <a:xfrm>
+                  <a:off x="4577296" y="6128293"/>
+                  <a:ext cx="269284" cy="498466"/>
+                </a:xfrm>
+                <a:prstGeom prst="rightBrace">
+                  <a:avLst/>
+                </a:prstGeom>
+                <a:ln>
+                  <a:solidFill>
+                    <a:srgbClr val="FF0000"/>
+                  </a:solidFill>
+                </a:ln>
+              </p:spPr>
+              <p:style>
+                <a:lnRef idx="1">
+                  <a:schemeClr val="accent1"/>
+                </a:lnRef>
+                <a:fillRef idx="0">
+                  <a:schemeClr val="accent1"/>
+                </a:fillRef>
+                <a:effectRef idx="0">
+                  <a:schemeClr val="accent1"/>
+                </a:effectRef>
+                <a:fontRef idx="minor">
+                  <a:schemeClr val="tx1"/>
+                </a:fontRef>
+              </p:style>
+              <p:txBody>
+                <a:bodyPr rtlCol="0" anchor="ctr"/>
+                <a:lstStyle/>
+                <a:p>
+                  <a:pPr algn="ctr"/>
+                  <a:endParaRPr lang="en-US">
+                    <a:solidFill>
+                      <a:srgbClr val="FF0000"/>
+                    </a:solidFill>
+                  </a:endParaRPr>
+                </a:p>
+              </p:txBody>
+            </p:sp>
+            <p:sp>
+              <p:nvSpPr>
+                <p:cNvPr id="14" name="TextBox 13">
+                  <a:extLst>
+                    <a:ext uri="{FF2B5EF4-FFF2-40B4-BE49-F238E27FC236}">
+                      <a16:creationId xmlns:a16="http://schemas.microsoft.com/office/drawing/2014/main" id="{10DF5516-49FF-DA3B-DBBA-19CB4001338E}"/>
+                    </a:ext>
+                  </a:extLst>
+                </p:cNvPr>
+                <p:cNvSpPr txBox="1"/>
+                <p:nvPr/>
+              </p:nvSpPr>
+              <p:spPr>
+                <a:xfrm>
+                  <a:off x="4859903" y="6198579"/>
+                  <a:ext cx="1554686" cy="369332"/>
+                </a:xfrm>
+                <a:prstGeom prst="rect">
+                  <a:avLst/>
+                </a:prstGeom>
+                <a:noFill/>
                 <a:ln>
                   <a:noFill/>
                 </a:ln>
-                <a:solidFill>
-                  <a:srgbClr val="002C73"/>
-                </a:solidFill>
-                <a:effectLst/>
-                <a:uLnTx/>
-                <a:uFillTx/>
-                <a:latin typeface="Arial" panose="020B0604020202020204"/>
-                <a:ea typeface="+mj-ea"/>
-                <a:cs typeface="+mj-cs"/>
-              </a:rPr>
-              <a:t>Study Approach: Baseline BB84</a:t>
-            </a:r>
-          </a:p>
-        </p:txBody>
-      </p:sp>
-      <p:sp>
-        <p:nvSpPr>
-          <p:cNvPr id="9" name="TextBox 8">
-            <a:extLst>
-              <a:ext uri="{FF2B5EF4-FFF2-40B4-BE49-F238E27FC236}">
-                <a16:creationId xmlns:a16="http://schemas.microsoft.com/office/drawing/2014/main" id="{3635BDD3-4D84-2737-85CD-6BC4B8FF6EBF}"/>
-              </a:ext>
-            </a:extLst>
-          </p:cNvPr>
-          <p:cNvSpPr txBox="1"/>
-          <p:nvPr/>
-        </p:nvSpPr>
-        <p:spPr>
-          <a:xfrm>
-            <a:off x="457200" y="1181100"/>
-            <a:ext cx="7346644" cy="4401205"/>
-          </a:xfrm>
-          <a:prstGeom prst="rect">
-            <a:avLst/>
-          </a:prstGeom>
-          <a:noFill/>
-        </p:spPr>
-        <p:txBody>
-          <a:bodyPr wrap="square" lIns="91440" tIns="45720" rIns="91440" bIns="45720" anchor="t">
-            <a:spAutoFit/>
-          </a:bodyPr>
-          <a:lstStyle/>
-          <a:p>
-            <a:pPr marL="285750" indent="-285750">
-              <a:buFont typeface="Arial" panose="020B0604020202020204" pitchFamily="34" charset="0"/>
-              <a:buChar char="•"/>
-            </a:pPr>
-            <a:r>
-              <a:rPr lang="en-US" sz="2000">
-                <a:solidFill>
-                  <a:srgbClr val="202123"/>
-                </a:solidFill>
-                <a:latin typeface="Calibri"/>
-                <a:ea typeface="Calibri"/>
-                <a:cs typeface="Calibri"/>
-              </a:rPr>
-              <a:t>Baseline pipeline</a:t>
-            </a:r>
-            <a:endParaRPr lang="en-US">
-              <a:solidFill>
-                <a:srgbClr val="000000"/>
-              </a:solidFill>
-              <a:latin typeface="Calibri"/>
-              <a:ea typeface="Calibri"/>
-              <a:cs typeface="Calibri"/>
-            </a:endParaRPr>
-          </a:p>
-          <a:p>
-            <a:pPr marL="742950" lvl="1" indent="-285750">
-              <a:buFont typeface="Courier New" panose="020B0604020202020204" pitchFamily="34" charset="0"/>
-              <a:buChar char="o"/>
-            </a:pPr>
-            <a:r>
-              <a:rPr lang="en-US" sz="2000">
-                <a:solidFill>
-                  <a:srgbClr val="202123"/>
-                </a:solidFill>
-                <a:latin typeface="Calibri"/>
-                <a:ea typeface="Calibri"/>
-                <a:cs typeface="Calibri"/>
-              </a:rPr>
-              <a:t>Encoding: Alice randomly selects a basis and a bit</a:t>
-            </a:r>
-          </a:p>
-          <a:p>
-            <a:pPr marL="742950" lvl="1" indent="-285750">
-              <a:buFont typeface="Courier New" panose="020B0604020202020204" pitchFamily="34" charset="0"/>
-              <a:buChar char="o"/>
-            </a:pPr>
-            <a:r>
-              <a:rPr lang="en-US" sz="2000">
-                <a:solidFill>
-                  <a:srgbClr val="202123"/>
-                </a:solidFill>
-                <a:latin typeface="Calibri"/>
-                <a:ea typeface="Calibri"/>
-                <a:cs typeface="Calibri"/>
-              </a:rPr>
-              <a:t>Measurement: Bob randomly selects a basis and measures</a:t>
-            </a:r>
-          </a:p>
-          <a:p>
-            <a:pPr marL="742950" lvl="1" indent="-285750">
-              <a:buFont typeface="Courier New" panose="020B0604020202020204" pitchFamily="34" charset="0"/>
-              <a:buChar char="o"/>
-            </a:pPr>
-            <a:r>
-              <a:rPr lang="en-US" sz="2000">
-                <a:solidFill>
-                  <a:srgbClr val="202123"/>
-                </a:solidFill>
-                <a:latin typeface="Calibri"/>
-                <a:ea typeface="Calibri"/>
-                <a:cs typeface="Calibri"/>
-              </a:rPr>
-              <a:t>Decoding: Alice and Bob compare bases and retain only those bits that match</a:t>
-            </a:r>
-          </a:p>
-          <a:p>
-            <a:pPr marL="742950" lvl="1" indent="-285750">
-              <a:buFont typeface="Courier New" panose="020B0604020202020204" pitchFamily="34" charset="0"/>
-              <a:buChar char="o"/>
-            </a:pPr>
-            <a:endParaRPr lang="en-US" sz="2000">
-              <a:solidFill>
-                <a:srgbClr val="202123"/>
-              </a:solidFill>
-              <a:latin typeface="Calibri"/>
-              <a:ea typeface="Calibri"/>
-              <a:cs typeface="Calibri"/>
-            </a:endParaRPr>
-          </a:p>
-          <a:p>
-            <a:pPr marL="742950" lvl="1" indent="-285750">
-              <a:buFont typeface="Courier New" panose="020B0604020202020204" pitchFamily="34" charset="0"/>
-              <a:buChar char="o"/>
-            </a:pPr>
-            <a:endParaRPr lang="en-US" sz="2000">
-              <a:solidFill>
-                <a:srgbClr val="202123"/>
-              </a:solidFill>
-              <a:latin typeface="Calibri"/>
-              <a:ea typeface="Calibri"/>
-              <a:cs typeface="Calibri"/>
-            </a:endParaRPr>
-          </a:p>
-          <a:p>
-            <a:pPr marL="285750" indent="-285750">
-              <a:buFont typeface="Arial" panose="020B0604020202020204" pitchFamily="34" charset="0"/>
-              <a:buChar char="•"/>
-            </a:pPr>
-            <a:r>
-              <a:rPr lang="en-US" sz="2000">
-                <a:solidFill>
-                  <a:srgbClr val="202123"/>
-                </a:solidFill>
-                <a:latin typeface="Calibri"/>
-                <a:ea typeface="Calibri"/>
-                <a:cs typeface="Calibri"/>
-              </a:rPr>
-              <a:t>Example</a:t>
-            </a:r>
-          </a:p>
-          <a:p>
-            <a:pPr marL="742950" lvl="1" indent="-285750">
-              <a:buFont typeface="Courier New" panose="020B0604020202020204" pitchFamily="34" charset="0"/>
-              <a:buChar char="o"/>
-            </a:pPr>
-            <a:r>
-              <a:rPr lang="en-US" sz="2000">
-                <a:solidFill>
-                  <a:srgbClr val="202123"/>
-                </a:solidFill>
-                <a:latin typeface="Calibri"/>
-                <a:ea typeface="Calibri"/>
-                <a:cs typeface="Calibri"/>
-              </a:rPr>
-              <a:t>Alice's Bits:</a:t>
-            </a:r>
-            <a:r>
-              <a:rPr lang="en-US" sz="2000">
-                <a:solidFill>
-                  <a:srgbClr val="202123"/>
-                </a:solidFill>
-                <a:ea typeface="+mn-lt"/>
-                <a:cs typeface="+mn-lt"/>
-              </a:rPr>
-              <a:t> 0,1,1,0,1,0,0,0,0,0,0,1,0,1,0,0,1,1,1,1</a:t>
-            </a:r>
-          </a:p>
-          <a:p>
-            <a:pPr marL="742950" lvl="1" indent="-285750">
-              <a:buFont typeface="Courier New" panose="020B0604020202020204" pitchFamily="34" charset="0"/>
-              <a:buChar char="o"/>
-            </a:pPr>
-            <a:r>
-              <a:rPr lang="en-US" sz="2000">
-                <a:solidFill>
-                  <a:srgbClr val="202123"/>
-                </a:solidFill>
-                <a:ea typeface="+mn-lt"/>
-                <a:cs typeface="+mn-lt"/>
-              </a:rPr>
-              <a:t>Alice's Bases: Z,X,Z,Z,Z,X,X,Z,Z,X,Z,X,Z,X,X,Z,X,X,Z,X </a:t>
-            </a:r>
-          </a:p>
-          <a:p>
-            <a:pPr marL="742950" lvl="1" indent="-285750">
-              <a:buFont typeface="Courier New" panose="020B0604020202020204" pitchFamily="34" charset="0"/>
-              <a:buChar char="o"/>
-            </a:pPr>
-            <a:r>
-              <a:rPr lang="en-US" sz="2000">
-                <a:solidFill>
-                  <a:srgbClr val="202123"/>
-                </a:solidFill>
-                <a:ea typeface="+mn-lt"/>
-                <a:cs typeface="+mn-lt"/>
-              </a:rPr>
-              <a:t>Bob's Bases: X,Z,Z,Z,Z,Z,Z,X,Z,Z,Z,Z,Z,Z,Z,X,Z,X,Z,X</a:t>
-            </a:r>
-          </a:p>
-          <a:p>
-            <a:pPr marL="742950" lvl="1" indent="-285750">
-              <a:buFont typeface="Courier New" panose="020B0604020202020204" pitchFamily="34" charset="0"/>
-              <a:buChar char="o"/>
-            </a:pPr>
-            <a:r>
-              <a:rPr lang="en-US" sz="2000">
-                <a:solidFill>
-                  <a:srgbClr val="202123"/>
-                </a:solidFill>
-                <a:ea typeface="+mn-lt"/>
-                <a:cs typeface="+mn-lt"/>
-              </a:rPr>
-              <a:t>Bob's Bits: 0,0,1,0,1,0,1,1,0,1,0,1,0,1,1,0,0,1,1,1</a:t>
-            </a:r>
-          </a:p>
-          <a:p>
-            <a:pPr marL="742950" lvl="1" indent="-285750">
-              <a:buFont typeface="Courier New" panose="020B0604020202020204" pitchFamily="34" charset="0"/>
-              <a:buChar char="o"/>
-            </a:pPr>
-            <a:r>
-              <a:rPr lang="en-US" sz="2000">
-                <a:solidFill>
-                  <a:srgbClr val="202123"/>
-                </a:solidFill>
-                <a:ea typeface="+mn-lt"/>
-                <a:cs typeface="+mn-lt"/>
-              </a:rPr>
-              <a:t>Alice's Sifted Key: 1, 0, 1, 0, 0, 0, 1, 1, 1</a:t>
-            </a:r>
-          </a:p>
-          <a:p>
-            <a:pPr marL="742950" lvl="1" indent="-285750">
-              <a:buFont typeface="Courier New" panose="020B0604020202020204" pitchFamily="34" charset="0"/>
-              <a:buChar char="o"/>
-            </a:pPr>
-            <a:r>
-              <a:rPr lang="en-US" sz="2000">
-                <a:solidFill>
-                  <a:srgbClr val="202123"/>
-                </a:solidFill>
-                <a:ea typeface="+mn-lt"/>
-                <a:cs typeface="+mn-lt"/>
-              </a:rPr>
-              <a:t>Bob's Sifted Key: 1, 0, 1, 0, 0, 0, 1, 1, 1 </a:t>
-            </a:r>
-          </a:p>
-        </p:txBody>
-      </p:sp>
-      <p:pic>
-        <p:nvPicPr>
-          <p:cNvPr id="2" name="Picture 1" descr="A screenshot of a computer program&#10;&#10;AI-generated content may be incorrect.">
-            <a:extLst>
-              <a:ext uri="{FF2B5EF4-FFF2-40B4-BE49-F238E27FC236}">
-                <a16:creationId xmlns:a16="http://schemas.microsoft.com/office/drawing/2014/main" id="{276BC741-5F16-9902-C12D-2B45AF52D43E}"/>
-              </a:ext>
-            </a:extLst>
-          </p:cNvPr>
-          <p:cNvPicPr>
-            <a:picLocks noChangeAspect="1"/>
-          </p:cNvPicPr>
-          <p:nvPr/>
-        </p:nvPicPr>
-        <p:blipFill>
-          <a:blip r:embed="rId2"/>
-          <a:stretch>
-            <a:fillRect/>
-          </a:stretch>
-        </p:blipFill>
-        <p:spPr>
-          <a:xfrm>
-            <a:off x="8263253" y="0"/>
-            <a:ext cx="3930264" cy="6858000"/>
-          </a:xfrm>
-          <a:prstGeom prst="rect">
-            <a:avLst/>
-          </a:prstGeom>
-        </p:spPr>
-      </p:pic>
-      <p:sp>
-        <p:nvSpPr>
-          <p:cNvPr id="3" name="TextBox 2">
-            <a:extLst>
-              <a:ext uri="{FF2B5EF4-FFF2-40B4-BE49-F238E27FC236}">
-                <a16:creationId xmlns:a16="http://schemas.microsoft.com/office/drawing/2014/main" id="{1B2681E1-C30A-4694-4E82-C776EAF05DC0}"/>
-              </a:ext>
-            </a:extLst>
-          </p:cNvPr>
-          <p:cNvSpPr txBox="1"/>
-          <p:nvPr/>
-        </p:nvSpPr>
-        <p:spPr>
-          <a:xfrm>
-            <a:off x="3048000" y="2740068"/>
-            <a:ext cx="6096000" cy="646331"/>
-          </a:xfrm>
-          <a:prstGeom prst="rect">
-            <a:avLst/>
-          </a:prstGeom>
-          <a:noFill/>
-        </p:spPr>
-        <p:txBody>
-          <a:bodyPr rot="0" spcFirstLastPara="0" vertOverflow="overflow" horzOverflow="overflow" vert="horz" wrap="square" lIns="91440" tIns="45720" rIns="91440" bIns="45720" numCol="1" spcCol="0" rtlCol="0" fromWordArt="0" anchor="t" anchorCtr="0" forceAA="0" compatLnSpc="1">
-            <a:prstTxWarp prst="textNoShape">
-              <a:avLst/>
-            </a:prstTxWarp>
-            <a:spAutoFit/>
-          </a:bodyPr>
-          <a:lstStyle/>
-          <a:p>
-            <a:r>
-              <a:rPr lang="en-US" b="1"/>
-              <a:t>WILL FINISH TMR</a:t>
-            </a:r>
-          </a:p>
-          <a:p>
-            <a:pPr algn="ctr"/>
-            <a:endParaRPr lang="en-US" dirty="0">
-              <a:ea typeface="Calibri"/>
-              <a:cs typeface="Calibri"/>
-            </a:endParaRPr>
-          </a:p>
-        </p:txBody>
-      </p:sp>
+              </p:spPr>
+              <p:txBody>
+                <a:bodyPr rot="0" spcFirstLastPara="0" vertOverflow="overflow" horzOverflow="overflow" vert="horz" wrap="square" lIns="91440" tIns="45720" rIns="91440" bIns="45720" numCol="1" spcCol="0" rtlCol="0" fromWordArt="0" anchor="t" anchorCtr="0" forceAA="0" compatLnSpc="1">
+                  <a:prstTxWarp prst="textNoShape">
+                    <a:avLst/>
+                  </a:prstTxWarp>
+                  <a:spAutoFit/>
+                </a:bodyPr>
+                <a:lstStyle/>
+                <a:p>
+                  <a:pPr algn="ctr"/>
+                  <a:r>
+                    <a:rPr lang="en-US">
+                      <a:solidFill>
+                        <a:srgbClr val="FF0000"/>
+                      </a:solidFill>
+                      <a:ea typeface="Calibri"/>
+                      <a:cs typeface="Calibri"/>
+                    </a:rPr>
+                    <a:t>QBER ~ 11%</a:t>
+                  </a:r>
+                  <a:endParaRPr lang="en-US">
+                    <a:solidFill>
+                      <a:srgbClr val="FF0000"/>
+                    </a:solidFill>
+                  </a:endParaRPr>
+                </a:p>
+              </p:txBody>
+            </p:sp>
+          </p:grpSp>
+        </p:grpSp>
+      </p:grpSp>
     </p:spTree>
     <p:extLst>
       <p:ext uri="{BB962C8B-B14F-4D97-AF65-F5344CB8AC3E}">
@@ -8714,32 +10919,15 @@
               <a:defRPr/>
             </a:pPr>
             <a:r>
-              <a:rPr kumimoji="0" lang="en-US" sz="3600" b="1" i="0" u="none" strike="noStrike" kern="1200" cap="none" spc="0" normalizeH="0" baseline="0" noProof="0">
-                <a:ln>
-                  <a:noFill/>
-                </a:ln>
-                <a:solidFill>
-                  <a:srgbClr val="002C73"/>
-                </a:solidFill>
-                <a:effectLst/>
-                <a:uLnTx/>
-                <a:uFillTx/>
-                <a:latin typeface="Arial" panose="020B0604020202020204"/>
-                <a:ea typeface="+mj-ea"/>
-                <a:cs typeface="+mj-cs"/>
-              </a:rPr>
-              <a:t>Study Approach: Baseline BB84</a:t>
-            </a:r>
-            <a:r>
               <a:rPr lang="en-US">
                 <a:solidFill>
                   <a:srgbClr val="002C73"/>
                 </a:solidFill>
                 <a:latin typeface="Arial" panose="020B0604020202020204"/>
               </a:rPr>
-              <a:t> Results</a:t>
-            </a:r>
-            <a:endParaRPr kumimoji="0" lang="en-US" sz="3600" b="1" i="0" u="none" strike="noStrike" kern="1200" cap="none" spc="0" normalizeH="0" baseline="0" noProof="0">
+              <a:t>Baseline Experiments: No Eavesdropping</a:t>
+            </a:r>
+            <a:endParaRPr lang="en-US" sz="3600" b="1" i="0" u="none" strike="noStrike" kern="1200" cap="none" spc="0" normalizeH="0" baseline="0" noProof="0">
               <a:ln>
                 <a:noFill/>
               </a:ln>
@@ -8750,8 +10938,7 @@
               <a:uLnTx/>
               <a:uFillTx/>
               <a:latin typeface="Arial" panose="020B0604020202020204"/>
-              <a:ea typeface="+mj-ea"/>
-              <a:cs typeface="+mj-cs"/>
+              <a:cs typeface="Arial"/>
             </a:endParaRPr>
           </a:p>
         </p:txBody>
@@ -8844,8 +11031,8 @@
         </p:nvSpPr>
         <p:spPr>
           <a:xfrm>
-            <a:off x="457200" y="1976835"/>
-            <a:ext cx="5979446" cy="4708981"/>
+            <a:off x="457200" y="1378120"/>
+            <a:ext cx="5979446" cy="5232202"/>
           </a:xfrm>
           <a:prstGeom prst="rect">
             <a:avLst/>
@@ -8858,6 +11045,27 @@
           </a:bodyPr>
           <a:lstStyle/>
           <a:p>
+            <a:r>
+              <a:rPr lang="en-US" sz="2000" b="1">
+                <a:solidFill>
+                  <a:srgbClr val="202123"/>
+                </a:solidFill>
+                <a:ea typeface="Calibri"/>
+                <a:cs typeface="Calibri"/>
+              </a:rPr>
+              <a:t>Effects of Noise Parameters on QBER</a:t>
+            </a:r>
+          </a:p>
+          <a:p>
+            <a:endParaRPr lang="en-US" sz="2000">
+              <a:solidFill>
+                <a:srgbClr val="202123"/>
+              </a:solidFill>
+              <a:ea typeface="Calibri"/>
+              <a:cs typeface="Calibri"/>
+            </a:endParaRPr>
+          </a:p>
+          <a:p>
             <a:pPr marL="285750" indent="-285750">
               <a:buFont typeface="Arial" panose="020B0604020202020204" pitchFamily="34" charset="0"/>
               <a:buChar char="•"/>
@@ -8867,11 +11075,10 @@
                 <a:solidFill>
                   <a:srgbClr val="202123"/>
                 </a:solidFill>
-                <a:latin typeface="Calibri"/>
                 <a:ea typeface="Calibri"/>
                 <a:cs typeface="Calibri"/>
               </a:rPr>
-              <a:t>BER</a:t>
+              <a:t>QBER/Loss</a:t>
             </a:r>
             <a:endParaRPr lang="en-US"/>
           </a:p>
@@ -9189,40 +11396,31 @@
             </a:lvl1pPr>
           </a:lstStyle>
           <a:p>
-            <a:pPr marL="0" marR="0" lvl="0" indent="0" algn="l" defTabSz="914400" rtl="0" eaLnBrk="1" fontAlgn="auto" latinLnBrk="0" hangingPunct="1">
-              <a:lnSpc>
-                <a:spcPct val="90000"/>
-              </a:lnSpc>
-              <a:spcBef>
-                <a:spcPct val="0"/>
-              </a:spcBef>
-              <a:spcAft>
-                <a:spcPts val="0"/>
-              </a:spcAft>
-              <a:buClrTx/>
-              <a:buSzTx/>
-              <a:buFontTx/>
-              <a:buNone/>
-              <a:tabLst/>
+            <a:pPr>
               <a:defRPr/>
             </a:pPr>
             <a:r>
-              <a:rPr kumimoji="0" lang="en-US" sz="3600" b="1" i="0" u="none" strike="noStrike" kern="1200" cap="none" spc="0" normalizeH="0" baseline="0" noProof="0">
-                <a:ln>
-                  <a:noFill/>
-                </a:ln>
+              <a:rPr lang="en-US">
                 <a:solidFill>
                   <a:srgbClr val="002C73"/>
                 </a:solidFill>
-                <a:effectLst/>
-                <a:uLnTx/>
-                <a:uFillTx/>
                 <a:latin typeface="Arial" panose="020B0604020202020204"/>
-                <a:ea typeface="+mj-ea"/>
-                <a:cs typeface="+mj-cs"/>
               </a:rPr>
-              <a:t>Study Approach: Eavesdropper</a:t>
-            </a:r>
+              <a:t>Eavesdropping: Intercept, Resend</a:t>
+            </a:r>
+            <a:endParaRPr lang="en-US" sz="3600" b="1" i="0" u="none" strike="noStrike" kern="1200" cap="none" spc="0" normalizeH="0" baseline="0" noProof="0">
+              <a:ln>
+                <a:noFill/>
+              </a:ln>
+              <a:solidFill>
+                <a:srgbClr val="002C73"/>
+              </a:solidFill>
+              <a:effectLst/>
+              <a:uLnTx/>
+              <a:uFillTx/>
+              <a:latin typeface="Arial" panose="020B0604020202020204"/>
+              <a:cs typeface="Arial"/>
+            </a:endParaRPr>
           </a:p>
         </p:txBody>
       </p:sp>
@@ -9241,7 +11439,7 @@
         <p:spPr>
           <a:xfrm>
             <a:off x="457200" y="1181100"/>
-            <a:ext cx="6072456" cy="3447098"/>
+            <a:ext cx="6072456" cy="3908762"/>
           </a:xfrm>
           <a:prstGeom prst="rect">
             <a:avLst/>
@@ -9255,6 +11453,9 @@
           <a:lstStyle/>
           <a:p>
             <a:pPr marL="285750" indent="-285750">
+              <a:spcAft>
+                <a:spcPts val="600"/>
+              </a:spcAft>
               <a:buFont typeface="Arial" panose="020B0604020202020204" pitchFamily="34" charset="0"/>
               <a:buChar char="•"/>
             </a:pPr>
@@ -9268,9 +11469,13 @@
               </a:rPr>
               <a:t>Pipeline</a:t>
             </a:r>
+            <a:endParaRPr lang="en-US"/>
           </a:p>
           <a:p>
             <a:pPr marL="742950" lvl="1" indent="-285750">
+              <a:spcAft>
+                <a:spcPts val="600"/>
+              </a:spcAft>
               <a:buFont typeface="Courier New,monospace" panose="020B0604020202020204" pitchFamily="34" charset="0"/>
               <a:buChar char="o"/>
             </a:pPr>
@@ -9296,6 +11501,9 @@
           </a:p>
           <a:p>
             <a:pPr marL="742950" lvl="1" indent="-285750">
+              <a:spcAft>
+                <a:spcPts val="600"/>
+              </a:spcAft>
               <a:buFont typeface="Courier New,monospace" panose="020B0604020202020204" pitchFamily="34" charset="0"/>
               <a:buChar char="o"/>
             </a:pPr>
@@ -9313,6 +11521,9 @@
           </a:p>
           <a:p>
             <a:pPr marL="742950" lvl="1" indent="-285750">
+              <a:spcAft>
+                <a:spcPts val="600"/>
+              </a:spcAft>
               <a:buFont typeface="Courier New,monospace" panose="020B0604020202020204" pitchFamily="34" charset="0"/>
               <a:buChar char="o"/>
             </a:pPr>
@@ -9330,6 +11541,9 @@
           </a:p>
           <a:p>
             <a:pPr marL="742950" lvl="1" indent="-285750">
+              <a:spcAft>
+                <a:spcPts val="600"/>
+              </a:spcAft>
               <a:buFont typeface="Courier New,monospace" panose="020B0604020202020204" pitchFamily="34" charset="0"/>
               <a:buChar char="o"/>
             </a:pPr>
@@ -9355,11 +11569,14 @@
           </a:p>
           <a:p>
             <a:pPr marL="742950" lvl="1" indent="-285750">
+              <a:spcAft>
+                <a:spcPts val="600"/>
+              </a:spcAft>
               <a:buFont typeface="Courier New,monospace" panose="020B0604020202020204" pitchFamily="34" charset="0"/>
               <a:buChar char="o"/>
             </a:pPr>
             <a:r>
-              <a:rPr lang="en-US" sz="2000" dirty="0">
+              <a:rPr lang="en-US" sz="2000">
                 <a:solidFill>
                   <a:srgbClr val="202123"/>
                 </a:solidFill>
@@ -9369,7 +11586,7 @@
               </a:rPr>
               <a:t>Decoding: Alice and Bob compare bases and retain only those bits that match</a:t>
             </a:r>
-            <a:endParaRPr lang="en-US" dirty="0">
+            <a:endParaRPr lang="en-US">
               <a:ea typeface="Calibri" panose="020F0502020204030204"/>
               <a:cs typeface="Calibri" panose="020F0502020204030204"/>
             </a:endParaRPr>
@@ -9382,36 +11599,102 @@
           </a:p>
         </p:txBody>
       </p:sp>
-      <p:pic>
-        <p:nvPicPr>
-          <p:cNvPr id="3" name="Picture 2" descr="A screenshot of a diagram&#10;&#10;AI-generated content may be incorrect.">
+      <p:grpSp>
+        <p:nvGrpSpPr>
+          <p:cNvPr id="12" name="Group 11">
             <a:extLst>
               <a:ext uri="{FF2B5EF4-FFF2-40B4-BE49-F238E27FC236}">
-                <a16:creationId xmlns:a16="http://schemas.microsoft.com/office/drawing/2014/main" id="{C4B46866-D574-0180-207E-15A941723AAF}"/>
+                <a16:creationId xmlns:a16="http://schemas.microsoft.com/office/drawing/2014/main" id="{06E8952E-9FAB-6109-AF73-DD85F54196E4}"/>
               </a:ext>
             </a:extLst>
           </p:cNvPr>
-          <p:cNvPicPr>
-            <a:picLocks noChangeAspect="1"/>
-          </p:cNvPicPr>
+          <p:cNvGrpSpPr/>
           <p:nvPr/>
-        </p:nvPicPr>
-        <p:blipFill>
-          <a:blip r:embed="rId2"/>
-          <a:stretch>
-            <a:fillRect/>
-          </a:stretch>
-        </p:blipFill>
-        <p:spPr>
+        </p:nvGrpSpPr>
+        <p:grpSpPr>
           <a:xfrm>
-            <a:off x="7297025" y="0"/>
-            <a:ext cx="4891377" cy="6776357"/>
+            <a:off x="6879876" y="1995488"/>
+            <a:ext cx="5307264" cy="2245428"/>
+            <a:chOff x="7145421" y="3912034"/>
+            <a:chExt cx="5307264" cy="2245428"/>
           </a:xfrm>
-          <a:prstGeom prst="rect">
-            <a:avLst/>
-          </a:prstGeom>
-        </p:spPr>
-      </p:pic>
+        </p:grpSpPr>
+        <p:pic>
+          <p:nvPicPr>
+            <p:cNvPr id="10" name="Picture 9">
+              <a:extLst>
+                <a:ext uri="{FF2B5EF4-FFF2-40B4-BE49-F238E27FC236}">
+                  <a16:creationId xmlns:a16="http://schemas.microsoft.com/office/drawing/2014/main" id="{957D1150-F632-6A56-46A3-B8E1A693C891}"/>
+                </a:ext>
+              </a:extLst>
+            </p:cNvPr>
+            <p:cNvPicPr>
+              <a:picLocks noChangeAspect="1"/>
+            </p:cNvPicPr>
+            <p:nvPr/>
+          </p:nvPicPr>
+          <p:blipFill>
+            <a:blip r:embed="rId2"/>
+            <a:stretch>
+              <a:fillRect/>
+            </a:stretch>
+          </p:blipFill>
+          <p:spPr>
+            <a:xfrm>
+              <a:off x="7649153" y="3912034"/>
+              <a:ext cx="4375151" cy="1747117"/>
+            </a:xfrm>
+            <a:prstGeom prst="rect">
+              <a:avLst/>
+            </a:prstGeom>
+          </p:spPr>
+        </p:pic>
+        <p:sp>
+          <p:nvSpPr>
+            <p:cNvPr id="11" name="TextBox 10">
+              <a:extLst>
+                <a:ext uri="{FF2B5EF4-FFF2-40B4-BE49-F238E27FC236}">
+                  <a16:creationId xmlns:a16="http://schemas.microsoft.com/office/drawing/2014/main" id="{7ADE2A4B-9869-F3A7-D191-E5DF4525B087}"/>
+                </a:ext>
+              </a:extLst>
+            </p:cNvPr>
+            <p:cNvSpPr txBox="1"/>
+            <p:nvPr/>
+          </p:nvSpPr>
+          <p:spPr>
+            <a:xfrm>
+              <a:off x="7145421" y="5818908"/>
+              <a:ext cx="5307264" cy="338554"/>
+            </a:xfrm>
+            <a:prstGeom prst="rect">
+              <a:avLst/>
+            </a:prstGeom>
+            <a:noFill/>
+          </p:spPr>
+          <p:txBody>
+            <a:bodyPr rot="0" spcFirstLastPara="0" vertOverflow="overflow" horzOverflow="overflow" vert="horz" wrap="square" lIns="91440" tIns="45720" rIns="91440" bIns="45720" numCol="1" spcCol="0" rtlCol="0" fromWordArt="0" anchor="t" anchorCtr="0" forceAA="0" compatLnSpc="1">
+              <a:prstTxWarp prst="textNoShape">
+                <a:avLst/>
+              </a:prstTxWarp>
+              <a:spAutoFit/>
+            </a:bodyPr>
+            <a:lstStyle/>
+            <a:p>
+              <a:r>
+                <a:rPr lang="en-US" sz="800"/>
+                <a:t>https://uwaterloo.ca/institute-for-quantum-computing/sites/default/files/uploads/files/02-qcrypto-activity-answers.pdf</a:t>
+              </a:r>
+            </a:p>
+            <a:p>
+              <a:pPr algn="ctr"/>
+              <a:endParaRPr lang="en-US" sz="800">
+                <a:ea typeface="Calibri"/>
+                <a:cs typeface="Calibri"/>
+              </a:endParaRPr>
+            </a:p>
+          </p:txBody>
+        </p:sp>
+      </p:grpSp>
     </p:spTree>
     <p:extLst>
       <p:ext uri="{BB962C8B-B14F-4D97-AF65-F5344CB8AC3E}">
@@ -9499,32 +11782,15 @@
               <a:defRPr/>
             </a:pPr>
             <a:r>
-              <a:rPr kumimoji="0" lang="en-US" sz="3600" b="1" i="0" u="none" strike="noStrike" kern="1200" cap="none" spc="0" normalizeH="0" baseline="0" noProof="0">
-                <a:ln>
-                  <a:noFill/>
-                </a:ln>
-                <a:solidFill>
-                  <a:srgbClr val="002C73"/>
-                </a:solidFill>
-                <a:effectLst/>
-                <a:uLnTx/>
-                <a:uFillTx/>
-                <a:latin typeface="Arial" panose="020B0604020202020204"/>
-                <a:ea typeface="+mj-ea"/>
-                <a:cs typeface="+mj-cs"/>
-              </a:rPr>
-              <a:t>Study Approach: </a:t>
-            </a:r>
-            <a:r>
               <a:rPr lang="en-US">
                 <a:solidFill>
                   <a:srgbClr val="002C73"/>
                 </a:solidFill>
                 <a:latin typeface="Arial" panose="020B0604020202020204"/>
               </a:rPr>
-              <a:t>Eavesdropper Results</a:t>
-            </a:r>
-            <a:endParaRPr kumimoji="0" lang="en-US" sz="3600" b="1" i="0" u="none" strike="noStrike" kern="1200" cap="none" spc="0" normalizeH="0" baseline="0" noProof="0">
+              <a:t>Eavesdropping Experiments</a:t>
+            </a:r>
+            <a:endParaRPr lang="en-US" sz="3600" b="1" i="0" u="none" strike="noStrike" kern="1200" cap="none" spc="0" normalizeH="0" baseline="0" noProof="0">
               <a:ln>
                 <a:noFill/>
               </a:ln>
@@ -9535,8 +11801,7 @@
               <a:uLnTx/>
               <a:uFillTx/>
               <a:latin typeface="Arial" panose="020B0604020202020204"/>
-              <a:ea typeface="+mj-ea"/>
-              <a:cs typeface="+mj-cs"/>
+              <a:cs typeface="Arial"/>
             </a:endParaRPr>
           </a:p>
         </p:txBody>
@@ -9629,8 +11894,8 @@
         </p:nvSpPr>
         <p:spPr>
           <a:xfrm>
-            <a:off x="457200" y="1976835"/>
-            <a:ext cx="5979446" cy="4616648"/>
+            <a:off x="457200" y="1177890"/>
+            <a:ext cx="5979446" cy="5232202"/>
           </a:xfrm>
           <a:prstGeom prst="rect">
             <a:avLst/>
@@ -9643,6 +11908,28 @@
           </a:bodyPr>
           <a:lstStyle/>
           <a:p>
+            <a:r>
+              <a:rPr lang="en-US" sz="2000" b="1">
+                <a:solidFill>
+                  <a:srgbClr val="202123"/>
+                </a:solidFill>
+                <a:ea typeface="Calibri"/>
+                <a:cs typeface="Calibri"/>
+              </a:rPr>
+              <a:t>Effects of Noise Parameters on QBER</a:t>
+            </a:r>
+            <a:endParaRPr lang="en-US"/>
+          </a:p>
+          <a:p>
+            <a:endParaRPr lang="en-US" sz="2000" b="1">
+              <a:solidFill>
+                <a:srgbClr val="202123"/>
+              </a:solidFill>
+              <a:ea typeface="Calibri"/>
+              <a:cs typeface="Calibri"/>
+            </a:endParaRPr>
+          </a:p>
+          <a:p>
             <a:pPr marL="285750" indent="-285750">
               <a:buFont typeface="Arial" panose="020B0604020202020204" pitchFamily="34" charset="0"/>
               <a:buChar char="•"/>
@@ -9652,11 +11939,10 @@
                 <a:solidFill>
                   <a:srgbClr val="202123"/>
                 </a:solidFill>
-                <a:latin typeface="Calibri"/>
                 <a:ea typeface="Calibri"/>
                 <a:cs typeface="Calibri"/>
               </a:rPr>
-              <a:t>BER</a:t>
+              <a:t>QBER/Loss</a:t>
             </a:r>
             <a:endParaRPr lang="en-US"/>
           </a:p>
